--- a/Presentations/Graphs/Antananarivo_case.pptx
+++ b/Presentations/Graphs/Antananarivo_case.pptx
@@ -104,6 +104,11 @@
       </a:defRPr>
     </a:lvl9pPr>
   </p:defaultTextStyle>
+  <p:extLst>
+    <p:ext uri="{EFAFB233-063F-42B5-8137-9DF3F51BA10A}">
+      <p15:sldGuideLst xmlns:p15="http://schemas.microsoft.com/office/powerpoint/2012/main"/>
+    </p:ext>
+  </p:extLst>
 </p:presentation>
 </file>
 
@@ -254,7 +259,7 @@
           <a:p>
             <a:fld id="{621D41D5-CA81-4232-B0F3-C09376B2E785}" type="datetimeFigureOut">
               <a:rPr lang="en-US" smtClean="0"/>
-              <a:t>7/7/2026</a:t>
+              <a:t>7/8/2026</a:t>
             </a:fld>
             <a:endParaRPr lang="en-US"/>
           </a:p>
@@ -452,7 +457,7 @@
           <a:p>
             <a:fld id="{621D41D5-CA81-4232-B0F3-C09376B2E785}" type="datetimeFigureOut">
               <a:rPr lang="en-US" smtClean="0"/>
-              <a:t>7/7/2026</a:t>
+              <a:t>7/8/2026</a:t>
             </a:fld>
             <a:endParaRPr lang="en-US"/>
           </a:p>
@@ -660,7 +665,7 @@
           <a:p>
             <a:fld id="{621D41D5-CA81-4232-B0F3-C09376B2E785}" type="datetimeFigureOut">
               <a:rPr lang="en-US" smtClean="0"/>
-              <a:t>7/7/2026</a:t>
+              <a:t>7/8/2026</a:t>
             </a:fld>
             <a:endParaRPr lang="en-US"/>
           </a:p>
@@ -858,7 +863,7 @@
           <a:p>
             <a:fld id="{621D41D5-CA81-4232-B0F3-C09376B2E785}" type="datetimeFigureOut">
               <a:rPr lang="en-US" smtClean="0"/>
-              <a:t>7/7/2026</a:t>
+              <a:t>7/8/2026</a:t>
             </a:fld>
             <a:endParaRPr lang="en-US"/>
           </a:p>
@@ -1133,7 +1138,7 @@
           <a:p>
             <a:fld id="{621D41D5-CA81-4232-B0F3-C09376B2E785}" type="datetimeFigureOut">
               <a:rPr lang="en-US" smtClean="0"/>
-              <a:t>7/7/2026</a:t>
+              <a:t>7/8/2026</a:t>
             </a:fld>
             <a:endParaRPr lang="en-US"/>
           </a:p>
@@ -1398,7 +1403,7 @@
           <a:p>
             <a:fld id="{621D41D5-CA81-4232-B0F3-C09376B2E785}" type="datetimeFigureOut">
               <a:rPr lang="en-US" smtClean="0"/>
-              <a:t>7/7/2026</a:t>
+              <a:t>7/8/2026</a:t>
             </a:fld>
             <a:endParaRPr lang="en-US"/>
           </a:p>
@@ -1810,7 +1815,7 @@
           <a:p>
             <a:fld id="{621D41D5-CA81-4232-B0F3-C09376B2E785}" type="datetimeFigureOut">
               <a:rPr lang="en-US" smtClean="0"/>
-              <a:t>7/7/2026</a:t>
+              <a:t>7/8/2026</a:t>
             </a:fld>
             <a:endParaRPr lang="en-US"/>
           </a:p>
@@ -1951,7 +1956,7 @@
           <a:p>
             <a:fld id="{621D41D5-CA81-4232-B0F3-C09376B2E785}" type="datetimeFigureOut">
               <a:rPr lang="en-US" smtClean="0"/>
-              <a:t>7/7/2026</a:t>
+              <a:t>7/8/2026</a:t>
             </a:fld>
             <a:endParaRPr lang="en-US"/>
           </a:p>
@@ -2064,7 +2069,7 @@
           <a:p>
             <a:fld id="{621D41D5-CA81-4232-B0F3-C09376B2E785}" type="datetimeFigureOut">
               <a:rPr lang="en-US" smtClean="0"/>
-              <a:t>7/7/2026</a:t>
+              <a:t>7/8/2026</a:t>
             </a:fld>
             <a:endParaRPr lang="en-US"/>
           </a:p>
@@ -2375,7 +2380,7 @@
           <a:p>
             <a:fld id="{621D41D5-CA81-4232-B0F3-C09376B2E785}" type="datetimeFigureOut">
               <a:rPr lang="en-US" smtClean="0"/>
-              <a:t>7/7/2026</a:t>
+              <a:t>7/8/2026</a:t>
             </a:fld>
             <a:endParaRPr lang="en-US"/>
           </a:p>
@@ -2663,7 +2668,7 @@
           <a:p>
             <a:fld id="{621D41D5-CA81-4232-B0F3-C09376B2E785}" type="datetimeFigureOut">
               <a:rPr lang="en-US" smtClean="0"/>
-              <a:t>7/7/2026</a:t>
+              <a:t>7/8/2026</a:t>
             </a:fld>
             <a:endParaRPr lang="en-US"/>
           </a:p>
@@ -2904,7 +2909,7 @@
           <a:p>
             <a:fld id="{621D41D5-CA81-4232-B0F3-C09376B2E785}" type="datetimeFigureOut">
               <a:rPr lang="en-US" smtClean="0"/>
-              <a:t>7/7/2026</a:t>
+              <a:t>7/8/2026</a:t>
             </a:fld>
             <a:endParaRPr lang="en-US"/>
           </a:p>
@@ -3321,12 +3326,349 @@
           <a:chExt cx="0" cy="0"/>
         </a:xfrm>
       </p:grpSpPr>
+      <p:sp>
+        <p:nvSpPr>
+          <p:cNvPr id="11" name="Text Box 9">
+            <a:extLst>
+              <a:ext uri="{FF2B5EF4-FFF2-40B4-BE49-F238E27FC236}">
+                <a16:creationId xmlns:a16="http://schemas.microsoft.com/office/drawing/2014/main" id="{71EE8E13-96EA-910A-81F3-E9688BF50613}"/>
+              </a:ext>
+            </a:extLst>
+          </p:cNvPr>
+          <p:cNvSpPr txBox="1"/>
+          <p:nvPr/>
+        </p:nvSpPr>
+        <p:spPr>
+          <a:xfrm>
+            <a:off x="392188" y="562071"/>
+            <a:ext cx="5338052" cy="430497"/>
+          </a:xfrm>
+          <a:prstGeom prst="rect">
+            <a:avLst/>
+          </a:prstGeom>
+          <a:noFill/>
+        </p:spPr>
+        <p:txBody>
+          <a:bodyPr wrap="square" rtlCol="0">
+            <a:spAutoFit/>
+          </a:bodyPr>
+          <a:lstStyle>
+            <a:defPPr marR="0" lvl="0" algn="l" rtl="0">
+              <a:lnSpc>
+                <a:spcPct val="100000"/>
+              </a:lnSpc>
+              <a:spcBef>
+                <a:spcPts val="0"/>
+              </a:spcBef>
+              <a:spcAft>
+                <a:spcPts val="0"/>
+              </a:spcAft>
+            </a:defPPr>
+            <a:lvl1pPr marR="0" lvl="0" algn="l" rtl="0">
+              <a:lnSpc>
+                <a:spcPct val="100000"/>
+              </a:lnSpc>
+              <a:spcBef>
+                <a:spcPts val="0"/>
+              </a:spcBef>
+              <a:spcAft>
+                <a:spcPts val="0"/>
+              </a:spcAft>
+              <a:buClr>
+                <a:srgbClr val="000000"/>
+              </a:buClr>
+              <a:buFont typeface="Arial" panose="020B0604020202020204"/>
+              <a:defRPr sz="1400" b="0" i="0" u="none" strike="noStrike" cap="none">
+                <a:solidFill>
+                  <a:srgbClr val="000000"/>
+                </a:solidFill>
+                <a:latin typeface="Arial" panose="020B0604020202020204"/>
+                <a:ea typeface="Arial" panose="020B0604020202020204"/>
+                <a:cs typeface="Arial" panose="020B0604020202020204"/>
+                <a:sym typeface="Arial" panose="020B0604020202020204"/>
+              </a:defRPr>
+            </a:lvl1pPr>
+            <a:lvl2pPr marR="0" lvl="1" algn="l" rtl="0">
+              <a:lnSpc>
+                <a:spcPct val="100000"/>
+              </a:lnSpc>
+              <a:spcBef>
+                <a:spcPts val="0"/>
+              </a:spcBef>
+              <a:spcAft>
+                <a:spcPts val="0"/>
+              </a:spcAft>
+              <a:buClr>
+                <a:srgbClr val="000000"/>
+              </a:buClr>
+              <a:buFont typeface="Arial" panose="020B0604020202020204"/>
+              <a:defRPr sz="1400" b="0" i="0" u="none" strike="noStrike" cap="none">
+                <a:solidFill>
+                  <a:srgbClr val="000000"/>
+                </a:solidFill>
+                <a:latin typeface="Arial" panose="020B0604020202020204"/>
+                <a:ea typeface="Arial" panose="020B0604020202020204"/>
+                <a:cs typeface="Arial" panose="020B0604020202020204"/>
+                <a:sym typeface="Arial" panose="020B0604020202020204"/>
+              </a:defRPr>
+            </a:lvl2pPr>
+            <a:lvl3pPr marR="0" lvl="2" algn="l" rtl="0">
+              <a:lnSpc>
+                <a:spcPct val="100000"/>
+              </a:lnSpc>
+              <a:spcBef>
+                <a:spcPts val="0"/>
+              </a:spcBef>
+              <a:spcAft>
+                <a:spcPts val="0"/>
+              </a:spcAft>
+              <a:buClr>
+                <a:srgbClr val="000000"/>
+              </a:buClr>
+              <a:buFont typeface="Arial" panose="020B0604020202020204"/>
+              <a:defRPr sz="1400" b="0" i="0" u="none" strike="noStrike" cap="none">
+                <a:solidFill>
+                  <a:srgbClr val="000000"/>
+                </a:solidFill>
+                <a:latin typeface="Arial" panose="020B0604020202020204"/>
+                <a:ea typeface="Arial" panose="020B0604020202020204"/>
+                <a:cs typeface="Arial" panose="020B0604020202020204"/>
+                <a:sym typeface="Arial" panose="020B0604020202020204"/>
+              </a:defRPr>
+            </a:lvl3pPr>
+            <a:lvl4pPr marR="0" lvl="3" algn="l" rtl="0">
+              <a:lnSpc>
+                <a:spcPct val="100000"/>
+              </a:lnSpc>
+              <a:spcBef>
+                <a:spcPts val="0"/>
+              </a:spcBef>
+              <a:spcAft>
+                <a:spcPts val="0"/>
+              </a:spcAft>
+              <a:buClr>
+                <a:srgbClr val="000000"/>
+              </a:buClr>
+              <a:buFont typeface="Arial" panose="020B0604020202020204"/>
+              <a:defRPr sz="1400" b="0" i="0" u="none" strike="noStrike" cap="none">
+                <a:solidFill>
+                  <a:srgbClr val="000000"/>
+                </a:solidFill>
+                <a:latin typeface="Arial" panose="020B0604020202020204"/>
+                <a:ea typeface="Arial" panose="020B0604020202020204"/>
+                <a:cs typeface="Arial" panose="020B0604020202020204"/>
+                <a:sym typeface="Arial" panose="020B0604020202020204"/>
+              </a:defRPr>
+            </a:lvl4pPr>
+            <a:lvl5pPr marR="0" lvl="4" algn="l" rtl="0">
+              <a:lnSpc>
+                <a:spcPct val="100000"/>
+              </a:lnSpc>
+              <a:spcBef>
+                <a:spcPts val="0"/>
+              </a:spcBef>
+              <a:spcAft>
+                <a:spcPts val="0"/>
+              </a:spcAft>
+              <a:buClr>
+                <a:srgbClr val="000000"/>
+              </a:buClr>
+              <a:buFont typeface="Arial" panose="020B0604020202020204"/>
+              <a:defRPr sz="1400" b="0" i="0" u="none" strike="noStrike" cap="none">
+                <a:solidFill>
+                  <a:srgbClr val="000000"/>
+                </a:solidFill>
+                <a:latin typeface="Arial" panose="020B0604020202020204"/>
+                <a:ea typeface="Arial" panose="020B0604020202020204"/>
+                <a:cs typeface="Arial" panose="020B0604020202020204"/>
+                <a:sym typeface="Arial" panose="020B0604020202020204"/>
+              </a:defRPr>
+            </a:lvl5pPr>
+            <a:lvl6pPr marR="0" lvl="5" algn="l" rtl="0">
+              <a:lnSpc>
+                <a:spcPct val="100000"/>
+              </a:lnSpc>
+              <a:spcBef>
+                <a:spcPts val="0"/>
+              </a:spcBef>
+              <a:spcAft>
+                <a:spcPts val="0"/>
+              </a:spcAft>
+              <a:buClr>
+                <a:srgbClr val="000000"/>
+              </a:buClr>
+              <a:buFont typeface="Arial" panose="020B0604020202020204"/>
+              <a:defRPr sz="1400" b="0" i="0" u="none" strike="noStrike" cap="none">
+                <a:solidFill>
+                  <a:srgbClr val="000000"/>
+                </a:solidFill>
+                <a:latin typeface="Arial" panose="020B0604020202020204"/>
+                <a:ea typeface="Arial" panose="020B0604020202020204"/>
+                <a:cs typeface="Arial" panose="020B0604020202020204"/>
+                <a:sym typeface="Arial" panose="020B0604020202020204"/>
+              </a:defRPr>
+            </a:lvl6pPr>
+            <a:lvl7pPr marR="0" lvl="6" algn="l" rtl="0">
+              <a:lnSpc>
+                <a:spcPct val="100000"/>
+              </a:lnSpc>
+              <a:spcBef>
+                <a:spcPts val="0"/>
+              </a:spcBef>
+              <a:spcAft>
+                <a:spcPts val="0"/>
+              </a:spcAft>
+              <a:buClr>
+                <a:srgbClr val="000000"/>
+              </a:buClr>
+              <a:buFont typeface="Arial" panose="020B0604020202020204"/>
+              <a:defRPr sz="1400" b="0" i="0" u="none" strike="noStrike" cap="none">
+                <a:solidFill>
+                  <a:srgbClr val="000000"/>
+                </a:solidFill>
+                <a:latin typeface="Arial" panose="020B0604020202020204"/>
+                <a:ea typeface="Arial" panose="020B0604020202020204"/>
+                <a:cs typeface="Arial" panose="020B0604020202020204"/>
+                <a:sym typeface="Arial" panose="020B0604020202020204"/>
+              </a:defRPr>
+            </a:lvl7pPr>
+            <a:lvl8pPr marR="0" lvl="7" algn="l" rtl="0">
+              <a:lnSpc>
+                <a:spcPct val="100000"/>
+              </a:lnSpc>
+              <a:spcBef>
+                <a:spcPts val="0"/>
+              </a:spcBef>
+              <a:spcAft>
+                <a:spcPts val="0"/>
+              </a:spcAft>
+              <a:buClr>
+                <a:srgbClr val="000000"/>
+              </a:buClr>
+              <a:buFont typeface="Arial" panose="020B0604020202020204"/>
+              <a:defRPr sz="1400" b="0" i="0" u="none" strike="noStrike" cap="none">
+                <a:solidFill>
+                  <a:srgbClr val="000000"/>
+                </a:solidFill>
+                <a:latin typeface="Arial" panose="020B0604020202020204"/>
+                <a:ea typeface="Arial" panose="020B0604020202020204"/>
+                <a:cs typeface="Arial" panose="020B0604020202020204"/>
+                <a:sym typeface="Arial" panose="020B0604020202020204"/>
+              </a:defRPr>
+            </a:lvl8pPr>
+            <a:lvl9pPr marR="0" lvl="8" algn="l" rtl="0">
+              <a:lnSpc>
+                <a:spcPct val="100000"/>
+              </a:lnSpc>
+              <a:spcBef>
+                <a:spcPts val="0"/>
+              </a:spcBef>
+              <a:spcAft>
+                <a:spcPts val="0"/>
+              </a:spcAft>
+              <a:buClr>
+                <a:srgbClr val="000000"/>
+              </a:buClr>
+              <a:buFont typeface="Arial" panose="020B0604020202020204"/>
+              <a:defRPr sz="1400" b="0" i="0" u="none" strike="noStrike" cap="none">
+                <a:solidFill>
+                  <a:srgbClr val="000000"/>
+                </a:solidFill>
+                <a:latin typeface="Arial" panose="020B0604020202020204"/>
+                <a:ea typeface="Arial" panose="020B0604020202020204"/>
+                <a:cs typeface="Arial" panose="020B0604020202020204"/>
+                <a:sym typeface="Arial" panose="020B0604020202020204"/>
+              </a:defRPr>
+            </a:lvl9pPr>
+          </a:lstStyle>
+          <a:p>
+            <a:pPr algn="ctr"/>
+            <a:r>
+              <a:rPr lang="en-US" altLang="zh-CN" sz="1800" dirty="0"/>
+              <a:t>Case City: </a:t>
+            </a:r>
+            <a:r>
+              <a:rPr lang="en-US" sz="1800" dirty="0"/>
+              <a:t>Antananarivo,</a:t>
+            </a:r>
+            <a:r>
+              <a:rPr lang="zh-CN" altLang="en-US" sz="1800" dirty="0"/>
+              <a:t> </a:t>
+            </a:r>
+            <a:r>
+              <a:rPr lang="en-US" altLang="zh-CN" sz="1800" dirty="0"/>
+              <a:t>Madagascar</a:t>
+            </a:r>
+            <a:endParaRPr lang="en-US" sz="1800" dirty="0"/>
+          </a:p>
+        </p:txBody>
+      </p:sp>
+      <p:pic>
+        <p:nvPicPr>
+          <p:cNvPr id="8" name="Picture 7" descr="Screenshot from 2025-05-14 13-41-03">
+            <a:extLst>
+              <a:ext uri="{FF2B5EF4-FFF2-40B4-BE49-F238E27FC236}">
+                <a16:creationId xmlns:a16="http://schemas.microsoft.com/office/drawing/2014/main" id="{056F824A-2F53-240E-AC0C-0D72D54D8DBA}"/>
+              </a:ext>
+            </a:extLst>
+          </p:cNvPr>
+          <p:cNvPicPr>
+            <a:picLocks noChangeAspect="1"/>
+          </p:cNvPicPr>
+          <p:nvPr/>
+        </p:nvPicPr>
+        <p:blipFill>
+          <a:blip r:embed="rId2"/>
+          <a:stretch>
+            <a:fillRect/>
+          </a:stretch>
+        </p:blipFill>
+        <p:spPr>
+          <a:xfrm>
+            <a:off x="3101650" y="1293770"/>
+            <a:ext cx="2628590" cy="2417285"/>
+          </a:xfrm>
+          <a:prstGeom prst="rect">
+            <a:avLst/>
+          </a:prstGeom>
+        </p:spPr>
+      </p:pic>
+      <p:pic>
+        <p:nvPicPr>
+          <p:cNvPr id="9" name="Picture 8" descr="Screenshot from 2025-05-14 13-40-46">
+            <a:extLst>
+              <a:ext uri="{FF2B5EF4-FFF2-40B4-BE49-F238E27FC236}">
+                <a16:creationId xmlns:a16="http://schemas.microsoft.com/office/drawing/2014/main" id="{55CEAB13-7257-3152-494A-9D1F6233A402}"/>
+              </a:ext>
+            </a:extLst>
+          </p:cNvPr>
+          <p:cNvPicPr>
+            <a:picLocks noChangeAspect="1"/>
+          </p:cNvPicPr>
+          <p:nvPr/>
+        </p:nvPicPr>
+        <p:blipFill>
+          <a:blip r:embed="rId3"/>
+          <a:stretch>
+            <a:fillRect/>
+          </a:stretch>
+        </p:blipFill>
+        <p:spPr>
+          <a:xfrm>
+            <a:off x="456569" y="1293770"/>
+            <a:ext cx="2628590" cy="2417285"/>
+          </a:xfrm>
+          <a:prstGeom prst="rect">
+            <a:avLst/>
+          </a:prstGeom>
+        </p:spPr>
+      </p:pic>
       <p:grpSp>
         <p:nvGrpSpPr>
-          <p:cNvPr id="4" name="Group 3">
-            <a:extLst>
-              <a:ext uri="{FF2B5EF4-FFF2-40B4-BE49-F238E27FC236}">
-                <a16:creationId xmlns:a16="http://schemas.microsoft.com/office/drawing/2014/main" id="{F05C1FC6-746B-B4C2-65BA-CD981D74EF01}"/>
+          <p:cNvPr id="10" name="Google Shape;156;p16">
+            <a:extLst>
+              <a:ext uri="{FF2B5EF4-FFF2-40B4-BE49-F238E27FC236}">
+                <a16:creationId xmlns:a16="http://schemas.microsoft.com/office/drawing/2014/main" id="{5E731B56-553C-28A0-B977-8FA0B7143C61}"/>
               </a:ext>
             </a:extLst>
           </p:cNvPr>
@@ -3335,2527 +3677,292 @@
         </p:nvGrpSpPr>
         <p:grpSpPr>
           <a:xfrm>
-            <a:off x="506488" y="1133478"/>
-            <a:ext cx="5338052" cy="3731196"/>
-            <a:chOff x="4331237" y="4876125"/>
-            <a:chExt cx="4579620" cy="3201067"/>
+            <a:off x="1323444" y="3711051"/>
+            <a:ext cx="3041592" cy="658323"/>
+            <a:chOff x="4807925" y="4484375"/>
+            <a:chExt cx="2693250" cy="582180"/>
           </a:xfrm>
         </p:grpSpPr>
-        <p:grpSp>
-          <p:nvGrpSpPr>
-            <p:cNvPr id="5" name="Group 4">
+        <p:sp>
+          <p:nvSpPr>
+            <p:cNvPr id="17" name="Google Shape;157;p16">
               <a:extLst>
                 <a:ext uri="{FF2B5EF4-FFF2-40B4-BE49-F238E27FC236}">
-                  <a16:creationId xmlns:a16="http://schemas.microsoft.com/office/drawing/2014/main" id="{1FBFFF65-B6A2-F5DD-04FE-86667B103AFD}"/>
+                  <a16:creationId xmlns:a16="http://schemas.microsoft.com/office/drawing/2014/main" id="{8B13B24B-FBD8-5930-DE5D-C55C619CE57A}"/>
                 </a:ext>
               </a:extLst>
             </p:cNvPr>
-            <p:cNvGrpSpPr/>
+            <p:cNvSpPr/>
             <p:nvPr/>
-          </p:nvGrpSpPr>
-          <p:grpSpPr>
+          </p:nvSpPr>
+          <p:spPr>
             <a:xfrm>
-              <a:off x="4331237" y="4876125"/>
-              <a:ext cx="4579620" cy="3201067"/>
-              <a:chOff x="4331237" y="4876125"/>
-              <a:chExt cx="4579620" cy="3201067"/>
+              <a:off x="4913433" y="4758200"/>
+              <a:ext cx="432300" cy="234600"/>
             </a:xfrm>
-          </p:grpSpPr>
-          <p:pic>
-            <p:nvPicPr>
-              <p:cNvPr id="8" name="Picture 7" descr="Screenshot from 2025-05-14 13-41-03">
-                <a:extLst>
-                  <a:ext uri="{FF2B5EF4-FFF2-40B4-BE49-F238E27FC236}">
-                    <a16:creationId xmlns:a16="http://schemas.microsoft.com/office/drawing/2014/main" id="{056F824A-2F53-240E-AC0C-0D72D54D8DBA}"/>
-                  </a:ext>
-                </a:extLst>
-              </p:cNvPr>
-              <p:cNvPicPr>
-                <a:picLocks noChangeAspect="1"/>
-              </p:cNvPicPr>
-              <p:nvPr/>
-            </p:nvPicPr>
-            <p:blipFill>
-              <a:blip r:embed="rId2"/>
-              <a:stretch>
-                <a:fillRect/>
-              </a:stretch>
-            </p:blipFill>
-            <p:spPr>
-              <a:xfrm>
-                <a:off x="6655738" y="5438570"/>
-                <a:ext cx="2255119" cy="2073837"/>
-              </a:xfrm>
-              <a:prstGeom prst="rect">
-                <a:avLst/>
-              </a:prstGeom>
-            </p:spPr>
-          </p:pic>
-          <p:pic>
-            <p:nvPicPr>
-              <p:cNvPr id="9" name="Picture 8" descr="Screenshot from 2025-05-14 13-40-46">
-                <a:extLst>
-                  <a:ext uri="{FF2B5EF4-FFF2-40B4-BE49-F238E27FC236}">
-                    <a16:creationId xmlns:a16="http://schemas.microsoft.com/office/drawing/2014/main" id="{55CEAB13-7257-3152-494A-9D1F6233A402}"/>
-                  </a:ext>
-                </a:extLst>
-              </p:cNvPr>
-              <p:cNvPicPr>
-                <a:picLocks noChangeAspect="1"/>
-              </p:cNvPicPr>
-              <p:nvPr/>
-            </p:nvPicPr>
-            <p:blipFill>
-              <a:blip r:embed="rId3"/>
-              <a:stretch>
-                <a:fillRect/>
-              </a:stretch>
-            </p:blipFill>
-            <p:spPr>
-              <a:xfrm>
-                <a:off x="4386471" y="5438570"/>
-                <a:ext cx="2255119" cy="2073837"/>
-              </a:xfrm>
-              <a:prstGeom prst="rect">
-                <a:avLst/>
-              </a:prstGeom>
-            </p:spPr>
-          </p:pic>
-          <p:grpSp>
-            <p:nvGrpSpPr>
-              <p:cNvPr id="10" name="Google Shape;156;p16">
-                <a:extLst>
-                  <a:ext uri="{FF2B5EF4-FFF2-40B4-BE49-F238E27FC236}">
-                    <a16:creationId xmlns:a16="http://schemas.microsoft.com/office/drawing/2014/main" id="{5E731B56-553C-28A0-B977-8FA0B7143C61}"/>
-                  </a:ext>
-                </a:extLst>
-              </p:cNvPr>
-              <p:cNvGrpSpPr/>
-              <p:nvPr/>
-            </p:nvGrpSpPr>
-            <p:grpSpPr>
-              <a:xfrm>
-                <a:off x="5130180" y="7512404"/>
-                <a:ext cx="2609442" cy="564788"/>
-                <a:chOff x="4807925" y="4484375"/>
-                <a:chExt cx="2693250" cy="582180"/>
-              </a:xfrm>
-            </p:grpSpPr>
-            <p:sp>
-              <p:nvSpPr>
-                <p:cNvPr id="17" name="Google Shape;157;p16">
-                  <a:extLst>
-                    <a:ext uri="{FF2B5EF4-FFF2-40B4-BE49-F238E27FC236}">
-                      <a16:creationId xmlns:a16="http://schemas.microsoft.com/office/drawing/2014/main" id="{8B13B24B-FBD8-5930-DE5D-C55C619CE57A}"/>
-                    </a:ext>
-                  </a:extLst>
-                </p:cNvPr>
-                <p:cNvSpPr/>
-                <p:nvPr/>
-              </p:nvSpPr>
-              <p:spPr>
-                <a:xfrm>
-                  <a:off x="4913433" y="4758200"/>
-                  <a:ext cx="432300" cy="234600"/>
-                </a:xfrm>
-                <a:prstGeom prst="rect">
-                  <a:avLst/>
-                </a:prstGeom>
-                <a:solidFill>
-                  <a:schemeClr val="dk1"/>
-                </a:solidFill>
-                <a:ln>
-                  <a:noFill/>
-                </a:ln>
-              </p:spPr>
-              <p:txBody>
-                <a:bodyPr spcFirstLastPara="1" wrap="square" lIns="91425" tIns="91425" rIns="91425" bIns="91425" anchor="ctr" anchorCtr="0">
-                  <a:noAutofit/>
-                </a:bodyPr>
-                <a:lstStyle>
-                  <a:defPPr marR="0" lvl="0" algn="l" rtl="0">
-                    <a:lnSpc>
-                      <a:spcPct val="100000"/>
-                    </a:lnSpc>
-                    <a:spcBef>
-                      <a:spcPts val="0"/>
-                    </a:spcBef>
-                    <a:spcAft>
-                      <a:spcPts val="0"/>
-                    </a:spcAft>
-                  </a:defPPr>
-                  <a:lvl1pPr marR="0" lvl="0" algn="l" rtl="0">
-                    <a:lnSpc>
-                      <a:spcPct val="100000"/>
-                    </a:lnSpc>
-                    <a:spcBef>
-                      <a:spcPts val="0"/>
-                    </a:spcBef>
-                    <a:spcAft>
-                      <a:spcPts val="0"/>
-                    </a:spcAft>
-                    <a:buClr>
-                      <a:srgbClr val="000000"/>
-                    </a:buClr>
-                    <a:buFont typeface="Arial" panose="020B0604020202020204"/>
-                    <a:defRPr sz="1400" b="0" i="0" u="none" strike="noStrike" cap="none">
-                      <a:solidFill>
-                        <a:srgbClr val="000000"/>
-                      </a:solidFill>
-                      <a:latin typeface="Arial" panose="020B0604020202020204"/>
-                      <a:ea typeface="Arial" panose="020B0604020202020204"/>
-                      <a:cs typeface="Arial" panose="020B0604020202020204"/>
-                      <a:sym typeface="Arial" panose="020B0604020202020204"/>
-                    </a:defRPr>
-                  </a:lvl1pPr>
-                  <a:lvl2pPr marR="0" lvl="1" algn="l" rtl="0">
-                    <a:lnSpc>
-                      <a:spcPct val="100000"/>
-                    </a:lnSpc>
-                    <a:spcBef>
-                      <a:spcPts val="0"/>
-                    </a:spcBef>
-                    <a:spcAft>
-                      <a:spcPts val="0"/>
-                    </a:spcAft>
-                    <a:buClr>
-                      <a:srgbClr val="000000"/>
-                    </a:buClr>
-                    <a:buFont typeface="Arial" panose="020B0604020202020204"/>
-                    <a:defRPr sz="1400" b="0" i="0" u="none" strike="noStrike" cap="none">
-                      <a:solidFill>
-                        <a:srgbClr val="000000"/>
-                      </a:solidFill>
-                      <a:latin typeface="Arial" panose="020B0604020202020204"/>
-                      <a:ea typeface="Arial" panose="020B0604020202020204"/>
-                      <a:cs typeface="Arial" panose="020B0604020202020204"/>
-                      <a:sym typeface="Arial" panose="020B0604020202020204"/>
-                    </a:defRPr>
-                  </a:lvl2pPr>
-                  <a:lvl3pPr marR="0" lvl="2" algn="l" rtl="0">
-                    <a:lnSpc>
-                      <a:spcPct val="100000"/>
-                    </a:lnSpc>
-                    <a:spcBef>
-                      <a:spcPts val="0"/>
-                    </a:spcBef>
-                    <a:spcAft>
-                      <a:spcPts val="0"/>
-                    </a:spcAft>
-                    <a:buClr>
-                      <a:srgbClr val="000000"/>
-                    </a:buClr>
-                    <a:buFont typeface="Arial" panose="020B0604020202020204"/>
-                    <a:defRPr sz="1400" b="0" i="0" u="none" strike="noStrike" cap="none">
-                      <a:solidFill>
-                        <a:srgbClr val="000000"/>
-                      </a:solidFill>
-                      <a:latin typeface="Arial" panose="020B0604020202020204"/>
-                      <a:ea typeface="Arial" panose="020B0604020202020204"/>
-                      <a:cs typeface="Arial" panose="020B0604020202020204"/>
-                      <a:sym typeface="Arial" panose="020B0604020202020204"/>
-                    </a:defRPr>
-                  </a:lvl3pPr>
-                  <a:lvl4pPr marR="0" lvl="3" algn="l" rtl="0">
-                    <a:lnSpc>
-                      <a:spcPct val="100000"/>
-                    </a:lnSpc>
-                    <a:spcBef>
-                      <a:spcPts val="0"/>
-                    </a:spcBef>
-                    <a:spcAft>
-                      <a:spcPts val="0"/>
-                    </a:spcAft>
-                    <a:buClr>
-                      <a:srgbClr val="000000"/>
-                    </a:buClr>
-                    <a:buFont typeface="Arial" panose="020B0604020202020204"/>
-                    <a:defRPr sz="1400" b="0" i="0" u="none" strike="noStrike" cap="none">
-                      <a:solidFill>
-                        <a:srgbClr val="000000"/>
-                      </a:solidFill>
-                      <a:latin typeface="Arial" panose="020B0604020202020204"/>
-                      <a:ea typeface="Arial" panose="020B0604020202020204"/>
-                      <a:cs typeface="Arial" panose="020B0604020202020204"/>
-                      <a:sym typeface="Arial" panose="020B0604020202020204"/>
-                    </a:defRPr>
-                  </a:lvl4pPr>
-                  <a:lvl5pPr marR="0" lvl="4" algn="l" rtl="0">
-                    <a:lnSpc>
-                      <a:spcPct val="100000"/>
-                    </a:lnSpc>
-                    <a:spcBef>
-                      <a:spcPts val="0"/>
-                    </a:spcBef>
-                    <a:spcAft>
-                      <a:spcPts val="0"/>
-                    </a:spcAft>
-                    <a:buClr>
-                      <a:srgbClr val="000000"/>
-                    </a:buClr>
-                    <a:buFont typeface="Arial" panose="020B0604020202020204"/>
-                    <a:defRPr sz="1400" b="0" i="0" u="none" strike="noStrike" cap="none">
-                      <a:solidFill>
-                        <a:srgbClr val="000000"/>
-                      </a:solidFill>
-                      <a:latin typeface="Arial" panose="020B0604020202020204"/>
-                      <a:ea typeface="Arial" panose="020B0604020202020204"/>
-                      <a:cs typeface="Arial" panose="020B0604020202020204"/>
-                      <a:sym typeface="Arial" panose="020B0604020202020204"/>
-                    </a:defRPr>
-                  </a:lvl5pPr>
-                  <a:lvl6pPr marR="0" lvl="5" algn="l" rtl="0">
-                    <a:lnSpc>
-                      <a:spcPct val="100000"/>
-                    </a:lnSpc>
-                    <a:spcBef>
-                      <a:spcPts val="0"/>
-                    </a:spcBef>
-                    <a:spcAft>
-                      <a:spcPts val="0"/>
-                    </a:spcAft>
-                    <a:buClr>
-                      <a:srgbClr val="000000"/>
-                    </a:buClr>
-                    <a:buFont typeface="Arial" panose="020B0604020202020204"/>
-                    <a:defRPr sz="1400" b="0" i="0" u="none" strike="noStrike" cap="none">
-                      <a:solidFill>
-                        <a:srgbClr val="000000"/>
-                      </a:solidFill>
-                      <a:latin typeface="Arial" panose="020B0604020202020204"/>
-                      <a:ea typeface="Arial" panose="020B0604020202020204"/>
-                      <a:cs typeface="Arial" panose="020B0604020202020204"/>
-                      <a:sym typeface="Arial" panose="020B0604020202020204"/>
-                    </a:defRPr>
-                  </a:lvl6pPr>
-                  <a:lvl7pPr marR="0" lvl="6" algn="l" rtl="0">
-                    <a:lnSpc>
-                      <a:spcPct val="100000"/>
-                    </a:lnSpc>
-                    <a:spcBef>
-                      <a:spcPts val="0"/>
-                    </a:spcBef>
-                    <a:spcAft>
-                      <a:spcPts val="0"/>
-                    </a:spcAft>
-                    <a:buClr>
-                      <a:srgbClr val="000000"/>
-                    </a:buClr>
-                    <a:buFont typeface="Arial" panose="020B0604020202020204"/>
-                    <a:defRPr sz="1400" b="0" i="0" u="none" strike="noStrike" cap="none">
-                      <a:solidFill>
-                        <a:srgbClr val="000000"/>
-                      </a:solidFill>
-                      <a:latin typeface="Arial" panose="020B0604020202020204"/>
-                      <a:ea typeface="Arial" panose="020B0604020202020204"/>
-                      <a:cs typeface="Arial" panose="020B0604020202020204"/>
-                      <a:sym typeface="Arial" panose="020B0604020202020204"/>
-                    </a:defRPr>
-                  </a:lvl7pPr>
-                  <a:lvl8pPr marR="0" lvl="7" algn="l" rtl="0">
-                    <a:lnSpc>
-                      <a:spcPct val="100000"/>
-                    </a:lnSpc>
-                    <a:spcBef>
-                      <a:spcPts val="0"/>
-                    </a:spcBef>
-                    <a:spcAft>
-                      <a:spcPts val="0"/>
-                    </a:spcAft>
-                    <a:buClr>
-                      <a:srgbClr val="000000"/>
-                    </a:buClr>
-                    <a:buFont typeface="Arial" panose="020B0604020202020204"/>
-                    <a:defRPr sz="1400" b="0" i="0" u="none" strike="noStrike" cap="none">
-                      <a:solidFill>
-                        <a:srgbClr val="000000"/>
-                      </a:solidFill>
-                      <a:latin typeface="Arial" panose="020B0604020202020204"/>
-                      <a:ea typeface="Arial" panose="020B0604020202020204"/>
-                      <a:cs typeface="Arial" panose="020B0604020202020204"/>
-                      <a:sym typeface="Arial" panose="020B0604020202020204"/>
-                    </a:defRPr>
-                  </a:lvl8pPr>
-                  <a:lvl9pPr marR="0" lvl="8" algn="l" rtl="0">
-                    <a:lnSpc>
-                      <a:spcPct val="100000"/>
-                    </a:lnSpc>
-                    <a:spcBef>
-                      <a:spcPts val="0"/>
-                    </a:spcBef>
-                    <a:spcAft>
-                      <a:spcPts val="0"/>
-                    </a:spcAft>
-                    <a:buClr>
-                      <a:srgbClr val="000000"/>
-                    </a:buClr>
-                    <a:buFont typeface="Arial" panose="020B0604020202020204"/>
-                    <a:defRPr sz="1400" b="0" i="0" u="none" strike="noStrike" cap="none">
-                      <a:solidFill>
-                        <a:srgbClr val="000000"/>
-                      </a:solidFill>
-                      <a:latin typeface="Arial" panose="020B0604020202020204"/>
-                      <a:ea typeface="Arial" panose="020B0604020202020204"/>
-                      <a:cs typeface="Arial" panose="020B0604020202020204"/>
-                      <a:sym typeface="Arial" panose="020B0604020202020204"/>
-                    </a:defRPr>
-                  </a:lvl9pPr>
-                </a:lstStyle>
-                <a:p>
-                  <a:pPr marL="0" lvl="0" indent="0" algn="ctr" rtl="0">
-                    <a:spcBef>
-                      <a:spcPts val="0"/>
-                    </a:spcBef>
-                    <a:spcAft>
-                      <a:spcPts val="0"/>
-                    </a:spcAft>
-                    <a:buNone/>
-                  </a:pPr>
-                  <a:endParaRPr sz="1800"/>
-                </a:p>
-              </p:txBody>
-            </p:sp>
-            <p:sp>
-              <p:nvSpPr>
-                <p:cNvPr id="18" name="Google Shape;158;p16">
-                  <a:extLst>
-                    <a:ext uri="{FF2B5EF4-FFF2-40B4-BE49-F238E27FC236}">
-                      <a16:creationId xmlns:a16="http://schemas.microsoft.com/office/drawing/2014/main" id="{E38C44FB-852A-E8CE-AA35-AD40BB952321}"/>
-                    </a:ext>
-                  </a:extLst>
-                </p:cNvPr>
-                <p:cNvSpPr txBox="1"/>
-                <p:nvPr/>
-              </p:nvSpPr>
-              <p:spPr>
-                <a:xfrm>
-                  <a:off x="4807925" y="4484375"/>
-                  <a:ext cx="800100" cy="507575"/>
-                </a:xfrm>
-                <a:prstGeom prst="rect">
-                  <a:avLst/>
-                </a:prstGeom>
-                <a:noFill/>
-                <a:ln>
-                  <a:noFill/>
-                </a:ln>
-              </p:spPr>
-              <p:txBody>
-                <a:bodyPr spcFirstLastPara="1" wrap="square" lIns="91425" tIns="91425" rIns="91425" bIns="91425" anchor="t" anchorCtr="0">
-                  <a:spAutoFit/>
-                </a:bodyPr>
-                <a:lstStyle>
-                  <a:defPPr marR="0" lvl="0" algn="l" rtl="0">
-                    <a:lnSpc>
-                      <a:spcPct val="100000"/>
-                    </a:lnSpc>
-                    <a:spcBef>
-                      <a:spcPts val="0"/>
-                    </a:spcBef>
-                    <a:spcAft>
-                      <a:spcPts val="0"/>
-                    </a:spcAft>
-                  </a:defPPr>
-                  <a:lvl1pPr marR="0" lvl="0" algn="l" rtl="0">
-                    <a:lnSpc>
-                      <a:spcPct val="100000"/>
-                    </a:lnSpc>
-                    <a:spcBef>
-                      <a:spcPts val="0"/>
-                    </a:spcBef>
-                    <a:spcAft>
-                      <a:spcPts val="0"/>
-                    </a:spcAft>
-                    <a:buClr>
-                      <a:srgbClr val="000000"/>
-                    </a:buClr>
-                    <a:buFont typeface="Arial" panose="020B0604020202020204"/>
-                    <a:defRPr sz="1400" b="0" i="0" u="none" strike="noStrike" cap="none">
-                      <a:solidFill>
-                        <a:srgbClr val="000000"/>
-                      </a:solidFill>
-                      <a:latin typeface="Arial" panose="020B0604020202020204"/>
-                      <a:ea typeface="Arial" panose="020B0604020202020204"/>
-                      <a:cs typeface="Arial" panose="020B0604020202020204"/>
-                      <a:sym typeface="Arial" panose="020B0604020202020204"/>
-                    </a:defRPr>
-                  </a:lvl1pPr>
-                  <a:lvl2pPr marR="0" lvl="1" algn="l" rtl="0">
-                    <a:lnSpc>
-                      <a:spcPct val="100000"/>
-                    </a:lnSpc>
-                    <a:spcBef>
-                      <a:spcPts val="0"/>
-                    </a:spcBef>
-                    <a:spcAft>
-                      <a:spcPts val="0"/>
-                    </a:spcAft>
-                    <a:buClr>
-                      <a:srgbClr val="000000"/>
-                    </a:buClr>
-                    <a:buFont typeface="Arial" panose="020B0604020202020204"/>
-                    <a:defRPr sz="1400" b="0" i="0" u="none" strike="noStrike" cap="none">
-                      <a:solidFill>
-                        <a:srgbClr val="000000"/>
-                      </a:solidFill>
-                      <a:latin typeface="Arial" panose="020B0604020202020204"/>
-                      <a:ea typeface="Arial" panose="020B0604020202020204"/>
-                      <a:cs typeface="Arial" panose="020B0604020202020204"/>
-                      <a:sym typeface="Arial" panose="020B0604020202020204"/>
-                    </a:defRPr>
-                  </a:lvl2pPr>
-                  <a:lvl3pPr marR="0" lvl="2" algn="l" rtl="0">
-                    <a:lnSpc>
-                      <a:spcPct val="100000"/>
-                    </a:lnSpc>
-                    <a:spcBef>
-                      <a:spcPts val="0"/>
-                    </a:spcBef>
-                    <a:spcAft>
-                      <a:spcPts val="0"/>
-                    </a:spcAft>
-                    <a:buClr>
-                      <a:srgbClr val="000000"/>
-                    </a:buClr>
-                    <a:buFont typeface="Arial" panose="020B0604020202020204"/>
-                    <a:defRPr sz="1400" b="0" i="0" u="none" strike="noStrike" cap="none">
-                      <a:solidFill>
-                        <a:srgbClr val="000000"/>
-                      </a:solidFill>
-                      <a:latin typeface="Arial" panose="020B0604020202020204"/>
-                      <a:ea typeface="Arial" panose="020B0604020202020204"/>
-                      <a:cs typeface="Arial" panose="020B0604020202020204"/>
-                      <a:sym typeface="Arial" panose="020B0604020202020204"/>
-                    </a:defRPr>
-                  </a:lvl3pPr>
-                  <a:lvl4pPr marR="0" lvl="3" algn="l" rtl="0">
-                    <a:lnSpc>
-                      <a:spcPct val="100000"/>
-                    </a:lnSpc>
-                    <a:spcBef>
-                      <a:spcPts val="0"/>
-                    </a:spcBef>
-                    <a:spcAft>
-                      <a:spcPts val="0"/>
-                    </a:spcAft>
-                    <a:buClr>
-                      <a:srgbClr val="000000"/>
-                    </a:buClr>
-                    <a:buFont typeface="Arial" panose="020B0604020202020204"/>
-                    <a:defRPr sz="1400" b="0" i="0" u="none" strike="noStrike" cap="none">
-                      <a:solidFill>
-                        <a:srgbClr val="000000"/>
-                      </a:solidFill>
-                      <a:latin typeface="Arial" panose="020B0604020202020204"/>
-                      <a:ea typeface="Arial" panose="020B0604020202020204"/>
-                      <a:cs typeface="Arial" panose="020B0604020202020204"/>
-                      <a:sym typeface="Arial" panose="020B0604020202020204"/>
-                    </a:defRPr>
-                  </a:lvl4pPr>
-                  <a:lvl5pPr marR="0" lvl="4" algn="l" rtl="0">
-                    <a:lnSpc>
-                      <a:spcPct val="100000"/>
-                    </a:lnSpc>
-                    <a:spcBef>
-                      <a:spcPts val="0"/>
-                    </a:spcBef>
-                    <a:spcAft>
-                      <a:spcPts val="0"/>
-                    </a:spcAft>
-                    <a:buClr>
-                      <a:srgbClr val="000000"/>
-                    </a:buClr>
-                    <a:buFont typeface="Arial" panose="020B0604020202020204"/>
-                    <a:defRPr sz="1400" b="0" i="0" u="none" strike="noStrike" cap="none">
-                      <a:solidFill>
-                        <a:srgbClr val="000000"/>
-                      </a:solidFill>
-                      <a:latin typeface="Arial" panose="020B0604020202020204"/>
-                      <a:ea typeface="Arial" panose="020B0604020202020204"/>
-                      <a:cs typeface="Arial" panose="020B0604020202020204"/>
-                      <a:sym typeface="Arial" panose="020B0604020202020204"/>
-                    </a:defRPr>
-                  </a:lvl5pPr>
-                  <a:lvl6pPr marR="0" lvl="5" algn="l" rtl="0">
-                    <a:lnSpc>
-                      <a:spcPct val="100000"/>
-                    </a:lnSpc>
-                    <a:spcBef>
-                      <a:spcPts val="0"/>
-                    </a:spcBef>
-                    <a:spcAft>
-                      <a:spcPts val="0"/>
-                    </a:spcAft>
-                    <a:buClr>
-                      <a:srgbClr val="000000"/>
-                    </a:buClr>
-                    <a:buFont typeface="Arial" panose="020B0604020202020204"/>
-                    <a:defRPr sz="1400" b="0" i="0" u="none" strike="noStrike" cap="none">
-                      <a:solidFill>
-                        <a:srgbClr val="000000"/>
-                      </a:solidFill>
-                      <a:latin typeface="Arial" panose="020B0604020202020204"/>
-                      <a:ea typeface="Arial" panose="020B0604020202020204"/>
-                      <a:cs typeface="Arial" panose="020B0604020202020204"/>
-                      <a:sym typeface="Arial" panose="020B0604020202020204"/>
-                    </a:defRPr>
-                  </a:lvl6pPr>
-                  <a:lvl7pPr marR="0" lvl="6" algn="l" rtl="0">
-                    <a:lnSpc>
-                      <a:spcPct val="100000"/>
-                    </a:lnSpc>
-                    <a:spcBef>
-                      <a:spcPts val="0"/>
-                    </a:spcBef>
-                    <a:spcAft>
-                      <a:spcPts val="0"/>
-                    </a:spcAft>
-                    <a:buClr>
-                      <a:srgbClr val="000000"/>
-                    </a:buClr>
-                    <a:buFont typeface="Arial" panose="020B0604020202020204"/>
-                    <a:defRPr sz="1400" b="0" i="0" u="none" strike="noStrike" cap="none">
-                      <a:solidFill>
-                        <a:srgbClr val="000000"/>
-                      </a:solidFill>
-                      <a:latin typeface="Arial" panose="020B0604020202020204"/>
-                      <a:ea typeface="Arial" panose="020B0604020202020204"/>
-                      <a:cs typeface="Arial" panose="020B0604020202020204"/>
-                      <a:sym typeface="Arial" panose="020B0604020202020204"/>
-                    </a:defRPr>
-                  </a:lvl7pPr>
-                  <a:lvl8pPr marR="0" lvl="7" algn="l" rtl="0">
-                    <a:lnSpc>
-                      <a:spcPct val="100000"/>
-                    </a:lnSpc>
-                    <a:spcBef>
-                      <a:spcPts val="0"/>
-                    </a:spcBef>
-                    <a:spcAft>
-                      <a:spcPts val="0"/>
-                    </a:spcAft>
-                    <a:buClr>
-                      <a:srgbClr val="000000"/>
-                    </a:buClr>
-                    <a:buFont typeface="Arial" panose="020B0604020202020204"/>
-                    <a:defRPr sz="1400" b="0" i="0" u="none" strike="noStrike" cap="none">
-                      <a:solidFill>
-                        <a:srgbClr val="000000"/>
-                      </a:solidFill>
-                      <a:latin typeface="Arial" panose="020B0604020202020204"/>
-                      <a:ea typeface="Arial" panose="020B0604020202020204"/>
-                      <a:cs typeface="Arial" panose="020B0604020202020204"/>
-                      <a:sym typeface="Arial" panose="020B0604020202020204"/>
-                    </a:defRPr>
-                  </a:lvl8pPr>
-                  <a:lvl9pPr marR="0" lvl="8" algn="l" rtl="0">
-                    <a:lnSpc>
-                      <a:spcPct val="100000"/>
-                    </a:lnSpc>
-                    <a:spcBef>
-                      <a:spcPts val="0"/>
-                    </a:spcBef>
-                    <a:spcAft>
-                      <a:spcPts val="0"/>
-                    </a:spcAft>
-                    <a:buClr>
-                      <a:srgbClr val="000000"/>
-                    </a:buClr>
-                    <a:buFont typeface="Arial" panose="020B0604020202020204"/>
-                    <a:defRPr sz="1400" b="0" i="0" u="none" strike="noStrike" cap="none">
-                      <a:solidFill>
-                        <a:srgbClr val="000000"/>
-                      </a:solidFill>
-                      <a:latin typeface="Arial" panose="020B0604020202020204"/>
-                      <a:ea typeface="Arial" panose="020B0604020202020204"/>
-                      <a:cs typeface="Arial" panose="020B0604020202020204"/>
-                      <a:sym typeface="Arial" panose="020B0604020202020204"/>
-                    </a:defRPr>
-                  </a:lvl9pPr>
-                </a:lstStyle>
-                <a:p>
-                  <a:pPr marL="0" lvl="0" indent="0" algn="l" rtl="0">
-                    <a:spcBef>
-                      <a:spcPts val="0"/>
-                    </a:spcBef>
-                    <a:spcAft>
-                      <a:spcPts val="0"/>
-                    </a:spcAft>
-                    <a:buNone/>
-                  </a:pPr>
-                  <a:r>
-                    <a:rPr lang="de-AT" sz="1000" b="1" dirty="0">
-                      <a:solidFill>
-                        <a:schemeClr val="dk1"/>
-                      </a:solidFill>
-                    </a:rPr>
-                    <a:t>No Building</a:t>
-                  </a:r>
-                  <a:endParaRPr sz="1000" b="1" dirty="0">
-                    <a:solidFill>
-                      <a:schemeClr val="dk1"/>
-                    </a:solidFill>
-                  </a:endParaRPr>
-                </a:p>
-              </p:txBody>
-            </p:sp>
-            <p:sp>
-              <p:nvSpPr>
-                <p:cNvPr id="19" name="Google Shape;159;p16">
-                  <a:extLst>
-                    <a:ext uri="{FF2B5EF4-FFF2-40B4-BE49-F238E27FC236}">
-                      <a16:creationId xmlns:a16="http://schemas.microsoft.com/office/drawing/2014/main" id="{4D00177F-CDC7-0F25-08C3-B4767BE48A71}"/>
-                    </a:ext>
-                  </a:extLst>
-                </p:cNvPr>
-                <p:cNvSpPr/>
-                <p:nvPr/>
-              </p:nvSpPr>
-              <p:spPr>
-                <a:xfrm>
-                  <a:off x="5890875" y="4753925"/>
-                  <a:ext cx="1009200" cy="234600"/>
-                </a:xfrm>
-                <a:prstGeom prst="rect">
-                  <a:avLst/>
-                </a:prstGeom>
-                <a:gradFill>
-                  <a:gsLst>
-                    <a:gs pos="0">
-                      <a:srgbClr val="1D4877"/>
-                    </a:gs>
-                    <a:gs pos="24000">
-                      <a:srgbClr val="1B8A5A"/>
-                    </a:gs>
-                    <a:gs pos="50000">
-                      <a:srgbClr val="FBB021"/>
-                    </a:gs>
-                    <a:gs pos="75000">
-                      <a:srgbClr val="F68838"/>
-                    </a:gs>
-                    <a:gs pos="100000">
-                      <a:srgbClr val="EE3E32"/>
-                    </a:gs>
-                  </a:gsLst>
-                  <a:lin ang="0" scaled="0"/>
-                </a:gradFill>
-                <a:ln>
-                  <a:noFill/>
-                </a:ln>
-              </p:spPr>
-              <p:txBody>
-                <a:bodyPr spcFirstLastPara="1" wrap="square" lIns="91425" tIns="91425" rIns="91425" bIns="91425" anchor="ctr" anchorCtr="0">
-                  <a:noAutofit/>
-                </a:bodyPr>
-                <a:lstStyle>
-                  <a:defPPr marR="0" lvl="0" algn="l" rtl="0">
-                    <a:lnSpc>
-                      <a:spcPct val="100000"/>
-                    </a:lnSpc>
-                    <a:spcBef>
-                      <a:spcPts val="0"/>
-                    </a:spcBef>
-                    <a:spcAft>
-                      <a:spcPts val="0"/>
-                    </a:spcAft>
-                  </a:defPPr>
-                  <a:lvl1pPr marR="0" lvl="0" algn="l" rtl="0">
-                    <a:lnSpc>
-                      <a:spcPct val="100000"/>
-                    </a:lnSpc>
-                    <a:spcBef>
-                      <a:spcPts val="0"/>
-                    </a:spcBef>
-                    <a:spcAft>
-                      <a:spcPts val="0"/>
-                    </a:spcAft>
-                    <a:buClr>
-                      <a:srgbClr val="000000"/>
-                    </a:buClr>
-                    <a:buFont typeface="Arial" panose="020B0604020202020204"/>
-                    <a:defRPr sz="1400" b="0" i="0" u="none" strike="noStrike" cap="none">
-                      <a:solidFill>
-                        <a:srgbClr val="000000"/>
-                      </a:solidFill>
-                      <a:latin typeface="Arial" panose="020B0604020202020204"/>
-                      <a:ea typeface="Arial" panose="020B0604020202020204"/>
-                      <a:cs typeface="Arial" panose="020B0604020202020204"/>
-                      <a:sym typeface="Arial" panose="020B0604020202020204"/>
-                    </a:defRPr>
-                  </a:lvl1pPr>
-                  <a:lvl2pPr marR="0" lvl="1" algn="l" rtl="0">
-                    <a:lnSpc>
-                      <a:spcPct val="100000"/>
-                    </a:lnSpc>
-                    <a:spcBef>
-                      <a:spcPts val="0"/>
-                    </a:spcBef>
-                    <a:spcAft>
-                      <a:spcPts val="0"/>
-                    </a:spcAft>
-                    <a:buClr>
-                      <a:srgbClr val="000000"/>
-                    </a:buClr>
-                    <a:buFont typeface="Arial" panose="020B0604020202020204"/>
-                    <a:defRPr sz="1400" b="0" i="0" u="none" strike="noStrike" cap="none">
-                      <a:solidFill>
-                        <a:srgbClr val="000000"/>
-                      </a:solidFill>
-                      <a:latin typeface="Arial" panose="020B0604020202020204"/>
-                      <a:ea typeface="Arial" panose="020B0604020202020204"/>
-                      <a:cs typeface="Arial" panose="020B0604020202020204"/>
-                      <a:sym typeface="Arial" panose="020B0604020202020204"/>
-                    </a:defRPr>
-                  </a:lvl2pPr>
-                  <a:lvl3pPr marR="0" lvl="2" algn="l" rtl="0">
-                    <a:lnSpc>
-                      <a:spcPct val="100000"/>
-                    </a:lnSpc>
-                    <a:spcBef>
-                      <a:spcPts val="0"/>
-                    </a:spcBef>
-                    <a:spcAft>
-                      <a:spcPts val="0"/>
-                    </a:spcAft>
-                    <a:buClr>
-                      <a:srgbClr val="000000"/>
-                    </a:buClr>
-                    <a:buFont typeface="Arial" panose="020B0604020202020204"/>
-                    <a:defRPr sz="1400" b="0" i="0" u="none" strike="noStrike" cap="none">
-                      <a:solidFill>
-                        <a:srgbClr val="000000"/>
-                      </a:solidFill>
-                      <a:latin typeface="Arial" panose="020B0604020202020204"/>
-                      <a:ea typeface="Arial" panose="020B0604020202020204"/>
-                      <a:cs typeface="Arial" panose="020B0604020202020204"/>
-                      <a:sym typeface="Arial" panose="020B0604020202020204"/>
-                    </a:defRPr>
-                  </a:lvl3pPr>
-                  <a:lvl4pPr marR="0" lvl="3" algn="l" rtl="0">
-                    <a:lnSpc>
-                      <a:spcPct val="100000"/>
-                    </a:lnSpc>
-                    <a:spcBef>
-                      <a:spcPts val="0"/>
-                    </a:spcBef>
-                    <a:spcAft>
-                      <a:spcPts val="0"/>
-                    </a:spcAft>
-                    <a:buClr>
-                      <a:srgbClr val="000000"/>
-                    </a:buClr>
-                    <a:buFont typeface="Arial" panose="020B0604020202020204"/>
-                    <a:defRPr sz="1400" b="0" i="0" u="none" strike="noStrike" cap="none">
-                      <a:solidFill>
-                        <a:srgbClr val="000000"/>
-                      </a:solidFill>
-                      <a:latin typeface="Arial" panose="020B0604020202020204"/>
-                      <a:ea typeface="Arial" panose="020B0604020202020204"/>
-                      <a:cs typeface="Arial" panose="020B0604020202020204"/>
-                      <a:sym typeface="Arial" panose="020B0604020202020204"/>
-                    </a:defRPr>
-                  </a:lvl4pPr>
-                  <a:lvl5pPr marR="0" lvl="4" algn="l" rtl="0">
-                    <a:lnSpc>
-                      <a:spcPct val="100000"/>
-                    </a:lnSpc>
-                    <a:spcBef>
-                      <a:spcPts val="0"/>
-                    </a:spcBef>
-                    <a:spcAft>
-                      <a:spcPts val="0"/>
-                    </a:spcAft>
-                    <a:buClr>
-                      <a:srgbClr val="000000"/>
-                    </a:buClr>
-                    <a:buFont typeface="Arial" panose="020B0604020202020204"/>
-                    <a:defRPr sz="1400" b="0" i="0" u="none" strike="noStrike" cap="none">
-                      <a:solidFill>
-                        <a:srgbClr val="000000"/>
-                      </a:solidFill>
-                      <a:latin typeface="Arial" panose="020B0604020202020204"/>
-                      <a:ea typeface="Arial" panose="020B0604020202020204"/>
-                      <a:cs typeface="Arial" panose="020B0604020202020204"/>
-                      <a:sym typeface="Arial" panose="020B0604020202020204"/>
-                    </a:defRPr>
-                  </a:lvl5pPr>
-                  <a:lvl6pPr marR="0" lvl="5" algn="l" rtl="0">
-                    <a:lnSpc>
-                      <a:spcPct val="100000"/>
-                    </a:lnSpc>
-                    <a:spcBef>
-                      <a:spcPts val="0"/>
-                    </a:spcBef>
-                    <a:spcAft>
-                      <a:spcPts val="0"/>
-                    </a:spcAft>
-                    <a:buClr>
-                      <a:srgbClr val="000000"/>
-                    </a:buClr>
-                    <a:buFont typeface="Arial" panose="020B0604020202020204"/>
-                    <a:defRPr sz="1400" b="0" i="0" u="none" strike="noStrike" cap="none">
-                      <a:solidFill>
-                        <a:srgbClr val="000000"/>
-                      </a:solidFill>
-                      <a:latin typeface="Arial" panose="020B0604020202020204"/>
-                      <a:ea typeface="Arial" panose="020B0604020202020204"/>
-                      <a:cs typeface="Arial" panose="020B0604020202020204"/>
-                      <a:sym typeface="Arial" panose="020B0604020202020204"/>
-                    </a:defRPr>
-                  </a:lvl6pPr>
-                  <a:lvl7pPr marR="0" lvl="6" algn="l" rtl="0">
-                    <a:lnSpc>
-                      <a:spcPct val="100000"/>
-                    </a:lnSpc>
-                    <a:spcBef>
-                      <a:spcPts val="0"/>
-                    </a:spcBef>
-                    <a:spcAft>
-                      <a:spcPts val="0"/>
-                    </a:spcAft>
-                    <a:buClr>
-                      <a:srgbClr val="000000"/>
-                    </a:buClr>
-                    <a:buFont typeface="Arial" panose="020B0604020202020204"/>
-                    <a:defRPr sz="1400" b="0" i="0" u="none" strike="noStrike" cap="none">
-                      <a:solidFill>
-                        <a:srgbClr val="000000"/>
-                      </a:solidFill>
-                      <a:latin typeface="Arial" panose="020B0604020202020204"/>
-                      <a:ea typeface="Arial" panose="020B0604020202020204"/>
-                      <a:cs typeface="Arial" panose="020B0604020202020204"/>
-                      <a:sym typeface="Arial" panose="020B0604020202020204"/>
-                    </a:defRPr>
-                  </a:lvl7pPr>
-                  <a:lvl8pPr marR="0" lvl="7" algn="l" rtl="0">
-                    <a:lnSpc>
-                      <a:spcPct val="100000"/>
-                    </a:lnSpc>
-                    <a:spcBef>
-                      <a:spcPts val="0"/>
-                    </a:spcBef>
-                    <a:spcAft>
-                      <a:spcPts val="0"/>
-                    </a:spcAft>
-                    <a:buClr>
-                      <a:srgbClr val="000000"/>
-                    </a:buClr>
-                    <a:buFont typeface="Arial" panose="020B0604020202020204"/>
-                    <a:defRPr sz="1400" b="0" i="0" u="none" strike="noStrike" cap="none">
-                      <a:solidFill>
-                        <a:srgbClr val="000000"/>
-                      </a:solidFill>
-                      <a:latin typeface="Arial" panose="020B0604020202020204"/>
-                      <a:ea typeface="Arial" panose="020B0604020202020204"/>
-                      <a:cs typeface="Arial" panose="020B0604020202020204"/>
-                      <a:sym typeface="Arial" panose="020B0604020202020204"/>
-                    </a:defRPr>
-                  </a:lvl8pPr>
-                  <a:lvl9pPr marR="0" lvl="8" algn="l" rtl="0">
-                    <a:lnSpc>
-                      <a:spcPct val="100000"/>
-                    </a:lnSpc>
-                    <a:spcBef>
-                      <a:spcPts val="0"/>
-                    </a:spcBef>
-                    <a:spcAft>
-                      <a:spcPts val="0"/>
-                    </a:spcAft>
-                    <a:buClr>
-                      <a:srgbClr val="000000"/>
-                    </a:buClr>
-                    <a:buFont typeface="Arial" panose="020B0604020202020204"/>
-                    <a:defRPr sz="1400" b="0" i="0" u="none" strike="noStrike" cap="none">
-                      <a:solidFill>
-                        <a:srgbClr val="000000"/>
-                      </a:solidFill>
-                      <a:latin typeface="Arial" panose="020B0604020202020204"/>
-                      <a:ea typeface="Arial" panose="020B0604020202020204"/>
-                      <a:cs typeface="Arial" panose="020B0604020202020204"/>
-                      <a:sym typeface="Arial" panose="020B0604020202020204"/>
-                    </a:defRPr>
-                  </a:lvl9pPr>
-                </a:lstStyle>
-                <a:p>
-                  <a:pPr marL="0" lvl="0" indent="0" algn="ctr" rtl="0">
-                    <a:spcBef>
-                      <a:spcPts val="0"/>
-                    </a:spcBef>
-                    <a:spcAft>
-                      <a:spcPts val="0"/>
-                    </a:spcAft>
-                    <a:buNone/>
-                  </a:pPr>
-                  <a:endParaRPr sz="1800"/>
-                </a:p>
-              </p:txBody>
-            </p:sp>
-            <p:sp>
-              <p:nvSpPr>
-                <p:cNvPr id="20" name="Google Shape;160;p16">
-                  <a:extLst>
-                    <a:ext uri="{FF2B5EF4-FFF2-40B4-BE49-F238E27FC236}">
-                      <a16:creationId xmlns:a16="http://schemas.microsoft.com/office/drawing/2014/main" id="{2A44F1C0-705F-63B6-1892-E834A7E81E7A}"/>
-                    </a:ext>
-                  </a:extLst>
-                </p:cNvPr>
-                <p:cNvSpPr txBox="1"/>
-                <p:nvPr/>
-              </p:nvSpPr>
-              <p:spPr>
-                <a:xfrm>
-                  <a:off x="5647974" y="4709676"/>
-                  <a:ext cx="233100" cy="356879"/>
-                </a:xfrm>
-                <a:prstGeom prst="rect">
-                  <a:avLst/>
-                </a:prstGeom>
-                <a:noFill/>
-                <a:ln>
-                  <a:noFill/>
-                </a:ln>
-              </p:spPr>
-              <p:txBody>
-                <a:bodyPr spcFirstLastPara="1" wrap="square" lIns="91425" tIns="91425" rIns="91425" bIns="91425" anchor="t" anchorCtr="0">
-                  <a:spAutoFit/>
-                </a:bodyPr>
-                <a:lstStyle>
-                  <a:defPPr marR="0" lvl="0" algn="l" rtl="0">
-                    <a:lnSpc>
-                      <a:spcPct val="100000"/>
-                    </a:lnSpc>
-                    <a:spcBef>
-                      <a:spcPts val="0"/>
-                    </a:spcBef>
-                    <a:spcAft>
-                      <a:spcPts val="0"/>
-                    </a:spcAft>
-                  </a:defPPr>
-                  <a:lvl1pPr marR="0" lvl="0" algn="l" rtl="0">
-                    <a:lnSpc>
-                      <a:spcPct val="100000"/>
-                    </a:lnSpc>
-                    <a:spcBef>
-                      <a:spcPts val="0"/>
-                    </a:spcBef>
-                    <a:spcAft>
-                      <a:spcPts val="0"/>
-                    </a:spcAft>
-                    <a:buClr>
-                      <a:srgbClr val="000000"/>
-                    </a:buClr>
-                    <a:buFont typeface="Arial" panose="020B0604020202020204"/>
-                    <a:defRPr sz="1400" b="0" i="0" u="none" strike="noStrike" cap="none">
-                      <a:solidFill>
-                        <a:srgbClr val="000000"/>
-                      </a:solidFill>
-                      <a:latin typeface="Arial" panose="020B0604020202020204"/>
-                      <a:ea typeface="Arial" panose="020B0604020202020204"/>
-                      <a:cs typeface="Arial" panose="020B0604020202020204"/>
-                      <a:sym typeface="Arial" panose="020B0604020202020204"/>
-                    </a:defRPr>
-                  </a:lvl1pPr>
-                  <a:lvl2pPr marR="0" lvl="1" algn="l" rtl="0">
-                    <a:lnSpc>
-                      <a:spcPct val="100000"/>
-                    </a:lnSpc>
-                    <a:spcBef>
-                      <a:spcPts val="0"/>
-                    </a:spcBef>
-                    <a:spcAft>
-                      <a:spcPts val="0"/>
-                    </a:spcAft>
-                    <a:buClr>
-                      <a:srgbClr val="000000"/>
-                    </a:buClr>
-                    <a:buFont typeface="Arial" panose="020B0604020202020204"/>
-                    <a:defRPr sz="1400" b="0" i="0" u="none" strike="noStrike" cap="none">
-                      <a:solidFill>
-                        <a:srgbClr val="000000"/>
-                      </a:solidFill>
-                      <a:latin typeface="Arial" panose="020B0604020202020204"/>
-                      <a:ea typeface="Arial" panose="020B0604020202020204"/>
-                      <a:cs typeface="Arial" panose="020B0604020202020204"/>
-                      <a:sym typeface="Arial" panose="020B0604020202020204"/>
-                    </a:defRPr>
-                  </a:lvl2pPr>
-                  <a:lvl3pPr marR="0" lvl="2" algn="l" rtl="0">
-                    <a:lnSpc>
-                      <a:spcPct val="100000"/>
-                    </a:lnSpc>
-                    <a:spcBef>
-                      <a:spcPts val="0"/>
-                    </a:spcBef>
-                    <a:spcAft>
-                      <a:spcPts val="0"/>
-                    </a:spcAft>
-                    <a:buClr>
-                      <a:srgbClr val="000000"/>
-                    </a:buClr>
-                    <a:buFont typeface="Arial" panose="020B0604020202020204"/>
-                    <a:defRPr sz="1400" b="0" i="0" u="none" strike="noStrike" cap="none">
-                      <a:solidFill>
-                        <a:srgbClr val="000000"/>
-                      </a:solidFill>
-                      <a:latin typeface="Arial" panose="020B0604020202020204"/>
-                      <a:ea typeface="Arial" panose="020B0604020202020204"/>
-                      <a:cs typeface="Arial" panose="020B0604020202020204"/>
-                      <a:sym typeface="Arial" panose="020B0604020202020204"/>
-                    </a:defRPr>
-                  </a:lvl3pPr>
-                  <a:lvl4pPr marR="0" lvl="3" algn="l" rtl="0">
-                    <a:lnSpc>
-                      <a:spcPct val="100000"/>
-                    </a:lnSpc>
-                    <a:spcBef>
-                      <a:spcPts val="0"/>
-                    </a:spcBef>
-                    <a:spcAft>
-                      <a:spcPts val="0"/>
-                    </a:spcAft>
-                    <a:buClr>
-                      <a:srgbClr val="000000"/>
-                    </a:buClr>
-                    <a:buFont typeface="Arial" panose="020B0604020202020204"/>
-                    <a:defRPr sz="1400" b="0" i="0" u="none" strike="noStrike" cap="none">
-                      <a:solidFill>
-                        <a:srgbClr val="000000"/>
-                      </a:solidFill>
-                      <a:latin typeface="Arial" panose="020B0604020202020204"/>
-                      <a:ea typeface="Arial" panose="020B0604020202020204"/>
-                      <a:cs typeface="Arial" panose="020B0604020202020204"/>
-                      <a:sym typeface="Arial" panose="020B0604020202020204"/>
-                    </a:defRPr>
-                  </a:lvl4pPr>
-                  <a:lvl5pPr marR="0" lvl="4" algn="l" rtl="0">
-                    <a:lnSpc>
-                      <a:spcPct val="100000"/>
-                    </a:lnSpc>
-                    <a:spcBef>
-                      <a:spcPts val="0"/>
-                    </a:spcBef>
-                    <a:spcAft>
-                      <a:spcPts val="0"/>
-                    </a:spcAft>
-                    <a:buClr>
-                      <a:srgbClr val="000000"/>
-                    </a:buClr>
-                    <a:buFont typeface="Arial" panose="020B0604020202020204"/>
-                    <a:defRPr sz="1400" b="0" i="0" u="none" strike="noStrike" cap="none">
-                      <a:solidFill>
-                        <a:srgbClr val="000000"/>
-                      </a:solidFill>
-                      <a:latin typeface="Arial" panose="020B0604020202020204"/>
-                      <a:ea typeface="Arial" panose="020B0604020202020204"/>
-                      <a:cs typeface="Arial" panose="020B0604020202020204"/>
-                      <a:sym typeface="Arial" panose="020B0604020202020204"/>
-                    </a:defRPr>
-                  </a:lvl5pPr>
-                  <a:lvl6pPr marR="0" lvl="5" algn="l" rtl="0">
-                    <a:lnSpc>
-                      <a:spcPct val="100000"/>
-                    </a:lnSpc>
-                    <a:spcBef>
-                      <a:spcPts val="0"/>
-                    </a:spcBef>
-                    <a:spcAft>
-                      <a:spcPts val="0"/>
-                    </a:spcAft>
-                    <a:buClr>
-                      <a:srgbClr val="000000"/>
-                    </a:buClr>
-                    <a:buFont typeface="Arial" panose="020B0604020202020204"/>
-                    <a:defRPr sz="1400" b="0" i="0" u="none" strike="noStrike" cap="none">
-                      <a:solidFill>
-                        <a:srgbClr val="000000"/>
-                      </a:solidFill>
-                      <a:latin typeface="Arial" panose="020B0604020202020204"/>
-                      <a:ea typeface="Arial" panose="020B0604020202020204"/>
-                      <a:cs typeface="Arial" panose="020B0604020202020204"/>
-                      <a:sym typeface="Arial" panose="020B0604020202020204"/>
-                    </a:defRPr>
-                  </a:lvl6pPr>
-                  <a:lvl7pPr marR="0" lvl="6" algn="l" rtl="0">
-                    <a:lnSpc>
-                      <a:spcPct val="100000"/>
-                    </a:lnSpc>
-                    <a:spcBef>
-                      <a:spcPts val="0"/>
-                    </a:spcBef>
-                    <a:spcAft>
-                      <a:spcPts val="0"/>
-                    </a:spcAft>
-                    <a:buClr>
-                      <a:srgbClr val="000000"/>
-                    </a:buClr>
-                    <a:buFont typeface="Arial" panose="020B0604020202020204"/>
-                    <a:defRPr sz="1400" b="0" i="0" u="none" strike="noStrike" cap="none">
-                      <a:solidFill>
-                        <a:srgbClr val="000000"/>
-                      </a:solidFill>
-                      <a:latin typeface="Arial" panose="020B0604020202020204"/>
-                      <a:ea typeface="Arial" panose="020B0604020202020204"/>
-                      <a:cs typeface="Arial" panose="020B0604020202020204"/>
-                      <a:sym typeface="Arial" panose="020B0604020202020204"/>
-                    </a:defRPr>
-                  </a:lvl7pPr>
-                  <a:lvl8pPr marR="0" lvl="7" algn="l" rtl="0">
-                    <a:lnSpc>
-                      <a:spcPct val="100000"/>
-                    </a:lnSpc>
-                    <a:spcBef>
-                      <a:spcPts val="0"/>
-                    </a:spcBef>
-                    <a:spcAft>
-                      <a:spcPts val="0"/>
-                    </a:spcAft>
-                    <a:buClr>
-                      <a:srgbClr val="000000"/>
-                    </a:buClr>
-                    <a:buFont typeface="Arial" panose="020B0604020202020204"/>
-                    <a:defRPr sz="1400" b="0" i="0" u="none" strike="noStrike" cap="none">
-                      <a:solidFill>
-                        <a:srgbClr val="000000"/>
-                      </a:solidFill>
-                      <a:latin typeface="Arial" panose="020B0604020202020204"/>
-                      <a:ea typeface="Arial" panose="020B0604020202020204"/>
-                      <a:cs typeface="Arial" panose="020B0604020202020204"/>
-                      <a:sym typeface="Arial" panose="020B0604020202020204"/>
-                    </a:defRPr>
-                  </a:lvl8pPr>
-                  <a:lvl9pPr marR="0" lvl="8" algn="l" rtl="0">
-                    <a:lnSpc>
-                      <a:spcPct val="100000"/>
-                    </a:lnSpc>
-                    <a:spcBef>
-                      <a:spcPts val="0"/>
-                    </a:spcBef>
-                    <a:spcAft>
-                      <a:spcPts val="0"/>
-                    </a:spcAft>
-                    <a:buClr>
-                      <a:srgbClr val="000000"/>
-                    </a:buClr>
-                    <a:buFont typeface="Arial" panose="020B0604020202020204"/>
-                    <a:defRPr sz="1400" b="0" i="0" u="none" strike="noStrike" cap="none">
-                      <a:solidFill>
-                        <a:srgbClr val="000000"/>
-                      </a:solidFill>
-                      <a:latin typeface="Arial" panose="020B0604020202020204"/>
-                      <a:ea typeface="Arial" panose="020B0604020202020204"/>
-                      <a:cs typeface="Arial" panose="020B0604020202020204"/>
-                      <a:sym typeface="Arial" panose="020B0604020202020204"/>
-                    </a:defRPr>
-                  </a:lvl9pPr>
-                </a:lstStyle>
-                <a:p>
-                  <a:pPr marL="0" lvl="0" indent="0" algn="l" rtl="0">
-                    <a:spcBef>
-                      <a:spcPts val="0"/>
-                    </a:spcBef>
-                    <a:spcAft>
-                      <a:spcPts val="0"/>
-                    </a:spcAft>
-                    <a:buNone/>
-                  </a:pPr>
-                  <a:r>
-                    <a:rPr lang="de-AT" sz="1050">
-                      <a:solidFill>
-                        <a:schemeClr val="dk1"/>
-                      </a:solidFill>
-                    </a:rPr>
-                    <a:t>0</a:t>
-                  </a:r>
-                  <a:endParaRPr sz="1050">
-                    <a:solidFill>
-                      <a:schemeClr val="dk1"/>
-                    </a:solidFill>
-                  </a:endParaRPr>
-                </a:p>
-              </p:txBody>
-            </p:sp>
-            <p:sp>
-              <p:nvSpPr>
-                <p:cNvPr id="21" name="Google Shape;161;p16">
-                  <a:extLst>
-                    <a:ext uri="{FF2B5EF4-FFF2-40B4-BE49-F238E27FC236}">
-                      <a16:creationId xmlns:a16="http://schemas.microsoft.com/office/drawing/2014/main" id="{1AC6F036-707E-BE20-2985-A19BC9824237}"/>
-                    </a:ext>
-                  </a:extLst>
-                </p:cNvPr>
-                <p:cNvSpPr txBox="1"/>
-                <p:nvPr/>
-              </p:nvSpPr>
-              <p:spPr>
-                <a:xfrm>
-                  <a:off x="6909875" y="4709675"/>
-                  <a:ext cx="591300" cy="356879"/>
-                </a:xfrm>
-                <a:prstGeom prst="rect">
-                  <a:avLst/>
-                </a:prstGeom>
-                <a:noFill/>
-                <a:ln>
-                  <a:noFill/>
-                </a:ln>
-              </p:spPr>
-              <p:txBody>
-                <a:bodyPr spcFirstLastPara="1" wrap="square" lIns="91425" tIns="91425" rIns="91425" bIns="91425" anchor="t" anchorCtr="0">
-                  <a:spAutoFit/>
-                </a:bodyPr>
-                <a:lstStyle>
-                  <a:defPPr marR="0" lvl="0" algn="l" rtl="0">
-                    <a:lnSpc>
-                      <a:spcPct val="100000"/>
-                    </a:lnSpc>
-                    <a:spcBef>
-                      <a:spcPts val="0"/>
-                    </a:spcBef>
-                    <a:spcAft>
-                      <a:spcPts val="0"/>
-                    </a:spcAft>
-                  </a:defPPr>
-                  <a:lvl1pPr marR="0" lvl="0" algn="l" rtl="0">
-                    <a:lnSpc>
-                      <a:spcPct val="100000"/>
-                    </a:lnSpc>
-                    <a:spcBef>
-                      <a:spcPts val="0"/>
-                    </a:spcBef>
-                    <a:spcAft>
-                      <a:spcPts val="0"/>
-                    </a:spcAft>
-                    <a:buClr>
-                      <a:srgbClr val="000000"/>
-                    </a:buClr>
-                    <a:buFont typeface="Arial" panose="020B0604020202020204"/>
-                    <a:defRPr sz="1400" b="0" i="0" u="none" strike="noStrike" cap="none">
-                      <a:solidFill>
-                        <a:srgbClr val="000000"/>
-                      </a:solidFill>
-                      <a:latin typeface="Arial" panose="020B0604020202020204"/>
-                      <a:ea typeface="Arial" panose="020B0604020202020204"/>
-                      <a:cs typeface="Arial" panose="020B0604020202020204"/>
-                      <a:sym typeface="Arial" panose="020B0604020202020204"/>
-                    </a:defRPr>
-                  </a:lvl1pPr>
-                  <a:lvl2pPr marR="0" lvl="1" algn="l" rtl="0">
-                    <a:lnSpc>
-                      <a:spcPct val="100000"/>
-                    </a:lnSpc>
-                    <a:spcBef>
-                      <a:spcPts val="0"/>
-                    </a:spcBef>
-                    <a:spcAft>
-                      <a:spcPts val="0"/>
-                    </a:spcAft>
-                    <a:buClr>
-                      <a:srgbClr val="000000"/>
-                    </a:buClr>
-                    <a:buFont typeface="Arial" panose="020B0604020202020204"/>
-                    <a:defRPr sz="1400" b="0" i="0" u="none" strike="noStrike" cap="none">
-                      <a:solidFill>
-                        <a:srgbClr val="000000"/>
-                      </a:solidFill>
-                      <a:latin typeface="Arial" panose="020B0604020202020204"/>
-                      <a:ea typeface="Arial" panose="020B0604020202020204"/>
-                      <a:cs typeface="Arial" panose="020B0604020202020204"/>
-                      <a:sym typeface="Arial" panose="020B0604020202020204"/>
-                    </a:defRPr>
-                  </a:lvl2pPr>
-                  <a:lvl3pPr marR="0" lvl="2" algn="l" rtl="0">
-                    <a:lnSpc>
-                      <a:spcPct val="100000"/>
-                    </a:lnSpc>
-                    <a:spcBef>
-                      <a:spcPts val="0"/>
-                    </a:spcBef>
-                    <a:spcAft>
-                      <a:spcPts val="0"/>
-                    </a:spcAft>
-                    <a:buClr>
-                      <a:srgbClr val="000000"/>
-                    </a:buClr>
-                    <a:buFont typeface="Arial" panose="020B0604020202020204"/>
-                    <a:defRPr sz="1400" b="0" i="0" u="none" strike="noStrike" cap="none">
-                      <a:solidFill>
-                        <a:srgbClr val="000000"/>
-                      </a:solidFill>
-                      <a:latin typeface="Arial" panose="020B0604020202020204"/>
-                      <a:ea typeface="Arial" panose="020B0604020202020204"/>
-                      <a:cs typeface="Arial" panose="020B0604020202020204"/>
-                      <a:sym typeface="Arial" panose="020B0604020202020204"/>
-                    </a:defRPr>
-                  </a:lvl3pPr>
-                  <a:lvl4pPr marR="0" lvl="3" algn="l" rtl="0">
-                    <a:lnSpc>
-                      <a:spcPct val="100000"/>
-                    </a:lnSpc>
-                    <a:spcBef>
-                      <a:spcPts val="0"/>
-                    </a:spcBef>
-                    <a:spcAft>
-                      <a:spcPts val="0"/>
-                    </a:spcAft>
-                    <a:buClr>
-                      <a:srgbClr val="000000"/>
-                    </a:buClr>
-                    <a:buFont typeface="Arial" panose="020B0604020202020204"/>
-                    <a:defRPr sz="1400" b="0" i="0" u="none" strike="noStrike" cap="none">
-                      <a:solidFill>
-                        <a:srgbClr val="000000"/>
-                      </a:solidFill>
-                      <a:latin typeface="Arial" panose="020B0604020202020204"/>
-                      <a:ea typeface="Arial" panose="020B0604020202020204"/>
-                      <a:cs typeface="Arial" panose="020B0604020202020204"/>
-                      <a:sym typeface="Arial" panose="020B0604020202020204"/>
-                    </a:defRPr>
-                  </a:lvl4pPr>
-                  <a:lvl5pPr marR="0" lvl="4" algn="l" rtl="0">
-                    <a:lnSpc>
-                      <a:spcPct val="100000"/>
-                    </a:lnSpc>
-                    <a:spcBef>
-                      <a:spcPts val="0"/>
-                    </a:spcBef>
-                    <a:spcAft>
-                      <a:spcPts val="0"/>
-                    </a:spcAft>
-                    <a:buClr>
-                      <a:srgbClr val="000000"/>
-                    </a:buClr>
-                    <a:buFont typeface="Arial" panose="020B0604020202020204"/>
-                    <a:defRPr sz="1400" b="0" i="0" u="none" strike="noStrike" cap="none">
-                      <a:solidFill>
-                        <a:srgbClr val="000000"/>
-                      </a:solidFill>
-                      <a:latin typeface="Arial" panose="020B0604020202020204"/>
-                      <a:ea typeface="Arial" panose="020B0604020202020204"/>
-                      <a:cs typeface="Arial" panose="020B0604020202020204"/>
-                      <a:sym typeface="Arial" panose="020B0604020202020204"/>
-                    </a:defRPr>
-                  </a:lvl5pPr>
-                  <a:lvl6pPr marR="0" lvl="5" algn="l" rtl="0">
-                    <a:lnSpc>
-                      <a:spcPct val="100000"/>
-                    </a:lnSpc>
-                    <a:spcBef>
-                      <a:spcPts val="0"/>
-                    </a:spcBef>
-                    <a:spcAft>
-                      <a:spcPts val="0"/>
-                    </a:spcAft>
-                    <a:buClr>
-                      <a:srgbClr val="000000"/>
-                    </a:buClr>
-                    <a:buFont typeface="Arial" panose="020B0604020202020204"/>
-                    <a:defRPr sz="1400" b="0" i="0" u="none" strike="noStrike" cap="none">
-                      <a:solidFill>
-                        <a:srgbClr val="000000"/>
-                      </a:solidFill>
-                      <a:latin typeface="Arial" panose="020B0604020202020204"/>
-                      <a:ea typeface="Arial" panose="020B0604020202020204"/>
-                      <a:cs typeface="Arial" panose="020B0604020202020204"/>
-                      <a:sym typeface="Arial" panose="020B0604020202020204"/>
-                    </a:defRPr>
-                  </a:lvl6pPr>
-                  <a:lvl7pPr marR="0" lvl="6" algn="l" rtl="0">
-                    <a:lnSpc>
-                      <a:spcPct val="100000"/>
-                    </a:lnSpc>
-                    <a:spcBef>
-                      <a:spcPts val="0"/>
-                    </a:spcBef>
-                    <a:spcAft>
-                      <a:spcPts val="0"/>
-                    </a:spcAft>
-                    <a:buClr>
-                      <a:srgbClr val="000000"/>
-                    </a:buClr>
-                    <a:buFont typeface="Arial" panose="020B0604020202020204"/>
-                    <a:defRPr sz="1400" b="0" i="0" u="none" strike="noStrike" cap="none">
-                      <a:solidFill>
-                        <a:srgbClr val="000000"/>
-                      </a:solidFill>
-                      <a:latin typeface="Arial" panose="020B0604020202020204"/>
-                      <a:ea typeface="Arial" panose="020B0604020202020204"/>
-                      <a:cs typeface="Arial" panose="020B0604020202020204"/>
-                      <a:sym typeface="Arial" panose="020B0604020202020204"/>
-                    </a:defRPr>
-                  </a:lvl7pPr>
-                  <a:lvl8pPr marR="0" lvl="7" algn="l" rtl="0">
-                    <a:lnSpc>
-                      <a:spcPct val="100000"/>
-                    </a:lnSpc>
-                    <a:spcBef>
-                      <a:spcPts val="0"/>
-                    </a:spcBef>
-                    <a:spcAft>
-                      <a:spcPts val="0"/>
-                    </a:spcAft>
-                    <a:buClr>
-                      <a:srgbClr val="000000"/>
-                    </a:buClr>
-                    <a:buFont typeface="Arial" panose="020B0604020202020204"/>
-                    <a:defRPr sz="1400" b="0" i="0" u="none" strike="noStrike" cap="none">
-                      <a:solidFill>
-                        <a:srgbClr val="000000"/>
-                      </a:solidFill>
-                      <a:latin typeface="Arial" panose="020B0604020202020204"/>
-                      <a:ea typeface="Arial" panose="020B0604020202020204"/>
-                      <a:cs typeface="Arial" panose="020B0604020202020204"/>
-                      <a:sym typeface="Arial" panose="020B0604020202020204"/>
-                    </a:defRPr>
-                  </a:lvl8pPr>
-                  <a:lvl9pPr marR="0" lvl="8" algn="l" rtl="0">
-                    <a:lnSpc>
-                      <a:spcPct val="100000"/>
-                    </a:lnSpc>
-                    <a:spcBef>
-                      <a:spcPts val="0"/>
-                    </a:spcBef>
-                    <a:spcAft>
-                      <a:spcPts val="0"/>
-                    </a:spcAft>
-                    <a:buClr>
-                      <a:srgbClr val="000000"/>
-                    </a:buClr>
-                    <a:buFont typeface="Arial" panose="020B0604020202020204"/>
-                    <a:defRPr sz="1400" b="0" i="0" u="none" strike="noStrike" cap="none">
-                      <a:solidFill>
-                        <a:srgbClr val="000000"/>
-                      </a:solidFill>
-                      <a:latin typeface="Arial" panose="020B0604020202020204"/>
-                      <a:ea typeface="Arial" panose="020B0604020202020204"/>
-                      <a:cs typeface="Arial" panose="020B0604020202020204"/>
-                      <a:sym typeface="Arial" panose="020B0604020202020204"/>
-                    </a:defRPr>
-                  </a:lvl9pPr>
-                </a:lstStyle>
-                <a:p>
-                  <a:pPr marL="0" lvl="0" indent="0" algn="l" rtl="0">
-                    <a:spcBef>
-                      <a:spcPts val="0"/>
-                    </a:spcBef>
-                    <a:spcAft>
-                      <a:spcPts val="0"/>
-                    </a:spcAft>
-                    <a:buNone/>
-                  </a:pPr>
-                  <a:r>
-                    <a:rPr lang="de-AT" sz="1050">
-                      <a:solidFill>
-                        <a:schemeClr val="dk1"/>
-                      </a:solidFill>
-                    </a:rPr>
-                    <a:t>100m</a:t>
-                  </a:r>
-                  <a:endParaRPr sz="1050">
-                    <a:solidFill>
-                      <a:schemeClr val="dk1"/>
-                    </a:solidFill>
-                  </a:endParaRPr>
-                </a:p>
-              </p:txBody>
-            </p:sp>
-            <p:sp>
-              <p:nvSpPr>
-                <p:cNvPr id="22" name="Google Shape;162;p16">
-                  <a:extLst>
-                    <a:ext uri="{FF2B5EF4-FFF2-40B4-BE49-F238E27FC236}">
-                      <a16:creationId xmlns:a16="http://schemas.microsoft.com/office/drawing/2014/main" id="{FC8456CD-8F64-C977-7C60-F1174824676B}"/>
-                    </a:ext>
-                  </a:extLst>
-                </p:cNvPr>
-                <p:cNvSpPr txBox="1"/>
-                <p:nvPr/>
-              </p:nvSpPr>
-              <p:spPr>
-                <a:xfrm>
-                  <a:off x="5819375" y="4484375"/>
-                  <a:ext cx="1681800" cy="348948"/>
-                </a:xfrm>
-                <a:prstGeom prst="rect">
-                  <a:avLst/>
-                </a:prstGeom>
-                <a:noFill/>
-                <a:ln>
-                  <a:noFill/>
-                </a:ln>
-              </p:spPr>
-              <p:txBody>
-                <a:bodyPr spcFirstLastPara="1" wrap="square" lIns="91425" tIns="91425" rIns="91425" bIns="91425" anchor="t" anchorCtr="0">
-                  <a:spAutoFit/>
-                </a:bodyPr>
-                <a:lstStyle>
-                  <a:defPPr marR="0" lvl="0" algn="l" rtl="0">
-                    <a:lnSpc>
-                      <a:spcPct val="100000"/>
-                    </a:lnSpc>
-                    <a:spcBef>
-                      <a:spcPts val="0"/>
-                    </a:spcBef>
-                    <a:spcAft>
-                      <a:spcPts val="0"/>
-                    </a:spcAft>
-                  </a:defPPr>
-                  <a:lvl1pPr marR="0" lvl="0" algn="l" rtl="0">
-                    <a:lnSpc>
-                      <a:spcPct val="100000"/>
-                    </a:lnSpc>
-                    <a:spcBef>
-                      <a:spcPts val="0"/>
-                    </a:spcBef>
-                    <a:spcAft>
-                      <a:spcPts val="0"/>
-                    </a:spcAft>
-                    <a:buClr>
-                      <a:srgbClr val="000000"/>
-                    </a:buClr>
-                    <a:buFont typeface="Arial" panose="020B0604020202020204"/>
-                    <a:defRPr sz="1400" b="0" i="0" u="none" strike="noStrike" cap="none">
-                      <a:solidFill>
-                        <a:srgbClr val="000000"/>
-                      </a:solidFill>
-                      <a:latin typeface="Arial" panose="020B0604020202020204"/>
-                      <a:ea typeface="Arial" panose="020B0604020202020204"/>
-                      <a:cs typeface="Arial" panose="020B0604020202020204"/>
-                      <a:sym typeface="Arial" panose="020B0604020202020204"/>
-                    </a:defRPr>
-                  </a:lvl1pPr>
-                  <a:lvl2pPr marR="0" lvl="1" algn="l" rtl="0">
-                    <a:lnSpc>
-                      <a:spcPct val="100000"/>
-                    </a:lnSpc>
-                    <a:spcBef>
-                      <a:spcPts val="0"/>
-                    </a:spcBef>
-                    <a:spcAft>
-                      <a:spcPts val="0"/>
-                    </a:spcAft>
-                    <a:buClr>
-                      <a:srgbClr val="000000"/>
-                    </a:buClr>
-                    <a:buFont typeface="Arial" panose="020B0604020202020204"/>
-                    <a:defRPr sz="1400" b="0" i="0" u="none" strike="noStrike" cap="none">
-                      <a:solidFill>
-                        <a:srgbClr val="000000"/>
-                      </a:solidFill>
-                      <a:latin typeface="Arial" panose="020B0604020202020204"/>
-                      <a:ea typeface="Arial" panose="020B0604020202020204"/>
-                      <a:cs typeface="Arial" panose="020B0604020202020204"/>
-                      <a:sym typeface="Arial" panose="020B0604020202020204"/>
-                    </a:defRPr>
-                  </a:lvl2pPr>
-                  <a:lvl3pPr marR="0" lvl="2" algn="l" rtl="0">
-                    <a:lnSpc>
-                      <a:spcPct val="100000"/>
-                    </a:lnSpc>
-                    <a:spcBef>
-                      <a:spcPts val="0"/>
-                    </a:spcBef>
-                    <a:spcAft>
-                      <a:spcPts val="0"/>
-                    </a:spcAft>
-                    <a:buClr>
-                      <a:srgbClr val="000000"/>
-                    </a:buClr>
-                    <a:buFont typeface="Arial" panose="020B0604020202020204"/>
-                    <a:defRPr sz="1400" b="0" i="0" u="none" strike="noStrike" cap="none">
-                      <a:solidFill>
-                        <a:srgbClr val="000000"/>
-                      </a:solidFill>
-                      <a:latin typeface="Arial" panose="020B0604020202020204"/>
-                      <a:ea typeface="Arial" panose="020B0604020202020204"/>
-                      <a:cs typeface="Arial" panose="020B0604020202020204"/>
-                      <a:sym typeface="Arial" panose="020B0604020202020204"/>
-                    </a:defRPr>
-                  </a:lvl3pPr>
-                  <a:lvl4pPr marR="0" lvl="3" algn="l" rtl="0">
-                    <a:lnSpc>
-                      <a:spcPct val="100000"/>
-                    </a:lnSpc>
-                    <a:spcBef>
-                      <a:spcPts val="0"/>
-                    </a:spcBef>
-                    <a:spcAft>
-                      <a:spcPts val="0"/>
-                    </a:spcAft>
-                    <a:buClr>
-                      <a:srgbClr val="000000"/>
-                    </a:buClr>
-                    <a:buFont typeface="Arial" panose="020B0604020202020204"/>
-                    <a:defRPr sz="1400" b="0" i="0" u="none" strike="noStrike" cap="none">
-                      <a:solidFill>
-                        <a:srgbClr val="000000"/>
-                      </a:solidFill>
-                      <a:latin typeface="Arial" panose="020B0604020202020204"/>
-                      <a:ea typeface="Arial" panose="020B0604020202020204"/>
-                      <a:cs typeface="Arial" panose="020B0604020202020204"/>
-                      <a:sym typeface="Arial" panose="020B0604020202020204"/>
-                    </a:defRPr>
-                  </a:lvl4pPr>
-                  <a:lvl5pPr marR="0" lvl="4" algn="l" rtl="0">
-                    <a:lnSpc>
-                      <a:spcPct val="100000"/>
-                    </a:lnSpc>
-                    <a:spcBef>
-                      <a:spcPts val="0"/>
-                    </a:spcBef>
-                    <a:spcAft>
-                      <a:spcPts val="0"/>
-                    </a:spcAft>
-                    <a:buClr>
-                      <a:srgbClr val="000000"/>
-                    </a:buClr>
-                    <a:buFont typeface="Arial" panose="020B0604020202020204"/>
-                    <a:defRPr sz="1400" b="0" i="0" u="none" strike="noStrike" cap="none">
-                      <a:solidFill>
-                        <a:srgbClr val="000000"/>
-                      </a:solidFill>
-                      <a:latin typeface="Arial" panose="020B0604020202020204"/>
-                      <a:ea typeface="Arial" panose="020B0604020202020204"/>
-                      <a:cs typeface="Arial" panose="020B0604020202020204"/>
-                      <a:sym typeface="Arial" panose="020B0604020202020204"/>
-                    </a:defRPr>
-                  </a:lvl5pPr>
-                  <a:lvl6pPr marR="0" lvl="5" algn="l" rtl="0">
-                    <a:lnSpc>
-                      <a:spcPct val="100000"/>
-                    </a:lnSpc>
-                    <a:spcBef>
-                      <a:spcPts val="0"/>
-                    </a:spcBef>
-                    <a:spcAft>
-                      <a:spcPts val="0"/>
-                    </a:spcAft>
-                    <a:buClr>
-                      <a:srgbClr val="000000"/>
-                    </a:buClr>
-                    <a:buFont typeface="Arial" panose="020B0604020202020204"/>
-                    <a:defRPr sz="1400" b="0" i="0" u="none" strike="noStrike" cap="none">
-                      <a:solidFill>
-                        <a:srgbClr val="000000"/>
-                      </a:solidFill>
-                      <a:latin typeface="Arial" panose="020B0604020202020204"/>
-                      <a:ea typeface="Arial" panose="020B0604020202020204"/>
-                      <a:cs typeface="Arial" panose="020B0604020202020204"/>
-                      <a:sym typeface="Arial" panose="020B0604020202020204"/>
-                    </a:defRPr>
-                  </a:lvl6pPr>
-                  <a:lvl7pPr marR="0" lvl="6" algn="l" rtl="0">
-                    <a:lnSpc>
-                      <a:spcPct val="100000"/>
-                    </a:lnSpc>
-                    <a:spcBef>
-                      <a:spcPts val="0"/>
-                    </a:spcBef>
-                    <a:spcAft>
-                      <a:spcPts val="0"/>
-                    </a:spcAft>
-                    <a:buClr>
-                      <a:srgbClr val="000000"/>
-                    </a:buClr>
-                    <a:buFont typeface="Arial" panose="020B0604020202020204"/>
-                    <a:defRPr sz="1400" b="0" i="0" u="none" strike="noStrike" cap="none">
-                      <a:solidFill>
-                        <a:srgbClr val="000000"/>
-                      </a:solidFill>
-                      <a:latin typeface="Arial" panose="020B0604020202020204"/>
-                      <a:ea typeface="Arial" panose="020B0604020202020204"/>
-                      <a:cs typeface="Arial" panose="020B0604020202020204"/>
-                      <a:sym typeface="Arial" panose="020B0604020202020204"/>
-                    </a:defRPr>
-                  </a:lvl7pPr>
-                  <a:lvl8pPr marR="0" lvl="7" algn="l" rtl="0">
-                    <a:lnSpc>
-                      <a:spcPct val="100000"/>
-                    </a:lnSpc>
-                    <a:spcBef>
-                      <a:spcPts val="0"/>
-                    </a:spcBef>
-                    <a:spcAft>
-                      <a:spcPts val="0"/>
-                    </a:spcAft>
-                    <a:buClr>
-                      <a:srgbClr val="000000"/>
-                    </a:buClr>
-                    <a:buFont typeface="Arial" panose="020B0604020202020204"/>
-                    <a:defRPr sz="1400" b="0" i="0" u="none" strike="noStrike" cap="none">
-                      <a:solidFill>
-                        <a:srgbClr val="000000"/>
-                      </a:solidFill>
-                      <a:latin typeface="Arial" panose="020B0604020202020204"/>
-                      <a:ea typeface="Arial" panose="020B0604020202020204"/>
-                      <a:cs typeface="Arial" panose="020B0604020202020204"/>
-                      <a:sym typeface="Arial" panose="020B0604020202020204"/>
-                    </a:defRPr>
-                  </a:lvl8pPr>
-                  <a:lvl9pPr marR="0" lvl="8" algn="l" rtl="0">
-                    <a:lnSpc>
-                      <a:spcPct val="100000"/>
-                    </a:lnSpc>
-                    <a:spcBef>
-                      <a:spcPts val="0"/>
-                    </a:spcBef>
-                    <a:spcAft>
-                      <a:spcPts val="0"/>
-                    </a:spcAft>
-                    <a:buClr>
-                      <a:srgbClr val="000000"/>
-                    </a:buClr>
-                    <a:buFont typeface="Arial" panose="020B0604020202020204"/>
-                    <a:defRPr sz="1400" b="0" i="0" u="none" strike="noStrike" cap="none">
-                      <a:solidFill>
-                        <a:srgbClr val="000000"/>
-                      </a:solidFill>
-                      <a:latin typeface="Arial" panose="020B0604020202020204"/>
-                      <a:ea typeface="Arial" panose="020B0604020202020204"/>
-                      <a:cs typeface="Arial" panose="020B0604020202020204"/>
-                      <a:sym typeface="Arial" panose="020B0604020202020204"/>
-                    </a:defRPr>
-                  </a:lvl9pPr>
-                </a:lstStyle>
-                <a:p>
-                  <a:pPr marL="0" lvl="0" indent="0" algn="l" rtl="0">
-                    <a:spcBef>
-                      <a:spcPts val="0"/>
-                    </a:spcBef>
-                    <a:spcAft>
-                      <a:spcPts val="0"/>
-                    </a:spcAft>
-                    <a:buNone/>
-                  </a:pPr>
-                  <a:r>
-                    <a:rPr lang="de-AT" sz="1000" b="1">
-                      <a:solidFill>
-                        <a:schemeClr val="dk1"/>
-                      </a:solidFill>
-                    </a:rPr>
-                    <a:t>Building Height (pixel)</a:t>
-                  </a:r>
-                  <a:endParaRPr sz="1000" b="1">
-                    <a:solidFill>
-                      <a:schemeClr val="dk1"/>
-                    </a:solidFill>
-                  </a:endParaRPr>
-                </a:p>
-              </p:txBody>
-            </p:sp>
-          </p:grpSp>
-          <p:sp>
-            <p:nvSpPr>
-              <p:cNvPr id="11" name="Text Box 9">
-                <a:extLst>
-                  <a:ext uri="{FF2B5EF4-FFF2-40B4-BE49-F238E27FC236}">
-                    <a16:creationId xmlns:a16="http://schemas.microsoft.com/office/drawing/2014/main" id="{71EE8E13-96EA-910A-81F3-E9688BF50613}"/>
-                  </a:ext>
-                </a:extLst>
-              </p:cNvPr>
-              <p:cNvSpPr txBox="1"/>
-              <p:nvPr/>
-            </p:nvSpPr>
-            <p:spPr>
-              <a:xfrm>
-                <a:off x="4331237" y="4876125"/>
-                <a:ext cx="4579620" cy="369332"/>
-              </a:xfrm>
-              <a:prstGeom prst="rect">
-                <a:avLst/>
-              </a:prstGeom>
+            <a:prstGeom prst="rect">
+              <a:avLst/>
+            </a:prstGeom>
+            <a:solidFill>
+              <a:schemeClr val="dk1"/>
+            </a:solidFill>
+            <a:ln>
               <a:noFill/>
-            </p:spPr>
-            <p:txBody>
-              <a:bodyPr wrap="square" rtlCol="0">
-                <a:spAutoFit/>
-              </a:bodyPr>
-              <a:lstStyle>
-                <a:defPPr marR="0" lvl="0" algn="l" rtl="0">
-                  <a:lnSpc>
-                    <a:spcPct val="100000"/>
-                  </a:lnSpc>
-                  <a:spcBef>
-                    <a:spcPts val="0"/>
-                  </a:spcBef>
-                  <a:spcAft>
-                    <a:spcPts val="0"/>
-                  </a:spcAft>
-                </a:defPPr>
-                <a:lvl1pPr marR="0" lvl="0" algn="l" rtl="0">
-                  <a:lnSpc>
-                    <a:spcPct val="100000"/>
-                  </a:lnSpc>
-                  <a:spcBef>
-                    <a:spcPts val="0"/>
-                  </a:spcBef>
-                  <a:spcAft>
-                    <a:spcPts val="0"/>
-                  </a:spcAft>
-                  <a:buClr>
+            </a:ln>
+          </p:spPr>
+          <p:txBody>
+            <a:bodyPr spcFirstLastPara="1" wrap="square" lIns="91425" tIns="91425" rIns="91425" bIns="91425" anchor="ctr" anchorCtr="0">
+              <a:noAutofit/>
+            </a:bodyPr>
+            <a:lstStyle>
+              <a:defPPr marR="0" lvl="0" algn="l" rtl="0">
+                <a:lnSpc>
+                  <a:spcPct val="100000"/>
+                </a:lnSpc>
+                <a:spcBef>
+                  <a:spcPts val="0"/>
+                </a:spcBef>
+                <a:spcAft>
+                  <a:spcPts val="0"/>
+                </a:spcAft>
+              </a:defPPr>
+              <a:lvl1pPr marR="0" lvl="0" algn="l" rtl="0">
+                <a:lnSpc>
+                  <a:spcPct val="100000"/>
+                </a:lnSpc>
+                <a:spcBef>
+                  <a:spcPts val="0"/>
+                </a:spcBef>
+                <a:spcAft>
+                  <a:spcPts val="0"/>
+                </a:spcAft>
+                <a:buClr>
+                  <a:srgbClr val="000000"/>
+                </a:buClr>
+                <a:buFont typeface="Arial" panose="020B0604020202020204"/>
+                <a:defRPr sz="1400" b="0" i="0" u="none" strike="noStrike" cap="none">
+                  <a:solidFill>
                     <a:srgbClr val="000000"/>
-                  </a:buClr>
-                  <a:buFont typeface="Arial" panose="020B0604020202020204"/>
-                  <a:defRPr sz="1400" b="0" i="0" u="none" strike="noStrike" cap="none">
-                    <a:solidFill>
-                      <a:srgbClr val="000000"/>
-                    </a:solidFill>
-                    <a:latin typeface="Arial" panose="020B0604020202020204"/>
-                    <a:ea typeface="Arial" panose="020B0604020202020204"/>
-                    <a:cs typeface="Arial" panose="020B0604020202020204"/>
-                    <a:sym typeface="Arial" panose="020B0604020202020204"/>
-                  </a:defRPr>
-                </a:lvl1pPr>
-                <a:lvl2pPr marR="0" lvl="1" algn="l" rtl="0">
-                  <a:lnSpc>
-                    <a:spcPct val="100000"/>
-                  </a:lnSpc>
-                  <a:spcBef>
-                    <a:spcPts val="0"/>
-                  </a:spcBef>
-                  <a:spcAft>
-                    <a:spcPts val="0"/>
-                  </a:spcAft>
-                  <a:buClr>
+                  </a:solidFill>
+                  <a:latin typeface="Arial" panose="020B0604020202020204"/>
+                  <a:ea typeface="Arial" panose="020B0604020202020204"/>
+                  <a:cs typeface="Arial" panose="020B0604020202020204"/>
+                  <a:sym typeface="Arial" panose="020B0604020202020204"/>
+                </a:defRPr>
+              </a:lvl1pPr>
+              <a:lvl2pPr marR="0" lvl="1" algn="l" rtl="0">
+                <a:lnSpc>
+                  <a:spcPct val="100000"/>
+                </a:lnSpc>
+                <a:spcBef>
+                  <a:spcPts val="0"/>
+                </a:spcBef>
+                <a:spcAft>
+                  <a:spcPts val="0"/>
+                </a:spcAft>
+                <a:buClr>
+                  <a:srgbClr val="000000"/>
+                </a:buClr>
+                <a:buFont typeface="Arial" panose="020B0604020202020204"/>
+                <a:defRPr sz="1400" b="0" i="0" u="none" strike="noStrike" cap="none">
+                  <a:solidFill>
                     <a:srgbClr val="000000"/>
-                  </a:buClr>
-                  <a:buFont typeface="Arial" panose="020B0604020202020204"/>
-                  <a:defRPr sz="1400" b="0" i="0" u="none" strike="noStrike" cap="none">
-                    <a:solidFill>
-                      <a:srgbClr val="000000"/>
-                    </a:solidFill>
-                    <a:latin typeface="Arial" panose="020B0604020202020204"/>
-                    <a:ea typeface="Arial" panose="020B0604020202020204"/>
-                    <a:cs typeface="Arial" panose="020B0604020202020204"/>
-                    <a:sym typeface="Arial" panose="020B0604020202020204"/>
-                  </a:defRPr>
-                </a:lvl2pPr>
-                <a:lvl3pPr marR="0" lvl="2" algn="l" rtl="0">
-                  <a:lnSpc>
-                    <a:spcPct val="100000"/>
-                  </a:lnSpc>
-                  <a:spcBef>
-                    <a:spcPts val="0"/>
-                  </a:spcBef>
-                  <a:spcAft>
-                    <a:spcPts val="0"/>
-                  </a:spcAft>
-                  <a:buClr>
+                  </a:solidFill>
+                  <a:latin typeface="Arial" panose="020B0604020202020204"/>
+                  <a:ea typeface="Arial" panose="020B0604020202020204"/>
+                  <a:cs typeface="Arial" panose="020B0604020202020204"/>
+                  <a:sym typeface="Arial" panose="020B0604020202020204"/>
+                </a:defRPr>
+              </a:lvl2pPr>
+              <a:lvl3pPr marR="0" lvl="2" algn="l" rtl="0">
+                <a:lnSpc>
+                  <a:spcPct val="100000"/>
+                </a:lnSpc>
+                <a:spcBef>
+                  <a:spcPts val="0"/>
+                </a:spcBef>
+                <a:spcAft>
+                  <a:spcPts val="0"/>
+                </a:spcAft>
+                <a:buClr>
+                  <a:srgbClr val="000000"/>
+                </a:buClr>
+                <a:buFont typeface="Arial" panose="020B0604020202020204"/>
+                <a:defRPr sz="1400" b="0" i="0" u="none" strike="noStrike" cap="none">
+                  <a:solidFill>
                     <a:srgbClr val="000000"/>
-                  </a:buClr>
-                  <a:buFont typeface="Arial" panose="020B0604020202020204"/>
-                  <a:defRPr sz="1400" b="0" i="0" u="none" strike="noStrike" cap="none">
-                    <a:solidFill>
-                      <a:srgbClr val="000000"/>
-                    </a:solidFill>
-                    <a:latin typeface="Arial" panose="020B0604020202020204"/>
-                    <a:ea typeface="Arial" panose="020B0604020202020204"/>
-                    <a:cs typeface="Arial" panose="020B0604020202020204"/>
-                    <a:sym typeface="Arial" panose="020B0604020202020204"/>
-                  </a:defRPr>
-                </a:lvl3pPr>
-                <a:lvl4pPr marR="0" lvl="3" algn="l" rtl="0">
-                  <a:lnSpc>
-                    <a:spcPct val="100000"/>
-                  </a:lnSpc>
-                  <a:spcBef>
-                    <a:spcPts val="0"/>
-                  </a:spcBef>
-                  <a:spcAft>
-                    <a:spcPts val="0"/>
-                  </a:spcAft>
-                  <a:buClr>
+                  </a:solidFill>
+                  <a:latin typeface="Arial" panose="020B0604020202020204"/>
+                  <a:ea typeface="Arial" panose="020B0604020202020204"/>
+                  <a:cs typeface="Arial" panose="020B0604020202020204"/>
+                  <a:sym typeface="Arial" panose="020B0604020202020204"/>
+                </a:defRPr>
+              </a:lvl3pPr>
+              <a:lvl4pPr marR="0" lvl="3" algn="l" rtl="0">
+                <a:lnSpc>
+                  <a:spcPct val="100000"/>
+                </a:lnSpc>
+                <a:spcBef>
+                  <a:spcPts val="0"/>
+                </a:spcBef>
+                <a:spcAft>
+                  <a:spcPts val="0"/>
+                </a:spcAft>
+                <a:buClr>
+                  <a:srgbClr val="000000"/>
+                </a:buClr>
+                <a:buFont typeface="Arial" panose="020B0604020202020204"/>
+                <a:defRPr sz="1400" b="0" i="0" u="none" strike="noStrike" cap="none">
+                  <a:solidFill>
                     <a:srgbClr val="000000"/>
-                  </a:buClr>
-                  <a:buFont typeface="Arial" panose="020B0604020202020204"/>
-                  <a:defRPr sz="1400" b="0" i="0" u="none" strike="noStrike" cap="none">
-                    <a:solidFill>
-                      <a:srgbClr val="000000"/>
-                    </a:solidFill>
-                    <a:latin typeface="Arial" panose="020B0604020202020204"/>
-                    <a:ea typeface="Arial" panose="020B0604020202020204"/>
-                    <a:cs typeface="Arial" panose="020B0604020202020204"/>
-                    <a:sym typeface="Arial" panose="020B0604020202020204"/>
-                  </a:defRPr>
-                </a:lvl4pPr>
-                <a:lvl5pPr marR="0" lvl="4" algn="l" rtl="0">
-                  <a:lnSpc>
-                    <a:spcPct val="100000"/>
-                  </a:lnSpc>
-                  <a:spcBef>
-                    <a:spcPts val="0"/>
-                  </a:spcBef>
-                  <a:spcAft>
-                    <a:spcPts val="0"/>
-                  </a:spcAft>
-                  <a:buClr>
+                  </a:solidFill>
+                  <a:latin typeface="Arial" panose="020B0604020202020204"/>
+                  <a:ea typeface="Arial" panose="020B0604020202020204"/>
+                  <a:cs typeface="Arial" panose="020B0604020202020204"/>
+                  <a:sym typeface="Arial" panose="020B0604020202020204"/>
+                </a:defRPr>
+              </a:lvl4pPr>
+              <a:lvl5pPr marR="0" lvl="4" algn="l" rtl="0">
+                <a:lnSpc>
+                  <a:spcPct val="100000"/>
+                </a:lnSpc>
+                <a:spcBef>
+                  <a:spcPts val="0"/>
+                </a:spcBef>
+                <a:spcAft>
+                  <a:spcPts val="0"/>
+                </a:spcAft>
+                <a:buClr>
+                  <a:srgbClr val="000000"/>
+                </a:buClr>
+                <a:buFont typeface="Arial" panose="020B0604020202020204"/>
+                <a:defRPr sz="1400" b="0" i="0" u="none" strike="noStrike" cap="none">
+                  <a:solidFill>
                     <a:srgbClr val="000000"/>
-                  </a:buClr>
-                  <a:buFont typeface="Arial" panose="020B0604020202020204"/>
-                  <a:defRPr sz="1400" b="0" i="0" u="none" strike="noStrike" cap="none">
-                    <a:solidFill>
-                      <a:srgbClr val="000000"/>
-                    </a:solidFill>
-                    <a:latin typeface="Arial" panose="020B0604020202020204"/>
-                    <a:ea typeface="Arial" panose="020B0604020202020204"/>
-                    <a:cs typeface="Arial" panose="020B0604020202020204"/>
-                    <a:sym typeface="Arial" panose="020B0604020202020204"/>
-                  </a:defRPr>
-                </a:lvl5pPr>
-                <a:lvl6pPr marR="0" lvl="5" algn="l" rtl="0">
-                  <a:lnSpc>
-                    <a:spcPct val="100000"/>
-                  </a:lnSpc>
-                  <a:spcBef>
-                    <a:spcPts val="0"/>
-                  </a:spcBef>
-                  <a:spcAft>
-                    <a:spcPts val="0"/>
-                  </a:spcAft>
-                  <a:buClr>
+                  </a:solidFill>
+                  <a:latin typeface="Arial" panose="020B0604020202020204"/>
+                  <a:ea typeface="Arial" panose="020B0604020202020204"/>
+                  <a:cs typeface="Arial" panose="020B0604020202020204"/>
+                  <a:sym typeface="Arial" panose="020B0604020202020204"/>
+                </a:defRPr>
+              </a:lvl5pPr>
+              <a:lvl6pPr marR="0" lvl="5" algn="l" rtl="0">
+                <a:lnSpc>
+                  <a:spcPct val="100000"/>
+                </a:lnSpc>
+                <a:spcBef>
+                  <a:spcPts val="0"/>
+                </a:spcBef>
+                <a:spcAft>
+                  <a:spcPts val="0"/>
+                </a:spcAft>
+                <a:buClr>
+                  <a:srgbClr val="000000"/>
+                </a:buClr>
+                <a:buFont typeface="Arial" panose="020B0604020202020204"/>
+                <a:defRPr sz="1400" b="0" i="0" u="none" strike="noStrike" cap="none">
+                  <a:solidFill>
                     <a:srgbClr val="000000"/>
-                  </a:buClr>
-                  <a:buFont typeface="Arial" panose="020B0604020202020204"/>
-                  <a:defRPr sz="1400" b="0" i="0" u="none" strike="noStrike" cap="none">
-                    <a:solidFill>
-                      <a:srgbClr val="000000"/>
-                    </a:solidFill>
-                    <a:latin typeface="Arial" panose="020B0604020202020204"/>
-                    <a:ea typeface="Arial" panose="020B0604020202020204"/>
-                    <a:cs typeface="Arial" panose="020B0604020202020204"/>
-                    <a:sym typeface="Arial" panose="020B0604020202020204"/>
-                  </a:defRPr>
-                </a:lvl6pPr>
-                <a:lvl7pPr marR="0" lvl="6" algn="l" rtl="0">
-                  <a:lnSpc>
-                    <a:spcPct val="100000"/>
-                  </a:lnSpc>
-                  <a:spcBef>
-                    <a:spcPts val="0"/>
-                  </a:spcBef>
-                  <a:spcAft>
-                    <a:spcPts val="0"/>
-                  </a:spcAft>
-                  <a:buClr>
+                  </a:solidFill>
+                  <a:latin typeface="Arial" panose="020B0604020202020204"/>
+                  <a:ea typeface="Arial" panose="020B0604020202020204"/>
+                  <a:cs typeface="Arial" panose="020B0604020202020204"/>
+                  <a:sym typeface="Arial" panose="020B0604020202020204"/>
+                </a:defRPr>
+              </a:lvl6pPr>
+              <a:lvl7pPr marR="0" lvl="6" algn="l" rtl="0">
+                <a:lnSpc>
+                  <a:spcPct val="100000"/>
+                </a:lnSpc>
+                <a:spcBef>
+                  <a:spcPts val="0"/>
+                </a:spcBef>
+                <a:spcAft>
+                  <a:spcPts val="0"/>
+                </a:spcAft>
+                <a:buClr>
+                  <a:srgbClr val="000000"/>
+                </a:buClr>
+                <a:buFont typeface="Arial" panose="020B0604020202020204"/>
+                <a:defRPr sz="1400" b="0" i="0" u="none" strike="noStrike" cap="none">
+                  <a:solidFill>
                     <a:srgbClr val="000000"/>
-                  </a:buClr>
-                  <a:buFont typeface="Arial" panose="020B0604020202020204"/>
-                  <a:defRPr sz="1400" b="0" i="0" u="none" strike="noStrike" cap="none">
-                    <a:solidFill>
-                      <a:srgbClr val="000000"/>
-                    </a:solidFill>
-                    <a:latin typeface="Arial" panose="020B0604020202020204"/>
-                    <a:ea typeface="Arial" panose="020B0604020202020204"/>
-                    <a:cs typeface="Arial" panose="020B0604020202020204"/>
-                    <a:sym typeface="Arial" panose="020B0604020202020204"/>
-                  </a:defRPr>
-                </a:lvl7pPr>
-                <a:lvl8pPr marR="0" lvl="7" algn="l" rtl="0">
-                  <a:lnSpc>
-                    <a:spcPct val="100000"/>
-                  </a:lnSpc>
-                  <a:spcBef>
-                    <a:spcPts val="0"/>
-                  </a:spcBef>
-                  <a:spcAft>
-                    <a:spcPts val="0"/>
-                  </a:spcAft>
-                  <a:buClr>
+                  </a:solidFill>
+                  <a:latin typeface="Arial" panose="020B0604020202020204"/>
+                  <a:ea typeface="Arial" panose="020B0604020202020204"/>
+                  <a:cs typeface="Arial" panose="020B0604020202020204"/>
+                  <a:sym typeface="Arial" panose="020B0604020202020204"/>
+                </a:defRPr>
+              </a:lvl7pPr>
+              <a:lvl8pPr marR="0" lvl="7" algn="l" rtl="0">
+                <a:lnSpc>
+                  <a:spcPct val="100000"/>
+                </a:lnSpc>
+                <a:spcBef>
+                  <a:spcPts val="0"/>
+                </a:spcBef>
+                <a:spcAft>
+                  <a:spcPts val="0"/>
+                </a:spcAft>
+                <a:buClr>
+                  <a:srgbClr val="000000"/>
+                </a:buClr>
+                <a:buFont typeface="Arial" panose="020B0604020202020204"/>
+                <a:defRPr sz="1400" b="0" i="0" u="none" strike="noStrike" cap="none">
+                  <a:solidFill>
                     <a:srgbClr val="000000"/>
-                  </a:buClr>
-                  <a:buFont typeface="Arial" panose="020B0604020202020204"/>
-                  <a:defRPr sz="1400" b="0" i="0" u="none" strike="noStrike" cap="none">
-                    <a:solidFill>
-                      <a:srgbClr val="000000"/>
-                    </a:solidFill>
-                    <a:latin typeface="Arial" panose="020B0604020202020204"/>
-                    <a:ea typeface="Arial" panose="020B0604020202020204"/>
-                    <a:cs typeface="Arial" panose="020B0604020202020204"/>
-                    <a:sym typeface="Arial" panose="020B0604020202020204"/>
-                  </a:defRPr>
-                </a:lvl8pPr>
-                <a:lvl9pPr marR="0" lvl="8" algn="l" rtl="0">
-                  <a:lnSpc>
-                    <a:spcPct val="100000"/>
-                  </a:lnSpc>
-                  <a:spcBef>
-                    <a:spcPts val="0"/>
-                  </a:spcBef>
-                  <a:spcAft>
-                    <a:spcPts val="0"/>
-                  </a:spcAft>
-                  <a:buClr>
+                  </a:solidFill>
+                  <a:latin typeface="Arial" panose="020B0604020202020204"/>
+                  <a:ea typeface="Arial" panose="020B0604020202020204"/>
+                  <a:cs typeface="Arial" panose="020B0604020202020204"/>
+                  <a:sym typeface="Arial" panose="020B0604020202020204"/>
+                </a:defRPr>
+              </a:lvl8pPr>
+              <a:lvl9pPr marR="0" lvl="8" algn="l" rtl="0">
+                <a:lnSpc>
+                  <a:spcPct val="100000"/>
+                </a:lnSpc>
+                <a:spcBef>
+                  <a:spcPts val="0"/>
+                </a:spcBef>
+                <a:spcAft>
+                  <a:spcPts val="0"/>
+                </a:spcAft>
+                <a:buClr>
+                  <a:srgbClr val="000000"/>
+                </a:buClr>
+                <a:buFont typeface="Arial" panose="020B0604020202020204"/>
+                <a:defRPr sz="1400" b="0" i="0" u="none" strike="noStrike" cap="none">
+                  <a:solidFill>
                     <a:srgbClr val="000000"/>
-                  </a:buClr>
-                  <a:buFont typeface="Arial" panose="020B0604020202020204"/>
-                  <a:defRPr sz="1400" b="0" i="0" u="none" strike="noStrike" cap="none">
-                    <a:solidFill>
-                      <a:srgbClr val="000000"/>
-                    </a:solidFill>
-                    <a:latin typeface="Arial" panose="020B0604020202020204"/>
-                    <a:ea typeface="Arial" panose="020B0604020202020204"/>
-                    <a:cs typeface="Arial" panose="020B0604020202020204"/>
-                    <a:sym typeface="Arial" panose="020B0604020202020204"/>
-                  </a:defRPr>
-                </a:lvl9pPr>
-              </a:lstStyle>
-              <a:p>
-                <a:pPr algn="ctr"/>
-                <a:r>
-                  <a:rPr lang="en-US" altLang="zh-CN" sz="1800" dirty="0"/>
-                  <a:t>Case City: </a:t>
-                </a:r>
-                <a:r>
-                  <a:rPr lang="en-US" sz="1800" dirty="0"/>
-                  <a:t>Antananarivo,</a:t>
-                </a:r>
-                <a:r>
-                  <a:rPr lang="zh-CN" altLang="en-US" sz="1800" dirty="0"/>
-                  <a:t> </a:t>
-                </a:r>
-                <a:r>
-                  <a:rPr lang="en-US" altLang="zh-CN" sz="1800" dirty="0"/>
-                  <a:t>Madagascar</a:t>
-                </a:r>
-                <a:endParaRPr lang="en-US" sz="1800" dirty="0"/>
-              </a:p>
-            </p:txBody>
-          </p:sp>
-          <p:grpSp>
-            <p:nvGrpSpPr>
-              <p:cNvPr id="12" name="Group 11">
-                <a:extLst>
-                  <a:ext uri="{FF2B5EF4-FFF2-40B4-BE49-F238E27FC236}">
-                    <a16:creationId xmlns:a16="http://schemas.microsoft.com/office/drawing/2014/main" id="{1535C9F1-4CA4-885B-8432-CC933F4B0C0B}"/>
-                  </a:ext>
-                </a:extLst>
-              </p:cNvPr>
-              <p:cNvGrpSpPr/>
-              <p:nvPr/>
-            </p:nvGrpSpPr>
-            <p:grpSpPr>
-              <a:xfrm>
-                <a:off x="7771610" y="7589925"/>
-                <a:ext cx="729561" cy="346358"/>
-                <a:chOff x="9532" y="3515"/>
-                <a:chExt cx="1186" cy="563"/>
-              </a:xfrm>
-            </p:grpSpPr>
-            <p:cxnSp>
-              <p:nvCxnSpPr>
-                <p:cNvPr id="13" name="Straight Arrow Connector 12">
-                  <a:extLst>
-                    <a:ext uri="{FF2B5EF4-FFF2-40B4-BE49-F238E27FC236}">
-                      <a16:creationId xmlns:a16="http://schemas.microsoft.com/office/drawing/2014/main" id="{7002651F-A00B-4E5F-8A89-20BD15899721}"/>
-                    </a:ext>
-                  </a:extLst>
-                </p:cNvPr>
-                <p:cNvCxnSpPr/>
-                <p:nvPr/>
-              </p:nvCxnSpPr>
-              <p:spPr>
-                <a:xfrm>
-                  <a:off x="9532" y="4006"/>
-                  <a:ext cx="1186" cy="0"/>
-                </a:xfrm>
-                <a:prstGeom prst="straightConnector1">
-                  <a:avLst/>
-                </a:prstGeom>
-                <a:ln>
-                  <a:solidFill>
-                    <a:schemeClr val="tx1"/>
                   </a:solidFill>
-                  <a:headEnd type="none"/>
-                  <a:tailEnd type="none"/>
-                </a:ln>
-              </p:spPr>
-              <p:style>
-                <a:lnRef idx="2">
-                  <a:schemeClr val="accent1"/>
-                </a:lnRef>
-                <a:fillRef idx="0">
-                  <a:srgbClr val="FFFFFF"/>
-                </a:fillRef>
-                <a:effectRef idx="0">
-                  <a:srgbClr val="FFFFFF"/>
-                </a:effectRef>
-                <a:fontRef idx="minor">
-                  <a:schemeClr val="tx1"/>
-                </a:fontRef>
-              </p:style>
-            </p:cxnSp>
-            <p:cxnSp>
-              <p:nvCxnSpPr>
-                <p:cNvPr id="14" name="Straight Arrow Connector 13">
-                  <a:extLst>
-                    <a:ext uri="{FF2B5EF4-FFF2-40B4-BE49-F238E27FC236}">
-                      <a16:creationId xmlns:a16="http://schemas.microsoft.com/office/drawing/2014/main" id="{0B77F212-63FB-51BA-811E-5A58EEF8B3FC}"/>
-                    </a:ext>
-                  </a:extLst>
-                </p:cNvPr>
-                <p:cNvCxnSpPr/>
-                <p:nvPr/>
-              </p:nvCxnSpPr>
-              <p:spPr>
-                <a:xfrm flipV="1">
-                  <a:off x="9551" y="3894"/>
-                  <a:ext cx="3" cy="130"/>
-                </a:xfrm>
-                <a:prstGeom prst="straightConnector1">
-                  <a:avLst/>
-                </a:prstGeom>
-                <a:ln>
-                  <a:solidFill>
-                    <a:schemeClr val="tx1"/>
-                  </a:solidFill>
-                  <a:headEnd type="none"/>
-                  <a:tailEnd type="none"/>
-                </a:ln>
-              </p:spPr>
-              <p:style>
-                <a:lnRef idx="2">
-                  <a:schemeClr val="accent1"/>
-                </a:lnRef>
-                <a:fillRef idx="0">
-                  <a:srgbClr val="FFFFFF"/>
-                </a:fillRef>
-                <a:effectRef idx="0">
-                  <a:srgbClr val="FFFFFF"/>
-                </a:effectRef>
-                <a:fontRef idx="minor">
-                  <a:schemeClr val="tx1"/>
-                </a:fontRef>
-              </p:style>
-            </p:cxnSp>
-            <p:cxnSp>
-              <p:nvCxnSpPr>
-                <p:cNvPr id="15" name="Straight Arrow Connector 14">
-                  <a:extLst>
-                    <a:ext uri="{FF2B5EF4-FFF2-40B4-BE49-F238E27FC236}">
-                      <a16:creationId xmlns:a16="http://schemas.microsoft.com/office/drawing/2014/main" id="{3CE63090-3263-99FF-383B-8DB1E9DDAA54}"/>
-                    </a:ext>
-                  </a:extLst>
-                </p:cNvPr>
-                <p:cNvCxnSpPr/>
-                <p:nvPr/>
-              </p:nvCxnSpPr>
-              <p:spPr>
-                <a:xfrm flipV="1">
-                  <a:off x="10706" y="3894"/>
-                  <a:ext cx="3" cy="130"/>
-                </a:xfrm>
-                <a:prstGeom prst="straightConnector1">
-                  <a:avLst/>
-                </a:prstGeom>
-                <a:ln>
-                  <a:solidFill>
-                    <a:schemeClr val="tx1"/>
-                  </a:solidFill>
-                  <a:headEnd type="none"/>
-                  <a:tailEnd type="none"/>
-                </a:ln>
-              </p:spPr>
-              <p:style>
-                <a:lnRef idx="2">
-                  <a:schemeClr val="accent1"/>
-                </a:lnRef>
-                <a:fillRef idx="0">
-                  <a:srgbClr val="FFFFFF"/>
-                </a:fillRef>
-                <a:effectRef idx="0">
-                  <a:srgbClr val="FFFFFF"/>
-                </a:effectRef>
-                <a:fontRef idx="minor">
-                  <a:schemeClr val="tx1"/>
-                </a:fontRef>
-              </p:style>
-            </p:cxnSp>
-            <p:sp>
-              <p:nvSpPr>
-                <p:cNvPr id="16" name="Google Shape;161;p16">
-                  <a:extLst>
-                    <a:ext uri="{FF2B5EF4-FFF2-40B4-BE49-F238E27FC236}">
-                      <a16:creationId xmlns:a16="http://schemas.microsoft.com/office/drawing/2014/main" id="{E4BAC250-6F45-21BF-A9F9-15F556E8B35E}"/>
-                    </a:ext>
-                  </a:extLst>
-                </p:cNvPr>
-                <p:cNvSpPr txBox="1"/>
-                <p:nvPr/>
-              </p:nvSpPr>
-              <p:spPr>
-                <a:xfrm>
-                  <a:off x="9677" y="3515"/>
-                  <a:ext cx="931" cy="563"/>
-                </a:xfrm>
-                <a:prstGeom prst="rect">
-                  <a:avLst/>
-                </a:prstGeom>
-                <a:noFill/>
-                <a:ln>
-                  <a:noFill/>
-                </a:ln>
-              </p:spPr>
-              <p:txBody>
-                <a:bodyPr spcFirstLastPara="1" wrap="square" lIns="91425" tIns="91425" rIns="91425" bIns="91425" anchor="t" anchorCtr="0">
-                  <a:spAutoFit/>
-                </a:bodyPr>
-                <a:lstStyle>
-                  <a:defPPr marR="0" lvl="0" algn="l" rtl="0">
-                    <a:lnSpc>
-                      <a:spcPct val="100000"/>
-                    </a:lnSpc>
-                    <a:spcBef>
-                      <a:spcPts val="0"/>
-                    </a:spcBef>
-                    <a:spcAft>
-                      <a:spcPts val="0"/>
-                    </a:spcAft>
-                  </a:defPPr>
-                  <a:lvl1pPr marR="0" lvl="0" algn="l" rtl="0">
-                    <a:lnSpc>
-                      <a:spcPct val="100000"/>
-                    </a:lnSpc>
-                    <a:spcBef>
-                      <a:spcPts val="0"/>
-                    </a:spcBef>
-                    <a:spcAft>
-                      <a:spcPts val="0"/>
-                    </a:spcAft>
-                    <a:buClr>
-                      <a:srgbClr val="000000"/>
-                    </a:buClr>
-                    <a:buFont typeface="Arial" panose="020B0604020202020204"/>
-                    <a:defRPr sz="1400" b="0" i="0" u="none" strike="noStrike" cap="none">
-                      <a:solidFill>
-                        <a:srgbClr val="000000"/>
-                      </a:solidFill>
-                      <a:latin typeface="Arial" panose="020B0604020202020204"/>
-                      <a:ea typeface="Arial" panose="020B0604020202020204"/>
-                      <a:cs typeface="Arial" panose="020B0604020202020204"/>
-                      <a:sym typeface="Arial" panose="020B0604020202020204"/>
-                    </a:defRPr>
-                  </a:lvl1pPr>
-                  <a:lvl2pPr marR="0" lvl="1" algn="l" rtl="0">
-                    <a:lnSpc>
-                      <a:spcPct val="100000"/>
-                    </a:lnSpc>
-                    <a:spcBef>
-                      <a:spcPts val="0"/>
-                    </a:spcBef>
-                    <a:spcAft>
-                      <a:spcPts val="0"/>
-                    </a:spcAft>
-                    <a:buClr>
-                      <a:srgbClr val="000000"/>
-                    </a:buClr>
-                    <a:buFont typeface="Arial" panose="020B0604020202020204"/>
-                    <a:defRPr sz="1400" b="0" i="0" u="none" strike="noStrike" cap="none">
-                      <a:solidFill>
-                        <a:srgbClr val="000000"/>
-                      </a:solidFill>
-                      <a:latin typeface="Arial" panose="020B0604020202020204"/>
-                      <a:ea typeface="Arial" panose="020B0604020202020204"/>
-                      <a:cs typeface="Arial" panose="020B0604020202020204"/>
-                      <a:sym typeface="Arial" panose="020B0604020202020204"/>
-                    </a:defRPr>
-                  </a:lvl2pPr>
-                  <a:lvl3pPr marR="0" lvl="2" algn="l" rtl="0">
-                    <a:lnSpc>
-                      <a:spcPct val="100000"/>
-                    </a:lnSpc>
-                    <a:spcBef>
-                      <a:spcPts val="0"/>
-                    </a:spcBef>
-                    <a:spcAft>
-                      <a:spcPts val="0"/>
-                    </a:spcAft>
-                    <a:buClr>
-                      <a:srgbClr val="000000"/>
-                    </a:buClr>
-                    <a:buFont typeface="Arial" panose="020B0604020202020204"/>
-                    <a:defRPr sz="1400" b="0" i="0" u="none" strike="noStrike" cap="none">
-                      <a:solidFill>
-                        <a:srgbClr val="000000"/>
-                      </a:solidFill>
-                      <a:latin typeface="Arial" panose="020B0604020202020204"/>
-                      <a:ea typeface="Arial" panose="020B0604020202020204"/>
-                      <a:cs typeface="Arial" panose="020B0604020202020204"/>
-                      <a:sym typeface="Arial" panose="020B0604020202020204"/>
-                    </a:defRPr>
-                  </a:lvl3pPr>
-                  <a:lvl4pPr marR="0" lvl="3" algn="l" rtl="0">
-                    <a:lnSpc>
-                      <a:spcPct val="100000"/>
-                    </a:lnSpc>
-                    <a:spcBef>
-                      <a:spcPts val="0"/>
-                    </a:spcBef>
-                    <a:spcAft>
-                      <a:spcPts val="0"/>
-                    </a:spcAft>
-                    <a:buClr>
-                      <a:srgbClr val="000000"/>
-                    </a:buClr>
-                    <a:buFont typeface="Arial" panose="020B0604020202020204"/>
-                    <a:defRPr sz="1400" b="0" i="0" u="none" strike="noStrike" cap="none">
-                      <a:solidFill>
-                        <a:srgbClr val="000000"/>
-                      </a:solidFill>
-                      <a:latin typeface="Arial" panose="020B0604020202020204"/>
-                      <a:ea typeface="Arial" panose="020B0604020202020204"/>
-                      <a:cs typeface="Arial" panose="020B0604020202020204"/>
-                      <a:sym typeface="Arial" panose="020B0604020202020204"/>
-                    </a:defRPr>
-                  </a:lvl4pPr>
-                  <a:lvl5pPr marR="0" lvl="4" algn="l" rtl="0">
-                    <a:lnSpc>
-                      <a:spcPct val="100000"/>
-                    </a:lnSpc>
-                    <a:spcBef>
-                      <a:spcPts val="0"/>
-                    </a:spcBef>
-                    <a:spcAft>
-                      <a:spcPts val="0"/>
-                    </a:spcAft>
-                    <a:buClr>
-                      <a:srgbClr val="000000"/>
-                    </a:buClr>
-                    <a:buFont typeface="Arial" panose="020B0604020202020204"/>
-                    <a:defRPr sz="1400" b="0" i="0" u="none" strike="noStrike" cap="none">
-                      <a:solidFill>
-                        <a:srgbClr val="000000"/>
-                      </a:solidFill>
-                      <a:latin typeface="Arial" panose="020B0604020202020204"/>
-                      <a:ea typeface="Arial" panose="020B0604020202020204"/>
-                      <a:cs typeface="Arial" panose="020B0604020202020204"/>
-                      <a:sym typeface="Arial" panose="020B0604020202020204"/>
-                    </a:defRPr>
-                  </a:lvl5pPr>
-                  <a:lvl6pPr marR="0" lvl="5" algn="l" rtl="0">
-                    <a:lnSpc>
-                      <a:spcPct val="100000"/>
-                    </a:lnSpc>
-                    <a:spcBef>
-                      <a:spcPts val="0"/>
-                    </a:spcBef>
-                    <a:spcAft>
-                      <a:spcPts val="0"/>
-                    </a:spcAft>
-                    <a:buClr>
-                      <a:srgbClr val="000000"/>
-                    </a:buClr>
-                    <a:buFont typeface="Arial" panose="020B0604020202020204"/>
-                    <a:defRPr sz="1400" b="0" i="0" u="none" strike="noStrike" cap="none">
-                      <a:solidFill>
-                        <a:srgbClr val="000000"/>
-                      </a:solidFill>
-                      <a:latin typeface="Arial" panose="020B0604020202020204"/>
-                      <a:ea typeface="Arial" panose="020B0604020202020204"/>
-                      <a:cs typeface="Arial" panose="020B0604020202020204"/>
-                      <a:sym typeface="Arial" panose="020B0604020202020204"/>
-                    </a:defRPr>
-                  </a:lvl6pPr>
-                  <a:lvl7pPr marR="0" lvl="6" algn="l" rtl="0">
-                    <a:lnSpc>
-                      <a:spcPct val="100000"/>
-                    </a:lnSpc>
-                    <a:spcBef>
-                      <a:spcPts val="0"/>
-                    </a:spcBef>
-                    <a:spcAft>
-                      <a:spcPts val="0"/>
-                    </a:spcAft>
-                    <a:buClr>
-                      <a:srgbClr val="000000"/>
-                    </a:buClr>
-                    <a:buFont typeface="Arial" panose="020B0604020202020204"/>
-                    <a:defRPr sz="1400" b="0" i="0" u="none" strike="noStrike" cap="none">
-                      <a:solidFill>
-                        <a:srgbClr val="000000"/>
-                      </a:solidFill>
-                      <a:latin typeface="Arial" panose="020B0604020202020204"/>
-                      <a:ea typeface="Arial" panose="020B0604020202020204"/>
-                      <a:cs typeface="Arial" panose="020B0604020202020204"/>
-                      <a:sym typeface="Arial" panose="020B0604020202020204"/>
-                    </a:defRPr>
-                  </a:lvl7pPr>
-                  <a:lvl8pPr marR="0" lvl="7" algn="l" rtl="0">
-                    <a:lnSpc>
-                      <a:spcPct val="100000"/>
-                    </a:lnSpc>
-                    <a:spcBef>
-                      <a:spcPts val="0"/>
-                    </a:spcBef>
-                    <a:spcAft>
-                      <a:spcPts val="0"/>
-                    </a:spcAft>
-                    <a:buClr>
-                      <a:srgbClr val="000000"/>
-                    </a:buClr>
-                    <a:buFont typeface="Arial" panose="020B0604020202020204"/>
-                    <a:defRPr sz="1400" b="0" i="0" u="none" strike="noStrike" cap="none">
-                      <a:solidFill>
-                        <a:srgbClr val="000000"/>
-                      </a:solidFill>
-                      <a:latin typeface="Arial" panose="020B0604020202020204"/>
-                      <a:ea typeface="Arial" panose="020B0604020202020204"/>
-                      <a:cs typeface="Arial" panose="020B0604020202020204"/>
-                      <a:sym typeface="Arial" panose="020B0604020202020204"/>
-                    </a:defRPr>
-                  </a:lvl8pPr>
-                  <a:lvl9pPr marR="0" lvl="8" algn="l" rtl="0">
-                    <a:lnSpc>
-                      <a:spcPct val="100000"/>
-                    </a:lnSpc>
-                    <a:spcBef>
-                      <a:spcPts val="0"/>
-                    </a:spcBef>
-                    <a:spcAft>
-                      <a:spcPts val="0"/>
-                    </a:spcAft>
-                    <a:buClr>
-                      <a:srgbClr val="000000"/>
-                    </a:buClr>
-                    <a:buFont typeface="Arial" panose="020B0604020202020204"/>
-                    <a:defRPr sz="1400" b="0" i="0" u="none" strike="noStrike" cap="none">
-                      <a:solidFill>
-                        <a:srgbClr val="000000"/>
-                      </a:solidFill>
-                      <a:latin typeface="Arial" panose="020B0604020202020204"/>
-                      <a:ea typeface="Arial" panose="020B0604020202020204"/>
-                      <a:cs typeface="Arial" panose="020B0604020202020204"/>
-                      <a:sym typeface="Arial" panose="020B0604020202020204"/>
-                    </a:defRPr>
-                  </a:lvl9pPr>
-                </a:lstStyle>
-                <a:p>
-                  <a:pPr marL="0" lvl="0" indent="0" algn="ctr" rtl="0">
-                    <a:spcBef>
-                      <a:spcPts val="0"/>
-                    </a:spcBef>
-                    <a:spcAft>
-                      <a:spcPts val="0"/>
-                    </a:spcAft>
-                    <a:buNone/>
-                  </a:pPr>
-                  <a:r>
-                    <a:rPr lang="en-US" altLang="de-AT" sz="1050">
-                      <a:solidFill>
-                        <a:schemeClr val="dk1"/>
-                      </a:solidFill>
-                    </a:rPr>
-                    <a:t>10 km</a:t>
-                  </a:r>
-                </a:p>
-              </p:txBody>
-            </p:sp>
-          </p:grpSp>
-        </p:grpSp>
+                  <a:latin typeface="Arial" panose="020B0604020202020204"/>
+                  <a:ea typeface="Arial" panose="020B0604020202020204"/>
+                  <a:cs typeface="Arial" panose="020B0604020202020204"/>
+                  <a:sym typeface="Arial" panose="020B0604020202020204"/>
+                </a:defRPr>
+              </a:lvl9pPr>
+            </a:lstStyle>
+            <a:p>
+              <a:pPr marL="0" lvl="0" indent="0" algn="ctr" rtl="0">
+                <a:spcBef>
+                  <a:spcPts val="0"/>
+                </a:spcBef>
+                <a:spcAft>
+                  <a:spcPts val="0"/>
+                </a:spcAft>
+                <a:buNone/>
+              </a:pPr>
+              <a:endParaRPr sz="1800"/>
+            </a:p>
+          </p:txBody>
+        </p:sp>
         <p:sp>
           <p:nvSpPr>
-            <p:cNvPr id="6" name="TextBox 5">
+            <p:cNvPr id="18" name="Google Shape;158;p16">
               <a:extLst>
                 <a:ext uri="{FF2B5EF4-FFF2-40B4-BE49-F238E27FC236}">
-                  <a16:creationId xmlns:a16="http://schemas.microsoft.com/office/drawing/2014/main" id="{A0718CCF-89C6-9A5B-D8D8-35DFE5557012}"/>
+                  <a16:creationId xmlns:a16="http://schemas.microsoft.com/office/drawing/2014/main" id="{E38C44FB-852A-E8CE-AA35-AD40BB952321}"/>
                 </a:ext>
               </a:extLst>
             </p:cNvPr>
@@ -5864,34 +3971,573 @@
           </p:nvSpPr>
           <p:spPr>
             <a:xfrm>
-              <a:off x="5093597" y="5186802"/>
-              <a:ext cx="696464" cy="307777"/>
+              <a:off x="4807925" y="4484375"/>
+              <a:ext cx="800100" cy="507575"/>
             </a:xfrm>
             <a:prstGeom prst="rect">
               <a:avLst/>
             </a:prstGeom>
             <a:noFill/>
+            <a:ln>
+              <a:noFill/>
+            </a:ln>
           </p:spPr>
           <p:txBody>
-            <a:bodyPr wrap="square">
+            <a:bodyPr spcFirstLastPara="1" wrap="square" lIns="91425" tIns="91425" rIns="91425" bIns="91425" anchor="t" anchorCtr="0">
               <a:spAutoFit/>
             </a:bodyPr>
-            <a:lstStyle/>
+            <a:lstStyle>
+              <a:defPPr marR="0" lvl="0" algn="l" rtl="0">
+                <a:lnSpc>
+                  <a:spcPct val="100000"/>
+                </a:lnSpc>
+                <a:spcBef>
+                  <a:spcPts val="0"/>
+                </a:spcBef>
+                <a:spcAft>
+                  <a:spcPts val="0"/>
+                </a:spcAft>
+              </a:defPPr>
+              <a:lvl1pPr marR="0" lvl="0" algn="l" rtl="0">
+                <a:lnSpc>
+                  <a:spcPct val="100000"/>
+                </a:lnSpc>
+                <a:spcBef>
+                  <a:spcPts val="0"/>
+                </a:spcBef>
+                <a:spcAft>
+                  <a:spcPts val="0"/>
+                </a:spcAft>
+                <a:buClr>
+                  <a:srgbClr val="000000"/>
+                </a:buClr>
+                <a:buFont typeface="Arial" panose="020B0604020202020204"/>
+                <a:defRPr sz="1400" b="0" i="0" u="none" strike="noStrike" cap="none">
+                  <a:solidFill>
+                    <a:srgbClr val="000000"/>
+                  </a:solidFill>
+                  <a:latin typeface="Arial" panose="020B0604020202020204"/>
+                  <a:ea typeface="Arial" panose="020B0604020202020204"/>
+                  <a:cs typeface="Arial" panose="020B0604020202020204"/>
+                  <a:sym typeface="Arial" panose="020B0604020202020204"/>
+                </a:defRPr>
+              </a:lvl1pPr>
+              <a:lvl2pPr marR="0" lvl="1" algn="l" rtl="0">
+                <a:lnSpc>
+                  <a:spcPct val="100000"/>
+                </a:lnSpc>
+                <a:spcBef>
+                  <a:spcPts val="0"/>
+                </a:spcBef>
+                <a:spcAft>
+                  <a:spcPts val="0"/>
+                </a:spcAft>
+                <a:buClr>
+                  <a:srgbClr val="000000"/>
+                </a:buClr>
+                <a:buFont typeface="Arial" panose="020B0604020202020204"/>
+                <a:defRPr sz="1400" b="0" i="0" u="none" strike="noStrike" cap="none">
+                  <a:solidFill>
+                    <a:srgbClr val="000000"/>
+                  </a:solidFill>
+                  <a:latin typeface="Arial" panose="020B0604020202020204"/>
+                  <a:ea typeface="Arial" panose="020B0604020202020204"/>
+                  <a:cs typeface="Arial" panose="020B0604020202020204"/>
+                  <a:sym typeface="Arial" panose="020B0604020202020204"/>
+                </a:defRPr>
+              </a:lvl2pPr>
+              <a:lvl3pPr marR="0" lvl="2" algn="l" rtl="0">
+                <a:lnSpc>
+                  <a:spcPct val="100000"/>
+                </a:lnSpc>
+                <a:spcBef>
+                  <a:spcPts val="0"/>
+                </a:spcBef>
+                <a:spcAft>
+                  <a:spcPts val="0"/>
+                </a:spcAft>
+                <a:buClr>
+                  <a:srgbClr val="000000"/>
+                </a:buClr>
+                <a:buFont typeface="Arial" panose="020B0604020202020204"/>
+                <a:defRPr sz="1400" b="0" i="0" u="none" strike="noStrike" cap="none">
+                  <a:solidFill>
+                    <a:srgbClr val="000000"/>
+                  </a:solidFill>
+                  <a:latin typeface="Arial" panose="020B0604020202020204"/>
+                  <a:ea typeface="Arial" panose="020B0604020202020204"/>
+                  <a:cs typeface="Arial" panose="020B0604020202020204"/>
+                  <a:sym typeface="Arial" panose="020B0604020202020204"/>
+                </a:defRPr>
+              </a:lvl3pPr>
+              <a:lvl4pPr marR="0" lvl="3" algn="l" rtl="0">
+                <a:lnSpc>
+                  <a:spcPct val="100000"/>
+                </a:lnSpc>
+                <a:spcBef>
+                  <a:spcPts val="0"/>
+                </a:spcBef>
+                <a:spcAft>
+                  <a:spcPts val="0"/>
+                </a:spcAft>
+                <a:buClr>
+                  <a:srgbClr val="000000"/>
+                </a:buClr>
+                <a:buFont typeface="Arial" panose="020B0604020202020204"/>
+                <a:defRPr sz="1400" b="0" i="0" u="none" strike="noStrike" cap="none">
+                  <a:solidFill>
+                    <a:srgbClr val="000000"/>
+                  </a:solidFill>
+                  <a:latin typeface="Arial" panose="020B0604020202020204"/>
+                  <a:ea typeface="Arial" panose="020B0604020202020204"/>
+                  <a:cs typeface="Arial" panose="020B0604020202020204"/>
+                  <a:sym typeface="Arial" panose="020B0604020202020204"/>
+                </a:defRPr>
+              </a:lvl4pPr>
+              <a:lvl5pPr marR="0" lvl="4" algn="l" rtl="0">
+                <a:lnSpc>
+                  <a:spcPct val="100000"/>
+                </a:lnSpc>
+                <a:spcBef>
+                  <a:spcPts val="0"/>
+                </a:spcBef>
+                <a:spcAft>
+                  <a:spcPts val="0"/>
+                </a:spcAft>
+                <a:buClr>
+                  <a:srgbClr val="000000"/>
+                </a:buClr>
+                <a:buFont typeface="Arial" panose="020B0604020202020204"/>
+                <a:defRPr sz="1400" b="0" i="0" u="none" strike="noStrike" cap="none">
+                  <a:solidFill>
+                    <a:srgbClr val="000000"/>
+                  </a:solidFill>
+                  <a:latin typeface="Arial" panose="020B0604020202020204"/>
+                  <a:ea typeface="Arial" panose="020B0604020202020204"/>
+                  <a:cs typeface="Arial" panose="020B0604020202020204"/>
+                  <a:sym typeface="Arial" panose="020B0604020202020204"/>
+                </a:defRPr>
+              </a:lvl5pPr>
+              <a:lvl6pPr marR="0" lvl="5" algn="l" rtl="0">
+                <a:lnSpc>
+                  <a:spcPct val="100000"/>
+                </a:lnSpc>
+                <a:spcBef>
+                  <a:spcPts val="0"/>
+                </a:spcBef>
+                <a:spcAft>
+                  <a:spcPts val="0"/>
+                </a:spcAft>
+                <a:buClr>
+                  <a:srgbClr val="000000"/>
+                </a:buClr>
+                <a:buFont typeface="Arial" panose="020B0604020202020204"/>
+                <a:defRPr sz="1400" b="0" i="0" u="none" strike="noStrike" cap="none">
+                  <a:solidFill>
+                    <a:srgbClr val="000000"/>
+                  </a:solidFill>
+                  <a:latin typeface="Arial" panose="020B0604020202020204"/>
+                  <a:ea typeface="Arial" panose="020B0604020202020204"/>
+                  <a:cs typeface="Arial" panose="020B0604020202020204"/>
+                  <a:sym typeface="Arial" panose="020B0604020202020204"/>
+                </a:defRPr>
+              </a:lvl6pPr>
+              <a:lvl7pPr marR="0" lvl="6" algn="l" rtl="0">
+                <a:lnSpc>
+                  <a:spcPct val="100000"/>
+                </a:lnSpc>
+                <a:spcBef>
+                  <a:spcPts val="0"/>
+                </a:spcBef>
+                <a:spcAft>
+                  <a:spcPts val="0"/>
+                </a:spcAft>
+                <a:buClr>
+                  <a:srgbClr val="000000"/>
+                </a:buClr>
+                <a:buFont typeface="Arial" panose="020B0604020202020204"/>
+                <a:defRPr sz="1400" b="0" i="0" u="none" strike="noStrike" cap="none">
+                  <a:solidFill>
+                    <a:srgbClr val="000000"/>
+                  </a:solidFill>
+                  <a:latin typeface="Arial" panose="020B0604020202020204"/>
+                  <a:ea typeface="Arial" panose="020B0604020202020204"/>
+                  <a:cs typeface="Arial" panose="020B0604020202020204"/>
+                  <a:sym typeface="Arial" panose="020B0604020202020204"/>
+                </a:defRPr>
+              </a:lvl7pPr>
+              <a:lvl8pPr marR="0" lvl="7" algn="l" rtl="0">
+                <a:lnSpc>
+                  <a:spcPct val="100000"/>
+                </a:lnSpc>
+                <a:spcBef>
+                  <a:spcPts val="0"/>
+                </a:spcBef>
+                <a:spcAft>
+                  <a:spcPts val="0"/>
+                </a:spcAft>
+                <a:buClr>
+                  <a:srgbClr val="000000"/>
+                </a:buClr>
+                <a:buFont typeface="Arial" panose="020B0604020202020204"/>
+                <a:defRPr sz="1400" b="0" i="0" u="none" strike="noStrike" cap="none">
+                  <a:solidFill>
+                    <a:srgbClr val="000000"/>
+                  </a:solidFill>
+                  <a:latin typeface="Arial" panose="020B0604020202020204"/>
+                  <a:ea typeface="Arial" panose="020B0604020202020204"/>
+                  <a:cs typeface="Arial" panose="020B0604020202020204"/>
+                  <a:sym typeface="Arial" panose="020B0604020202020204"/>
+                </a:defRPr>
+              </a:lvl8pPr>
+              <a:lvl9pPr marR="0" lvl="8" algn="l" rtl="0">
+                <a:lnSpc>
+                  <a:spcPct val="100000"/>
+                </a:lnSpc>
+                <a:spcBef>
+                  <a:spcPts val="0"/>
+                </a:spcBef>
+                <a:spcAft>
+                  <a:spcPts val="0"/>
+                </a:spcAft>
+                <a:buClr>
+                  <a:srgbClr val="000000"/>
+                </a:buClr>
+                <a:buFont typeface="Arial" panose="020B0604020202020204"/>
+                <a:defRPr sz="1400" b="0" i="0" u="none" strike="noStrike" cap="none">
+                  <a:solidFill>
+                    <a:srgbClr val="000000"/>
+                  </a:solidFill>
+                  <a:latin typeface="Arial" panose="020B0604020202020204"/>
+                  <a:ea typeface="Arial" panose="020B0604020202020204"/>
+                  <a:cs typeface="Arial" panose="020B0604020202020204"/>
+                  <a:sym typeface="Arial" panose="020B0604020202020204"/>
+                </a:defRPr>
+              </a:lvl9pPr>
+            </a:lstStyle>
             <a:p>
-              <a:pPr algn="ctr"/>
+              <a:pPr marL="0" lvl="0" indent="0" algn="l" rtl="0">
+                <a:spcBef>
+                  <a:spcPts val="0"/>
+                </a:spcBef>
+                <a:spcAft>
+                  <a:spcPts val="0"/>
+                </a:spcAft>
+                <a:buNone/>
+              </a:pPr>
               <a:r>
-                <a:rPr lang="en-US" sz="1400" dirty="0"/>
-                <a:t>2016</a:t>
+                <a:rPr lang="de-AT" sz="1000" b="1" dirty="0">
+                  <a:solidFill>
+                    <a:schemeClr val="dk1"/>
+                  </a:solidFill>
+                </a:rPr>
+                <a:t>No Building</a:t>
               </a:r>
+              <a:endParaRPr sz="1000" b="1" dirty="0">
+                <a:solidFill>
+                  <a:schemeClr val="dk1"/>
+                </a:solidFill>
+              </a:endParaRPr>
             </a:p>
           </p:txBody>
         </p:sp>
         <p:sp>
           <p:nvSpPr>
-            <p:cNvPr id="7" name="TextBox 6">
+            <p:cNvPr id="19" name="Google Shape;159;p16">
               <a:extLst>
                 <a:ext uri="{FF2B5EF4-FFF2-40B4-BE49-F238E27FC236}">
-                  <a16:creationId xmlns:a16="http://schemas.microsoft.com/office/drawing/2014/main" id="{0B11A087-864B-B7F0-F2EF-92C7834CE9A7}"/>
+                  <a16:creationId xmlns:a16="http://schemas.microsoft.com/office/drawing/2014/main" id="{4D00177F-CDC7-0F25-08C3-B4767BE48A71}"/>
+                </a:ext>
+              </a:extLst>
+            </p:cNvPr>
+            <p:cNvSpPr/>
+            <p:nvPr/>
+          </p:nvSpPr>
+          <p:spPr>
+            <a:xfrm>
+              <a:off x="5890875" y="4753925"/>
+              <a:ext cx="1009200" cy="234600"/>
+            </a:xfrm>
+            <a:prstGeom prst="rect">
+              <a:avLst/>
+            </a:prstGeom>
+            <a:gradFill>
+              <a:gsLst>
+                <a:gs pos="0">
+                  <a:srgbClr val="1D4877"/>
+                </a:gs>
+                <a:gs pos="24000">
+                  <a:srgbClr val="1B8A5A"/>
+                </a:gs>
+                <a:gs pos="50000">
+                  <a:srgbClr val="FBB021"/>
+                </a:gs>
+                <a:gs pos="75000">
+                  <a:srgbClr val="F68838"/>
+                </a:gs>
+                <a:gs pos="100000">
+                  <a:srgbClr val="EE3E32"/>
+                </a:gs>
+              </a:gsLst>
+              <a:lin ang="0" scaled="0"/>
+            </a:gradFill>
+            <a:ln>
+              <a:noFill/>
+            </a:ln>
+          </p:spPr>
+          <p:txBody>
+            <a:bodyPr spcFirstLastPara="1" wrap="square" lIns="91425" tIns="91425" rIns="91425" bIns="91425" anchor="ctr" anchorCtr="0">
+              <a:noAutofit/>
+            </a:bodyPr>
+            <a:lstStyle>
+              <a:defPPr marR="0" lvl="0" algn="l" rtl="0">
+                <a:lnSpc>
+                  <a:spcPct val="100000"/>
+                </a:lnSpc>
+                <a:spcBef>
+                  <a:spcPts val="0"/>
+                </a:spcBef>
+                <a:spcAft>
+                  <a:spcPts val="0"/>
+                </a:spcAft>
+              </a:defPPr>
+              <a:lvl1pPr marR="0" lvl="0" algn="l" rtl="0">
+                <a:lnSpc>
+                  <a:spcPct val="100000"/>
+                </a:lnSpc>
+                <a:spcBef>
+                  <a:spcPts val="0"/>
+                </a:spcBef>
+                <a:spcAft>
+                  <a:spcPts val="0"/>
+                </a:spcAft>
+                <a:buClr>
+                  <a:srgbClr val="000000"/>
+                </a:buClr>
+                <a:buFont typeface="Arial" panose="020B0604020202020204"/>
+                <a:defRPr sz="1400" b="0" i="0" u="none" strike="noStrike" cap="none">
+                  <a:solidFill>
+                    <a:srgbClr val="000000"/>
+                  </a:solidFill>
+                  <a:latin typeface="Arial" panose="020B0604020202020204"/>
+                  <a:ea typeface="Arial" panose="020B0604020202020204"/>
+                  <a:cs typeface="Arial" panose="020B0604020202020204"/>
+                  <a:sym typeface="Arial" panose="020B0604020202020204"/>
+                </a:defRPr>
+              </a:lvl1pPr>
+              <a:lvl2pPr marR="0" lvl="1" algn="l" rtl="0">
+                <a:lnSpc>
+                  <a:spcPct val="100000"/>
+                </a:lnSpc>
+                <a:spcBef>
+                  <a:spcPts val="0"/>
+                </a:spcBef>
+                <a:spcAft>
+                  <a:spcPts val="0"/>
+                </a:spcAft>
+                <a:buClr>
+                  <a:srgbClr val="000000"/>
+                </a:buClr>
+                <a:buFont typeface="Arial" panose="020B0604020202020204"/>
+                <a:defRPr sz="1400" b="0" i="0" u="none" strike="noStrike" cap="none">
+                  <a:solidFill>
+                    <a:srgbClr val="000000"/>
+                  </a:solidFill>
+                  <a:latin typeface="Arial" panose="020B0604020202020204"/>
+                  <a:ea typeface="Arial" panose="020B0604020202020204"/>
+                  <a:cs typeface="Arial" panose="020B0604020202020204"/>
+                  <a:sym typeface="Arial" panose="020B0604020202020204"/>
+                </a:defRPr>
+              </a:lvl2pPr>
+              <a:lvl3pPr marR="0" lvl="2" algn="l" rtl="0">
+                <a:lnSpc>
+                  <a:spcPct val="100000"/>
+                </a:lnSpc>
+                <a:spcBef>
+                  <a:spcPts val="0"/>
+                </a:spcBef>
+                <a:spcAft>
+                  <a:spcPts val="0"/>
+                </a:spcAft>
+                <a:buClr>
+                  <a:srgbClr val="000000"/>
+                </a:buClr>
+                <a:buFont typeface="Arial" panose="020B0604020202020204"/>
+                <a:defRPr sz="1400" b="0" i="0" u="none" strike="noStrike" cap="none">
+                  <a:solidFill>
+                    <a:srgbClr val="000000"/>
+                  </a:solidFill>
+                  <a:latin typeface="Arial" panose="020B0604020202020204"/>
+                  <a:ea typeface="Arial" panose="020B0604020202020204"/>
+                  <a:cs typeface="Arial" panose="020B0604020202020204"/>
+                  <a:sym typeface="Arial" panose="020B0604020202020204"/>
+                </a:defRPr>
+              </a:lvl3pPr>
+              <a:lvl4pPr marR="0" lvl="3" algn="l" rtl="0">
+                <a:lnSpc>
+                  <a:spcPct val="100000"/>
+                </a:lnSpc>
+                <a:spcBef>
+                  <a:spcPts val="0"/>
+                </a:spcBef>
+                <a:spcAft>
+                  <a:spcPts val="0"/>
+                </a:spcAft>
+                <a:buClr>
+                  <a:srgbClr val="000000"/>
+                </a:buClr>
+                <a:buFont typeface="Arial" panose="020B0604020202020204"/>
+                <a:defRPr sz="1400" b="0" i="0" u="none" strike="noStrike" cap="none">
+                  <a:solidFill>
+                    <a:srgbClr val="000000"/>
+                  </a:solidFill>
+                  <a:latin typeface="Arial" panose="020B0604020202020204"/>
+                  <a:ea typeface="Arial" panose="020B0604020202020204"/>
+                  <a:cs typeface="Arial" panose="020B0604020202020204"/>
+                  <a:sym typeface="Arial" panose="020B0604020202020204"/>
+                </a:defRPr>
+              </a:lvl4pPr>
+              <a:lvl5pPr marR="0" lvl="4" algn="l" rtl="0">
+                <a:lnSpc>
+                  <a:spcPct val="100000"/>
+                </a:lnSpc>
+                <a:spcBef>
+                  <a:spcPts val="0"/>
+                </a:spcBef>
+                <a:spcAft>
+                  <a:spcPts val="0"/>
+                </a:spcAft>
+                <a:buClr>
+                  <a:srgbClr val="000000"/>
+                </a:buClr>
+                <a:buFont typeface="Arial" panose="020B0604020202020204"/>
+                <a:defRPr sz="1400" b="0" i="0" u="none" strike="noStrike" cap="none">
+                  <a:solidFill>
+                    <a:srgbClr val="000000"/>
+                  </a:solidFill>
+                  <a:latin typeface="Arial" panose="020B0604020202020204"/>
+                  <a:ea typeface="Arial" panose="020B0604020202020204"/>
+                  <a:cs typeface="Arial" panose="020B0604020202020204"/>
+                  <a:sym typeface="Arial" panose="020B0604020202020204"/>
+                </a:defRPr>
+              </a:lvl5pPr>
+              <a:lvl6pPr marR="0" lvl="5" algn="l" rtl="0">
+                <a:lnSpc>
+                  <a:spcPct val="100000"/>
+                </a:lnSpc>
+                <a:spcBef>
+                  <a:spcPts val="0"/>
+                </a:spcBef>
+                <a:spcAft>
+                  <a:spcPts val="0"/>
+                </a:spcAft>
+                <a:buClr>
+                  <a:srgbClr val="000000"/>
+                </a:buClr>
+                <a:buFont typeface="Arial" panose="020B0604020202020204"/>
+                <a:defRPr sz="1400" b="0" i="0" u="none" strike="noStrike" cap="none">
+                  <a:solidFill>
+                    <a:srgbClr val="000000"/>
+                  </a:solidFill>
+                  <a:latin typeface="Arial" panose="020B0604020202020204"/>
+                  <a:ea typeface="Arial" panose="020B0604020202020204"/>
+                  <a:cs typeface="Arial" panose="020B0604020202020204"/>
+                  <a:sym typeface="Arial" panose="020B0604020202020204"/>
+                </a:defRPr>
+              </a:lvl6pPr>
+              <a:lvl7pPr marR="0" lvl="6" algn="l" rtl="0">
+                <a:lnSpc>
+                  <a:spcPct val="100000"/>
+                </a:lnSpc>
+                <a:spcBef>
+                  <a:spcPts val="0"/>
+                </a:spcBef>
+                <a:spcAft>
+                  <a:spcPts val="0"/>
+                </a:spcAft>
+                <a:buClr>
+                  <a:srgbClr val="000000"/>
+                </a:buClr>
+                <a:buFont typeface="Arial" panose="020B0604020202020204"/>
+                <a:defRPr sz="1400" b="0" i="0" u="none" strike="noStrike" cap="none">
+                  <a:solidFill>
+                    <a:srgbClr val="000000"/>
+                  </a:solidFill>
+                  <a:latin typeface="Arial" panose="020B0604020202020204"/>
+                  <a:ea typeface="Arial" panose="020B0604020202020204"/>
+                  <a:cs typeface="Arial" panose="020B0604020202020204"/>
+                  <a:sym typeface="Arial" panose="020B0604020202020204"/>
+                </a:defRPr>
+              </a:lvl7pPr>
+              <a:lvl8pPr marR="0" lvl="7" algn="l" rtl="0">
+                <a:lnSpc>
+                  <a:spcPct val="100000"/>
+                </a:lnSpc>
+                <a:spcBef>
+                  <a:spcPts val="0"/>
+                </a:spcBef>
+                <a:spcAft>
+                  <a:spcPts val="0"/>
+                </a:spcAft>
+                <a:buClr>
+                  <a:srgbClr val="000000"/>
+                </a:buClr>
+                <a:buFont typeface="Arial" panose="020B0604020202020204"/>
+                <a:defRPr sz="1400" b="0" i="0" u="none" strike="noStrike" cap="none">
+                  <a:solidFill>
+                    <a:srgbClr val="000000"/>
+                  </a:solidFill>
+                  <a:latin typeface="Arial" panose="020B0604020202020204"/>
+                  <a:ea typeface="Arial" panose="020B0604020202020204"/>
+                  <a:cs typeface="Arial" panose="020B0604020202020204"/>
+                  <a:sym typeface="Arial" panose="020B0604020202020204"/>
+                </a:defRPr>
+              </a:lvl8pPr>
+              <a:lvl9pPr marR="0" lvl="8" algn="l" rtl="0">
+                <a:lnSpc>
+                  <a:spcPct val="100000"/>
+                </a:lnSpc>
+                <a:spcBef>
+                  <a:spcPts val="0"/>
+                </a:spcBef>
+                <a:spcAft>
+                  <a:spcPts val="0"/>
+                </a:spcAft>
+                <a:buClr>
+                  <a:srgbClr val="000000"/>
+                </a:buClr>
+                <a:buFont typeface="Arial" panose="020B0604020202020204"/>
+                <a:defRPr sz="1400" b="0" i="0" u="none" strike="noStrike" cap="none">
+                  <a:solidFill>
+                    <a:srgbClr val="000000"/>
+                  </a:solidFill>
+                  <a:latin typeface="Arial" panose="020B0604020202020204"/>
+                  <a:ea typeface="Arial" panose="020B0604020202020204"/>
+                  <a:cs typeface="Arial" panose="020B0604020202020204"/>
+                  <a:sym typeface="Arial" panose="020B0604020202020204"/>
+                </a:defRPr>
+              </a:lvl9pPr>
+            </a:lstStyle>
+            <a:p>
+              <a:pPr marL="0" lvl="0" indent="0" algn="ctr" rtl="0">
+                <a:spcBef>
+                  <a:spcPts val="0"/>
+                </a:spcBef>
+                <a:spcAft>
+                  <a:spcPts val="0"/>
+                </a:spcAft>
+                <a:buNone/>
+              </a:pPr>
+              <a:endParaRPr sz="1800"/>
+            </a:p>
+          </p:txBody>
+        </p:sp>
+        <p:sp>
+          <p:nvSpPr>
+            <p:cNvPr id="20" name="Google Shape;160;p16">
+              <a:extLst>
+                <a:ext uri="{FF2B5EF4-FFF2-40B4-BE49-F238E27FC236}">
+                  <a16:creationId xmlns:a16="http://schemas.microsoft.com/office/drawing/2014/main" id="{2A44F1C0-705F-63B6-1892-E834A7E81E7A}"/>
                 </a:ext>
               </a:extLst>
             </p:cNvPr>
@@ -5900,29 +4546,3710 @@
           </p:nvSpPr>
           <p:spPr>
             <a:xfrm>
-              <a:off x="7391390" y="5162907"/>
-              <a:ext cx="696464" cy="307777"/>
+              <a:off x="5647974" y="4709676"/>
+              <a:ext cx="233100" cy="356879"/>
             </a:xfrm>
             <a:prstGeom prst="rect">
               <a:avLst/>
             </a:prstGeom>
             <a:noFill/>
+            <a:ln>
+              <a:noFill/>
+            </a:ln>
           </p:spPr>
           <p:txBody>
-            <a:bodyPr wrap="square">
+            <a:bodyPr spcFirstLastPara="1" wrap="square" lIns="91425" tIns="91425" rIns="91425" bIns="91425" anchor="t" anchorCtr="0">
               <a:spAutoFit/>
             </a:bodyPr>
-            <a:lstStyle/>
+            <a:lstStyle>
+              <a:defPPr marR="0" lvl="0" algn="l" rtl="0">
+                <a:lnSpc>
+                  <a:spcPct val="100000"/>
+                </a:lnSpc>
+                <a:spcBef>
+                  <a:spcPts val="0"/>
+                </a:spcBef>
+                <a:spcAft>
+                  <a:spcPts val="0"/>
+                </a:spcAft>
+              </a:defPPr>
+              <a:lvl1pPr marR="0" lvl="0" algn="l" rtl="0">
+                <a:lnSpc>
+                  <a:spcPct val="100000"/>
+                </a:lnSpc>
+                <a:spcBef>
+                  <a:spcPts val="0"/>
+                </a:spcBef>
+                <a:spcAft>
+                  <a:spcPts val="0"/>
+                </a:spcAft>
+                <a:buClr>
+                  <a:srgbClr val="000000"/>
+                </a:buClr>
+                <a:buFont typeface="Arial" panose="020B0604020202020204"/>
+                <a:defRPr sz="1400" b="0" i="0" u="none" strike="noStrike" cap="none">
+                  <a:solidFill>
+                    <a:srgbClr val="000000"/>
+                  </a:solidFill>
+                  <a:latin typeface="Arial" panose="020B0604020202020204"/>
+                  <a:ea typeface="Arial" panose="020B0604020202020204"/>
+                  <a:cs typeface="Arial" panose="020B0604020202020204"/>
+                  <a:sym typeface="Arial" panose="020B0604020202020204"/>
+                </a:defRPr>
+              </a:lvl1pPr>
+              <a:lvl2pPr marR="0" lvl="1" algn="l" rtl="0">
+                <a:lnSpc>
+                  <a:spcPct val="100000"/>
+                </a:lnSpc>
+                <a:spcBef>
+                  <a:spcPts val="0"/>
+                </a:spcBef>
+                <a:spcAft>
+                  <a:spcPts val="0"/>
+                </a:spcAft>
+                <a:buClr>
+                  <a:srgbClr val="000000"/>
+                </a:buClr>
+                <a:buFont typeface="Arial" panose="020B0604020202020204"/>
+                <a:defRPr sz="1400" b="0" i="0" u="none" strike="noStrike" cap="none">
+                  <a:solidFill>
+                    <a:srgbClr val="000000"/>
+                  </a:solidFill>
+                  <a:latin typeface="Arial" panose="020B0604020202020204"/>
+                  <a:ea typeface="Arial" panose="020B0604020202020204"/>
+                  <a:cs typeface="Arial" panose="020B0604020202020204"/>
+                  <a:sym typeface="Arial" panose="020B0604020202020204"/>
+                </a:defRPr>
+              </a:lvl2pPr>
+              <a:lvl3pPr marR="0" lvl="2" algn="l" rtl="0">
+                <a:lnSpc>
+                  <a:spcPct val="100000"/>
+                </a:lnSpc>
+                <a:spcBef>
+                  <a:spcPts val="0"/>
+                </a:spcBef>
+                <a:spcAft>
+                  <a:spcPts val="0"/>
+                </a:spcAft>
+                <a:buClr>
+                  <a:srgbClr val="000000"/>
+                </a:buClr>
+                <a:buFont typeface="Arial" panose="020B0604020202020204"/>
+                <a:defRPr sz="1400" b="0" i="0" u="none" strike="noStrike" cap="none">
+                  <a:solidFill>
+                    <a:srgbClr val="000000"/>
+                  </a:solidFill>
+                  <a:latin typeface="Arial" panose="020B0604020202020204"/>
+                  <a:ea typeface="Arial" panose="020B0604020202020204"/>
+                  <a:cs typeface="Arial" panose="020B0604020202020204"/>
+                  <a:sym typeface="Arial" panose="020B0604020202020204"/>
+                </a:defRPr>
+              </a:lvl3pPr>
+              <a:lvl4pPr marR="0" lvl="3" algn="l" rtl="0">
+                <a:lnSpc>
+                  <a:spcPct val="100000"/>
+                </a:lnSpc>
+                <a:spcBef>
+                  <a:spcPts val="0"/>
+                </a:spcBef>
+                <a:spcAft>
+                  <a:spcPts val="0"/>
+                </a:spcAft>
+                <a:buClr>
+                  <a:srgbClr val="000000"/>
+                </a:buClr>
+                <a:buFont typeface="Arial" panose="020B0604020202020204"/>
+                <a:defRPr sz="1400" b="0" i="0" u="none" strike="noStrike" cap="none">
+                  <a:solidFill>
+                    <a:srgbClr val="000000"/>
+                  </a:solidFill>
+                  <a:latin typeface="Arial" panose="020B0604020202020204"/>
+                  <a:ea typeface="Arial" panose="020B0604020202020204"/>
+                  <a:cs typeface="Arial" panose="020B0604020202020204"/>
+                  <a:sym typeface="Arial" panose="020B0604020202020204"/>
+                </a:defRPr>
+              </a:lvl4pPr>
+              <a:lvl5pPr marR="0" lvl="4" algn="l" rtl="0">
+                <a:lnSpc>
+                  <a:spcPct val="100000"/>
+                </a:lnSpc>
+                <a:spcBef>
+                  <a:spcPts val="0"/>
+                </a:spcBef>
+                <a:spcAft>
+                  <a:spcPts val="0"/>
+                </a:spcAft>
+                <a:buClr>
+                  <a:srgbClr val="000000"/>
+                </a:buClr>
+                <a:buFont typeface="Arial" panose="020B0604020202020204"/>
+                <a:defRPr sz="1400" b="0" i="0" u="none" strike="noStrike" cap="none">
+                  <a:solidFill>
+                    <a:srgbClr val="000000"/>
+                  </a:solidFill>
+                  <a:latin typeface="Arial" panose="020B0604020202020204"/>
+                  <a:ea typeface="Arial" panose="020B0604020202020204"/>
+                  <a:cs typeface="Arial" panose="020B0604020202020204"/>
+                  <a:sym typeface="Arial" panose="020B0604020202020204"/>
+                </a:defRPr>
+              </a:lvl5pPr>
+              <a:lvl6pPr marR="0" lvl="5" algn="l" rtl="0">
+                <a:lnSpc>
+                  <a:spcPct val="100000"/>
+                </a:lnSpc>
+                <a:spcBef>
+                  <a:spcPts val="0"/>
+                </a:spcBef>
+                <a:spcAft>
+                  <a:spcPts val="0"/>
+                </a:spcAft>
+                <a:buClr>
+                  <a:srgbClr val="000000"/>
+                </a:buClr>
+                <a:buFont typeface="Arial" panose="020B0604020202020204"/>
+                <a:defRPr sz="1400" b="0" i="0" u="none" strike="noStrike" cap="none">
+                  <a:solidFill>
+                    <a:srgbClr val="000000"/>
+                  </a:solidFill>
+                  <a:latin typeface="Arial" panose="020B0604020202020204"/>
+                  <a:ea typeface="Arial" panose="020B0604020202020204"/>
+                  <a:cs typeface="Arial" panose="020B0604020202020204"/>
+                  <a:sym typeface="Arial" panose="020B0604020202020204"/>
+                </a:defRPr>
+              </a:lvl6pPr>
+              <a:lvl7pPr marR="0" lvl="6" algn="l" rtl="0">
+                <a:lnSpc>
+                  <a:spcPct val="100000"/>
+                </a:lnSpc>
+                <a:spcBef>
+                  <a:spcPts val="0"/>
+                </a:spcBef>
+                <a:spcAft>
+                  <a:spcPts val="0"/>
+                </a:spcAft>
+                <a:buClr>
+                  <a:srgbClr val="000000"/>
+                </a:buClr>
+                <a:buFont typeface="Arial" panose="020B0604020202020204"/>
+                <a:defRPr sz="1400" b="0" i="0" u="none" strike="noStrike" cap="none">
+                  <a:solidFill>
+                    <a:srgbClr val="000000"/>
+                  </a:solidFill>
+                  <a:latin typeface="Arial" panose="020B0604020202020204"/>
+                  <a:ea typeface="Arial" panose="020B0604020202020204"/>
+                  <a:cs typeface="Arial" panose="020B0604020202020204"/>
+                  <a:sym typeface="Arial" panose="020B0604020202020204"/>
+                </a:defRPr>
+              </a:lvl7pPr>
+              <a:lvl8pPr marR="0" lvl="7" algn="l" rtl="0">
+                <a:lnSpc>
+                  <a:spcPct val="100000"/>
+                </a:lnSpc>
+                <a:spcBef>
+                  <a:spcPts val="0"/>
+                </a:spcBef>
+                <a:spcAft>
+                  <a:spcPts val="0"/>
+                </a:spcAft>
+                <a:buClr>
+                  <a:srgbClr val="000000"/>
+                </a:buClr>
+                <a:buFont typeface="Arial" panose="020B0604020202020204"/>
+                <a:defRPr sz="1400" b="0" i="0" u="none" strike="noStrike" cap="none">
+                  <a:solidFill>
+                    <a:srgbClr val="000000"/>
+                  </a:solidFill>
+                  <a:latin typeface="Arial" panose="020B0604020202020204"/>
+                  <a:ea typeface="Arial" panose="020B0604020202020204"/>
+                  <a:cs typeface="Arial" panose="020B0604020202020204"/>
+                  <a:sym typeface="Arial" panose="020B0604020202020204"/>
+                </a:defRPr>
+              </a:lvl8pPr>
+              <a:lvl9pPr marR="0" lvl="8" algn="l" rtl="0">
+                <a:lnSpc>
+                  <a:spcPct val="100000"/>
+                </a:lnSpc>
+                <a:spcBef>
+                  <a:spcPts val="0"/>
+                </a:spcBef>
+                <a:spcAft>
+                  <a:spcPts val="0"/>
+                </a:spcAft>
+                <a:buClr>
+                  <a:srgbClr val="000000"/>
+                </a:buClr>
+                <a:buFont typeface="Arial" panose="020B0604020202020204"/>
+                <a:defRPr sz="1400" b="0" i="0" u="none" strike="noStrike" cap="none">
+                  <a:solidFill>
+                    <a:srgbClr val="000000"/>
+                  </a:solidFill>
+                  <a:latin typeface="Arial" panose="020B0604020202020204"/>
+                  <a:ea typeface="Arial" panose="020B0604020202020204"/>
+                  <a:cs typeface="Arial" panose="020B0604020202020204"/>
+                  <a:sym typeface="Arial" panose="020B0604020202020204"/>
+                </a:defRPr>
+              </a:lvl9pPr>
+            </a:lstStyle>
             <a:p>
-              <a:pPr algn="ctr"/>
+              <a:pPr marL="0" lvl="0" indent="0" algn="l" rtl="0">
+                <a:spcBef>
+                  <a:spcPts val="0"/>
+                </a:spcBef>
+                <a:spcAft>
+                  <a:spcPts val="0"/>
+                </a:spcAft>
+                <a:buNone/>
+              </a:pPr>
               <a:r>
-                <a:rPr lang="en-US" sz="1400" dirty="0"/>
-                <a:t>2023</a:t>
+                <a:rPr lang="de-AT" sz="1050">
+                  <a:solidFill>
+                    <a:schemeClr val="dk1"/>
+                  </a:solidFill>
+                </a:rPr>
+                <a:t>0</a:t>
+              </a:r>
+              <a:endParaRPr sz="1050">
+                <a:solidFill>
+                  <a:schemeClr val="dk1"/>
+                </a:solidFill>
+              </a:endParaRPr>
+            </a:p>
+          </p:txBody>
+        </p:sp>
+        <p:sp>
+          <p:nvSpPr>
+            <p:cNvPr id="21" name="Google Shape;161;p16">
+              <a:extLst>
+                <a:ext uri="{FF2B5EF4-FFF2-40B4-BE49-F238E27FC236}">
+                  <a16:creationId xmlns:a16="http://schemas.microsoft.com/office/drawing/2014/main" id="{1AC6F036-707E-BE20-2985-A19BC9824237}"/>
+                </a:ext>
+              </a:extLst>
+            </p:cNvPr>
+            <p:cNvSpPr txBox="1"/>
+            <p:nvPr/>
+          </p:nvSpPr>
+          <p:spPr>
+            <a:xfrm>
+              <a:off x="6909875" y="4709675"/>
+              <a:ext cx="591300" cy="356879"/>
+            </a:xfrm>
+            <a:prstGeom prst="rect">
+              <a:avLst/>
+            </a:prstGeom>
+            <a:noFill/>
+            <a:ln>
+              <a:noFill/>
+            </a:ln>
+          </p:spPr>
+          <p:txBody>
+            <a:bodyPr spcFirstLastPara="1" wrap="square" lIns="91425" tIns="91425" rIns="91425" bIns="91425" anchor="t" anchorCtr="0">
+              <a:spAutoFit/>
+            </a:bodyPr>
+            <a:lstStyle>
+              <a:defPPr marR="0" lvl="0" algn="l" rtl="0">
+                <a:lnSpc>
+                  <a:spcPct val="100000"/>
+                </a:lnSpc>
+                <a:spcBef>
+                  <a:spcPts val="0"/>
+                </a:spcBef>
+                <a:spcAft>
+                  <a:spcPts val="0"/>
+                </a:spcAft>
+              </a:defPPr>
+              <a:lvl1pPr marR="0" lvl="0" algn="l" rtl="0">
+                <a:lnSpc>
+                  <a:spcPct val="100000"/>
+                </a:lnSpc>
+                <a:spcBef>
+                  <a:spcPts val="0"/>
+                </a:spcBef>
+                <a:spcAft>
+                  <a:spcPts val="0"/>
+                </a:spcAft>
+                <a:buClr>
+                  <a:srgbClr val="000000"/>
+                </a:buClr>
+                <a:buFont typeface="Arial" panose="020B0604020202020204"/>
+                <a:defRPr sz="1400" b="0" i="0" u="none" strike="noStrike" cap="none">
+                  <a:solidFill>
+                    <a:srgbClr val="000000"/>
+                  </a:solidFill>
+                  <a:latin typeface="Arial" panose="020B0604020202020204"/>
+                  <a:ea typeface="Arial" panose="020B0604020202020204"/>
+                  <a:cs typeface="Arial" panose="020B0604020202020204"/>
+                  <a:sym typeface="Arial" panose="020B0604020202020204"/>
+                </a:defRPr>
+              </a:lvl1pPr>
+              <a:lvl2pPr marR="0" lvl="1" algn="l" rtl="0">
+                <a:lnSpc>
+                  <a:spcPct val="100000"/>
+                </a:lnSpc>
+                <a:spcBef>
+                  <a:spcPts val="0"/>
+                </a:spcBef>
+                <a:spcAft>
+                  <a:spcPts val="0"/>
+                </a:spcAft>
+                <a:buClr>
+                  <a:srgbClr val="000000"/>
+                </a:buClr>
+                <a:buFont typeface="Arial" panose="020B0604020202020204"/>
+                <a:defRPr sz="1400" b="0" i="0" u="none" strike="noStrike" cap="none">
+                  <a:solidFill>
+                    <a:srgbClr val="000000"/>
+                  </a:solidFill>
+                  <a:latin typeface="Arial" panose="020B0604020202020204"/>
+                  <a:ea typeface="Arial" panose="020B0604020202020204"/>
+                  <a:cs typeface="Arial" panose="020B0604020202020204"/>
+                  <a:sym typeface="Arial" panose="020B0604020202020204"/>
+                </a:defRPr>
+              </a:lvl2pPr>
+              <a:lvl3pPr marR="0" lvl="2" algn="l" rtl="0">
+                <a:lnSpc>
+                  <a:spcPct val="100000"/>
+                </a:lnSpc>
+                <a:spcBef>
+                  <a:spcPts val="0"/>
+                </a:spcBef>
+                <a:spcAft>
+                  <a:spcPts val="0"/>
+                </a:spcAft>
+                <a:buClr>
+                  <a:srgbClr val="000000"/>
+                </a:buClr>
+                <a:buFont typeface="Arial" panose="020B0604020202020204"/>
+                <a:defRPr sz="1400" b="0" i="0" u="none" strike="noStrike" cap="none">
+                  <a:solidFill>
+                    <a:srgbClr val="000000"/>
+                  </a:solidFill>
+                  <a:latin typeface="Arial" panose="020B0604020202020204"/>
+                  <a:ea typeface="Arial" panose="020B0604020202020204"/>
+                  <a:cs typeface="Arial" panose="020B0604020202020204"/>
+                  <a:sym typeface="Arial" panose="020B0604020202020204"/>
+                </a:defRPr>
+              </a:lvl3pPr>
+              <a:lvl4pPr marR="0" lvl="3" algn="l" rtl="0">
+                <a:lnSpc>
+                  <a:spcPct val="100000"/>
+                </a:lnSpc>
+                <a:spcBef>
+                  <a:spcPts val="0"/>
+                </a:spcBef>
+                <a:spcAft>
+                  <a:spcPts val="0"/>
+                </a:spcAft>
+                <a:buClr>
+                  <a:srgbClr val="000000"/>
+                </a:buClr>
+                <a:buFont typeface="Arial" panose="020B0604020202020204"/>
+                <a:defRPr sz="1400" b="0" i="0" u="none" strike="noStrike" cap="none">
+                  <a:solidFill>
+                    <a:srgbClr val="000000"/>
+                  </a:solidFill>
+                  <a:latin typeface="Arial" panose="020B0604020202020204"/>
+                  <a:ea typeface="Arial" panose="020B0604020202020204"/>
+                  <a:cs typeface="Arial" panose="020B0604020202020204"/>
+                  <a:sym typeface="Arial" panose="020B0604020202020204"/>
+                </a:defRPr>
+              </a:lvl4pPr>
+              <a:lvl5pPr marR="0" lvl="4" algn="l" rtl="0">
+                <a:lnSpc>
+                  <a:spcPct val="100000"/>
+                </a:lnSpc>
+                <a:spcBef>
+                  <a:spcPts val="0"/>
+                </a:spcBef>
+                <a:spcAft>
+                  <a:spcPts val="0"/>
+                </a:spcAft>
+                <a:buClr>
+                  <a:srgbClr val="000000"/>
+                </a:buClr>
+                <a:buFont typeface="Arial" panose="020B0604020202020204"/>
+                <a:defRPr sz="1400" b="0" i="0" u="none" strike="noStrike" cap="none">
+                  <a:solidFill>
+                    <a:srgbClr val="000000"/>
+                  </a:solidFill>
+                  <a:latin typeface="Arial" panose="020B0604020202020204"/>
+                  <a:ea typeface="Arial" panose="020B0604020202020204"/>
+                  <a:cs typeface="Arial" panose="020B0604020202020204"/>
+                  <a:sym typeface="Arial" panose="020B0604020202020204"/>
+                </a:defRPr>
+              </a:lvl5pPr>
+              <a:lvl6pPr marR="0" lvl="5" algn="l" rtl="0">
+                <a:lnSpc>
+                  <a:spcPct val="100000"/>
+                </a:lnSpc>
+                <a:spcBef>
+                  <a:spcPts val="0"/>
+                </a:spcBef>
+                <a:spcAft>
+                  <a:spcPts val="0"/>
+                </a:spcAft>
+                <a:buClr>
+                  <a:srgbClr val="000000"/>
+                </a:buClr>
+                <a:buFont typeface="Arial" panose="020B0604020202020204"/>
+                <a:defRPr sz="1400" b="0" i="0" u="none" strike="noStrike" cap="none">
+                  <a:solidFill>
+                    <a:srgbClr val="000000"/>
+                  </a:solidFill>
+                  <a:latin typeface="Arial" panose="020B0604020202020204"/>
+                  <a:ea typeface="Arial" panose="020B0604020202020204"/>
+                  <a:cs typeface="Arial" panose="020B0604020202020204"/>
+                  <a:sym typeface="Arial" panose="020B0604020202020204"/>
+                </a:defRPr>
+              </a:lvl6pPr>
+              <a:lvl7pPr marR="0" lvl="6" algn="l" rtl="0">
+                <a:lnSpc>
+                  <a:spcPct val="100000"/>
+                </a:lnSpc>
+                <a:spcBef>
+                  <a:spcPts val="0"/>
+                </a:spcBef>
+                <a:spcAft>
+                  <a:spcPts val="0"/>
+                </a:spcAft>
+                <a:buClr>
+                  <a:srgbClr val="000000"/>
+                </a:buClr>
+                <a:buFont typeface="Arial" panose="020B0604020202020204"/>
+                <a:defRPr sz="1400" b="0" i="0" u="none" strike="noStrike" cap="none">
+                  <a:solidFill>
+                    <a:srgbClr val="000000"/>
+                  </a:solidFill>
+                  <a:latin typeface="Arial" panose="020B0604020202020204"/>
+                  <a:ea typeface="Arial" panose="020B0604020202020204"/>
+                  <a:cs typeface="Arial" panose="020B0604020202020204"/>
+                  <a:sym typeface="Arial" panose="020B0604020202020204"/>
+                </a:defRPr>
+              </a:lvl7pPr>
+              <a:lvl8pPr marR="0" lvl="7" algn="l" rtl="0">
+                <a:lnSpc>
+                  <a:spcPct val="100000"/>
+                </a:lnSpc>
+                <a:spcBef>
+                  <a:spcPts val="0"/>
+                </a:spcBef>
+                <a:spcAft>
+                  <a:spcPts val="0"/>
+                </a:spcAft>
+                <a:buClr>
+                  <a:srgbClr val="000000"/>
+                </a:buClr>
+                <a:buFont typeface="Arial" panose="020B0604020202020204"/>
+                <a:defRPr sz="1400" b="0" i="0" u="none" strike="noStrike" cap="none">
+                  <a:solidFill>
+                    <a:srgbClr val="000000"/>
+                  </a:solidFill>
+                  <a:latin typeface="Arial" panose="020B0604020202020204"/>
+                  <a:ea typeface="Arial" panose="020B0604020202020204"/>
+                  <a:cs typeface="Arial" panose="020B0604020202020204"/>
+                  <a:sym typeface="Arial" panose="020B0604020202020204"/>
+                </a:defRPr>
+              </a:lvl8pPr>
+              <a:lvl9pPr marR="0" lvl="8" algn="l" rtl="0">
+                <a:lnSpc>
+                  <a:spcPct val="100000"/>
+                </a:lnSpc>
+                <a:spcBef>
+                  <a:spcPts val="0"/>
+                </a:spcBef>
+                <a:spcAft>
+                  <a:spcPts val="0"/>
+                </a:spcAft>
+                <a:buClr>
+                  <a:srgbClr val="000000"/>
+                </a:buClr>
+                <a:buFont typeface="Arial" panose="020B0604020202020204"/>
+                <a:defRPr sz="1400" b="0" i="0" u="none" strike="noStrike" cap="none">
+                  <a:solidFill>
+                    <a:srgbClr val="000000"/>
+                  </a:solidFill>
+                  <a:latin typeface="Arial" panose="020B0604020202020204"/>
+                  <a:ea typeface="Arial" panose="020B0604020202020204"/>
+                  <a:cs typeface="Arial" panose="020B0604020202020204"/>
+                  <a:sym typeface="Arial" panose="020B0604020202020204"/>
+                </a:defRPr>
+              </a:lvl9pPr>
+            </a:lstStyle>
+            <a:p>
+              <a:pPr marL="0" lvl="0" indent="0" algn="l" rtl="0">
+                <a:spcBef>
+                  <a:spcPts val="0"/>
+                </a:spcBef>
+                <a:spcAft>
+                  <a:spcPts val="0"/>
+                </a:spcAft>
+                <a:buNone/>
+              </a:pPr>
+              <a:r>
+                <a:rPr lang="de-AT" sz="1050">
+                  <a:solidFill>
+                    <a:schemeClr val="dk1"/>
+                  </a:solidFill>
+                </a:rPr>
+                <a:t>100m</a:t>
+              </a:r>
+              <a:endParaRPr sz="1050">
+                <a:solidFill>
+                  <a:schemeClr val="dk1"/>
+                </a:solidFill>
+              </a:endParaRPr>
+            </a:p>
+          </p:txBody>
+        </p:sp>
+        <p:sp>
+          <p:nvSpPr>
+            <p:cNvPr id="22" name="Google Shape;162;p16">
+              <a:extLst>
+                <a:ext uri="{FF2B5EF4-FFF2-40B4-BE49-F238E27FC236}">
+                  <a16:creationId xmlns:a16="http://schemas.microsoft.com/office/drawing/2014/main" id="{FC8456CD-8F64-C977-7C60-F1174824676B}"/>
+                </a:ext>
+              </a:extLst>
+            </p:cNvPr>
+            <p:cNvSpPr txBox="1"/>
+            <p:nvPr/>
+          </p:nvSpPr>
+          <p:spPr>
+            <a:xfrm>
+              <a:off x="5819375" y="4484375"/>
+              <a:ext cx="1681800" cy="348948"/>
+            </a:xfrm>
+            <a:prstGeom prst="rect">
+              <a:avLst/>
+            </a:prstGeom>
+            <a:noFill/>
+            <a:ln>
+              <a:noFill/>
+            </a:ln>
+          </p:spPr>
+          <p:txBody>
+            <a:bodyPr spcFirstLastPara="1" wrap="square" lIns="91425" tIns="91425" rIns="91425" bIns="91425" anchor="t" anchorCtr="0">
+              <a:spAutoFit/>
+            </a:bodyPr>
+            <a:lstStyle>
+              <a:defPPr marR="0" lvl="0" algn="l" rtl="0">
+                <a:lnSpc>
+                  <a:spcPct val="100000"/>
+                </a:lnSpc>
+                <a:spcBef>
+                  <a:spcPts val="0"/>
+                </a:spcBef>
+                <a:spcAft>
+                  <a:spcPts val="0"/>
+                </a:spcAft>
+              </a:defPPr>
+              <a:lvl1pPr marR="0" lvl="0" algn="l" rtl="0">
+                <a:lnSpc>
+                  <a:spcPct val="100000"/>
+                </a:lnSpc>
+                <a:spcBef>
+                  <a:spcPts val="0"/>
+                </a:spcBef>
+                <a:spcAft>
+                  <a:spcPts val="0"/>
+                </a:spcAft>
+                <a:buClr>
+                  <a:srgbClr val="000000"/>
+                </a:buClr>
+                <a:buFont typeface="Arial" panose="020B0604020202020204"/>
+                <a:defRPr sz="1400" b="0" i="0" u="none" strike="noStrike" cap="none">
+                  <a:solidFill>
+                    <a:srgbClr val="000000"/>
+                  </a:solidFill>
+                  <a:latin typeface="Arial" panose="020B0604020202020204"/>
+                  <a:ea typeface="Arial" panose="020B0604020202020204"/>
+                  <a:cs typeface="Arial" panose="020B0604020202020204"/>
+                  <a:sym typeface="Arial" panose="020B0604020202020204"/>
+                </a:defRPr>
+              </a:lvl1pPr>
+              <a:lvl2pPr marR="0" lvl="1" algn="l" rtl="0">
+                <a:lnSpc>
+                  <a:spcPct val="100000"/>
+                </a:lnSpc>
+                <a:spcBef>
+                  <a:spcPts val="0"/>
+                </a:spcBef>
+                <a:spcAft>
+                  <a:spcPts val="0"/>
+                </a:spcAft>
+                <a:buClr>
+                  <a:srgbClr val="000000"/>
+                </a:buClr>
+                <a:buFont typeface="Arial" panose="020B0604020202020204"/>
+                <a:defRPr sz="1400" b="0" i="0" u="none" strike="noStrike" cap="none">
+                  <a:solidFill>
+                    <a:srgbClr val="000000"/>
+                  </a:solidFill>
+                  <a:latin typeface="Arial" panose="020B0604020202020204"/>
+                  <a:ea typeface="Arial" panose="020B0604020202020204"/>
+                  <a:cs typeface="Arial" panose="020B0604020202020204"/>
+                  <a:sym typeface="Arial" panose="020B0604020202020204"/>
+                </a:defRPr>
+              </a:lvl2pPr>
+              <a:lvl3pPr marR="0" lvl="2" algn="l" rtl="0">
+                <a:lnSpc>
+                  <a:spcPct val="100000"/>
+                </a:lnSpc>
+                <a:spcBef>
+                  <a:spcPts val="0"/>
+                </a:spcBef>
+                <a:spcAft>
+                  <a:spcPts val="0"/>
+                </a:spcAft>
+                <a:buClr>
+                  <a:srgbClr val="000000"/>
+                </a:buClr>
+                <a:buFont typeface="Arial" panose="020B0604020202020204"/>
+                <a:defRPr sz="1400" b="0" i="0" u="none" strike="noStrike" cap="none">
+                  <a:solidFill>
+                    <a:srgbClr val="000000"/>
+                  </a:solidFill>
+                  <a:latin typeface="Arial" panose="020B0604020202020204"/>
+                  <a:ea typeface="Arial" panose="020B0604020202020204"/>
+                  <a:cs typeface="Arial" panose="020B0604020202020204"/>
+                  <a:sym typeface="Arial" panose="020B0604020202020204"/>
+                </a:defRPr>
+              </a:lvl3pPr>
+              <a:lvl4pPr marR="0" lvl="3" algn="l" rtl="0">
+                <a:lnSpc>
+                  <a:spcPct val="100000"/>
+                </a:lnSpc>
+                <a:spcBef>
+                  <a:spcPts val="0"/>
+                </a:spcBef>
+                <a:spcAft>
+                  <a:spcPts val="0"/>
+                </a:spcAft>
+                <a:buClr>
+                  <a:srgbClr val="000000"/>
+                </a:buClr>
+                <a:buFont typeface="Arial" panose="020B0604020202020204"/>
+                <a:defRPr sz="1400" b="0" i="0" u="none" strike="noStrike" cap="none">
+                  <a:solidFill>
+                    <a:srgbClr val="000000"/>
+                  </a:solidFill>
+                  <a:latin typeface="Arial" panose="020B0604020202020204"/>
+                  <a:ea typeface="Arial" panose="020B0604020202020204"/>
+                  <a:cs typeface="Arial" panose="020B0604020202020204"/>
+                  <a:sym typeface="Arial" panose="020B0604020202020204"/>
+                </a:defRPr>
+              </a:lvl4pPr>
+              <a:lvl5pPr marR="0" lvl="4" algn="l" rtl="0">
+                <a:lnSpc>
+                  <a:spcPct val="100000"/>
+                </a:lnSpc>
+                <a:spcBef>
+                  <a:spcPts val="0"/>
+                </a:spcBef>
+                <a:spcAft>
+                  <a:spcPts val="0"/>
+                </a:spcAft>
+                <a:buClr>
+                  <a:srgbClr val="000000"/>
+                </a:buClr>
+                <a:buFont typeface="Arial" panose="020B0604020202020204"/>
+                <a:defRPr sz="1400" b="0" i="0" u="none" strike="noStrike" cap="none">
+                  <a:solidFill>
+                    <a:srgbClr val="000000"/>
+                  </a:solidFill>
+                  <a:latin typeface="Arial" panose="020B0604020202020204"/>
+                  <a:ea typeface="Arial" panose="020B0604020202020204"/>
+                  <a:cs typeface="Arial" panose="020B0604020202020204"/>
+                  <a:sym typeface="Arial" panose="020B0604020202020204"/>
+                </a:defRPr>
+              </a:lvl5pPr>
+              <a:lvl6pPr marR="0" lvl="5" algn="l" rtl="0">
+                <a:lnSpc>
+                  <a:spcPct val="100000"/>
+                </a:lnSpc>
+                <a:spcBef>
+                  <a:spcPts val="0"/>
+                </a:spcBef>
+                <a:spcAft>
+                  <a:spcPts val="0"/>
+                </a:spcAft>
+                <a:buClr>
+                  <a:srgbClr val="000000"/>
+                </a:buClr>
+                <a:buFont typeface="Arial" panose="020B0604020202020204"/>
+                <a:defRPr sz="1400" b="0" i="0" u="none" strike="noStrike" cap="none">
+                  <a:solidFill>
+                    <a:srgbClr val="000000"/>
+                  </a:solidFill>
+                  <a:latin typeface="Arial" panose="020B0604020202020204"/>
+                  <a:ea typeface="Arial" panose="020B0604020202020204"/>
+                  <a:cs typeface="Arial" panose="020B0604020202020204"/>
+                  <a:sym typeface="Arial" panose="020B0604020202020204"/>
+                </a:defRPr>
+              </a:lvl6pPr>
+              <a:lvl7pPr marR="0" lvl="6" algn="l" rtl="0">
+                <a:lnSpc>
+                  <a:spcPct val="100000"/>
+                </a:lnSpc>
+                <a:spcBef>
+                  <a:spcPts val="0"/>
+                </a:spcBef>
+                <a:spcAft>
+                  <a:spcPts val="0"/>
+                </a:spcAft>
+                <a:buClr>
+                  <a:srgbClr val="000000"/>
+                </a:buClr>
+                <a:buFont typeface="Arial" panose="020B0604020202020204"/>
+                <a:defRPr sz="1400" b="0" i="0" u="none" strike="noStrike" cap="none">
+                  <a:solidFill>
+                    <a:srgbClr val="000000"/>
+                  </a:solidFill>
+                  <a:latin typeface="Arial" panose="020B0604020202020204"/>
+                  <a:ea typeface="Arial" panose="020B0604020202020204"/>
+                  <a:cs typeface="Arial" panose="020B0604020202020204"/>
+                  <a:sym typeface="Arial" panose="020B0604020202020204"/>
+                </a:defRPr>
+              </a:lvl7pPr>
+              <a:lvl8pPr marR="0" lvl="7" algn="l" rtl="0">
+                <a:lnSpc>
+                  <a:spcPct val="100000"/>
+                </a:lnSpc>
+                <a:spcBef>
+                  <a:spcPts val="0"/>
+                </a:spcBef>
+                <a:spcAft>
+                  <a:spcPts val="0"/>
+                </a:spcAft>
+                <a:buClr>
+                  <a:srgbClr val="000000"/>
+                </a:buClr>
+                <a:buFont typeface="Arial" panose="020B0604020202020204"/>
+                <a:defRPr sz="1400" b="0" i="0" u="none" strike="noStrike" cap="none">
+                  <a:solidFill>
+                    <a:srgbClr val="000000"/>
+                  </a:solidFill>
+                  <a:latin typeface="Arial" panose="020B0604020202020204"/>
+                  <a:ea typeface="Arial" panose="020B0604020202020204"/>
+                  <a:cs typeface="Arial" panose="020B0604020202020204"/>
+                  <a:sym typeface="Arial" panose="020B0604020202020204"/>
+                </a:defRPr>
+              </a:lvl8pPr>
+              <a:lvl9pPr marR="0" lvl="8" algn="l" rtl="0">
+                <a:lnSpc>
+                  <a:spcPct val="100000"/>
+                </a:lnSpc>
+                <a:spcBef>
+                  <a:spcPts val="0"/>
+                </a:spcBef>
+                <a:spcAft>
+                  <a:spcPts val="0"/>
+                </a:spcAft>
+                <a:buClr>
+                  <a:srgbClr val="000000"/>
+                </a:buClr>
+                <a:buFont typeface="Arial" panose="020B0604020202020204"/>
+                <a:defRPr sz="1400" b="0" i="0" u="none" strike="noStrike" cap="none">
+                  <a:solidFill>
+                    <a:srgbClr val="000000"/>
+                  </a:solidFill>
+                  <a:latin typeface="Arial" panose="020B0604020202020204"/>
+                  <a:ea typeface="Arial" panose="020B0604020202020204"/>
+                  <a:cs typeface="Arial" panose="020B0604020202020204"/>
+                  <a:sym typeface="Arial" panose="020B0604020202020204"/>
+                </a:defRPr>
+              </a:lvl9pPr>
+            </a:lstStyle>
+            <a:p>
+              <a:pPr marL="0" lvl="0" indent="0" algn="l" rtl="0">
+                <a:spcBef>
+                  <a:spcPts val="0"/>
+                </a:spcBef>
+                <a:spcAft>
+                  <a:spcPts val="0"/>
+                </a:spcAft>
+                <a:buNone/>
+              </a:pPr>
+              <a:r>
+                <a:rPr lang="de-AT" sz="1000" b="1">
+                  <a:solidFill>
+                    <a:schemeClr val="dk1"/>
+                  </a:solidFill>
+                </a:rPr>
+                <a:t>Building Height (pixel)</a:t>
+              </a:r>
+              <a:endParaRPr sz="1000" b="1">
+                <a:solidFill>
+                  <a:schemeClr val="dk1"/>
+                </a:solidFill>
+              </a:endParaRPr>
+            </a:p>
+          </p:txBody>
+        </p:sp>
+      </p:grpSp>
+      <p:grpSp>
+        <p:nvGrpSpPr>
+          <p:cNvPr id="12" name="Group 11">
+            <a:extLst>
+              <a:ext uri="{FF2B5EF4-FFF2-40B4-BE49-F238E27FC236}">
+                <a16:creationId xmlns:a16="http://schemas.microsoft.com/office/drawing/2014/main" id="{1535C9F1-4CA4-885B-8432-CC933F4B0C0B}"/>
+              </a:ext>
+            </a:extLst>
+          </p:cNvPr>
+          <p:cNvGrpSpPr/>
+          <p:nvPr/>
+        </p:nvGrpSpPr>
+        <p:grpSpPr>
+          <a:xfrm>
+            <a:off x="4402322" y="3801411"/>
+            <a:ext cx="850384" cy="403718"/>
+            <a:chOff x="9532" y="3515"/>
+            <a:chExt cx="1186" cy="563"/>
+          </a:xfrm>
+        </p:grpSpPr>
+        <p:cxnSp>
+          <p:nvCxnSpPr>
+            <p:cNvPr id="13" name="Straight Arrow Connector 12">
+              <a:extLst>
+                <a:ext uri="{FF2B5EF4-FFF2-40B4-BE49-F238E27FC236}">
+                  <a16:creationId xmlns:a16="http://schemas.microsoft.com/office/drawing/2014/main" id="{7002651F-A00B-4E5F-8A89-20BD15899721}"/>
+                </a:ext>
+              </a:extLst>
+            </p:cNvPr>
+            <p:cNvCxnSpPr/>
+            <p:nvPr/>
+          </p:nvCxnSpPr>
+          <p:spPr>
+            <a:xfrm>
+              <a:off x="9532" y="4006"/>
+              <a:ext cx="1186" cy="0"/>
+            </a:xfrm>
+            <a:prstGeom prst="straightConnector1">
+              <a:avLst/>
+            </a:prstGeom>
+            <a:ln>
+              <a:solidFill>
+                <a:schemeClr val="tx1"/>
+              </a:solidFill>
+              <a:headEnd type="none"/>
+              <a:tailEnd type="none"/>
+            </a:ln>
+          </p:spPr>
+          <p:style>
+            <a:lnRef idx="2">
+              <a:schemeClr val="accent1"/>
+            </a:lnRef>
+            <a:fillRef idx="0">
+              <a:srgbClr val="FFFFFF"/>
+            </a:fillRef>
+            <a:effectRef idx="0">
+              <a:srgbClr val="FFFFFF"/>
+            </a:effectRef>
+            <a:fontRef idx="minor">
+              <a:schemeClr val="tx1"/>
+            </a:fontRef>
+          </p:style>
+        </p:cxnSp>
+        <p:cxnSp>
+          <p:nvCxnSpPr>
+            <p:cNvPr id="14" name="Straight Arrow Connector 13">
+              <a:extLst>
+                <a:ext uri="{FF2B5EF4-FFF2-40B4-BE49-F238E27FC236}">
+                  <a16:creationId xmlns:a16="http://schemas.microsoft.com/office/drawing/2014/main" id="{0B77F212-63FB-51BA-811E-5A58EEF8B3FC}"/>
+                </a:ext>
+              </a:extLst>
+            </p:cNvPr>
+            <p:cNvCxnSpPr/>
+            <p:nvPr/>
+          </p:nvCxnSpPr>
+          <p:spPr>
+            <a:xfrm flipV="1">
+              <a:off x="9551" y="3894"/>
+              <a:ext cx="3" cy="130"/>
+            </a:xfrm>
+            <a:prstGeom prst="straightConnector1">
+              <a:avLst/>
+            </a:prstGeom>
+            <a:ln>
+              <a:solidFill>
+                <a:schemeClr val="tx1"/>
+              </a:solidFill>
+              <a:headEnd type="none"/>
+              <a:tailEnd type="none"/>
+            </a:ln>
+          </p:spPr>
+          <p:style>
+            <a:lnRef idx="2">
+              <a:schemeClr val="accent1"/>
+            </a:lnRef>
+            <a:fillRef idx="0">
+              <a:srgbClr val="FFFFFF"/>
+            </a:fillRef>
+            <a:effectRef idx="0">
+              <a:srgbClr val="FFFFFF"/>
+            </a:effectRef>
+            <a:fontRef idx="minor">
+              <a:schemeClr val="tx1"/>
+            </a:fontRef>
+          </p:style>
+        </p:cxnSp>
+        <p:cxnSp>
+          <p:nvCxnSpPr>
+            <p:cNvPr id="15" name="Straight Arrow Connector 14">
+              <a:extLst>
+                <a:ext uri="{FF2B5EF4-FFF2-40B4-BE49-F238E27FC236}">
+                  <a16:creationId xmlns:a16="http://schemas.microsoft.com/office/drawing/2014/main" id="{3CE63090-3263-99FF-383B-8DB1E9DDAA54}"/>
+                </a:ext>
+              </a:extLst>
+            </p:cNvPr>
+            <p:cNvCxnSpPr/>
+            <p:nvPr/>
+          </p:nvCxnSpPr>
+          <p:spPr>
+            <a:xfrm flipV="1">
+              <a:off x="10706" y="3894"/>
+              <a:ext cx="3" cy="130"/>
+            </a:xfrm>
+            <a:prstGeom prst="straightConnector1">
+              <a:avLst/>
+            </a:prstGeom>
+            <a:ln>
+              <a:solidFill>
+                <a:schemeClr val="tx1"/>
+              </a:solidFill>
+              <a:headEnd type="none"/>
+              <a:tailEnd type="none"/>
+            </a:ln>
+          </p:spPr>
+          <p:style>
+            <a:lnRef idx="2">
+              <a:schemeClr val="accent1"/>
+            </a:lnRef>
+            <a:fillRef idx="0">
+              <a:srgbClr val="FFFFFF"/>
+            </a:fillRef>
+            <a:effectRef idx="0">
+              <a:srgbClr val="FFFFFF"/>
+            </a:effectRef>
+            <a:fontRef idx="minor">
+              <a:schemeClr val="tx1"/>
+            </a:fontRef>
+          </p:style>
+        </p:cxnSp>
+        <p:sp>
+          <p:nvSpPr>
+            <p:cNvPr id="16" name="Google Shape;161;p16">
+              <a:extLst>
+                <a:ext uri="{FF2B5EF4-FFF2-40B4-BE49-F238E27FC236}">
+                  <a16:creationId xmlns:a16="http://schemas.microsoft.com/office/drawing/2014/main" id="{E4BAC250-6F45-21BF-A9F9-15F556E8B35E}"/>
+                </a:ext>
+              </a:extLst>
+            </p:cNvPr>
+            <p:cNvSpPr txBox="1"/>
+            <p:nvPr/>
+          </p:nvSpPr>
+          <p:spPr>
+            <a:xfrm>
+              <a:off x="9677" y="3515"/>
+              <a:ext cx="931" cy="563"/>
+            </a:xfrm>
+            <a:prstGeom prst="rect">
+              <a:avLst/>
+            </a:prstGeom>
+            <a:noFill/>
+            <a:ln>
+              <a:noFill/>
+            </a:ln>
+          </p:spPr>
+          <p:txBody>
+            <a:bodyPr spcFirstLastPara="1" wrap="square" lIns="91425" tIns="91425" rIns="91425" bIns="91425" anchor="t" anchorCtr="0">
+              <a:spAutoFit/>
+            </a:bodyPr>
+            <a:lstStyle>
+              <a:defPPr marR="0" lvl="0" algn="l" rtl="0">
+                <a:lnSpc>
+                  <a:spcPct val="100000"/>
+                </a:lnSpc>
+                <a:spcBef>
+                  <a:spcPts val="0"/>
+                </a:spcBef>
+                <a:spcAft>
+                  <a:spcPts val="0"/>
+                </a:spcAft>
+              </a:defPPr>
+              <a:lvl1pPr marR="0" lvl="0" algn="l" rtl="0">
+                <a:lnSpc>
+                  <a:spcPct val="100000"/>
+                </a:lnSpc>
+                <a:spcBef>
+                  <a:spcPts val="0"/>
+                </a:spcBef>
+                <a:spcAft>
+                  <a:spcPts val="0"/>
+                </a:spcAft>
+                <a:buClr>
+                  <a:srgbClr val="000000"/>
+                </a:buClr>
+                <a:buFont typeface="Arial" panose="020B0604020202020204"/>
+                <a:defRPr sz="1400" b="0" i="0" u="none" strike="noStrike" cap="none">
+                  <a:solidFill>
+                    <a:srgbClr val="000000"/>
+                  </a:solidFill>
+                  <a:latin typeface="Arial" panose="020B0604020202020204"/>
+                  <a:ea typeface="Arial" panose="020B0604020202020204"/>
+                  <a:cs typeface="Arial" panose="020B0604020202020204"/>
+                  <a:sym typeface="Arial" panose="020B0604020202020204"/>
+                </a:defRPr>
+              </a:lvl1pPr>
+              <a:lvl2pPr marR="0" lvl="1" algn="l" rtl="0">
+                <a:lnSpc>
+                  <a:spcPct val="100000"/>
+                </a:lnSpc>
+                <a:spcBef>
+                  <a:spcPts val="0"/>
+                </a:spcBef>
+                <a:spcAft>
+                  <a:spcPts val="0"/>
+                </a:spcAft>
+                <a:buClr>
+                  <a:srgbClr val="000000"/>
+                </a:buClr>
+                <a:buFont typeface="Arial" panose="020B0604020202020204"/>
+                <a:defRPr sz="1400" b="0" i="0" u="none" strike="noStrike" cap="none">
+                  <a:solidFill>
+                    <a:srgbClr val="000000"/>
+                  </a:solidFill>
+                  <a:latin typeface="Arial" panose="020B0604020202020204"/>
+                  <a:ea typeface="Arial" panose="020B0604020202020204"/>
+                  <a:cs typeface="Arial" panose="020B0604020202020204"/>
+                  <a:sym typeface="Arial" panose="020B0604020202020204"/>
+                </a:defRPr>
+              </a:lvl2pPr>
+              <a:lvl3pPr marR="0" lvl="2" algn="l" rtl="0">
+                <a:lnSpc>
+                  <a:spcPct val="100000"/>
+                </a:lnSpc>
+                <a:spcBef>
+                  <a:spcPts val="0"/>
+                </a:spcBef>
+                <a:spcAft>
+                  <a:spcPts val="0"/>
+                </a:spcAft>
+                <a:buClr>
+                  <a:srgbClr val="000000"/>
+                </a:buClr>
+                <a:buFont typeface="Arial" panose="020B0604020202020204"/>
+                <a:defRPr sz="1400" b="0" i="0" u="none" strike="noStrike" cap="none">
+                  <a:solidFill>
+                    <a:srgbClr val="000000"/>
+                  </a:solidFill>
+                  <a:latin typeface="Arial" panose="020B0604020202020204"/>
+                  <a:ea typeface="Arial" panose="020B0604020202020204"/>
+                  <a:cs typeface="Arial" panose="020B0604020202020204"/>
+                  <a:sym typeface="Arial" panose="020B0604020202020204"/>
+                </a:defRPr>
+              </a:lvl3pPr>
+              <a:lvl4pPr marR="0" lvl="3" algn="l" rtl="0">
+                <a:lnSpc>
+                  <a:spcPct val="100000"/>
+                </a:lnSpc>
+                <a:spcBef>
+                  <a:spcPts val="0"/>
+                </a:spcBef>
+                <a:spcAft>
+                  <a:spcPts val="0"/>
+                </a:spcAft>
+                <a:buClr>
+                  <a:srgbClr val="000000"/>
+                </a:buClr>
+                <a:buFont typeface="Arial" panose="020B0604020202020204"/>
+                <a:defRPr sz="1400" b="0" i="0" u="none" strike="noStrike" cap="none">
+                  <a:solidFill>
+                    <a:srgbClr val="000000"/>
+                  </a:solidFill>
+                  <a:latin typeface="Arial" panose="020B0604020202020204"/>
+                  <a:ea typeface="Arial" panose="020B0604020202020204"/>
+                  <a:cs typeface="Arial" panose="020B0604020202020204"/>
+                  <a:sym typeface="Arial" panose="020B0604020202020204"/>
+                </a:defRPr>
+              </a:lvl4pPr>
+              <a:lvl5pPr marR="0" lvl="4" algn="l" rtl="0">
+                <a:lnSpc>
+                  <a:spcPct val="100000"/>
+                </a:lnSpc>
+                <a:spcBef>
+                  <a:spcPts val="0"/>
+                </a:spcBef>
+                <a:spcAft>
+                  <a:spcPts val="0"/>
+                </a:spcAft>
+                <a:buClr>
+                  <a:srgbClr val="000000"/>
+                </a:buClr>
+                <a:buFont typeface="Arial" panose="020B0604020202020204"/>
+                <a:defRPr sz="1400" b="0" i="0" u="none" strike="noStrike" cap="none">
+                  <a:solidFill>
+                    <a:srgbClr val="000000"/>
+                  </a:solidFill>
+                  <a:latin typeface="Arial" panose="020B0604020202020204"/>
+                  <a:ea typeface="Arial" panose="020B0604020202020204"/>
+                  <a:cs typeface="Arial" panose="020B0604020202020204"/>
+                  <a:sym typeface="Arial" panose="020B0604020202020204"/>
+                </a:defRPr>
+              </a:lvl5pPr>
+              <a:lvl6pPr marR="0" lvl="5" algn="l" rtl="0">
+                <a:lnSpc>
+                  <a:spcPct val="100000"/>
+                </a:lnSpc>
+                <a:spcBef>
+                  <a:spcPts val="0"/>
+                </a:spcBef>
+                <a:spcAft>
+                  <a:spcPts val="0"/>
+                </a:spcAft>
+                <a:buClr>
+                  <a:srgbClr val="000000"/>
+                </a:buClr>
+                <a:buFont typeface="Arial" panose="020B0604020202020204"/>
+                <a:defRPr sz="1400" b="0" i="0" u="none" strike="noStrike" cap="none">
+                  <a:solidFill>
+                    <a:srgbClr val="000000"/>
+                  </a:solidFill>
+                  <a:latin typeface="Arial" panose="020B0604020202020204"/>
+                  <a:ea typeface="Arial" panose="020B0604020202020204"/>
+                  <a:cs typeface="Arial" panose="020B0604020202020204"/>
+                  <a:sym typeface="Arial" panose="020B0604020202020204"/>
+                </a:defRPr>
+              </a:lvl6pPr>
+              <a:lvl7pPr marR="0" lvl="6" algn="l" rtl="0">
+                <a:lnSpc>
+                  <a:spcPct val="100000"/>
+                </a:lnSpc>
+                <a:spcBef>
+                  <a:spcPts val="0"/>
+                </a:spcBef>
+                <a:spcAft>
+                  <a:spcPts val="0"/>
+                </a:spcAft>
+                <a:buClr>
+                  <a:srgbClr val="000000"/>
+                </a:buClr>
+                <a:buFont typeface="Arial" panose="020B0604020202020204"/>
+                <a:defRPr sz="1400" b="0" i="0" u="none" strike="noStrike" cap="none">
+                  <a:solidFill>
+                    <a:srgbClr val="000000"/>
+                  </a:solidFill>
+                  <a:latin typeface="Arial" panose="020B0604020202020204"/>
+                  <a:ea typeface="Arial" panose="020B0604020202020204"/>
+                  <a:cs typeface="Arial" panose="020B0604020202020204"/>
+                  <a:sym typeface="Arial" panose="020B0604020202020204"/>
+                </a:defRPr>
+              </a:lvl7pPr>
+              <a:lvl8pPr marR="0" lvl="7" algn="l" rtl="0">
+                <a:lnSpc>
+                  <a:spcPct val="100000"/>
+                </a:lnSpc>
+                <a:spcBef>
+                  <a:spcPts val="0"/>
+                </a:spcBef>
+                <a:spcAft>
+                  <a:spcPts val="0"/>
+                </a:spcAft>
+                <a:buClr>
+                  <a:srgbClr val="000000"/>
+                </a:buClr>
+                <a:buFont typeface="Arial" panose="020B0604020202020204"/>
+                <a:defRPr sz="1400" b="0" i="0" u="none" strike="noStrike" cap="none">
+                  <a:solidFill>
+                    <a:srgbClr val="000000"/>
+                  </a:solidFill>
+                  <a:latin typeface="Arial" panose="020B0604020202020204"/>
+                  <a:ea typeface="Arial" panose="020B0604020202020204"/>
+                  <a:cs typeface="Arial" panose="020B0604020202020204"/>
+                  <a:sym typeface="Arial" panose="020B0604020202020204"/>
+                </a:defRPr>
+              </a:lvl8pPr>
+              <a:lvl9pPr marR="0" lvl="8" algn="l" rtl="0">
+                <a:lnSpc>
+                  <a:spcPct val="100000"/>
+                </a:lnSpc>
+                <a:spcBef>
+                  <a:spcPts val="0"/>
+                </a:spcBef>
+                <a:spcAft>
+                  <a:spcPts val="0"/>
+                </a:spcAft>
+                <a:buClr>
+                  <a:srgbClr val="000000"/>
+                </a:buClr>
+                <a:buFont typeface="Arial" panose="020B0604020202020204"/>
+                <a:defRPr sz="1400" b="0" i="0" u="none" strike="noStrike" cap="none">
+                  <a:solidFill>
+                    <a:srgbClr val="000000"/>
+                  </a:solidFill>
+                  <a:latin typeface="Arial" panose="020B0604020202020204"/>
+                  <a:ea typeface="Arial" panose="020B0604020202020204"/>
+                  <a:cs typeface="Arial" panose="020B0604020202020204"/>
+                  <a:sym typeface="Arial" panose="020B0604020202020204"/>
+                </a:defRPr>
+              </a:lvl9pPr>
+            </a:lstStyle>
+            <a:p>
+              <a:pPr marL="0" lvl="0" indent="0" algn="ctr" rtl="0">
+                <a:spcBef>
+                  <a:spcPts val="0"/>
+                </a:spcBef>
+                <a:spcAft>
+                  <a:spcPts val="0"/>
+                </a:spcAft>
+                <a:buNone/>
+              </a:pPr>
+              <a:r>
+                <a:rPr lang="en-US" altLang="de-AT" sz="1050">
+                  <a:solidFill>
+                    <a:schemeClr val="dk1"/>
+                  </a:solidFill>
+                </a:rPr>
+                <a:t>10 km</a:t>
               </a:r>
             </a:p>
           </p:txBody>
         </p:sp>
       </p:grpSp>
+      <p:sp>
+        <p:nvSpPr>
+          <p:cNvPr id="6" name="TextBox 5">
+            <a:extLst>
+              <a:ext uri="{FF2B5EF4-FFF2-40B4-BE49-F238E27FC236}">
+                <a16:creationId xmlns:a16="http://schemas.microsoft.com/office/drawing/2014/main" id="{A0718CCF-89C6-9A5B-D8D8-35DFE5557012}"/>
+              </a:ext>
+            </a:extLst>
+          </p:cNvPr>
+          <p:cNvSpPr txBox="1"/>
+          <p:nvPr/>
+        </p:nvSpPr>
+        <p:spPr>
+          <a:xfrm>
+            <a:off x="1280803" y="1000306"/>
+            <a:ext cx="811806" cy="358748"/>
+          </a:xfrm>
+          <a:prstGeom prst="rect">
+            <a:avLst/>
+          </a:prstGeom>
+          <a:noFill/>
+        </p:spPr>
+        <p:txBody>
+          <a:bodyPr wrap="square">
+            <a:spAutoFit/>
+          </a:bodyPr>
+          <a:lstStyle/>
+          <a:p>
+            <a:pPr algn="ctr"/>
+            <a:r>
+              <a:rPr lang="en-US" sz="1400" dirty="0"/>
+              <a:t>2016</a:t>
+            </a:r>
+          </a:p>
+        </p:txBody>
+      </p:sp>
+      <p:sp>
+        <p:nvSpPr>
+          <p:cNvPr id="7" name="TextBox 6">
+            <a:extLst>
+              <a:ext uri="{FF2B5EF4-FFF2-40B4-BE49-F238E27FC236}">
+                <a16:creationId xmlns:a16="http://schemas.microsoft.com/office/drawing/2014/main" id="{0B11A087-864B-B7F0-F2EF-92C7834CE9A7}"/>
+              </a:ext>
+            </a:extLst>
+          </p:cNvPr>
+          <p:cNvSpPr txBox="1"/>
+          <p:nvPr/>
+        </p:nvSpPr>
+        <p:spPr>
+          <a:xfrm>
+            <a:off x="3959134" y="972454"/>
+            <a:ext cx="811806" cy="358748"/>
+          </a:xfrm>
+          <a:prstGeom prst="rect">
+            <a:avLst/>
+          </a:prstGeom>
+          <a:noFill/>
+        </p:spPr>
+        <p:txBody>
+          <a:bodyPr wrap="square">
+            <a:spAutoFit/>
+          </a:bodyPr>
+          <a:lstStyle/>
+          <a:p>
+            <a:pPr algn="ctr"/>
+            <a:r>
+              <a:rPr lang="en-US" sz="1400" dirty="0"/>
+              <a:t>2023</a:t>
+            </a:r>
+          </a:p>
+        </p:txBody>
+      </p:sp>
+      <p:sp>
+        <p:nvSpPr>
+          <p:cNvPr id="32" name="Oval 31">
+            <a:extLst>
+              <a:ext uri="{FF2B5EF4-FFF2-40B4-BE49-F238E27FC236}">
+                <a16:creationId xmlns:a16="http://schemas.microsoft.com/office/drawing/2014/main" id="{717C5B53-6F7E-620F-8824-8CA8FD2621A7}"/>
+              </a:ext>
+            </a:extLst>
+          </p:cNvPr>
+          <p:cNvSpPr/>
+          <p:nvPr/>
+        </p:nvSpPr>
+        <p:spPr>
+          <a:xfrm>
+            <a:off x="1467658" y="2205990"/>
+            <a:ext cx="597362" cy="597362"/>
+          </a:xfrm>
+          <a:prstGeom prst="ellipse">
+            <a:avLst/>
+          </a:prstGeom>
+          <a:noFill/>
+          <a:ln w="12700">
+            <a:solidFill>
+              <a:schemeClr val="bg1"/>
+            </a:solidFill>
+          </a:ln>
+        </p:spPr>
+        <p:style>
+          <a:lnRef idx="2">
+            <a:schemeClr val="accent1">
+              <a:shade val="15000"/>
+            </a:schemeClr>
+          </a:lnRef>
+          <a:fillRef idx="1">
+            <a:schemeClr val="accent1"/>
+          </a:fillRef>
+          <a:effectRef idx="0">
+            <a:schemeClr val="accent1"/>
+          </a:effectRef>
+          <a:fontRef idx="minor">
+            <a:schemeClr val="lt1"/>
+          </a:fontRef>
+        </p:style>
+        <p:txBody>
+          <a:bodyPr rtlCol="0" anchor="ctr"/>
+          <a:lstStyle/>
+          <a:p>
+            <a:pPr algn="ctr"/>
+            <a:endParaRPr lang="en-US"/>
+          </a:p>
+        </p:txBody>
+      </p:sp>
+      <p:sp>
+        <p:nvSpPr>
+          <p:cNvPr id="34" name="Oval 33">
+            <a:extLst>
+              <a:ext uri="{FF2B5EF4-FFF2-40B4-BE49-F238E27FC236}">
+                <a16:creationId xmlns:a16="http://schemas.microsoft.com/office/drawing/2014/main" id="{543BC997-0C00-0EB4-3CE1-2D6064A67220}"/>
+              </a:ext>
+            </a:extLst>
+          </p:cNvPr>
+          <p:cNvSpPr/>
+          <p:nvPr/>
+        </p:nvSpPr>
+        <p:spPr>
+          <a:xfrm>
+            <a:off x="1274393" y="2005005"/>
+            <a:ext cx="991560" cy="991560"/>
+          </a:xfrm>
+          <a:prstGeom prst="ellipse">
+            <a:avLst/>
+          </a:prstGeom>
+          <a:noFill/>
+          <a:ln w="12700">
+            <a:solidFill>
+              <a:schemeClr val="bg1"/>
+            </a:solidFill>
+          </a:ln>
+        </p:spPr>
+        <p:style>
+          <a:lnRef idx="2">
+            <a:schemeClr val="accent1">
+              <a:shade val="15000"/>
+            </a:schemeClr>
+          </a:lnRef>
+          <a:fillRef idx="1">
+            <a:schemeClr val="accent1"/>
+          </a:fillRef>
+          <a:effectRef idx="0">
+            <a:schemeClr val="accent1"/>
+          </a:effectRef>
+          <a:fontRef idx="minor">
+            <a:schemeClr val="lt1"/>
+          </a:fontRef>
+        </p:style>
+        <p:txBody>
+          <a:bodyPr rtlCol="0" anchor="ctr"/>
+          <a:lstStyle/>
+          <a:p>
+            <a:pPr algn="ctr"/>
+            <a:endParaRPr lang="en-US"/>
+          </a:p>
+        </p:txBody>
+      </p:sp>
+      <p:sp>
+        <p:nvSpPr>
+          <p:cNvPr id="35" name="Oval 34">
+            <a:extLst>
+              <a:ext uri="{FF2B5EF4-FFF2-40B4-BE49-F238E27FC236}">
+                <a16:creationId xmlns:a16="http://schemas.microsoft.com/office/drawing/2014/main" id="{419523A6-3302-6551-DCCF-F1AD301981AC}"/>
+              </a:ext>
+            </a:extLst>
+          </p:cNvPr>
+          <p:cNvSpPr/>
+          <p:nvPr/>
+        </p:nvSpPr>
+        <p:spPr>
+          <a:xfrm>
+            <a:off x="860002" y="1595378"/>
+            <a:ext cx="1811570" cy="1811570"/>
+          </a:xfrm>
+          <a:prstGeom prst="ellipse">
+            <a:avLst/>
+          </a:prstGeom>
+          <a:noFill/>
+          <a:ln w="12700">
+            <a:solidFill>
+              <a:schemeClr val="bg1"/>
+            </a:solidFill>
+          </a:ln>
+        </p:spPr>
+        <p:style>
+          <a:lnRef idx="2">
+            <a:schemeClr val="accent1">
+              <a:shade val="15000"/>
+            </a:schemeClr>
+          </a:lnRef>
+          <a:fillRef idx="1">
+            <a:schemeClr val="accent1"/>
+          </a:fillRef>
+          <a:effectRef idx="0">
+            <a:schemeClr val="accent1"/>
+          </a:effectRef>
+          <a:fontRef idx="minor">
+            <a:schemeClr val="lt1"/>
+          </a:fontRef>
+        </p:style>
+        <p:txBody>
+          <a:bodyPr rtlCol="0" anchor="ctr"/>
+          <a:lstStyle/>
+          <a:p>
+            <a:pPr algn="ctr"/>
+            <a:endParaRPr lang="en-US"/>
+          </a:p>
+        </p:txBody>
+      </p:sp>
+      <p:sp>
+        <p:nvSpPr>
+          <p:cNvPr id="36" name="Oval 35">
+            <a:extLst>
+              <a:ext uri="{FF2B5EF4-FFF2-40B4-BE49-F238E27FC236}">
+                <a16:creationId xmlns:a16="http://schemas.microsoft.com/office/drawing/2014/main" id="{848DAC31-A088-F3EE-AB48-A6E0FBD6E98D}"/>
+              </a:ext>
+            </a:extLst>
+          </p:cNvPr>
+          <p:cNvSpPr/>
+          <p:nvPr/>
+        </p:nvSpPr>
+        <p:spPr>
+          <a:xfrm>
+            <a:off x="1746991" y="2477925"/>
+            <a:ext cx="46363" cy="45719"/>
+          </a:xfrm>
+          <a:prstGeom prst="ellipse">
+            <a:avLst/>
+          </a:prstGeom>
+          <a:solidFill>
+            <a:srgbClr val="FF0000"/>
+          </a:solidFill>
+          <a:ln>
+            <a:noFill/>
+          </a:ln>
+        </p:spPr>
+        <p:style>
+          <a:lnRef idx="2">
+            <a:schemeClr val="accent1">
+              <a:shade val="15000"/>
+            </a:schemeClr>
+          </a:lnRef>
+          <a:fillRef idx="1">
+            <a:schemeClr val="accent1"/>
+          </a:fillRef>
+          <a:effectRef idx="0">
+            <a:schemeClr val="accent1"/>
+          </a:effectRef>
+          <a:fontRef idx="minor">
+            <a:schemeClr val="lt1"/>
+          </a:fontRef>
+        </p:style>
+        <p:txBody>
+          <a:bodyPr rtlCol="0" anchor="ctr"/>
+          <a:lstStyle/>
+          <a:p>
+            <a:pPr algn="ctr"/>
+            <a:endParaRPr lang="en-US"/>
+          </a:p>
+        </p:txBody>
+      </p:sp>
+      <p:sp>
+        <p:nvSpPr>
+          <p:cNvPr id="37" name="Oval 36">
+            <a:extLst>
+              <a:ext uri="{FF2B5EF4-FFF2-40B4-BE49-F238E27FC236}">
+                <a16:creationId xmlns:a16="http://schemas.microsoft.com/office/drawing/2014/main" id="{63EC0BBF-FC5A-CF7D-849A-455D29EF46C7}"/>
+              </a:ext>
+            </a:extLst>
+          </p:cNvPr>
+          <p:cNvSpPr/>
+          <p:nvPr/>
+        </p:nvSpPr>
+        <p:spPr>
+          <a:xfrm>
+            <a:off x="4048389" y="2152536"/>
+            <a:ext cx="712204" cy="712204"/>
+          </a:xfrm>
+          <a:prstGeom prst="ellipse">
+            <a:avLst/>
+          </a:prstGeom>
+          <a:noFill/>
+          <a:ln w="12700">
+            <a:solidFill>
+              <a:schemeClr val="bg1"/>
+            </a:solidFill>
+          </a:ln>
+        </p:spPr>
+        <p:style>
+          <a:lnRef idx="2">
+            <a:schemeClr val="accent1">
+              <a:shade val="15000"/>
+            </a:schemeClr>
+          </a:lnRef>
+          <a:fillRef idx="1">
+            <a:schemeClr val="accent1"/>
+          </a:fillRef>
+          <a:effectRef idx="0">
+            <a:schemeClr val="accent1"/>
+          </a:effectRef>
+          <a:fontRef idx="minor">
+            <a:schemeClr val="lt1"/>
+          </a:fontRef>
+        </p:style>
+        <p:txBody>
+          <a:bodyPr rtlCol="0" anchor="ctr"/>
+          <a:lstStyle/>
+          <a:p>
+            <a:pPr algn="ctr"/>
+            <a:endParaRPr lang="en-US"/>
+          </a:p>
+        </p:txBody>
+      </p:sp>
+      <p:sp>
+        <p:nvSpPr>
+          <p:cNvPr id="38" name="Oval 37">
+            <a:extLst>
+              <a:ext uri="{FF2B5EF4-FFF2-40B4-BE49-F238E27FC236}">
+                <a16:creationId xmlns:a16="http://schemas.microsoft.com/office/drawing/2014/main" id="{8D38980D-9E05-337F-FCE2-582ACFBF458F}"/>
+              </a:ext>
+            </a:extLst>
+          </p:cNvPr>
+          <p:cNvSpPr/>
+          <p:nvPr/>
+        </p:nvSpPr>
+        <p:spPr>
+          <a:xfrm>
+            <a:off x="3817232" y="1913659"/>
+            <a:ext cx="1182186" cy="1182186"/>
+          </a:xfrm>
+          <a:prstGeom prst="ellipse">
+            <a:avLst/>
+          </a:prstGeom>
+          <a:noFill/>
+          <a:ln w="12700">
+            <a:solidFill>
+              <a:schemeClr val="bg1"/>
+            </a:solidFill>
+          </a:ln>
+        </p:spPr>
+        <p:style>
+          <a:lnRef idx="2">
+            <a:schemeClr val="accent1">
+              <a:shade val="15000"/>
+            </a:schemeClr>
+          </a:lnRef>
+          <a:fillRef idx="1">
+            <a:schemeClr val="accent1"/>
+          </a:fillRef>
+          <a:effectRef idx="0">
+            <a:schemeClr val="accent1"/>
+          </a:effectRef>
+          <a:fontRef idx="minor">
+            <a:schemeClr val="lt1"/>
+          </a:fontRef>
+        </p:style>
+        <p:txBody>
+          <a:bodyPr rtlCol="0" anchor="ctr"/>
+          <a:lstStyle/>
+          <a:p>
+            <a:pPr algn="ctr"/>
+            <a:endParaRPr lang="en-US"/>
+          </a:p>
+        </p:txBody>
+      </p:sp>
+      <p:sp>
+        <p:nvSpPr>
+          <p:cNvPr id="39" name="Oval 38">
+            <a:extLst>
+              <a:ext uri="{FF2B5EF4-FFF2-40B4-BE49-F238E27FC236}">
+                <a16:creationId xmlns:a16="http://schemas.microsoft.com/office/drawing/2014/main" id="{FC767CF5-3F7E-5898-9174-A1D68D84785E}"/>
+              </a:ext>
+            </a:extLst>
+          </p:cNvPr>
+          <p:cNvSpPr/>
+          <p:nvPr/>
+        </p:nvSpPr>
+        <p:spPr>
+          <a:xfrm>
+            <a:off x="3324018" y="1425209"/>
+            <a:ext cx="2159842" cy="2159842"/>
+          </a:xfrm>
+          <a:prstGeom prst="ellipse">
+            <a:avLst/>
+          </a:prstGeom>
+          <a:noFill/>
+          <a:ln w="12700">
+            <a:solidFill>
+              <a:schemeClr val="bg1"/>
+            </a:solidFill>
+          </a:ln>
+        </p:spPr>
+        <p:style>
+          <a:lnRef idx="2">
+            <a:schemeClr val="accent1">
+              <a:shade val="15000"/>
+            </a:schemeClr>
+          </a:lnRef>
+          <a:fillRef idx="1">
+            <a:schemeClr val="accent1"/>
+          </a:fillRef>
+          <a:effectRef idx="0">
+            <a:schemeClr val="accent1"/>
+          </a:effectRef>
+          <a:fontRef idx="minor">
+            <a:schemeClr val="lt1"/>
+          </a:fontRef>
+        </p:style>
+        <p:txBody>
+          <a:bodyPr rtlCol="0" anchor="ctr"/>
+          <a:lstStyle/>
+          <a:p>
+            <a:pPr algn="ctr"/>
+            <a:endParaRPr lang="en-US"/>
+          </a:p>
+        </p:txBody>
+      </p:sp>
+      <p:sp>
+        <p:nvSpPr>
+          <p:cNvPr id="40" name="Oval 39">
+            <a:extLst>
+              <a:ext uri="{FF2B5EF4-FFF2-40B4-BE49-F238E27FC236}">
+                <a16:creationId xmlns:a16="http://schemas.microsoft.com/office/drawing/2014/main" id="{E220E4FA-D09B-D2C9-F7B2-1640991D20B9}"/>
+              </a:ext>
+            </a:extLst>
+          </p:cNvPr>
+          <p:cNvSpPr/>
+          <p:nvPr/>
+        </p:nvSpPr>
+        <p:spPr>
+          <a:xfrm>
+            <a:off x="4392763" y="2492052"/>
+            <a:ext cx="46363" cy="45719"/>
+          </a:xfrm>
+          <a:prstGeom prst="ellipse">
+            <a:avLst/>
+          </a:prstGeom>
+          <a:solidFill>
+            <a:srgbClr val="FF0000"/>
+          </a:solidFill>
+          <a:ln>
+            <a:noFill/>
+          </a:ln>
+        </p:spPr>
+        <p:style>
+          <a:lnRef idx="2">
+            <a:schemeClr val="accent1">
+              <a:shade val="15000"/>
+            </a:schemeClr>
+          </a:lnRef>
+          <a:fillRef idx="1">
+            <a:schemeClr val="accent1"/>
+          </a:fillRef>
+          <a:effectRef idx="0">
+            <a:schemeClr val="accent1"/>
+          </a:effectRef>
+          <a:fontRef idx="minor">
+            <a:schemeClr val="lt1"/>
+          </a:fontRef>
+        </p:style>
+        <p:txBody>
+          <a:bodyPr rtlCol="0" anchor="ctr"/>
+          <a:lstStyle/>
+          <a:p>
+            <a:pPr algn="ctr"/>
+            <a:endParaRPr lang="en-US"/>
+          </a:p>
+        </p:txBody>
+      </p:sp>
+      <p:sp>
+        <p:nvSpPr>
+          <p:cNvPr id="41" name="TextBox 40">
+            <a:extLst>
+              <a:ext uri="{FF2B5EF4-FFF2-40B4-BE49-F238E27FC236}">
+                <a16:creationId xmlns:a16="http://schemas.microsoft.com/office/drawing/2014/main" id="{922561D7-B1FD-1DA6-1675-5142A70F2A98}"/>
+              </a:ext>
+            </a:extLst>
+          </p:cNvPr>
+          <p:cNvSpPr txBox="1"/>
+          <p:nvPr/>
+        </p:nvSpPr>
+        <p:spPr>
+          <a:xfrm>
+            <a:off x="1512081" y="1378417"/>
+            <a:ext cx="497252" cy="276999"/>
+          </a:xfrm>
+          <a:prstGeom prst="rect">
+            <a:avLst/>
+          </a:prstGeom>
+          <a:noFill/>
+        </p:spPr>
+        <p:txBody>
+          <a:bodyPr wrap="none" rtlCol="0">
+            <a:spAutoFit/>
+          </a:bodyPr>
+          <a:lstStyle/>
+          <a:p>
+            <a:r>
+              <a:rPr lang="en-US" sz="1200" dirty="0">
+                <a:solidFill>
+                  <a:schemeClr val="bg1"/>
+                </a:solidFill>
+                <a:latin typeface="Arial" panose="020B0604020202020204" pitchFamily="34" charset="0"/>
+                <a:cs typeface="Arial" panose="020B0604020202020204" pitchFamily="34" charset="0"/>
+              </a:rPr>
+              <a:t>r = 9</a:t>
+            </a:r>
+          </a:p>
+        </p:txBody>
+      </p:sp>
+      <p:sp>
+        <p:nvSpPr>
+          <p:cNvPr id="42" name="TextBox 41">
+            <a:extLst>
+              <a:ext uri="{FF2B5EF4-FFF2-40B4-BE49-F238E27FC236}">
+                <a16:creationId xmlns:a16="http://schemas.microsoft.com/office/drawing/2014/main" id="{88E02713-4BD8-00C1-DC2B-D3B577D6A312}"/>
+              </a:ext>
+            </a:extLst>
+          </p:cNvPr>
+          <p:cNvSpPr txBox="1"/>
+          <p:nvPr/>
+        </p:nvSpPr>
+        <p:spPr>
+          <a:xfrm>
+            <a:off x="1512081" y="1787782"/>
+            <a:ext cx="497252" cy="276999"/>
+          </a:xfrm>
+          <a:prstGeom prst="rect">
+            <a:avLst/>
+          </a:prstGeom>
+          <a:noFill/>
+        </p:spPr>
+        <p:txBody>
+          <a:bodyPr wrap="none" rtlCol="0">
+            <a:spAutoFit/>
+          </a:bodyPr>
+          <a:lstStyle/>
+          <a:p>
+            <a:r>
+              <a:rPr lang="en-US" sz="1200" dirty="0">
+                <a:solidFill>
+                  <a:schemeClr val="bg1"/>
+                </a:solidFill>
+                <a:latin typeface="Arial" panose="020B0604020202020204" pitchFamily="34" charset="0"/>
+                <a:cs typeface="Arial" panose="020B0604020202020204" pitchFamily="34" charset="0"/>
+              </a:rPr>
+              <a:t>r = 5</a:t>
+            </a:r>
+          </a:p>
+        </p:txBody>
+      </p:sp>
+      <p:sp>
+        <p:nvSpPr>
+          <p:cNvPr id="43" name="TextBox 42">
+            <a:extLst>
+              <a:ext uri="{FF2B5EF4-FFF2-40B4-BE49-F238E27FC236}">
+                <a16:creationId xmlns:a16="http://schemas.microsoft.com/office/drawing/2014/main" id="{BBE0EBB4-0222-7243-FC9C-8C48680D8EAD}"/>
+              </a:ext>
+            </a:extLst>
+          </p:cNvPr>
+          <p:cNvSpPr txBox="1"/>
+          <p:nvPr/>
+        </p:nvSpPr>
+        <p:spPr>
+          <a:xfrm>
+            <a:off x="1520327" y="2006378"/>
+            <a:ext cx="497252" cy="276999"/>
+          </a:xfrm>
+          <a:prstGeom prst="rect">
+            <a:avLst/>
+          </a:prstGeom>
+          <a:noFill/>
+        </p:spPr>
+        <p:txBody>
+          <a:bodyPr wrap="none" rtlCol="0">
+            <a:spAutoFit/>
+          </a:bodyPr>
+          <a:lstStyle/>
+          <a:p>
+            <a:r>
+              <a:rPr lang="en-US" sz="1200" dirty="0">
+                <a:solidFill>
+                  <a:schemeClr val="bg1"/>
+                </a:solidFill>
+                <a:latin typeface="Arial" panose="020B0604020202020204" pitchFamily="34" charset="0"/>
+                <a:cs typeface="Arial" panose="020B0604020202020204" pitchFamily="34" charset="0"/>
+              </a:rPr>
+              <a:t>r = 3</a:t>
+            </a:r>
+          </a:p>
+        </p:txBody>
+      </p:sp>
+      <p:pic>
+        <p:nvPicPr>
+          <p:cNvPr id="47" name="Picture 46">
+            <a:extLst>
+              <a:ext uri="{FF2B5EF4-FFF2-40B4-BE49-F238E27FC236}">
+                <a16:creationId xmlns:a16="http://schemas.microsoft.com/office/drawing/2014/main" id="{F0F4096D-917E-3986-3120-252F590A0BB5}"/>
+              </a:ext>
+            </a:extLst>
+          </p:cNvPr>
+          <p:cNvPicPr>
+            <a:picLocks noChangeAspect="1"/>
+          </p:cNvPicPr>
+          <p:nvPr/>
+        </p:nvPicPr>
+        <p:blipFill>
+          <a:blip r:embed="rId4"/>
+          <a:stretch>
+            <a:fillRect/>
+          </a:stretch>
+        </p:blipFill>
+        <p:spPr>
+          <a:xfrm>
+            <a:off x="5861031" y="701351"/>
+            <a:ext cx="5610225" cy="2752725"/>
+          </a:xfrm>
+          <a:prstGeom prst="rect">
+            <a:avLst/>
+          </a:prstGeom>
+        </p:spPr>
+      </p:pic>
+      <mc:AlternateContent xmlns:mc="http://schemas.openxmlformats.org/markup-compatibility/2006">
+        <mc:Choice xmlns:a14="http://schemas.microsoft.com/office/drawing/2010/main" Requires="a14">
+          <p:graphicFrame>
+            <p:nvGraphicFramePr>
+              <p:cNvPr id="48" name="Table 47">
+                <a:extLst>
+                  <a:ext uri="{FF2B5EF4-FFF2-40B4-BE49-F238E27FC236}">
+                    <a16:creationId xmlns:a16="http://schemas.microsoft.com/office/drawing/2014/main" id="{BFF03B53-8874-C1A9-EE0C-D12FA8B9DAF4}"/>
+                  </a:ext>
+                </a:extLst>
+              </p:cNvPr>
+              <p:cNvGraphicFramePr>
+                <a:graphicFrameLocks noGrp="1"/>
+              </p:cNvGraphicFramePr>
+              <p:nvPr>
+                <p:extLst>
+                  <p:ext uri="{D42A27DB-BD31-4B8C-83A1-F6EECF244321}">
+                    <p14:modId xmlns:p14="http://schemas.microsoft.com/office/powerpoint/2010/main" val="2623190717"/>
+                  </p:ext>
+                </p:extLst>
+              </p:nvPr>
+            </p:nvGraphicFramePr>
+            <p:xfrm>
+              <a:off x="5985794" y="3596755"/>
+              <a:ext cx="5551976" cy="914400"/>
+            </p:xfrm>
+            <a:graphic>
+              <a:graphicData uri="http://schemas.openxmlformats.org/drawingml/2006/table">
+                <a:tbl>
+                  <a:tblPr firstRow="1" bandRow="1">
+                    <a:tableStyleId>{073A0DAA-6AF3-43AB-8588-CEC1D06C72B9}</a:tableStyleId>
+                  </a:tblPr>
+                  <a:tblGrid>
+                    <a:gridCol w="693997">
+                      <a:extLst>
+                        <a:ext uri="{9D8B030D-6E8A-4147-A177-3AD203B41FA5}">
+                          <a16:colId xmlns:a16="http://schemas.microsoft.com/office/drawing/2014/main" val="4114666085"/>
+                        </a:ext>
+                      </a:extLst>
+                    </a:gridCol>
+                    <a:gridCol w="693997">
+                      <a:extLst>
+                        <a:ext uri="{9D8B030D-6E8A-4147-A177-3AD203B41FA5}">
+                          <a16:colId xmlns:a16="http://schemas.microsoft.com/office/drawing/2014/main" val="3185546286"/>
+                        </a:ext>
+                      </a:extLst>
+                    </a:gridCol>
+                    <a:gridCol w="693997">
+                      <a:extLst>
+                        <a:ext uri="{9D8B030D-6E8A-4147-A177-3AD203B41FA5}">
+                          <a16:colId xmlns:a16="http://schemas.microsoft.com/office/drawing/2014/main" val="3891605319"/>
+                        </a:ext>
+                      </a:extLst>
+                    </a:gridCol>
+                    <a:gridCol w="693997">
+                      <a:extLst>
+                        <a:ext uri="{9D8B030D-6E8A-4147-A177-3AD203B41FA5}">
+                          <a16:colId xmlns:a16="http://schemas.microsoft.com/office/drawing/2014/main" val="948251390"/>
+                        </a:ext>
+                      </a:extLst>
+                    </a:gridCol>
+                    <a:gridCol w="693997">
+                      <a:extLst>
+                        <a:ext uri="{9D8B030D-6E8A-4147-A177-3AD203B41FA5}">
+                          <a16:colId xmlns:a16="http://schemas.microsoft.com/office/drawing/2014/main" val="2777085471"/>
+                        </a:ext>
+                      </a:extLst>
+                    </a:gridCol>
+                    <a:gridCol w="693997">
+                      <a:extLst>
+                        <a:ext uri="{9D8B030D-6E8A-4147-A177-3AD203B41FA5}">
+                          <a16:colId xmlns:a16="http://schemas.microsoft.com/office/drawing/2014/main" val="3153909739"/>
+                        </a:ext>
+                      </a:extLst>
+                    </a:gridCol>
+                    <a:gridCol w="693997">
+                      <a:extLst>
+                        <a:ext uri="{9D8B030D-6E8A-4147-A177-3AD203B41FA5}">
+                          <a16:colId xmlns:a16="http://schemas.microsoft.com/office/drawing/2014/main" val="2071051192"/>
+                        </a:ext>
+                      </a:extLst>
+                    </a:gridCol>
+                    <a:gridCol w="693997">
+                      <a:extLst>
+                        <a:ext uri="{9D8B030D-6E8A-4147-A177-3AD203B41FA5}">
+                          <a16:colId xmlns:a16="http://schemas.microsoft.com/office/drawing/2014/main" val="4148276775"/>
+                        </a:ext>
+                      </a:extLst>
+                    </a:gridCol>
+                  </a:tblGrid>
+                  <a:tr h="0">
+                    <a:tc>
+                      <a:txBody>
+                        <a:bodyPr/>
+                        <a:lstStyle/>
+                        <a:p>
+                          <a:endParaRPr lang="en-US" sz="1400"/>
+                        </a:p>
+                      </a:txBody>
+                      <a:tcPr/>
+                    </a:tc>
+                    <a:tc>
+                      <a:txBody>
+                        <a:bodyPr/>
+                        <a:lstStyle/>
+                        <a:p>
+                          <a14:m>
+                            <m:oMathPara xmlns:m="http://schemas.openxmlformats.org/officeDocument/2006/math">
+                              <m:oMathParaPr>
+                                <m:jc m:val="centerGroup"/>
+                              </m:oMathParaPr>
+                              <m:oMath xmlns:m="http://schemas.openxmlformats.org/officeDocument/2006/math">
+                                <m:sSub>
+                                  <m:sSubPr>
+                                    <m:ctrlPr>
+                                      <a:rPr lang="en-US" sz="1400" dirty="0" smtClean="0"/>
+                                    </m:ctrlPr>
+                                  </m:sSubPr>
+                                  <m:e>
+                                    <m:r>
+                                      <a:rPr lang="en-US" sz="1400" b="1" dirty="0" smtClean="0"/>
+                                      <m:t>𝒑</m:t>
+                                    </m:r>
+                                  </m:e>
+                                  <m:sub>
+                                    <m:r>
+                                      <a:rPr lang="en-US" sz="1400" dirty="0" smtClean="0"/>
+                                      <m:t>𝜶</m:t>
+                                    </m:r>
+                                  </m:sub>
+                                </m:sSub>
+                              </m:oMath>
+                            </m:oMathPara>
+                          </a14:m>
+                        </a:p>
+                      </a:txBody>
+                      <a:tcPr/>
+                    </a:tc>
+                    <a:tc>
+                      <a:txBody>
+                        <a:bodyPr/>
+                        <a:lstStyle/>
+                        <a:p>
+                          <a14:m>
+                            <m:oMathPara xmlns:m="http://schemas.openxmlformats.org/officeDocument/2006/math">
+                              <m:oMathParaPr>
+                                <m:jc m:val="centerGroup"/>
+                              </m:oMathParaPr>
+                              <m:oMath xmlns:m="http://schemas.openxmlformats.org/officeDocument/2006/math">
+                                <m:r>
+                                  <a:rPr lang="en-US" sz="1400" dirty="0" smtClean="0"/>
+                                  <m:t>𝜷</m:t>
+                                </m:r>
+                              </m:oMath>
+                            </m:oMathPara>
+                          </a14:m>
+                          <a:endParaRPr lang="en-US" sz="1400" dirty="0">
+                            <a:latin typeface="Arial" panose="020B0604020202020204" pitchFamily="34" charset="0"/>
+                            <a:cs typeface="Arial" panose="020B0604020202020204" pitchFamily="34" charset="0"/>
+                          </a:endParaRPr>
+                        </a:p>
+                      </a:txBody>
+                      <a:tcPr/>
+                    </a:tc>
+                    <a:tc>
+                      <a:txBody>
+                        <a:bodyPr/>
+                        <a:lstStyle/>
+                        <a:p>
+                          <a14:m>
+                            <m:oMathPara xmlns:m="http://schemas.openxmlformats.org/officeDocument/2006/math">
+                              <m:oMathParaPr>
+                                <m:jc m:val="centerGroup"/>
+                              </m:oMathParaPr>
+                              <m:oMath xmlns:m="http://schemas.openxmlformats.org/officeDocument/2006/math">
+                                <m:sSub>
+                                  <m:sSubPr>
+                                    <m:ctrlPr>
+                                      <a:rPr lang="en-US" sz="1400" dirty="0" smtClean="0"/>
+                                    </m:ctrlPr>
+                                  </m:sSubPr>
+                                  <m:e>
+                                    <m:r>
+                                      <a:rPr lang="en-US" sz="1400" b="1" dirty="0" smtClean="0"/>
+                                      <m:t>𝒑</m:t>
+                                    </m:r>
+                                  </m:e>
+                                  <m:sub>
+                                    <m:r>
+                                      <a:rPr lang="en-US" sz="1400" b="1" dirty="0" smtClean="0"/>
+                                      <m:t>𝜿</m:t>
+                                    </m:r>
+                                  </m:sub>
+                                </m:sSub>
+                              </m:oMath>
+                            </m:oMathPara>
+                          </a14:m>
+                          <a:endParaRPr lang="en-US" sz="1400" dirty="0">
+                            <a:latin typeface="Arial" panose="020B0604020202020204" pitchFamily="34" charset="0"/>
+                            <a:cs typeface="Arial" panose="020B0604020202020204" pitchFamily="34" charset="0"/>
+                          </a:endParaRPr>
+                        </a:p>
+                      </a:txBody>
+                      <a:tcPr/>
+                    </a:tc>
+                    <a:tc>
+                      <a:txBody>
+                        <a:bodyPr/>
+                        <a:lstStyle/>
+                        <a:p>
+                          <a:pPr marL="0" marR="0" lvl="0" indent="0" algn="l" defTabSz="914400" rtl="0" eaLnBrk="1" fontAlgn="auto" latinLnBrk="0" hangingPunct="1">
+                            <a:lnSpc>
+                              <a:spcPct val="100000"/>
+                            </a:lnSpc>
+                            <a:spcBef>
+                              <a:spcPts val="0"/>
+                            </a:spcBef>
+                            <a:spcAft>
+                              <a:spcPts val="0"/>
+                            </a:spcAft>
+                            <a:buClrTx/>
+                            <a:buSzTx/>
+                            <a:buFontTx/>
+                            <a:buNone/>
+                            <a:tabLst/>
+                            <a:defRPr/>
+                          </a:pPr>
+                          <a14:m>
+                            <m:oMathPara xmlns:m="http://schemas.openxmlformats.org/officeDocument/2006/math">
+                              <m:oMathParaPr>
+                                <m:jc m:val="centerGroup"/>
+                              </m:oMathParaPr>
+                              <m:oMath xmlns:m="http://schemas.openxmlformats.org/officeDocument/2006/math">
+                                <m:r>
+                                  <a:rPr lang="en-US" sz="1400" smtClean="0"/>
+                                  <m:t>𝜹</m:t>
+                                </m:r>
+                              </m:oMath>
+                            </m:oMathPara>
+                          </a14:m>
+                          <a:endParaRPr lang="en-US" sz="1400" dirty="0">
+                            <a:latin typeface="Arial" panose="020B0604020202020204" pitchFamily="34" charset="0"/>
+                            <a:cs typeface="Arial" panose="020B0604020202020204" pitchFamily="34" charset="0"/>
+                          </a:endParaRPr>
+                        </a:p>
+                      </a:txBody>
+                      <a:tcPr/>
+                    </a:tc>
+                    <a:tc>
+                      <a:txBody>
+                        <a:bodyPr/>
+                        <a:lstStyle/>
+                        <a:p>
+                          <a14:m>
+                            <m:oMathPara xmlns:m="http://schemas.openxmlformats.org/officeDocument/2006/math">
+                              <m:oMathParaPr>
+                                <m:jc m:val="centerGroup"/>
+                              </m:oMathParaPr>
+                              <m:oMath xmlns:m="http://schemas.openxmlformats.org/officeDocument/2006/math">
+                                <m:r>
+                                  <a:rPr lang="en-US" altLang="zh-CN" sz="1400" dirty="0" smtClean="0"/>
+                                  <m:t>𝐴</m:t>
+                                </m:r>
+                              </m:oMath>
+                            </m:oMathPara>
+                          </a14:m>
+                        </a:p>
+                      </a:txBody>
+                      <a:tcPr/>
+                    </a:tc>
+                    <a:tc>
+                      <a:txBody>
+                        <a:bodyPr/>
+                        <a:lstStyle/>
+                        <a:p>
+                          <a14:m>
+                            <m:oMathPara xmlns:m="http://schemas.openxmlformats.org/officeDocument/2006/math">
+                              <m:oMathParaPr>
+                                <m:jc m:val="centerGroup"/>
+                              </m:oMathParaPr>
+                              <m:oMath xmlns:m="http://schemas.openxmlformats.org/officeDocument/2006/math">
+                                <m:r>
+                                  <a:rPr lang="en-US" altLang="zh-CN" sz="1400" dirty="0" smtClean="0"/>
+                                  <m:t>𝐵</m:t>
+                                </m:r>
+                              </m:oMath>
+                            </m:oMathPara>
+                          </a14:m>
+                        </a:p>
+                      </a:txBody>
+                      <a:tcPr/>
+                    </a:tc>
+                    <a:tc>
+                      <a:txBody>
+                        <a:bodyPr/>
+                        <a:lstStyle/>
+                        <a:p>
+                          <a14:m>
+                            <m:oMathPara xmlns:m="http://schemas.openxmlformats.org/officeDocument/2006/math">
+                              <m:oMathParaPr>
+                                <m:jc m:val="centerGroup"/>
+                              </m:oMathParaPr>
+                              <m:oMath xmlns:m="http://schemas.openxmlformats.org/officeDocument/2006/math">
+                                <m:r>
+                                  <a:rPr lang="en-US" altLang="zh-CN" sz="1400" dirty="0" smtClean="0"/>
+                                  <m:t>𝐶</m:t>
+                                </m:r>
+                              </m:oMath>
+                            </m:oMathPara>
+                          </a14:m>
+                          <a:endParaRPr lang="en-US" sz="1400" dirty="0">
+                            <a:latin typeface="Arial" panose="020B0604020202020204" pitchFamily="34" charset="0"/>
+                            <a:cs typeface="Arial" panose="020B0604020202020204" pitchFamily="34" charset="0"/>
+                          </a:endParaRPr>
+                        </a:p>
+                      </a:txBody>
+                      <a:tcPr/>
+                    </a:tc>
+                    <a:extLst>
+                      <a:ext uri="{0D108BD9-81ED-4DB2-BD59-A6C34878D82A}">
+                        <a16:rowId xmlns:a16="http://schemas.microsoft.com/office/drawing/2014/main" val="3353394126"/>
+                      </a:ext>
+                    </a:extLst>
+                  </a:tr>
+                  <a:tr h="0">
+                    <a:tc>
+                      <a:txBody>
+                        <a:bodyPr/>
+                        <a:lstStyle/>
+                        <a:p>
+                          <a:r>
+                            <a:rPr lang="en-US" sz="1400" dirty="0"/>
+                            <a:t>2016</a:t>
+                          </a:r>
+                          <a:endParaRPr lang="en-US" sz="1400" dirty="0">
+                            <a:latin typeface="Arial" panose="020B0604020202020204" pitchFamily="34" charset="0"/>
+                            <a:cs typeface="Arial" panose="020B0604020202020204" pitchFamily="34" charset="0"/>
+                          </a:endParaRPr>
+                        </a:p>
+                      </a:txBody>
+                      <a:tcPr/>
+                    </a:tc>
+                    <a:tc>
+                      <a:txBody>
+                        <a:bodyPr/>
+                        <a:lstStyle/>
+                        <a:p>
+                          <a:r>
+                            <a:rPr lang="en-US" sz="1400" dirty="0"/>
+                            <a:t>39.2%</a:t>
+                          </a:r>
+                          <a:endParaRPr lang="en-US" sz="1400" dirty="0">
+                            <a:latin typeface="Arial" panose="020B0604020202020204" pitchFamily="34" charset="0"/>
+                            <a:cs typeface="Arial" panose="020B0604020202020204" pitchFamily="34" charset="0"/>
+                          </a:endParaRPr>
+                        </a:p>
+                      </a:txBody>
+                      <a:tcPr/>
+                    </a:tc>
+                    <a:tc>
+                      <a:txBody>
+                        <a:bodyPr/>
+                        <a:lstStyle/>
+                        <a:p>
+                          <a:r>
+                            <a:rPr lang="en-US" sz="1400" dirty="0"/>
+                            <a:t>0.387</a:t>
+                          </a:r>
+                          <a:endParaRPr lang="en-US" sz="1400" dirty="0">
+                            <a:latin typeface="Arial" panose="020B0604020202020204" pitchFamily="34" charset="0"/>
+                            <a:cs typeface="Arial" panose="020B0604020202020204" pitchFamily="34" charset="0"/>
+                          </a:endParaRPr>
+                        </a:p>
+                      </a:txBody>
+                      <a:tcPr/>
+                    </a:tc>
+                    <a:tc>
+                      <a:txBody>
+                        <a:bodyPr/>
+                        <a:lstStyle/>
+                        <a:p>
+                          <a:r>
+                            <a:rPr lang="en-US" sz="1400" dirty="0"/>
+                            <a:t>33.9%</a:t>
+                          </a:r>
+                          <a:endParaRPr lang="en-US" sz="1400" dirty="0">
+                            <a:latin typeface="Arial" panose="020B0604020202020204" pitchFamily="34" charset="0"/>
+                            <a:cs typeface="Arial" panose="020B0604020202020204" pitchFamily="34" charset="0"/>
+                          </a:endParaRPr>
+                        </a:p>
+                      </a:txBody>
+                      <a:tcPr/>
+                    </a:tc>
+                    <a:tc>
+                      <a:txBody>
+                        <a:bodyPr/>
+                        <a:lstStyle/>
+                        <a:p>
+                          <a:r>
+                            <a:rPr lang="en-US" sz="1400" dirty="0"/>
+                            <a:t>0.136</a:t>
+                          </a:r>
+                          <a:endParaRPr lang="en-US" sz="1400" dirty="0">
+                            <a:latin typeface="Arial" panose="020B0604020202020204" pitchFamily="34" charset="0"/>
+                            <a:cs typeface="Arial" panose="020B0604020202020204" pitchFamily="34" charset="0"/>
+                          </a:endParaRPr>
+                        </a:p>
+                      </a:txBody>
+                      <a:tcPr/>
+                    </a:tc>
+                    <a:tc>
+                      <a:txBody>
+                        <a:bodyPr/>
+                        <a:lstStyle/>
+                        <a:p>
+                          <a:r>
+                            <a:rPr lang="en-US" sz="1400" dirty="0"/>
+                            <a:t>6.10</a:t>
+                          </a:r>
+                          <a:endParaRPr lang="en-US" sz="1400" dirty="0">
+                            <a:latin typeface="Arial" panose="020B0604020202020204" pitchFamily="34" charset="0"/>
+                            <a:cs typeface="Arial" panose="020B0604020202020204" pitchFamily="34" charset="0"/>
+                          </a:endParaRPr>
+                        </a:p>
+                      </a:txBody>
+                      <a:tcPr/>
+                    </a:tc>
+                    <a:tc>
+                      <a:txBody>
+                        <a:bodyPr/>
+                        <a:lstStyle/>
+                        <a:p>
+                          <a:r>
+                            <a:rPr lang="en-US" sz="1400" dirty="0"/>
+                            <a:t>-0.053</a:t>
+                          </a:r>
+                          <a:endParaRPr lang="en-US" sz="1400" dirty="0">
+                            <a:latin typeface="Arial" panose="020B0604020202020204" pitchFamily="34" charset="0"/>
+                            <a:cs typeface="Arial" panose="020B0604020202020204" pitchFamily="34" charset="0"/>
+                          </a:endParaRPr>
+                        </a:p>
+                      </a:txBody>
+                      <a:tcPr/>
+                    </a:tc>
+                    <a:tc>
+                      <a:txBody>
+                        <a:bodyPr/>
+                        <a:lstStyle/>
+                        <a:p>
+                          <a:r>
+                            <a:rPr lang="en-US" sz="1400" dirty="0"/>
+                            <a:t>0.002</a:t>
+                          </a:r>
+                          <a:endParaRPr lang="en-US" sz="1400" dirty="0">
+                            <a:latin typeface="Arial" panose="020B0604020202020204" pitchFamily="34" charset="0"/>
+                            <a:cs typeface="Arial" panose="020B0604020202020204" pitchFamily="34" charset="0"/>
+                          </a:endParaRPr>
+                        </a:p>
+                      </a:txBody>
+                      <a:tcPr/>
+                    </a:tc>
+                    <a:extLst>
+                      <a:ext uri="{0D108BD9-81ED-4DB2-BD59-A6C34878D82A}">
+                        <a16:rowId xmlns:a16="http://schemas.microsoft.com/office/drawing/2014/main" val="3635250859"/>
+                      </a:ext>
+                    </a:extLst>
+                  </a:tr>
+                  <a:tr h="0">
+                    <a:tc>
+                      <a:txBody>
+                        <a:bodyPr/>
+                        <a:lstStyle/>
+                        <a:p>
+                          <a:r>
+                            <a:rPr lang="en-US" sz="1400" dirty="0"/>
+                            <a:t>2023</a:t>
+                          </a:r>
+                          <a:endParaRPr lang="en-US" sz="1400" dirty="0">
+                            <a:latin typeface="Arial" panose="020B0604020202020204" pitchFamily="34" charset="0"/>
+                            <a:cs typeface="Arial" panose="020B0604020202020204" pitchFamily="34" charset="0"/>
+                          </a:endParaRPr>
+                        </a:p>
+                      </a:txBody>
+                      <a:tcPr/>
+                    </a:tc>
+                    <a:tc>
+                      <a:txBody>
+                        <a:bodyPr/>
+                        <a:lstStyle/>
+                        <a:p>
+                          <a:r>
+                            <a:rPr lang="en-US" sz="1400" dirty="0"/>
+                            <a:t>35.4%</a:t>
+                          </a:r>
+                          <a:endParaRPr lang="en-US" sz="1400" dirty="0">
+                            <a:latin typeface="Arial" panose="020B0604020202020204" pitchFamily="34" charset="0"/>
+                            <a:cs typeface="Arial" panose="020B0604020202020204" pitchFamily="34" charset="0"/>
+                          </a:endParaRPr>
+                        </a:p>
+                      </a:txBody>
+                      <a:tcPr/>
+                    </a:tc>
+                    <a:tc>
+                      <a:txBody>
+                        <a:bodyPr/>
+                        <a:lstStyle/>
+                        <a:p>
+                          <a:r>
+                            <a:rPr lang="en-US" sz="1400" dirty="0"/>
+                            <a:t>0.447</a:t>
+                          </a:r>
+                          <a:endParaRPr lang="en-US" sz="1400" dirty="0">
+                            <a:latin typeface="Arial" panose="020B0604020202020204" pitchFamily="34" charset="0"/>
+                            <a:cs typeface="Arial" panose="020B0604020202020204" pitchFamily="34" charset="0"/>
+                          </a:endParaRPr>
+                        </a:p>
+                      </a:txBody>
+                      <a:tcPr/>
+                    </a:tc>
+                    <a:tc>
+                      <a:txBody>
+                        <a:bodyPr/>
+                        <a:lstStyle/>
+                        <a:p>
+                          <a:r>
+                            <a:rPr lang="en-US" sz="1400" dirty="0"/>
+                            <a:t>35.4%</a:t>
+                          </a:r>
+                          <a:endParaRPr lang="en-US" sz="1400" dirty="0">
+                            <a:latin typeface="Arial" panose="020B0604020202020204" pitchFamily="34" charset="0"/>
+                            <a:cs typeface="Arial" panose="020B0604020202020204" pitchFamily="34" charset="0"/>
+                          </a:endParaRPr>
+                        </a:p>
+                      </a:txBody>
+                      <a:tcPr/>
+                    </a:tc>
+                    <a:tc>
+                      <a:txBody>
+                        <a:bodyPr/>
+                        <a:lstStyle/>
+                        <a:p>
+                          <a:r>
+                            <a:rPr lang="en-US" sz="1400" dirty="0"/>
+                            <a:t>0.162</a:t>
+                          </a:r>
+                          <a:endParaRPr lang="en-US" sz="1400" dirty="0">
+                            <a:latin typeface="Arial" panose="020B0604020202020204" pitchFamily="34" charset="0"/>
+                            <a:cs typeface="Arial" panose="020B0604020202020204" pitchFamily="34" charset="0"/>
+                          </a:endParaRPr>
+                        </a:p>
+                      </a:txBody>
+                      <a:tcPr/>
+                    </a:tc>
+                    <a:tc>
+                      <a:txBody>
+                        <a:bodyPr/>
+                        <a:lstStyle/>
+                        <a:p>
+                          <a:r>
+                            <a:rPr lang="en-US" sz="1400" dirty="0"/>
+                            <a:t>6.42</a:t>
+                          </a:r>
+                          <a:endParaRPr lang="en-US" sz="1400" dirty="0">
+                            <a:latin typeface="Arial" panose="020B0604020202020204" pitchFamily="34" charset="0"/>
+                            <a:cs typeface="Arial" panose="020B0604020202020204" pitchFamily="34" charset="0"/>
+                          </a:endParaRPr>
+                        </a:p>
+                      </a:txBody>
+                      <a:tcPr/>
+                    </a:tc>
+                    <a:tc>
+                      <a:txBody>
+                        <a:bodyPr/>
+                        <a:lstStyle/>
+                        <a:p>
+                          <a:r>
+                            <a:rPr lang="en-US" sz="1400" dirty="0"/>
+                            <a:t>-0.066</a:t>
+                          </a:r>
+                          <a:endParaRPr lang="en-US" sz="1400" dirty="0">
+                            <a:latin typeface="Arial" panose="020B0604020202020204" pitchFamily="34" charset="0"/>
+                            <a:cs typeface="Arial" panose="020B0604020202020204" pitchFamily="34" charset="0"/>
+                          </a:endParaRPr>
+                        </a:p>
+                      </a:txBody>
+                      <a:tcPr/>
+                    </a:tc>
+                    <a:tc>
+                      <a:txBody>
+                        <a:bodyPr/>
+                        <a:lstStyle/>
+                        <a:p>
+                          <a:r>
+                            <a:rPr lang="en-US" sz="1400" dirty="0"/>
+                            <a:t>0.003</a:t>
+                          </a:r>
+                          <a:endParaRPr lang="en-US" sz="1400" dirty="0">
+                            <a:latin typeface="Arial" panose="020B0604020202020204" pitchFamily="34" charset="0"/>
+                            <a:cs typeface="Arial" panose="020B0604020202020204" pitchFamily="34" charset="0"/>
+                          </a:endParaRPr>
+                        </a:p>
+                      </a:txBody>
+                      <a:tcPr/>
+                    </a:tc>
+                    <a:extLst>
+                      <a:ext uri="{0D108BD9-81ED-4DB2-BD59-A6C34878D82A}">
+                        <a16:rowId xmlns:a16="http://schemas.microsoft.com/office/drawing/2014/main" val="2541752953"/>
+                      </a:ext>
+                    </a:extLst>
+                  </a:tr>
+                </a:tbl>
+              </a:graphicData>
+            </a:graphic>
+          </p:graphicFrame>
+        </mc:Choice>
+        <mc:Fallback>
+          <p:graphicFrame>
+            <p:nvGraphicFramePr>
+              <p:cNvPr id="48" name="Table 47">
+                <a:extLst>
+                  <a:ext uri="{FF2B5EF4-FFF2-40B4-BE49-F238E27FC236}">
+                    <a16:creationId xmlns:a16="http://schemas.microsoft.com/office/drawing/2014/main" id="{BFF03B53-8874-C1A9-EE0C-D12FA8B9DAF4}"/>
+                  </a:ext>
+                </a:extLst>
+              </p:cNvPr>
+              <p:cNvGraphicFramePr>
+                <a:graphicFrameLocks noGrp="1"/>
+              </p:cNvGraphicFramePr>
+              <p:nvPr>
+                <p:extLst>
+                  <p:ext uri="{D42A27DB-BD31-4B8C-83A1-F6EECF244321}">
+                    <p14:modId xmlns:p14="http://schemas.microsoft.com/office/powerpoint/2010/main" val="2623190717"/>
+                  </p:ext>
+                </p:extLst>
+              </p:nvPr>
+            </p:nvGraphicFramePr>
+            <p:xfrm>
+              <a:off x="5985794" y="3596755"/>
+              <a:ext cx="5551976" cy="914400"/>
+            </p:xfrm>
+            <a:graphic>
+              <a:graphicData uri="http://schemas.openxmlformats.org/drawingml/2006/table">
+                <a:tbl>
+                  <a:tblPr firstRow="1" bandRow="1">
+                    <a:tableStyleId>{073A0DAA-6AF3-43AB-8588-CEC1D06C72B9}</a:tableStyleId>
+                  </a:tblPr>
+                  <a:tblGrid>
+                    <a:gridCol w="693997">
+                      <a:extLst>
+                        <a:ext uri="{9D8B030D-6E8A-4147-A177-3AD203B41FA5}">
+                          <a16:colId xmlns:a16="http://schemas.microsoft.com/office/drawing/2014/main" val="4114666085"/>
+                        </a:ext>
+                      </a:extLst>
+                    </a:gridCol>
+                    <a:gridCol w="693997">
+                      <a:extLst>
+                        <a:ext uri="{9D8B030D-6E8A-4147-A177-3AD203B41FA5}">
+                          <a16:colId xmlns:a16="http://schemas.microsoft.com/office/drawing/2014/main" val="3185546286"/>
+                        </a:ext>
+                      </a:extLst>
+                    </a:gridCol>
+                    <a:gridCol w="693997">
+                      <a:extLst>
+                        <a:ext uri="{9D8B030D-6E8A-4147-A177-3AD203B41FA5}">
+                          <a16:colId xmlns:a16="http://schemas.microsoft.com/office/drawing/2014/main" val="3891605319"/>
+                        </a:ext>
+                      </a:extLst>
+                    </a:gridCol>
+                    <a:gridCol w="693997">
+                      <a:extLst>
+                        <a:ext uri="{9D8B030D-6E8A-4147-A177-3AD203B41FA5}">
+                          <a16:colId xmlns:a16="http://schemas.microsoft.com/office/drawing/2014/main" val="948251390"/>
+                        </a:ext>
+                      </a:extLst>
+                    </a:gridCol>
+                    <a:gridCol w="693997">
+                      <a:extLst>
+                        <a:ext uri="{9D8B030D-6E8A-4147-A177-3AD203B41FA5}">
+                          <a16:colId xmlns:a16="http://schemas.microsoft.com/office/drawing/2014/main" val="2777085471"/>
+                        </a:ext>
+                      </a:extLst>
+                    </a:gridCol>
+                    <a:gridCol w="693997">
+                      <a:extLst>
+                        <a:ext uri="{9D8B030D-6E8A-4147-A177-3AD203B41FA5}">
+                          <a16:colId xmlns:a16="http://schemas.microsoft.com/office/drawing/2014/main" val="3153909739"/>
+                        </a:ext>
+                      </a:extLst>
+                    </a:gridCol>
+                    <a:gridCol w="693997">
+                      <a:extLst>
+                        <a:ext uri="{9D8B030D-6E8A-4147-A177-3AD203B41FA5}">
+                          <a16:colId xmlns:a16="http://schemas.microsoft.com/office/drawing/2014/main" val="2071051192"/>
+                        </a:ext>
+                      </a:extLst>
+                    </a:gridCol>
+                    <a:gridCol w="693997">
+                      <a:extLst>
+                        <a:ext uri="{9D8B030D-6E8A-4147-A177-3AD203B41FA5}">
+                          <a16:colId xmlns:a16="http://schemas.microsoft.com/office/drawing/2014/main" val="4148276775"/>
+                        </a:ext>
+                      </a:extLst>
+                    </a:gridCol>
+                  </a:tblGrid>
+                  <a:tr h="304800">
+                    <a:tc>
+                      <a:txBody>
+                        <a:bodyPr/>
+                        <a:lstStyle/>
+                        <a:p>
+                          <a:endParaRPr lang="en-US" sz="1400"/>
+                        </a:p>
+                      </a:txBody>
+                      <a:tcPr/>
+                    </a:tc>
+                    <a:tc>
+                      <a:txBody>
+                        <a:bodyPr/>
+                        <a:lstStyle/>
+                        <a:p>
+                          <a:endParaRPr lang="en-US"/>
+                        </a:p>
+                      </a:txBody>
+                      <a:tcPr>
+                        <a:blipFill>
+                          <a:blip r:embed="rId5"/>
+                          <a:stretch>
+                            <a:fillRect l="-100877" t="-6000" r="-603509" b="-222000"/>
+                          </a:stretch>
+                        </a:blipFill>
+                      </a:tcPr>
+                    </a:tc>
+                    <a:tc>
+                      <a:txBody>
+                        <a:bodyPr/>
+                        <a:lstStyle/>
+                        <a:p>
+                          <a:endParaRPr lang="en-US"/>
+                        </a:p>
+                      </a:txBody>
+                      <a:tcPr>
+                        <a:blipFill>
+                          <a:blip r:embed="rId5"/>
+                          <a:stretch>
+                            <a:fillRect l="-200877" t="-6000" r="-503509" b="-222000"/>
+                          </a:stretch>
+                        </a:blipFill>
+                      </a:tcPr>
+                    </a:tc>
+                    <a:tc>
+                      <a:txBody>
+                        <a:bodyPr/>
+                        <a:lstStyle/>
+                        <a:p>
+                          <a:endParaRPr lang="en-US"/>
+                        </a:p>
+                      </a:txBody>
+                      <a:tcPr>
+                        <a:blipFill>
+                          <a:blip r:embed="rId5"/>
+                          <a:stretch>
+                            <a:fillRect l="-300877" t="-6000" r="-403509" b="-222000"/>
+                          </a:stretch>
+                        </a:blipFill>
+                      </a:tcPr>
+                    </a:tc>
+                    <a:tc>
+                      <a:txBody>
+                        <a:bodyPr/>
+                        <a:lstStyle/>
+                        <a:p>
+                          <a:endParaRPr lang="en-US"/>
+                        </a:p>
+                      </a:txBody>
+                      <a:tcPr>
+                        <a:blipFill>
+                          <a:blip r:embed="rId5"/>
+                          <a:stretch>
+                            <a:fillRect l="-400877" t="-6000" r="-303509" b="-222000"/>
+                          </a:stretch>
+                        </a:blipFill>
+                      </a:tcPr>
+                    </a:tc>
+                    <a:tc>
+                      <a:txBody>
+                        <a:bodyPr/>
+                        <a:lstStyle/>
+                        <a:p>
+                          <a:endParaRPr lang="en-US"/>
+                        </a:p>
+                      </a:txBody>
+                      <a:tcPr>
+                        <a:blipFill>
+                          <a:blip r:embed="rId5"/>
+                          <a:stretch>
+                            <a:fillRect l="-500877" t="-6000" r="-203509" b="-222000"/>
+                          </a:stretch>
+                        </a:blipFill>
+                      </a:tcPr>
+                    </a:tc>
+                    <a:tc>
+                      <a:txBody>
+                        <a:bodyPr/>
+                        <a:lstStyle/>
+                        <a:p>
+                          <a:endParaRPr lang="en-US"/>
+                        </a:p>
+                      </a:txBody>
+                      <a:tcPr>
+                        <a:blipFill>
+                          <a:blip r:embed="rId5"/>
+                          <a:stretch>
+                            <a:fillRect l="-600877" t="-6000" r="-103509" b="-222000"/>
+                          </a:stretch>
+                        </a:blipFill>
+                      </a:tcPr>
+                    </a:tc>
+                    <a:tc>
+                      <a:txBody>
+                        <a:bodyPr/>
+                        <a:lstStyle/>
+                        <a:p>
+                          <a:endParaRPr lang="en-US"/>
+                        </a:p>
+                      </a:txBody>
+                      <a:tcPr>
+                        <a:blipFill>
+                          <a:blip r:embed="rId5"/>
+                          <a:stretch>
+                            <a:fillRect l="-700877" t="-6000" r="-3509" b="-222000"/>
+                          </a:stretch>
+                        </a:blipFill>
+                      </a:tcPr>
+                    </a:tc>
+                    <a:extLst>
+                      <a:ext uri="{0D108BD9-81ED-4DB2-BD59-A6C34878D82A}">
+                        <a16:rowId xmlns:a16="http://schemas.microsoft.com/office/drawing/2014/main" val="3353394126"/>
+                      </a:ext>
+                    </a:extLst>
+                  </a:tr>
+                  <a:tr h="304800">
+                    <a:tc>
+                      <a:txBody>
+                        <a:bodyPr/>
+                        <a:lstStyle/>
+                        <a:p>
+                          <a:r>
+                            <a:rPr lang="en-US" sz="1400" dirty="0"/>
+                            <a:t>2016</a:t>
+                          </a:r>
+                          <a:endParaRPr lang="en-US" sz="1400" dirty="0">
+                            <a:latin typeface="Arial" panose="020B0604020202020204" pitchFamily="34" charset="0"/>
+                            <a:cs typeface="Arial" panose="020B0604020202020204" pitchFamily="34" charset="0"/>
+                          </a:endParaRPr>
+                        </a:p>
+                      </a:txBody>
+                      <a:tcPr/>
+                    </a:tc>
+                    <a:tc>
+                      <a:txBody>
+                        <a:bodyPr/>
+                        <a:lstStyle/>
+                        <a:p>
+                          <a:r>
+                            <a:rPr lang="en-US" sz="1400" dirty="0"/>
+                            <a:t>39.2%</a:t>
+                          </a:r>
+                          <a:endParaRPr lang="en-US" sz="1400" dirty="0">
+                            <a:latin typeface="Arial" panose="020B0604020202020204" pitchFamily="34" charset="0"/>
+                            <a:cs typeface="Arial" panose="020B0604020202020204" pitchFamily="34" charset="0"/>
+                          </a:endParaRPr>
+                        </a:p>
+                      </a:txBody>
+                      <a:tcPr/>
+                    </a:tc>
+                    <a:tc>
+                      <a:txBody>
+                        <a:bodyPr/>
+                        <a:lstStyle/>
+                        <a:p>
+                          <a:r>
+                            <a:rPr lang="en-US" sz="1400" dirty="0"/>
+                            <a:t>0.387</a:t>
+                          </a:r>
+                          <a:endParaRPr lang="en-US" sz="1400" dirty="0">
+                            <a:latin typeface="Arial" panose="020B0604020202020204" pitchFamily="34" charset="0"/>
+                            <a:cs typeface="Arial" panose="020B0604020202020204" pitchFamily="34" charset="0"/>
+                          </a:endParaRPr>
+                        </a:p>
+                      </a:txBody>
+                      <a:tcPr/>
+                    </a:tc>
+                    <a:tc>
+                      <a:txBody>
+                        <a:bodyPr/>
+                        <a:lstStyle/>
+                        <a:p>
+                          <a:r>
+                            <a:rPr lang="en-US" sz="1400" dirty="0"/>
+                            <a:t>33.9%</a:t>
+                          </a:r>
+                          <a:endParaRPr lang="en-US" sz="1400" dirty="0">
+                            <a:latin typeface="Arial" panose="020B0604020202020204" pitchFamily="34" charset="0"/>
+                            <a:cs typeface="Arial" panose="020B0604020202020204" pitchFamily="34" charset="0"/>
+                          </a:endParaRPr>
+                        </a:p>
+                      </a:txBody>
+                      <a:tcPr/>
+                    </a:tc>
+                    <a:tc>
+                      <a:txBody>
+                        <a:bodyPr/>
+                        <a:lstStyle/>
+                        <a:p>
+                          <a:r>
+                            <a:rPr lang="en-US" sz="1400" dirty="0"/>
+                            <a:t>0.136</a:t>
+                          </a:r>
+                          <a:endParaRPr lang="en-US" sz="1400" dirty="0">
+                            <a:latin typeface="Arial" panose="020B0604020202020204" pitchFamily="34" charset="0"/>
+                            <a:cs typeface="Arial" panose="020B0604020202020204" pitchFamily="34" charset="0"/>
+                          </a:endParaRPr>
+                        </a:p>
+                      </a:txBody>
+                      <a:tcPr/>
+                    </a:tc>
+                    <a:tc>
+                      <a:txBody>
+                        <a:bodyPr/>
+                        <a:lstStyle/>
+                        <a:p>
+                          <a:r>
+                            <a:rPr lang="en-US" sz="1400" dirty="0"/>
+                            <a:t>6.10</a:t>
+                          </a:r>
+                          <a:endParaRPr lang="en-US" sz="1400" dirty="0">
+                            <a:latin typeface="Arial" panose="020B0604020202020204" pitchFamily="34" charset="0"/>
+                            <a:cs typeface="Arial" panose="020B0604020202020204" pitchFamily="34" charset="0"/>
+                          </a:endParaRPr>
+                        </a:p>
+                      </a:txBody>
+                      <a:tcPr/>
+                    </a:tc>
+                    <a:tc>
+                      <a:txBody>
+                        <a:bodyPr/>
+                        <a:lstStyle/>
+                        <a:p>
+                          <a:r>
+                            <a:rPr lang="en-US" sz="1400" dirty="0"/>
+                            <a:t>-0.053</a:t>
+                          </a:r>
+                          <a:endParaRPr lang="en-US" sz="1400" dirty="0">
+                            <a:latin typeface="Arial" panose="020B0604020202020204" pitchFamily="34" charset="0"/>
+                            <a:cs typeface="Arial" panose="020B0604020202020204" pitchFamily="34" charset="0"/>
+                          </a:endParaRPr>
+                        </a:p>
+                      </a:txBody>
+                      <a:tcPr/>
+                    </a:tc>
+                    <a:tc>
+                      <a:txBody>
+                        <a:bodyPr/>
+                        <a:lstStyle/>
+                        <a:p>
+                          <a:r>
+                            <a:rPr lang="en-US" sz="1400" dirty="0"/>
+                            <a:t>0.002</a:t>
+                          </a:r>
+                          <a:endParaRPr lang="en-US" sz="1400" dirty="0">
+                            <a:latin typeface="Arial" panose="020B0604020202020204" pitchFamily="34" charset="0"/>
+                            <a:cs typeface="Arial" panose="020B0604020202020204" pitchFamily="34" charset="0"/>
+                          </a:endParaRPr>
+                        </a:p>
+                      </a:txBody>
+                      <a:tcPr/>
+                    </a:tc>
+                    <a:extLst>
+                      <a:ext uri="{0D108BD9-81ED-4DB2-BD59-A6C34878D82A}">
+                        <a16:rowId xmlns:a16="http://schemas.microsoft.com/office/drawing/2014/main" val="3635250859"/>
+                      </a:ext>
+                    </a:extLst>
+                  </a:tr>
+                  <a:tr h="304800">
+                    <a:tc>
+                      <a:txBody>
+                        <a:bodyPr/>
+                        <a:lstStyle/>
+                        <a:p>
+                          <a:r>
+                            <a:rPr lang="en-US" sz="1400" dirty="0"/>
+                            <a:t>2023</a:t>
+                          </a:r>
+                          <a:endParaRPr lang="en-US" sz="1400" dirty="0">
+                            <a:latin typeface="Arial" panose="020B0604020202020204" pitchFamily="34" charset="0"/>
+                            <a:cs typeface="Arial" panose="020B0604020202020204" pitchFamily="34" charset="0"/>
+                          </a:endParaRPr>
+                        </a:p>
+                      </a:txBody>
+                      <a:tcPr/>
+                    </a:tc>
+                    <a:tc>
+                      <a:txBody>
+                        <a:bodyPr/>
+                        <a:lstStyle/>
+                        <a:p>
+                          <a:r>
+                            <a:rPr lang="en-US" sz="1400" dirty="0"/>
+                            <a:t>35.4%</a:t>
+                          </a:r>
+                          <a:endParaRPr lang="en-US" sz="1400" dirty="0">
+                            <a:latin typeface="Arial" panose="020B0604020202020204" pitchFamily="34" charset="0"/>
+                            <a:cs typeface="Arial" panose="020B0604020202020204" pitchFamily="34" charset="0"/>
+                          </a:endParaRPr>
+                        </a:p>
+                      </a:txBody>
+                      <a:tcPr/>
+                    </a:tc>
+                    <a:tc>
+                      <a:txBody>
+                        <a:bodyPr/>
+                        <a:lstStyle/>
+                        <a:p>
+                          <a:r>
+                            <a:rPr lang="en-US" sz="1400" dirty="0"/>
+                            <a:t>0.447</a:t>
+                          </a:r>
+                          <a:endParaRPr lang="en-US" sz="1400" dirty="0">
+                            <a:latin typeface="Arial" panose="020B0604020202020204" pitchFamily="34" charset="0"/>
+                            <a:cs typeface="Arial" panose="020B0604020202020204" pitchFamily="34" charset="0"/>
+                          </a:endParaRPr>
+                        </a:p>
+                      </a:txBody>
+                      <a:tcPr/>
+                    </a:tc>
+                    <a:tc>
+                      <a:txBody>
+                        <a:bodyPr/>
+                        <a:lstStyle/>
+                        <a:p>
+                          <a:r>
+                            <a:rPr lang="en-US" sz="1400" dirty="0"/>
+                            <a:t>35.4%</a:t>
+                          </a:r>
+                          <a:endParaRPr lang="en-US" sz="1400" dirty="0">
+                            <a:latin typeface="Arial" panose="020B0604020202020204" pitchFamily="34" charset="0"/>
+                            <a:cs typeface="Arial" panose="020B0604020202020204" pitchFamily="34" charset="0"/>
+                          </a:endParaRPr>
+                        </a:p>
+                      </a:txBody>
+                      <a:tcPr/>
+                    </a:tc>
+                    <a:tc>
+                      <a:txBody>
+                        <a:bodyPr/>
+                        <a:lstStyle/>
+                        <a:p>
+                          <a:r>
+                            <a:rPr lang="en-US" sz="1400" dirty="0"/>
+                            <a:t>0.162</a:t>
+                          </a:r>
+                          <a:endParaRPr lang="en-US" sz="1400" dirty="0">
+                            <a:latin typeface="Arial" panose="020B0604020202020204" pitchFamily="34" charset="0"/>
+                            <a:cs typeface="Arial" panose="020B0604020202020204" pitchFamily="34" charset="0"/>
+                          </a:endParaRPr>
+                        </a:p>
+                      </a:txBody>
+                      <a:tcPr/>
+                    </a:tc>
+                    <a:tc>
+                      <a:txBody>
+                        <a:bodyPr/>
+                        <a:lstStyle/>
+                        <a:p>
+                          <a:r>
+                            <a:rPr lang="en-US" sz="1400" dirty="0"/>
+                            <a:t>6.42</a:t>
+                          </a:r>
+                          <a:endParaRPr lang="en-US" sz="1400" dirty="0">
+                            <a:latin typeface="Arial" panose="020B0604020202020204" pitchFamily="34" charset="0"/>
+                            <a:cs typeface="Arial" panose="020B0604020202020204" pitchFamily="34" charset="0"/>
+                          </a:endParaRPr>
+                        </a:p>
+                      </a:txBody>
+                      <a:tcPr/>
+                    </a:tc>
+                    <a:tc>
+                      <a:txBody>
+                        <a:bodyPr/>
+                        <a:lstStyle/>
+                        <a:p>
+                          <a:r>
+                            <a:rPr lang="en-US" sz="1400" dirty="0"/>
+                            <a:t>-0.066</a:t>
+                          </a:r>
+                          <a:endParaRPr lang="en-US" sz="1400" dirty="0">
+                            <a:latin typeface="Arial" panose="020B0604020202020204" pitchFamily="34" charset="0"/>
+                            <a:cs typeface="Arial" panose="020B0604020202020204" pitchFamily="34" charset="0"/>
+                          </a:endParaRPr>
+                        </a:p>
+                      </a:txBody>
+                      <a:tcPr/>
+                    </a:tc>
+                    <a:tc>
+                      <a:txBody>
+                        <a:bodyPr/>
+                        <a:lstStyle/>
+                        <a:p>
+                          <a:r>
+                            <a:rPr lang="en-US" sz="1400" dirty="0"/>
+                            <a:t>0.003</a:t>
+                          </a:r>
+                          <a:endParaRPr lang="en-US" sz="1400" dirty="0">
+                            <a:latin typeface="Arial" panose="020B0604020202020204" pitchFamily="34" charset="0"/>
+                            <a:cs typeface="Arial" panose="020B0604020202020204" pitchFamily="34" charset="0"/>
+                          </a:endParaRPr>
+                        </a:p>
+                      </a:txBody>
+                      <a:tcPr/>
+                    </a:tc>
+                    <a:extLst>
+                      <a:ext uri="{0D108BD9-81ED-4DB2-BD59-A6C34878D82A}">
+                        <a16:rowId xmlns:a16="http://schemas.microsoft.com/office/drawing/2014/main" val="2541752953"/>
+                      </a:ext>
+                    </a:extLst>
+                  </a:tr>
+                </a:tbl>
+              </a:graphicData>
+            </a:graphic>
+          </p:graphicFrame>
+        </mc:Fallback>
+      </mc:AlternateContent>
+      <p:sp>
+        <p:nvSpPr>
+          <p:cNvPr id="53" name="TextBox 52">
+            <a:extLst>
+              <a:ext uri="{FF2B5EF4-FFF2-40B4-BE49-F238E27FC236}">
+                <a16:creationId xmlns:a16="http://schemas.microsoft.com/office/drawing/2014/main" id="{B3A76907-3FBF-879A-1D52-D28195EF35EE}"/>
+              </a:ext>
+            </a:extLst>
+          </p:cNvPr>
+          <p:cNvSpPr txBox="1"/>
+          <p:nvPr/>
+        </p:nvSpPr>
+        <p:spPr>
+          <a:xfrm>
+            <a:off x="4167318" y="1233590"/>
+            <a:ext cx="497252" cy="276999"/>
+          </a:xfrm>
+          <a:prstGeom prst="rect">
+            <a:avLst/>
+          </a:prstGeom>
+          <a:noFill/>
+        </p:spPr>
+        <p:txBody>
+          <a:bodyPr wrap="none" rtlCol="0">
+            <a:spAutoFit/>
+          </a:bodyPr>
+          <a:lstStyle/>
+          <a:p>
+            <a:r>
+              <a:rPr lang="en-US" sz="1200" dirty="0">
+                <a:solidFill>
+                  <a:schemeClr val="bg1"/>
+                </a:solidFill>
+                <a:latin typeface="Arial" panose="020B0604020202020204" pitchFamily="34" charset="0"/>
+                <a:cs typeface="Arial" panose="020B0604020202020204" pitchFamily="34" charset="0"/>
+              </a:rPr>
+              <a:t>r = 9</a:t>
+            </a:r>
+          </a:p>
+        </p:txBody>
+      </p:sp>
+      <p:sp>
+        <p:nvSpPr>
+          <p:cNvPr id="54" name="TextBox 53">
+            <a:extLst>
+              <a:ext uri="{FF2B5EF4-FFF2-40B4-BE49-F238E27FC236}">
+                <a16:creationId xmlns:a16="http://schemas.microsoft.com/office/drawing/2014/main" id="{4DE38E54-71C6-BD99-8E9B-834EF1B30091}"/>
+              </a:ext>
+            </a:extLst>
+          </p:cNvPr>
+          <p:cNvSpPr txBox="1"/>
+          <p:nvPr/>
+        </p:nvSpPr>
+        <p:spPr>
+          <a:xfrm>
+            <a:off x="4160914" y="1696881"/>
+            <a:ext cx="497252" cy="276999"/>
+          </a:xfrm>
+          <a:prstGeom prst="rect">
+            <a:avLst/>
+          </a:prstGeom>
+          <a:noFill/>
+        </p:spPr>
+        <p:txBody>
+          <a:bodyPr wrap="none" rtlCol="0">
+            <a:spAutoFit/>
+          </a:bodyPr>
+          <a:lstStyle/>
+          <a:p>
+            <a:r>
+              <a:rPr lang="en-US" sz="1200" dirty="0">
+                <a:solidFill>
+                  <a:schemeClr val="bg1"/>
+                </a:solidFill>
+                <a:latin typeface="Arial" panose="020B0604020202020204" pitchFamily="34" charset="0"/>
+                <a:cs typeface="Arial" panose="020B0604020202020204" pitchFamily="34" charset="0"/>
+              </a:rPr>
+              <a:t>r = 5</a:t>
+            </a:r>
+          </a:p>
+        </p:txBody>
+      </p:sp>
+      <p:sp>
+        <p:nvSpPr>
+          <p:cNvPr id="55" name="TextBox 54">
+            <a:extLst>
+              <a:ext uri="{FF2B5EF4-FFF2-40B4-BE49-F238E27FC236}">
+                <a16:creationId xmlns:a16="http://schemas.microsoft.com/office/drawing/2014/main" id="{E0A72C66-707D-1978-92C0-B54B82BEA728}"/>
+              </a:ext>
+            </a:extLst>
+          </p:cNvPr>
+          <p:cNvSpPr txBox="1"/>
+          <p:nvPr/>
+        </p:nvSpPr>
+        <p:spPr>
+          <a:xfrm>
+            <a:off x="4167319" y="1960290"/>
+            <a:ext cx="497252" cy="276999"/>
+          </a:xfrm>
+          <a:prstGeom prst="rect">
+            <a:avLst/>
+          </a:prstGeom>
+          <a:noFill/>
+        </p:spPr>
+        <p:txBody>
+          <a:bodyPr wrap="none" rtlCol="0">
+            <a:spAutoFit/>
+          </a:bodyPr>
+          <a:lstStyle/>
+          <a:p>
+            <a:r>
+              <a:rPr lang="en-US" sz="1200" dirty="0">
+                <a:solidFill>
+                  <a:schemeClr val="bg1"/>
+                </a:solidFill>
+                <a:latin typeface="Arial" panose="020B0604020202020204" pitchFamily="34" charset="0"/>
+                <a:cs typeface="Arial" panose="020B0604020202020204" pitchFamily="34" charset="0"/>
+              </a:rPr>
+              <a:t>r = 3</a:t>
+            </a:r>
+          </a:p>
+        </p:txBody>
+      </p:sp>
+      <p:sp>
+        <p:nvSpPr>
+          <p:cNvPr id="56" name="Text Box 9">
+            <a:extLst>
+              <a:ext uri="{FF2B5EF4-FFF2-40B4-BE49-F238E27FC236}">
+                <a16:creationId xmlns:a16="http://schemas.microsoft.com/office/drawing/2014/main" id="{9D877299-2E12-77FB-747A-C7C7C4A027AF}"/>
+              </a:ext>
+            </a:extLst>
+          </p:cNvPr>
+          <p:cNvSpPr txBox="1"/>
+          <p:nvPr/>
+        </p:nvSpPr>
+        <p:spPr>
+          <a:xfrm>
+            <a:off x="6533353" y="415177"/>
+            <a:ext cx="1642907" cy="646331"/>
+          </a:xfrm>
+          <a:prstGeom prst="rect">
+            <a:avLst/>
+          </a:prstGeom>
+          <a:noFill/>
+        </p:spPr>
+        <p:txBody>
+          <a:bodyPr wrap="square" rtlCol="0">
+            <a:spAutoFit/>
+          </a:bodyPr>
+          <a:lstStyle>
+            <a:defPPr marR="0" lvl="0" algn="l" rtl="0">
+              <a:lnSpc>
+                <a:spcPct val="100000"/>
+              </a:lnSpc>
+              <a:spcBef>
+                <a:spcPts val="0"/>
+              </a:spcBef>
+              <a:spcAft>
+                <a:spcPts val="0"/>
+              </a:spcAft>
+            </a:defPPr>
+            <a:lvl1pPr marR="0" lvl="0" algn="l" rtl="0">
+              <a:lnSpc>
+                <a:spcPct val="100000"/>
+              </a:lnSpc>
+              <a:spcBef>
+                <a:spcPts val="0"/>
+              </a:spcBef>
+              <a:spcAft>
+                <a:spcPts val="0"/>
+              </a:spcAft>
+              <a:buClr>
+                <a:srgbClr val="000000"/>
+              </a:buClr>
+              <a:buFont typeface="Arial" panose="020B0604020202020204"/>
+              <a:defRPr sz="1400" b="0" i="0" u="none" strike="noStrike" cap="none">
+                <a:solidFill>
+                  <a:srgbClr val="000000"/>
+                </a:solidFill>
+                <a:latin typeface="Arial" panose="020B0604020202020204"/>
+                <a:ea typeface="Arial" panose="020B0604020202020204"/>
+                <a:cs typeface="Arial" panose="020B0604020202020204"/>
+                <a:sym typeface="Arial" panose="020B0604020202020204"/>
+              </a:defRPr>
+            </a:lvl1pPr>
+            <a:lvl2pPr marR="0" lvl="1" algn="l" rtl="0">
+              <a:lnSpc>
+                <a:spcPct val="100000"/>
+              </a:lnSpc>
+              <a:spcBef>
+                <a:spcPts val="0"/>
+              </a:spcBef>
+              <a:spcAft>
+                <a:spcPts val="0"/>
+              </a:spcAft>
+              <a:buClr>
+                <a:srgbClr val="000000"/>
+              </a:buClr>
+              <a:buFont typeface="Arial" panose="020B0604020202020204"/>
+              <a:defRPr sz="1400" b="0" i="0" u="none" strike="noStrike" cap="none">
+                <a:solidFill>
+                  <a:srgbClr val="000000"/>
+                </a:solidFill>
+                <a:latin typeface="Arial" panose="020B0604020202020204"/>
+                <a:ea typeface="Arial" panose="020B0604020202020204"/>
+                <a:cs typeface="Arial" panose="020B0604020202020204"/>
+                <a:sym typeface="Arial" panose="020B0604020202020204"/>
+              </a:defRPr>
+            </a:lvl2pPr>
+            <a:lvl3pPr marR="0" lvl="2" algn="l" rtl="0">
+              <a:lnSpc>
+                <a:spcPct val="100000"/>
+              </a:lnSpc>
+              <a:spcBef>
+                <a:spcPts val="0"/>
+              </a:spcBef>
+              <a:spcAft>
+                <a:spcPts val="0"/>
+              </a:spcAft>
+              <a:buClr>
+                <a:srgbClr val="000000"/>
+              </a:buClr>
+              <a:buFont typeface="Arial" panose="020B0604020202020204"/>
+              <a:defRPr sz="1400" b="0" i="0" u="none" strike="noStrike" cap="none">
+                <a:solidFill>
+                  <a:srgbClr val="000000"/>
+                </a:solidFill>
+                <a:latin typeface="Arial" panose="020B0604020202020204"/>
+                <a:ea typeface="Arial" panose="020B0604020202020204"/>
+                <a:cs typeface="Arial" panose="020B0604020202020204"/>
+                <a:sym typeface="Arial" panose="020B0604020202020204"/>
+              </a:defRPr>
+            </a:lvl3pPr>
+            <a:lvl4pPr marR="0" lvl="3" algn="l" rtl="0">
+              <a:lnSpc>
+                <a:spcPct val="100000"/>
+              </a:lnSpc>
+              <a:spcBef>
+                <a:spcPts val="0"/>
+              </a:spcBef>
+              <a:spcAft>
+                <a:spcPts val="0"/>
+              </a:spcAft>
+              <a:buClr>
+                <a:srgbClr val="000000"/>
+              </a:buClr>
+              <a:buFont typeface="Arial" panose="020B0604020202020204"/>
+              <a:defRPr sz="1400" b="0" i="0" u="none" strike="noStrike" cap="none">
+                <a:solidFill>
+                  <a:srgbClr val="000000"/>
+                </a:solidFill>
+                <a:latin typeface="Arial" panose="020B0604020202020204"/>
+                <a:ea typeface="Arial" panose="020B0604020202020204"/>
+                <a:cs typeface="Arial" panose="020B0604020202020204"/>
+                <a:sym typeface="Arial" panose="020B0604020202020204"/>
+              </a:defRPr>
+            </a:lvl4pPr>
+            <a:lvl5pPr marR="0" lvl="4" algn="l" rtl="0">
+              <a:lnSpc>
+                <a:spcPct val="100000"/>
+              </a:lnSpc>
+              <a:spcBef>
+                <a:spcPts val="0"/>
+              </a:spcBef>
+              <a:spcAft>
+                <a:spcPts val="0"/>
+              </a:spcAft>
+              <a:buClr>
+                <a:srgbClr val="000000"/>
+              </a:buClr>
+              <a:buFont typeface="Arial" panose="020B0604020202020204"/>
+              <a:defRPr sz="1400" b="0" i="0" u="none" strike="noStrike" cap="none">
+                <a:solidFill>
+                  <a:srgbClr val="000000"/>
+                </a:solidFill>
+                <a:latin typeface="Arial" panose="020B0604020202020204"/>
+                <a:ea typeface="Arial" panose="020B0604020202020204"/>
+                <a:cs typeface="Arial" panose="020B0604020202020204"/>
+                <a:sym typeface="Arial" panose="020B0604020202020204"/>
+              </a:defRPr>
+            </a:lvl5pPr>
+            <a:lvl6pPr marR="0" lvl="5" algn="l" rtl="0">
+              <a:lnSpc>
+                <a:spcPct val="100000"/>
+              </a:lnSpc>
+              <a:spcBef>
+                <a:spcPts val="0"/>
+              </a:spcBef>
+              <a:spcAft>
+                <a:spcPts val="0"/>
+              </a:spcAft>
+              <a:buClr>
+                <a:srgbClr val="000000"/>
+              </a:buClr>
+              <a:buFont typeface="Arial" panose="020B0604020202020204"/>
+              <a:defRPr sz="1400" b="0" i="0" u="none" strike="noStrike" cap="none">
+                <a:solidFill>
+                  <a:srgbClr val="000000"/>
+                </a:solidFill>
+                <a:latin typeface="Arial" panose="020B0604020202020204"/>
+                <a:ea typeface="Arial" panose="020B0604020202020204"/>
+                <a:cs typeface="Arial" panose="020B0604020202020204"/>
+                <a:sym typeface="Arial" panose="020B0604020202020204"/>
+              </a:defRPr>
+            </a:lvl6pPr>
+            <a:lvl7pPr marR="0" lvl="6" algn="l" rtl="0">
+              <a:lnSpc>
+                <a:spcPct val="100000"/>
+              </a:lnSpc>
+              <a:spcBef>
+                <a:spcPts val="0"/>
+              </a:spcBef>
+              <a:spcAft>
+                <a:spcPts val="0"/>
+              </a:spcAft>
+              <a:buClr>
+                <a:srgbClr val="000000"/>
+              </a:buClr>
+              <a:buFont typeface="Arial" panose="020B0604020202020204"/>
+              <a:defRPr sz="1400" b="0" i="0" u="none" strike="noStrike" cap="none">
+                <a:solidFill>
+                  <a:srgbClr val="000000"/>
+                </a:solidFill>
+                <a:latin typeface="Arial" panose="020B0604020202020204"/>
+                <a:ea typeface="Arial" panose="020B0604020202020204"/>
+                <a:cs typeface="Arial" panose="020B0604020202020204"/>
+                <a:sym typeface="Arial" panose="020B0604020202020204"/>
+              </a:defRPr>
+            </a:lvl7pPr>
+            <a:lvl8pPr marR="0" lvl="7" algn="l" rtl="0">
+              <a:lnSpc>
+                <a:spcPct val="100000"/>
+              </a:lnSpc>
+              <a:spcBef>
+                <a:spcPts val="0"/>
+              </a:spcBef>
+              <a:spcAft>
+                <a:spcPts val="0"/>
+              </a:spcAft>
+              <a:buClr>
+                <a:srgbClr val="000000"/>
+              </a:buClr>
+              <a:buFont typeface="Arial" panose="020B0604020202020204"/>
+              <a:defRPr sz="1400" b="0" i="0" u="none" strike="noStrike" cap="none">
+                <a:solidFill>
+                  <a:srgbClr val="000000"/>
+                </a:solidFill>
+                <a:latin typeface="Arial" panose="020B0604020202020204"/>
+                <a:ea typeface="Arial" panose="020B0604020202020204"/>
+                <a:cs typeface="Arial" panose="020B0604020202020204"/>
+                <a:sym typeface="Arial" panose="020B0604020202020204"/>
+              </a:defRPr>
+            </a:lvl8pPr>
+            <a:lvl9pPr marR="0" lvl="8" algn="l" rtl="0">
+              <a:lnSpc>
+                <a:spcPct val="100000"/>
+              </a:lnSpc>
+              <a:spcBef>
+                <a:spcPts val="0"/>
+              </a:spcBef>
+              <a:spcAft>
+                <a:spcPts val="0"/>
+              </a:spcAft>
+              <a:buClr>
+                <a:srgbClr val="000000"/>
+              </a:buClr>
+              <a:buFont typeface="Arial" panose="020B0604020202020204"/>
+              <a:defRPr sz="1400" b="0" i="0" u="none" strike="noStrike" cap="none">
+                <a:solidFill>
+                  <a:srgbClr val="000000"/>
+                </a:solidFill>
+                <a:latin typeface="Arial" panose="020B0604020202020204"/>
+                <a:ea typeface="Arial" panose="020B0604020202020204"/>
+                <a:cs typeface="Arial" panose="020B0604020202020204"/>
+                <a:sym typeface="Arial" panose="020B0604020202020204"/>
+              </a:defRPr>
+            </a:lvl9pPr>
+          </a:lstStyle>
+          <a:p>
+            <a:pPr algn="ctr"/>
+            <a:r>
+              <a:rPr lang="en-US" sz="1800" dirty="0"/>
+              <a:t>Horizontal</a:t>
+            </a:r>
+          </a:p>
+          <a:p>
+            <a:pPr algn="ctr"/>
+            <a:r>
+              <a:rPr lang="en-US" sz="1800" dirty="0"/>
+              <a:t>\psi(</a:t>
+            </a:r>
+            <a:r>
+              <a:rPr lang="en-US" sz="1800"/>
+              <a:t>r) = </a:t>
+            </a:r>
+            <a:endParaRPr lang="en-US" sz="1800" dirty="0"/>
+          </a:p>
+        </p:txBody>
+      </p:sp>
+      <p:sp>
+        <p:nvSpPr>
+          <p:cNvPr id="57" name="Text Box 9">
+            <a:extLst>
+              <a:ext uri="{FF2B5EF4-FFF2-40B4-BE49-F238E27FC236}">
+                <a16:creationId xmlns:a16="http://schemas.microsoft.com/office/drawing/2014/main" id="{5E124426-FCA4-B31D-F11B-9CDD824BA24F}"/>
+              </a:ext>
+            </a:extLst>
+          </p:cNvPr>
+          <p:cNvSpPr txBox="1"/>
+          <p:nvPr/>
+        </p:nvSpPr>
+        <p:spPr>
+          <a:xfrm>
+            <a:off x="9398473" y="407987"/>
+            <a:ext cx="1642907" cy="369332"/>
+          </a:xfrm>
+          <a:prstGeom prst="rect">
+            <a:avLst/>
+          </a:prstGeom>
+          <a:noFill/>
+        </p:spPr>
+        <p:txBody>
+          <a:bodyPr wrap="square" rtlCol="0">
+            <a:spAutoFit/>
+          </a:bodyPr>
+          <a:lstStyle>
+            <a:defPPr marR="0" lvl="0" algn="l" rtl="0">
+              <a:lnSpc>
+                <a:spcPct val="100000"/>
+              </a:lnSpc>
+              <a:spcBef>
+                <a:spcPts val="0"/>
+              </a:spcBef>
+              <a:spcAft>
+                <a:spcPts val="0"/>
+              </a:spcAft>
+            </a:defPPr>
+            <a:lvl1pPr marR="0" lvl="0" algn="l" rtl="0">
+              <a:lnSpc>
+                <a:spcPct val="100000"/>
+              </a:lnSpc>
+              <a:spcBef>
+                <a:spcPts val="0"/>
+              </a:spcBef>
+              <a:spcAft>
+                <a:spcPts val="0"/>
+              </a:spcAft>
+              <a:buClr>
+                <a:srgbClr val="000000"/>
+              </a:buClr>
+              <a:buFont typeface="Arial" panose="020B0604020202020204"/>
+              <a:defRPr sz="1400" b="0" i="0" u="none" strike="noStrike" cap="none">
+                <a:solidFill>
+                  <a:srgbClr val="000000"/>
+                </a:solidFill>
+                <a:latin typeface="Arial" panose="020B0604020202020204"/>
+                <a:ea typeface="Arial" panose="020B0604020202020204"/>
+                <a:cs typeface="Arial" panose="020B0604020202020204"/>
+                <a:sym typeface="Arial" panose="020B0604020202020204"/>
+              </a:defRPr>
+            </a:lvl1pPr>
+            <a:lvl2pPr marR="0" lvl="1" algn="l" rtl="0">
+              <a:lnSpc>
+                <a:spcPct val="100000"/>
+              </a:lnSpc>
+              <a:spcBef>
+                <a:spcPts val="0"/>
+              </a:spcBef>
+              <a:spcAft>
+                <a:spcPts val="0"/>
+              </a:spcAft>
+              <a:buClr>
+                <a:srgbClr val="000000"/>
+              </a:buClr>
+              <a:buFont typeface="Arial" panose="020B0604020202020204"/>
+              <a:defRPr sz="1400" b="0" i="0" u="none" strike="noStrike" cap="none">
+                <a:solidFill>
+                  <a:srgbClr val="000000"/>
+                </a:solidFill>
+                <a:latin typeface="Arial" panose="020B0604020202020204"/>
+                <a:ea typeface="Arial" panose="020B0604020202020204"/>
+                <a:cs typeface="Arial" panose="020B0604020202020204"/>
+                <a:sym typeface="Arial" panose="020B0604020202020204"/>
+              </a:defRPr>
+            </a:lvl2pPr>
+            <a:lvl3pPr marR="0" lvl="2" algn="l" rtl="0">
+              <a:lnSpc>
+                <a:spcPct val="100000"/>
+              </a:lnSpc>
+              <a:spcBef>
+                <a:spcPts val="0"/>
+              </a:spcBef>
+              <a:spcAft>
+                <a:spcPts val="0"/>
+              </a:spcAft>
+              <a:buClr>
+                <a:srgbClr val="000000"/>
+              </a:buClr>
+              <a:buFont typeface="Arial" panose="020B0604020202020204"/>
+              <a:defRPr sz="1400" b="0" i="0" u="none" strike="noStrike" cap="none">
+                <a:solidFill>
+                  <a:srgbClr val="000000"/>
+                </a:solidFill>
+                <a:latin typeface="Arial" panose="020B0604020202020204"/>
+                <a:ea typeface="Arial" panose="020B0604020202020204"/>
+                <a:cs typeface="Arial" panose="020B0604020202020204"/>
+                <a:sym typeface="Arial" panose="020B0604020202020204"/>
+              </a:defRPr>
+            </a:lvl3pPr>
+            <a:lvl4pPr marR="0" lvl="3" algn="l" rtl="0">
+              <a:lnSpc>
+                <a:spcPct val="100000"/>
+              </a:lnSpc>
+              <a:spcBef>
+                <a:spcPts val="0"/>
+              </a:spcBef>
+              <a:spcAft>
+                <a:spcPts val="0"/>
+              </a:spcAft>
+              <a:buClr>
+                <a:srgbClr val="000000"/>
+              </a:buClr>
+              <a:buFont typeface="Arial" panose="020B0604020202020204"/>
+              <a:defRPr sz="1400" b="0" i="0" u="none" strike="noStrike" cap="none">
+                <a:solidFill>
+                  <a:srgbClr val="000000"/>
+                </a:solidFill>
+                <a:latin typeface="Arial" panose="020B0604020202020204"/>
+                <a:ea typeface="Arial" panose="020B0604020202020204"/>
+                <a:cs typeface="Arial" panose="020B0604020202020204"/>
+                <a:sym typeface="Arial" panose="020B0604020202020204"/>
+              </a:defRPr>
+            </a:lvl4pPr>
+            <a:lvl5pPr marR="0" lvl="4" algn="l" rtl="0">
+              <a:lnSpc>
+                <a:spcPct val="100000"/>
+              </a:lnSpc>
+              <a:spcBef>
+                <a:spcPts val="0"/>
+              </a:spcBef>
+              <a:spcAft>
+                <a:spcPts val="0"/>
+              </a:spcAft>
+              <a:buClr>
+                <a:srgbClr val="000000"/>
+              </a:buClr>
+              <a:buFont typeface="Arial" panose="020B0604020202020204"/>
+              <a:defRPr sz="1400" b="0" i="0" u="none" strike="noStrike" cap="none">
+                <a:solidFill>
+                  <a:srgbClr val="000000"/>
+                </a:solidFill>
+                <a:latin typeface="Arial" panose="020B0604020202020204"/>
+                <a:ea typeface="Arial" panose="020B0604020202020204"/>
+                <a:cs typeface="Arial" panose="020B0604020202020204"/>
+                <a:sym typeface="Arial" panose="020B0604020202020204"/>
+              </a:defRPr>
+            </a:lvl5pPr>
+            <a:lvl6pPr marR="0" lvl="5" algn="l" rtl="0">
+              <a:lnSpc>
+                <a:spcPct val="100000"/>
+              </a:lnSpc>
+              <a:spcBef>
+                <a:spcPts val="0"/>
+              </a:spcBef>
+              <a:spcAft>
+                <a:spcPts val="0"/>
+              </a:spcAft>
+              <a:buClr>
+                <a:srgbClr val="000000"/>
+              </a:buClr>
+              <a:buFont typeface="Arial" panose="020B0604020202020204"/>
+              <a:defRPr sz="1400" b="0" i="0" u="none" strike="noStrike" cap="none">
+                <a:solidFill>
+                  <a:srgbClr val="000000"/>
+                </a:solidFill>
+                <a:latin typeface="Arial" panose="020B0604020202020204"/>
+                <a:ea typeface="Arial" panose="020B0604020202020204"/>
+                <a:cs typeface="Arial" panose="020B0604020202020204"/>
+                <a:sym typeface="Arial" panose="020B0604020202020204"/>
+              </a:defRPr>
+            </a:lvl6pPr>
+            <a:lvl7pPr marR="0" lvl="6" algn="l" rtl="0">
+              <a:lnSpc>
+                <a:spcPct val="100000"/>
+              </a:lnSpc>
+              <a:spcBef>
+                <a:spcPts val="0"/>
+              </a:spcBef>
+              <a:spcAft>
+                <a:spcPts val="0"/>
+              </a:spcAft>
+              <a:buClr>
+                <a:srgbClr val="000000"/>
+              </a:buClr>
+              <a:buFont typeface="Arial" panose="020B0604020202020204"/>
+              <a:defRPr sz="1400" b="0" i="0" u="none" strike="noStrike" cap="none">
+                <a:solidFill>
+                  <a:srgbClr val="000000"/>
+                </a:solidFill>
+                <a:latin typeface="Arial" panose="020B0604020202020204"/>
+                <a:ea typeface="Arial" panose="020B0604020202020204"/>
+                <a:cs typeface="Arial" panose="020B0604020202020204"/>
+                <a:sym typeface="Arial" panose="020B0604020202020204"/>
+              </a:defRPr>
+            </a:lvl7pPr>
+            <a:lvl8pPr marR="0" lvl="7" algn="l" rtl="0">
+              <a:lnSpc>
+                <a:spcPct val="100000"/>
+              </a:lnSpc>
+              <a:spcBef>
+                <a:spcPts val="0"/>
+              </a:spcBef>
+              <a:spcAft>
+                <a:spcPts val="0"/>
+              </a:spcAft>
+              <a:buClr>
+                <a:srgbClr val="000000"/>
+              </a:buClr>
+              <a:buFont typeface="Arial" panose="020B0604020202020204"/>
+              <a:defRPr sz="1400" b="0" i="0" u="none" strike="noStrike" cap="none">
+                <a:solidFill>
+                  <a:srgbClr val="000000"/>
+                </a:solidFill>
+                <a:latin typeface="Arial" panose="020B0604020202020204"/>
+                <a:ea typeface="Arial" panose="020B0604020202020204"/>
+                <a:cs typeface="Arial" panose="020B0604020202020204"/>
+                <a:sym typeface="Arial" panose="020B0604020202020204"/>
+              </a:defRPr>
+            </a:lvl8pPr>
+            <a:lvl9pPr marR="0" lvl="8" algn="l" rtl="0">
+              <a:lnSpc>
+                <a:spcPct val="100000"/>
+              </a:lnSpc>
+              <a:spcBef>
+                <a:spcPts val="0"/>
+              </a:spcBef>
+              <a:spcAft>
+                <a:spcPts val="0"/>
+              </a:spcAft>
+              <a:buClr>
+                <a:srgbClr val="000000"/>
+              </a:buClr>
+              <a:buFont typeface="Arial" panose="020B0604020202020204"/>
+              <a:defRPr sz="1400" b="0" i="0" u="none" strike="noStrike" cap="none">
+                <a:solidFill>
+                  <a:srgbClr val="000000"/>
+                </a:solidFill>
+                <a:latin typeface="Arial" panose="020B0604020202020204"/>
+                <a:ea typeface="Arial" panose="020B0604020202020204"/>
+                <a:cs typeface="Arial" panose="020B0604020202020204"/>
+                <a:sym typeface="Arial" panose="020B0604020202020204"/>
+              </a:defRPr>
+            </a:lvl9pPr>
+          </a:lstStyle>
+          <a:p>
+            <a:pPr algn="ctr"/>
+            <a:r>
+              <a:rPr lang="en-US" sz="1800" dirty="0"/>
+              <a:t>Vertical</a:t>
+            </a:r>
+          </a:p>
+        </p:txBody>
+      </p:sp>
     </p:spTree>
     <p:extLst>
       <p:ext uri="{BB962C8B-B14F-4D97-AF65-F5344CB8AC3E}">

--- a/Presentations/Graphs/Antananarivo_case.pptx
+++ b/Presentations/Graphs/Antananarivo_case.pptx
@@ -259,7 +259,7 @@
           <a:p>
             <a:fld id="{621D41D5-CA81-4232-B0F3-C09376B2E785}" type="datetimeFigureOut">
               <a:rPr lang="en-US" smtClean="0"/>
-              <a:t>7/8/2026</a:t>
+              <a:t>7/9/2026</a:t>
             </a:fld>
             <a:endParaRPr lang="en-US"/>
           </a:p>
@@ -457,7 +457,7 @@
           <a:p>
             <a:fld id="{621D41D5-CA81-4232-B0F3-C09376B2E785}" type="datetimeFigureOut">
               <a:rPr lang="en-US" smtClean="0"/>
-              <a:t>7/8/2026</a:t>
+              <a:t>7/9/2026</a:t>
             </a:fld>
             <a:endParaRPr lang="en-US"/>
           </a:p>
@@ -665,7 +665,7 @@
           <a:p>
             <a:fld id="{621D41D5-CA81-4232-B0F3-C09376B2E785}" type="datetimeFigureOut">
               <a:rPr lang="en-US" smtClean="0"/>
-              <a:t>7/8/2026</a:t>
+              <a:t>7/9/2026</a:t>
             </a:fld>
             <a:endParaRPr lang="en-US"/>
           </a:p>
@@ -863,7 +863,7 @@
           <a:p>
             <a:fld id="{621D41D5-CA81-4232-B0F3-C09376B2E785}" type="datetimeFigureOut">
               <a:rPr lang="en-US" smtClean="0"/>
-              <a:t>7/8/2026</a:t>
+              <a:t>7/9/2026</a:t>
             </a:fld>
             <a:endParaRPr lang="en-US"/>
           </a:p>
@@ -1138,7 +1138,7 @@
           <a:p>
             <a:fld id="{621D41D5-CA81-4232-B0F3-C09376B2E785}" type="datetimeFigureOut">
               <a:rPr lang="en-US" smtClean="0"/>
-              <a:t>7/8/2026</a:t>
+              <a:t>7/9/2026</a:t>
             </a:fld>
             <a:endParaRPr lang="en-US"/>
           </a:p>
@@ -1403,7 +1403,7 @@
           <a:p>
             <a:fld id="{621D41D5-CA81-4232-B0F3-C09376B2E785}" type="datetimeFigureOut">
               <a:rPr lang="en-US" smtClean="0"/>
-              <a:t>7/8/2026</a:t>
+              <a:t>7/9/2026</a:t>
             </a:fld>
             <a:endParaRPr lang="en-US"/>
           </a:p>
@@ -1815,7 +1815,7 @@
           <a:p>
             <a:fld id="{621D41D5-CA81-4232-B0F3-C09376B2E785}" type="datetimeFigureOut">
               <a:rPr lang="en-US" smtClean="0"/>
-              <a:t>7/8/2026</a:t>
+              <a:t>7/9/2026</a:t>
             </a:fld>
             <a:endParaRPr lang="en-US"/>
           </a:p>
@@ -1956,7 +1956,7 @@
           <a:p>
             <a:fld id="{621D41D5-CA81-4232-B0F3-C09376B2E785}" type="datetimeFigureOut">
               <a:rPr lang="en-US" smtClean="0"/>
-              <a:t>7/8/2026</a:t>
+              <a:t>7/9/2026</a:t>
             </a:fld>
             <a:endParaRPr lang="en-US"/>
           </a:p>
@@ -2069,7 +2069,7 @@
           <a:p>
             <a:fld id="{621D41D5-CA81-4232-B0F3-C09376B2E785}" type="datetimeFigureOut">
               <a:rPr lang="en-US" smtClean="0"/>
-              <a:t>7/8/2026</a:t>
+              <a:t>7/9/2026</a:t>
             </a:fld>
             <a:endParaRPr lang="en-US"/>
           </a:p>
@@ -2380,7 +2380,7 @@
           <a:p>
             <a:fld id="{621D41D5-CA81-4232-B0F3-C09376B2E785}" type="datetimeFigureOut">
               <a:rPr lang="en-US" smtClean="0"/>
-              <a:t>7/8/2026</a:t>
+              <a:t>7/9/2026</a:t>
             </a:fld>
             <a:endParaRPr lang="en-US"/>
           </a:p>
@@ -2668,7 +2668,7 @@
           <a:p>
             <a:fld id="{621D41D5-CA81-4232-B0F3-C09376B2E785}" type="datetimeFigureOut">
               <a:rPr lang="en-US" smtClean="0"/>
-              <a:t>7/8/2026</a:t>
+              <a:t>7/9/2026</a:t>
             </a:fld>
             <a:endParaRPr lang="en-US"/>
           </a:p>
@@ -2909,7 +2909,7 @@
           <a:p>
             <a:fld id="{621D41D5-CA81-4232-B0F3-C09376B2E785}" type="datetimeFigureOut">
               <a:rPr lang="en-US" smtClean="0"/>
-              <a:t>7/8/2026</a:t>
+              <a:t>7/9/2026</a:t>
             </a:fld>
             <a:endParaRPr lang="en-US"/>
           </a:p>
@@ -5399,7 +5399,7 @@
         </p:nvGrpSpPr>
         <p:grpSpPr>
           <a:xfrm>
-            <a:off x="4402322" y="3801411"/>
+            <a:off x="4439126" y="3863342"/>
             <a:ext cx="850384" cy="403718"/>
             <a:chOff x="9532" y="3515"/>
             <a:chExt cx="1186" cy="563"/>
@@ -6455,8 +6455,8 @@
           </a:prstGeom>
         </p:spPr>
       </p:pic>
-      <mc:AlternateContent xmlns:mc="http://schemas.openxmlformats.org/markup-compatibility/2006">
-        <mc:Choice xmlns:a14="http://schemas.microsoft.com/office/drawing/2010/main" Requires="a14">
+      <mc:AlternateContent xmlns:mc="http://schemas.openxmlformats.org/markup-compatibility/2006" xmlns:a14="http://schemas.microsoft.com/office/drawing/2010/main">
+        <mc:Choice Requires="a14">
           <p:graphicFrame>
             <p:nvGraphicFramePr>
               <p:cNvPr id="48" name="Table 47">
@@ -6561,6 +6561,7 @@
                         <a:bodyPr/>
                         <a:lstStyle/>
                         <a:p>
+                          <a:pPr/>
                           <a14:m>
                             <m:oMathPara xmlns:m="http://schemas.openxmlformats.org/officeDocument/2006/math">
                               <m:oMathParaPr>
@@ -6570,18 +6571,24 @@
                                 <m:sSub>
                                   <m:sSubPr>
                                     <m:ctrlPr>
-                                      <a:rPr lang="en-US" sz="1400" dirty="0" smtClean="0"/>
+                                      <a:rPr lang="en-US" sz="1400" i="1" dirty="0" smtClean="0">
+                                        <a:latin typeface="Cambria Math" panose="02040503050406030204" pitchFamily="18" charset="0"/>
+                                      </a:rPr>
                                     </m:ctrlPr>
                                   </m:sSubPr>
                                   <m:e>
                                     <m:r>
-                                      <a:rPr lang="en-US" sz="1400" b="1" dirty="0" smtClean="0"/>
+                                      <a:rPr lang="en-US" sz="1400" b="1" dirty="0" smtClean="0">
+                                        <a:latin typeface="Cambria Math" panose="02040503050406030204" pitchFamily="18" charset="0"/>
+                                      </a:rPr>
                                       <m:t>𝒑</m:t>
                                     </m:r>
                                   </m:e>
                                   <m:sub>
                                     <m:r>
-                                      <a:rPr lang="en-US" sz="1400" dirty="0" smtClean="0"/>
+                                      <a:rPr lang="en-US" sz="1400" dirty="0" smtClean="0">
+                                        <a:latin typeface="Cambria Math" panose="02040503050406030204" pitchFamily="18" charset="0"/>
+                                      </a:rPr>
                                       <m:t>𝜶</m:t>
                                     </m:r>
                                   </m:sub>
@@ -6589,6 +6596,7 @@
                               </m:oMath>
                             </m:oMathPara>
                           </a14:m>
+                          <a:endParaRPr/>
                         </a:p>
                       </a:txBody>
                       <a:tcPr/>
@@ -6598,6 +6606,7 @@
                         <a:bodyPr/>
                         <a:lstStyle/>
                         <a:p>
+                          <a:pPr/>
                           <a14:m>
                             <m:oMathPara xmlns:m="http://schemas.openxmlformats.org/officeDocument/2006/math">
                               <m:oMathParaPr>
@@ -6605,7 +6614,9 @@
                               </m:oMathParaPr>
                               <m:oMath xmlns:m="http://schemas.openxmlformats.org/officeDocument/2006/math">
                                 <m:r>
-                                  <a:rPr lang="en-US" sz="1400" dirty="0" smtClean="0"/>
+                                  <a:rPr lang="en-US" sz="1400" dirty="0" smtClean="0">
+                                    <a:latin typeface="Cambria Math" panose="02040503050406030204" pitchFamily="18" charset="0"/>
+                                  </a:rPr>
                                   <m:t>𝜷</m:t>
                                 </m:r>
                               </m:oMath>
@@ -6624,6 +6635,7 @@
                         <a:bodyPr/>
                         <a:lstStyle/>
                         <a:p>
+                          <a:pPr/>
                           <a14:m>
                             <m:oMathPara xmlns:m="http://schemas.openxmlformats.org/officeDocument/2006/math">
                               <m:oMathParaPr>
@@ -6633,18 +6645,24 @@
                                 <m:sSub>
                                   <m:sSubPr>
                                     <m:ctrlPr>
-                                      <a:rPr lang="en-US" sz="1400" dirty="0" smtClean="0"/>
+                                      <a:rPr lang="en-US" sz="1400" i="1" dirty="0" smtClean="0">
+                                        <a:latin typeface="Cambria Math" panose="02040503050406030204" pitchFamily="18" charset="0"/>
+                                      </a:rPr>
                                     </m:ctrlPr>
                                   </m:sSubPr>
                                   <m:e>
                                     <m:r>
-                                      <a:rPr lang="en-US" sz="1400" b="1" dirty="0" smtClean="0"/>
+                                      <a:rPr lang="en-US" sz="1400" b="1" dirty="0" smtClean="0">
+                                        <a:latin typeface="Cambria Math" panose="02040503050406030204" pitchFamily="18" charset="0"/>
+                                      </a:rPr>
                                       <m:t>𝒑</m:t>
                                     </m:r>
                                   </m:e>
                                   <m:sub>
                                     <m:r>
-                                      <a:rPr lang="en-US" sz="1400" b="1" dirty="0" smtClean="0"/>
+                                      <a:rPr lang="en-US" sz="1400" b="1" dirty="0" smtClean="0">
+                                        <a:latin typeface="Cambria Math" panose="02040503050406030204" pitchFamily="18" charset="0"/>
+                                      </a:rPr>
                                       <m:t>𝜿</m:t>
                                     </m:r>
                                   </m:sub>
@@ -6689,7 +6707,9 @@
                               </m:oMathParaPr>
                               <m:oMath xmlns:m="http://schemas.openxmlformats.org/officeDocument/2006/math">
                                 <m:r>
-                                  <a:rPr lang="en-US" sz="1400" smtClean="0"/>
+                                  <a:rPr lang="en-US" sz="1400" smtClean="0">
+                                    <a:latin typeface="Cambria Math" panose="02040503050406030204" pitchFamily="18" charset="0"/>
+                                  </a:rPr>
                                   <m:t>𝜹</m:t>
                                 </m:r>
                               </m:oMath>
@@ -6708,6 +6728,7 @@
                         <a:bodyPr/>
                         <a:lstStyle/>
                         <a:p>
+                          <a:pPr/>
                           <a14:m>
                             <m:oMathPara xmlns:m="http://schemas.openxmlformats.org/officeDocument/2006/math">
                               <m:oMathParaPr>
@@ -6715,12 +6736,15 @@
                               </m:oMathParaPr>
                               <m:oMath xmlns:m="http://schemas.openxmlformats.org/officeDocument/2006/math">
                                 <m:r>
-                                  <a:rPr lang="en-US" altLang="zh-CN" sz="1400" dirty="0" smtClean="0"/>
+                                  <a:rPr lang="en-US" altLang="zh-CN" sz="1400" dirty="0" smtClean="0">
+                                    <a:latin typeface="Cambria Math" panose="02040503050406030204" pitchFamily="18" charset="0"/>
+                                  </a:rPr>
                                   <m:t>𝐴</m:t>
                                 </m:r>
                               </m:oMath>
                             </m:oMathPara>
                           </a14:m>
+                          <a:endParaRPr/>
                         </a:p>
                       </a:txBody>
                       <a:tcPr/>
@@ -6730,6 +6754,7 @@
                         <a:bodyPr/>
                         <a:lstStyle/>
                         <a:p>
+                          <a:pPr/>
                           <a14:m>
                             <m:oMathPara xmlns:m="http://schemas.openxmlformats.org/officeDocument/2006/math">
                               <m:oMathParaPr>
@@ -6737,12 +6762,15 @@
                               </m:oMathParaPr>
                               <m:oMath xmlns:m="http://schemas.openxmlformats.org/officeDocument/2006/math">
                                 <m:r>
-                                  <a:rPr lang="en-US" altLang="zh-CN" sz="1400" dirty="0" smtClean="0"/>
+                                  <a:rPr lang="en-US" altLang="zh-CN" sz="1400" dirty="0" smtClean="0">
+                                    <a:latin typeface="Cambria Math" panose="02040503050406030204" pitchFamily="18" charset="0"/>
+                                  </a:rPr>
                                   <m:t>𝐵</m:t>
                                 </m:r>
                               </m:oMath>
                             </m:oMathPara>
                           </a14:m>
+                          <a:endParaRPr/>
                         </a:p>
                       </a:txBody>
                       <a:tcPr/>
@@ -6752,6 +6780,7 @@
                         <a:bodyPr/>
                         <a:lstStyle/>
                         <a:p>
+                          <a:pPr/>
                           <a14:m>
                             <m:oMathPara xmlns:m="http://schemas.openxmlformats.org/officeDocument/2006/math">
                               <m:oMathParaPr>
@@ -6759,7 +6788,9 @@
                               </m:oMathParaPr>
                               <m:oMath xmlns:m="http://schemas.openxmlformats.org/officeDocument/2006/math">
                                 <m:r>
-                                  <a:rPr lang="en-US" altLang="zh-CN" sz="1400" dirty="0" smtClean="0"/>
+                                  <a:rPr lang="en-US" altLang="zh-CN" sz="1400" dirty="0" smtClean="0">
+                                    <a:latin typeface="Cambria Math" panose="02040503050406030204" pitchFamily="18" charset="0"/>
+                                  </a:rPr>
                                   <m:t>𝐶</m:t>
                                 </m:r>
                               </m:oMath>
@@ -7070,7 +7101,7 @@
             </a:graphic>
           </p:graphicFrame>
         </mc:Choice>
-        <mc:Fallback>
+        <mc:Fallback xmlns="">
           <p:graphicFrame>
             <p:nvGraphicFramePr>
               <p:cNvPr id="48" name="Table 47">
@@ -7976,13 +8007,8 @@
             <a:pPr algn="ctr"/>
             <a:r>
               <a:rPr lang="en-US" sz="1800" dirty="0"/>
-              <a:t>\psi(</a:t>
+              <a:t>\psi(r) = </a:t>
             </a:r>
-            <a:r>
-              <a:rPr lang="en-US" sz="1800"/>
-              <a:t>r) = </a:t>
-            </a:r>
-            <a:endParaRPr lang="en-US" sz="1800" dirty="0"/>
           </a:p>
         </p:txBody>
       </p:sp>

--- a/Presentations/Graphs/Antananarivo_case.pptx
+++ b/Presentations/Graphs/Antananarivo_case.pptx
@@ -259,7 +259,7 @@
           <a:p>
             <a:fld id="{621D41D5-CA81-4232-B0F3-C09376B2E785}" type="datetimeFigureOut">
               <a:rPr lang="en-US" smtClean="0"/>
-              <a:t>7/9/2026</a:t>
+              <a:t>7/10/2026</a:t>
             </a:fld>
             <a:endParaRPr lang="en-US"/>
           </a:p>
@@ -457,7 +457,7 @@
           <a:p>
             <a:fld id="{621D41D5-CA81-4232-B0F3-C09376B2E785}" type="datetimeFigureOut">
               <a:rPr lang="en-US" smtClean="0"/>
-              <a:t>7/9/2026</a:t>
+              <a:t>7/10/2026</a:t>
             </a:fld>
             <a:endParaRPr lang="en-US"/>
           </a:p>
@@ -665,7 +665,7 @@
           <a:p>
             <a:fld id="{621D41D5-CA81-4232-B0F3-C09376B2E785}" type="datetimeFigureOut">
               <a:rPr lang="en-US" smtClean="0"/>
-              <a:t>7/9/2026</a:t>
+              <a:t>7/10/2026</a:t>
             </a:fld>
             <a:endParaRPr lang="en-US"/>
           </a:p>
@@ -863,7 +863,7 @@
           <a:p>
             <a:fld id="{621D41D5-CA81-4232-B0F3-C09376B2E785}" type="datetimeFigureOut">
               <a:rPr lang="en-US" smtClean="0"/>
-              <a:t>7/9/2026</a:t>
+              <a:t>7/10/2026</a:t>
             </a:fld>
             <a:endParaRPr lang="en-US"/>
           </a:p>
@@ -1138,7 +1138,7 @@
           <a:p>
             <a:fld id="{621D41D5-CA81-4232-B0F3-C09376B2E785}" type="datetimeFigureOut">
               <a:rPr lang="en-US" smtClean="0"/>
-              <a:t>7/9/2026</a:t>
+              <a:t>7/10/2026</a:t>
             </a:fld>
             <a:endParaRPr lang="en-US"/>
           </a:p>
@@ -1403,7 +1403,7 @@
           <a:p>
             <a:fld id="{621D41D5-CA81-4232-B0F3-C09376B2E785}" type="datetimeFigureOut">
               <a:rPr lang="en-US" smtClean="0"/>
-              <a:t>7/9/2026</a:t>
+              <a:t>7/10/2026</a:t>
             </a:fld>
             <a:endParaRPr lang="en-US"/>
           </a:p>
@@ -1815,7 +1815,7 @@
           <a:p>
             <a:fld id="{621D41D5-CA81-4232-B0F3-C09376B2E785}" type="datetimeFigureOut">
               <a:rPr lang="en-US" smtClean="0"/>
-              <a:t>7/9/2026</a:t>
+              <a:t>7/10/2026</a:t>
             </a:fld>
             <a:endParaRPr lang="en-US"/>
           </a:p>
@@ -1956,7 +1956,7 @@
           <a:p>
             <a:fld id="{621D41D5-CA81-4232-B0F3-C09376B2E785}" type="datetimeFigureOut">
               <a:rPr lang="en-US" smtClean="0"/>
-              <a:t>7/9/2026</a:t>
+              <a:t>7/10/2026</a:t>
             </a:fld>
             <a:endParaRPr lang="en-US"/>
           </a:p>
@@ -2069,7 +2069,7 @@
           <a:p>
             <a:fld id="{621D41D5-CA81-4232-B0F3-C09376B2E785}" type="datetimeFigureOut">
               <a:rPr lang="en-US" smtClean="0"/>
-              <a:t>7/9/2026</a:t>
+              <a:t>7/10/2026</a:t>
             </a:fld>
             <a:endParaRPr lang="en-US"/>
           </a:p>
@@ -2380,7 +2380,7 @@
           <a:p>
             <a:fld id="{621D41D5-CA81-4232-B0F3-C09376B2E785}" type="datetimeFigureOut">
               <a:rPr lang="en-US" smtClean="0"/>
-              <a:t>7/9/2026</a:t>
+              <a:t>7/10/2026</a:t>
             </a:fld>
             <a:endParaRPr lang="en-US"/>
           </a:p>
@@ -2668,7 +2668,7 @@
           <a:p>
             <a:fld id="{621D41D5-CA81-4232-B0F3-C09376B2E785}" type="datetimeFigureOut">
               <a:rPr lang="en-US" smtClean="0"/>
-              <a:t>7/9/2026</a:t>
+              <a:t>7/10/2026</a:t>
             </a:fld>
             <a:endParaRPr lang="en-US"/>
           </a:p>
@@ -2909,7 +2909,7 @@
           <a:p>
             <a:fld id="{621D41D5-CA81-4232-B0F3-C09376B2E785}" type="datetimeFigureOut">
               <a:rPr lang="en-US" smtClean="0"/>
-              <a:t>7/9/2026</a:t>
+              <a:t>7/10/2026</a:t>
             </a:fld>
             <a:endParaRPr lang="en-US"/>
           </a:p>
@@ -3326,3143 +3326,14 @@
           <a:chExt cx="0" cy="0"/>
         </a:xfrm>
       </p:grpSpPr>
-      <p:sp>
-        <p:nvSpPr>
-          <p:cNvPr id="11" name="Text Box 9">
-            <a:extLst>
-              <a:ext uri="{FF2B5EF4-FFF2-40B4-BE49-F238E27FC236}">
-                <a16:creationId xmlns:a16="http://schemas.microsoft.com/office/drawing/2014/main" id="{71EE8E13-96EA-910A-81F3-E9688BF50613}"/>
-              </a:ext>
-            </a:extLst>
-          </p:cNvPr>
-          <p:cNvSpPr txBox="1"/>
-          <p:nvPr/>
-        </p:nvSpPr>
-        <p:spPr>
-          <a:xfrm>
-            <a:off x="392188" y="562071"/>
-            <a:ext cx="5338052" cy="430497"/>
-          </a:xfrm>
-          <a:prstGeom prst="rect">
-            <a:avLst/>
-          </a:prstGeom>
-          <a:noFill/>
-        </p:spPr>
-        <p:txBody>
-          <a:bodyPr wrap="square" rtlCol="0">
-            <a:spAutoFit/>
-          </a:bodyPr>
-          <a:lstStyle>
-            <a:defPPr marR="0" lvl="0" algn="l" rtl="0">
-              <a:lnSpc>
-                <a:spcPct val="100000"/>
-              </a:lnSpc>
-              <a:spcBef>
-                <a:spcPts val="0"/>
-              </a:spcBef>
-              <a:spcAft>
-                <a:spcPts val="0"/>
-              </a:spcAft>
-            </a:defPPr>
-            <a:lvl1pPr marR="0" lvl="0" algn="l" rtl="0">
-              <a:lnSpc>
-                <a:spcPct val="100000"/>
-              </a:lnSpc>
-              <a:spcBef>
-                <a:spcPts val="0"/>
-              </a:spcBef>
-              <a:spcAft>
-                <a:spcPts val="0"/>
-              </a:spcAft>
-              <a:buClr>
-                <a:srgbClr val="000000"/>
-              </a:buClr>
-              <a:buFont typeface="Arial" panose="020B0604020202020204"/>
-              <a:defRPr sz="1400" b="0" i="0" u="none" strike="noStrike" cap="none">
-                <a:solidFill>
-                  <a:srgbClr val="000000"/>
-                </a:solidFill>
-                <a:latin typeface="Arial" panose="020B0604020202020204"/>
-                <a:ea typeface="Arial" panose="020B0604020202020204"/>
-                <a:cs typeface="Arial" panose="020B0604020202020204"/>
-                <a:sym typeface="Arial" panose="020B0604020202020204"/>
-              </a:defRPr>
-            </a:lvl1pPr>
-            <a:lvl2pPr marR="0" lvl="1" algn="l" rtl="0">
-              <a:lnSpc>
-                <a:spcPct val="100000"/>
-              </a:lnSpc>
-              <a:spcBef>
-                <a:spcPts val="0"/>
-              </a:spcBef>
-              <a:spcAft>
-                <a:spcPts val="0"/>
-              </a:spcAft>
-              <a:buClr>
-                <a:srgbClr val="000000"/>
-              </a:buClr>
-              <a:buFont typeface="Arial" panose="020B0604020202020204"/>
-              <a:defRPr sz="1400" b="0" i="0" u="none" strike="noStrike" cap="none">
-                <a:solidFill>
-                  <a:srgbClr val="000000"/>
-                </a:solidFill>
-                <a:latin typeface="Arial" panose="020B0604020202020204"/>
-                <a:ea typeface="Arial" panose="020B0604020202020204"/>
-                <a:cs typeface="Arial" panose="020B0604020202020204"/>
-                <a:sym typeface="Arial" panose="020B0604020202020204"/>
-              </a:defRPr>
-            </a:lvl2pPr>
-            <a:lvl3pPr marR="0" lvl="2" algn="l" rtl="0">
-              <a:lnSpc>
-                <a:spcPct val="100000"/>
-              </a:lnSpc>
-              <a:spcBef>
-                <a:spcPts val="0"/>
-              </a:spcBef>
-              <a:spcAft>
-                <a:spcPts val="0"/>
-              </a:spcAft>
-              <a:buClr>
-                <a:srgbClr val="000000"/>
-              </a:buClr>
-              <a:buFont typeface="Arial" panose="020B0604020202020204"/>
-              <a:defRPr sz="1400" b="0" i="0" u="none" strike="noStrike" cap="none">
-                <a:solidFill>
-                  <a:srgbClr val="000000"/>
-                </a:solidFill>
-                <a:latin typeface="Arial" panose="020B0604020202020204"/>
-                <a:ea typeface="Arial" panose="020B0604020202020204"/>
-                <a:cs typeface="Arial" panose="020B0604020202020204"/>
-                <a:sym typeface="Arial" panose="020B0604020202020204"/>
-              </a:defRPr>
-            </a:lvl3pPr>
-            <a:lvl4pPr marR="0" lvl="3" algn="l" rtl="0">
-              <a:lnSpc>
-                <a:spcPct val="100000"/>
-              </a:lnSpc>
-              <a:spcBef>
-                <a:spcPts val="0"/>
-              </a:spcBef>
-              <a:spcAft>
-                <a:spcPts val="0"/>
-              </a:spcAft>
-              <a:buClr>
-                <a:srgbClr val="000000"/>
-              </a:buClr>
-              <a:buFont typeface="Arial" panose="020B0604020202020204"/>
-              <a:defRPr sz="1400" b="0" i="0" u="none" strike="noStrike" cap="none">
-                <a:solidFill>
-                  <a:srgbClr val="000000"/>
-                </a:solidFill>
-                <a:latin typeface="Arial" panose="020B0604020202020204"/>
-                <a:ea typeface="Arial" panose="020B0604020202020204"/>
-                <a:cs typeface="Arial" panose="020B0604020202020204"/>
-                <a:sym typeface="Arial" panose="020B0604020202020204"/>
-              </a:defRPr>
-            </a:lvl4pPr>
-            <a:lvl5pPr marR="0" lvl="4" algn="l" rtl="0">
-              <a:lnSpc>
-                <a:spcPct val="100000"/>
-              </a:lnSpc>
-              <a:spcBef>
-                <a:spcPts val="0"/>
-              </a:spcBef>
-              <a:spcAft>
-                <a:spcPts val="0"/>
-              </a:spcAft>
-              <a:buClr>
-                <a:srgbClr val="000000"/>
-              </a:buClr>
-              <a:buFont typeface="Arial" panose="020B0604020202020204"/>
-              <a:defRPr sz="1400" b="0" i="0" u="none" strike="noStrike" cap="none">
-                <a:solidFill>
-                  <a:srgbClr val="000000"/>
-                </a:solidFill>
-                <a:latin typeface="Arial" panose="020B0604020202020204"/>
-                <a:ea typeface="Arial" panose="020B0604020202020204"/>
-                <a:cs typeface="Arial" panose="020B0604020202020204"/>
-                <a:sym typeface="Arial" panose="020B0604020202020204"/>
-              </a:defRPr>
-            </a:lvl5pPr>
-            <a:lvl6pPr marR="0" lvl="5" algn="l" rtl="0">
-              <a:lnSpc>
-                <a:spcPct val="100000"/>
-              </a:lnSpc>
-              <a:spcBef>
-                <a:spcPts val="0"/>
-              </a:spcBef>
-              <a:spcAft>
-                <a:spcPts val="0"/>
-              </a:spcAft>
-              <a:buClr>
-                <a:srgbClr val="000000"/>
-              </a:buClr>
-              <a:buFont typeface="Arial" panose="020B0604020202020204"/>
-              <a:defRPr sz="1400" b="0" i="0" u="none" strike="noStrike" cap="none">
-                <a:solidFill>
-                  <a:srgbClr val="000000"/>
-                </a:solidFill>
-                <a:latin typeface="Arial" panose="020B0604020202020204"/>
-                <a:ea typeface="Arial" panose="020B0604020202020204"/>
-                <a:cs typeface="Arial" panose="020B0604020202020204"/>
-                <a:sym typeface="Arial" panose="020B0604020202020204"/>
-              </a:defRPr>
-            </a:lvl6pPr>
-            <a:lvl7pPr marR="0" lvl="6" algn="l" rtl="0">
-              <a:lnSpc>
-                <a:spcPct val="100000"/>
-              </a:lnSpc>
-              <a:spcBef>
-                <a:spcPts val="0"/>
-              </a:spcBef>
-              <a:spcAft>
-                <a:spcPts val="0"/>
-              </a:spcAft>
-              <a:buClr>
-                <a:srgbClr val="000000"/>
-              </a:buClr>
-              <a:buFont typeface="Arial" panose="020B0604020202020204"/>
-              <a:defRPr sz="1400" b="0" i="0" u="none" strike="noStrike" cap="none">
-                <a:solidFill>
-                  <a:srgbClr val="000000"/>
-                </a:solidFill>
-                <a:latin typeface="Arial" panose="020B0604020202020204"/>
-                <a:ea typeface="Arial" panose="020B0604020202020204"/>
-                <a:cs typeface="Arial" panose="020B0604020202020204"/>
-                <a:sym typeface="Arial" panose="020B0604020202020204"/>
-              </a:defRPr>
-            </a:lvl7pPr>
-            <a:lvl8pPr marR="0" lvl="7" algn="l" rtl="0">
-              <a:lnSpc>
-                <a:spcPct val="100000"/>
-              </a:lnSpc>
-              <a:spcBef>
-                <a:spcPts val="0"/>
-              </a:spcBef>
-              <a:spcAft>
-                <a:spcPts val="0"/>
-              </a:spcAft>
-              <a:buClr>
-                <a:srgbClr val="000000"/>
-              </a:buClr>
-              <a:buFont typeface="Arial" panose="020B0604020202020204"/>
-              <a:defRPr sz="1400" b="0" i="0" u="none" strike="noStrike" cap="none">
-                <a:solidFill>
-                  <a:srgbClr val="000000"/>
-                </a:solidFill>
-                <a:latin typeface="Arial" panose="020B0604020202020204"/>
-                <a:ea typeface="Arial" panose="020B0604020202020204"/>
-                <a:cs typeface="Arial" panose="020B0604020202020204"/>
-                <a:sym typeface="Arial" panose="020B0604020202020204"/>
-              </a:defRPr>
-            </a:lvl8pPr>
-            <a:lvl9pPr marR="0" lvl="8" algn="l" rtl="0">
-              <a:lnSpc>
-                <a:spcPct val="100000"/>
-              </a:lnSpc>
-              <a:spcBef>
-                <a:spcPts val="0"/>
-              </a:spcBef>
-              <a:spcAft>
-                <a:spcPts val="0"/>
-              </a:spcAft>
-              <a:buClr>
-                <a:srgbClr val="000000"/>
-              </a:buClr>
-              <a:buFont typeface="Arial" panose="020B0604020202020204"/>
-              <a:defRPr sz="1400" b="0" i="0" u="none" strike="noStrike" cap="none">
-                <a:solidFill>
-                  <a:srgbClr val="000000"/>
-                </a:solidFill>
-                <a:latin typeface="Arial" panose="020B0604020202020204"/>
-                <a:ea typeface="Arial" panose="020B0604020202020204"/>
-                <a:cs typeface="Arial" panose="020B0604020202020204"/>
-                <a:sym typeface="Arial" panose="020B0604020202020204"/>
-              </a:defRPr>
-            </a:lvl9pPr>
-          </a:lstStyle>
-          <a:p>
-            <a:pPr algn="ctr"/>
-            <a:r>
-              <a:rPr lang="en-US" altLang="zh-CN" sz="1800" dirty="0"/>
-              <a:t>Case City: </a:t>
-            </a:r>
-            <a:r>
-              <a:rPr lang="en-US" sz="1800" dirty="0"/>
-              <a:t>Antananarivo,</a:t>
-            </a:r>
-            <a:r>
-              <a:rPr lang="zh-CN" altLang="en-US" sz="1800" dirty="0"/>
-              <a:t> </a:t>
-            </a:r>
-            <a:r>
-              <a:rPr lang="en-US" altLang="zh-CN" sz="1800" dirty="0"/>
-              <a:t>Madagascar</a:t>
-            </a:r>
-            <a:endParaRPr lang="en-US" sz="1800" dirty="0"/>
-          </a:p>
-        </p:txBody>
-      </p:sp>
-      <p:pic>
-        <p:nvPicPr>
-          <p:cNvPr id="8" name="Picture 7" descr="Screenshot from 2025-05-14 13-41-03">
-            <a:extLst>
-              <a:ext uri="{FF2B5EF4-FFF2-40B4-BE49-F238E27FC236}">
-                <a16:creationId xmlns:a16="http://schemas.microsoft.com/office/drawing/2014/main" id="{056F824A-2F53-240E-AC0C-0D72D54D8DBA}"/>
-              </a:ext>
-            </a:extLst>
-          </p:cNvPr>
-          <p:cNvPicPr>
-            <a:picLocks noChangeAspect="1"/>
-          </p:cNvPicPr>
-          <p:nvPr/>
-        </p:nvPicPr>
-        <p:blipFill>
-          <a:blip r:embed="rId2"/>
-          <a:stretch>
-            <a:fillRect/>
-          </a:stretch>
-        </p:blipFill>
-        <p:spPr>
-          <a:xfrm>
-            <a:off x="3101650" y="1293770"/>
-            <a:ext cx="2628590" cy="2417285"/>
-          </a:xfrm>
-          <a:prstGeom prst="rect">
-            <a:avLst/>
-          </a:prstGeom>
-        </p:spPr>
-      </p:pic>
-      <p:pic>
-        <p:nvPicPr>
-          <p:cNvPr id="9" name="Picture 8" descr="Screenshot from 2025-05-14 13-40-46">
-            <a:extLst>
-              <a:ext uri="{FF2B5EF4-FFF2-40B4-BE49-F238E27FC236}">
-                <a16:creationId xmlns:a16="http://schemas.microsoft.com/office/drawing/2014/main" id="{55CEAB13-7257-3152-494A-9D1F6233A402}"/>
-              </a:ext>
-            </a:extLst>
-          </p:cNvPr>
-          <p:cNvPicPr>
-            <a:picLocks noChangeAspect="1"/>
-          </p:cNvPicPr>
-          <p:nvPr/>
-        </p:nvPicPr>
-        <p:blipFill>
-          <a:blip r:embed="rId3"/>
-          <a:stretch>
-            <a:fillRect/>
-          </a:stretch>
-        </p:blipFill>
-        <p:spPr>
-          <a:xfrm>
-            <a:off x="456569" y="1293770"/>
-            <a:ext cx="2628590" cy="2417285"/>
-          </a:xfrm>
-          <a:prstGeom prst="rect">
-            <a:avLst/>
-          </a:prstGeom>
-        </p:spPr>
-      </p:pic>
-      <p:grpSp>
-        <p:nvGrpSpPr>
-          <p:cNvPr id="10" name="Google Shape;156;p16">
-            <a:extLst>
-              <a:ext uri="{FF2B5EF4-FFF2-40B4-BE49-F238E27FC236}">
-                <a16:creationId xmlns:a16="http://schemas.microsoft.com/office/drawing/2014/main" id="{5E731B56-553C-28A0-B977-8FA0B7143C61}"/>
-              </a:ext>
-            </a:extLst>
-          </p:cNvPr>
-          <p:cNvGrpSpPr/>
-          <p:nvPr/>
-        </p:nvGrpSpPr>
-        <p:grpSpPr>
-          <a:xfrm>
-            <a:off x="1323444" y="3711051"/>
-            <a:ext cx="3041592" cy="658323"/>
-            <a:chOff x="4807925" y="4484375"/>
-            <a:chExt cx="2693250" cy="582180"/>
-          </a:xfrm>
-        </p:grpSpPr>
-        <p:sp>
-          <p:nvSpPr>
-            <p:cNvPr id="17" name="Google Shape;157;p16">
-              <a:extLst>
-                <a:ext uri="{FF2B5EF4-FFF2-40B4-BE49-F238E27FC236}">
-                  <a16:creationId xmlns:a16="http://schemas.microsoft.com/office/drawing/2014/main" id="{8B13B24B-FBD8-5930-DE5D-C55C619CE57A}"/>
-                </a:ext>
-              </a:extLst>
-            </p:cNvPr>
-            <p:cNvSpPr/>
-            <p:nvPr/>
-          </p:nvSpPr>
-          <p:spPr>
-            <a:xfrm>
-              <a:off x="4913433" y="4758200"/>
-              <a:ext cx="432300" cy="234600"/>
-            </a:xfrm>
-            <a:prstGeom prst="rect">
-              <a:avLst/>
-            </a:prstGeom>
-            <a:solidFill>
-              <a:schemeClr val="dk1"/>
-            </a:solidFill>
-            <a:ln>
-              <a:noFill/>
-            </a:ln>
-          </p:spPr>
-          <p:txBody>
-            <a:bodyPr spcFirstLastPara="1" wrap="square" lIns="91425" tIns="91425" rIns="91425" bIns="91425" anchor="ctr" anchorCtr="0">
-              <a:noAutofit/>
-            </a:bodyPr>
-            <a:lstStyle>
-              <a:defPPr marR="0" lvl="0" algn="l" rtl="0">
-                <a:lnSpc>
-                  <a:spcPct val="100000"/>
-                </a:lnSpc>
-                <a:spcBef>
-                  <a:spcPts val="0"/>
-                </a:spcBef>
-                <a:spcAft>
-                  <a:spcPts val="0"/>
-                </a:spcAft>
-              </a:defPPr>
-              <a:lvl1pPr marR="0" lvl="0" algn="l" rtl="0">
-                <a:lnSpc>
-                  <a:spcPct val="100000"/>
-                </a:lnSpc>
-                <a:spcBef>
-                  <a:spcPts val="0"/>
-                </a:spcBef>
-                <a:spcAft>
-                  <a:spcPts val="0"/>
-                </a:spcAft>
-                <a:buClr>
-                  <a:srgbClr val="000000"/>
-                </a:buClr>
-                <a:buFont typeface="Arial" panose="020B0604020202020204"/>
-                <a:defRPr sz="1400" b="0" i="0" u="none" strike="noStrike" cap="none">
-                  <a:solidFill>
-                    <a:srgbClr val="000000"/>
-                  </a:solidFill>
-                  <a:latin typeface="Arial" panose="020B0604020202020204"/>
-                  <a:ea typeface="Arial" panose="020B0604020202020204"/>
-                  <a:cs typeface="Arial" panose="020B0604020202020204"/>
-                  <a:sym typeface="Arial" panose="020B0604020202020204"/>
-                </a:defRPr>
-              </a:lvl1pPr>
-              <a:lvl2pPr marR="0" lvl="1" algn="l" rtl="0">
-                <a:lnSpc>
-                  <a:spcPct val="100000"/>
-                </a:lnSpc>
-                <a:spcBef>
-                  <a:spcPts val="0"/>
-                </a:spcBef>
-                <a:spcAft>
-                  <a:spcPts val="0"/>
-                </a:spcAft>
-                <a:buClr>
-                  <a:srgbClr val="000000"/>
-                </a:buClr>
-                <a:buFont typeface="Arial" panose="020B0604020202020204"/>
-                <a:defRPr sz="1400" b="0" i="0" u="none" strike="noStrike" cap="none">
-                  <a:solidFill>
-                    <a:srgbClr val="000000"/>
-                  </a:solidFill>
-                  <a:latin typeface="Arial" panose="020B0604020202020204"/>
-                  <a:ea typeface="Arial" panose="020B0604020202020204"/>
-                  <a:cs typeface="Arial" panose="020B0604020202020204"/>
-                  <a:sym typeface="Arial" panose="020B0604020202020204"/>
-                </a:defRPr>
-              </a:lvl2pPr>
-              <a:lvl3pPr marR="0" lvl="2" algn="l" rtl="0">
-                <a:lnSpc>
-                  <a:spcPct val="100000"/>
-                </a:lnSpc>
-                <a:spcBef>
-                  <a:spcPts val="0"/>
-                </a:spcBef>
-                <a:spcAft>
-                  <a:spcPts val="0"/>
-                </a:spcAft>
-                <a:buClr>
-                  <a:srgbClr val="000000"/>
-                </a:buClr>
-                <a:buFont typeface="Arial" panose="020B0604020202020204"/>
-                <a:defRPr sz="1400" b="0" i="0" u="none" strike="noStrike" cap="none">
-                  <a:solidFill>
-                    <a:srgbClr val="000000"/>
-                  </a:solidFill>
-                  <a:latin typeface="Arial" panose="020B0604020202020204"/>
-                  <a:ea typeface="Arial" panose="020B0604020202020204"/>
-                  <a:cs typeface="Arial" panose="020B0604020202020204"/>
-                  <a:sym typeface="Arial" panose="020B0604020202020204"/>
-                </a:defRPr>
-              </a:lvl3pPr>
-              <a:lvl4pPr marR="0" lvl="3" algn="l" rtl="0">
-                <a:lnSpc>
-                  <a:spcPct val="100000"/>
-                </a:lnSpc>
-                <a:spcBef>
-                  <a:spcPts val="0"/>
-                </a:spcBef>
-                <a:spcAft>
-                  <a:spcPts val="0"/>
-                </a:spcAft>
-                <a:buClr>
-                  <a:srgbClr val="000000"/>
-                </a:buClr>
-                <a:buFont typeface="Arial" panose="020B0604020202020204"/>
-                <a:defRPr sz="1400" b="0" i="0" u="none" strike="noStrike" cap="none">
-                  <a:solidFill>
-                    <a:srgbClr val="000000"/>
-                  </a:solidFill>
-                  <a:latin typeface="Arial" panose="020B0604020202020204"/>
-                  <a:ea typeface="Arial" panose="020B0604020202020204"/>
-                  <a:cs typeface="Arial" panose="020B0604020202020204"/>
-                  <a:sym typeface="Arial" panose="020B0604020202020204"/>
-                </a:defRPr>
-              </a:lvl4pPr>
-              <a:lvl5pPr marR="0" lvl="4" algn="l" rtl="0">
-                <a:lnSpc>
-                  <a:spcPct val="100000"/>
-                </a:lnSpc>
-                <a:spcBef>
-                  <a:spcPts val="0"/>
-                </a:spcBef>
-                <a:spcAft>
-                  <a:spcPts val="0"/>
-                </a:spcAft>
-                <a:buClr>
-                  <a:srgbClr val="000000"/>
-                </a:buClr>
-                <a:buFont typeface="Arial" panose="020B0604020202020204"/>
-                <a:defRPr sz="1400" b="0" i="0" u="none" strike="noStrike" cap="none">
-                  <a:solidFill>
-                    <a:srgbClr val="000000"/>
-                  </a:solidFill>
-                  <a:latin typeface="Arial" panose="020B0604020202020204"/>
-                  <a:ea typeface="Arial" panose="020B0604020202020204"/>
-                  <a:cs typeface="Arial" panose="020B0604020202020204"/>
-                  <a:sym typeface="Arial" panose="020B0604020202020204"/>
-                </a:defRPr>
-              </a:lvl5pPr>
-              <a:lvl6pPr marR="0" lvl="5" algn="l" rtl="0">
-                <a:lnSpc>
-                  <a:spcPct val="100000"/>
-                </a:lnSpc>
-                <a:spcBef>
-                  <a:spcPts val="0"/>
-                </a:spcBef>
-                <a:spcAft>
-                  <a:spcPts val="0"/>
-                </a:spcAft>
-                <a:buClr>
-                  <a:srgbClr val="000000"/>
-                </a:buClr>
-                <a:buFont typeface="Arial" panose="020B0604020202020204"/>
-                <a:defRPr sz="1400" b="0" i="0" u="none" strike="noStrike" cap="none">
-                  <a:solidFill>
-                    <a:srgbClr val="000000"/>
-                  </a:solidFill>
-                  <a:latin typeface="Arial" panose="020B0604020202020204"/>
-                  <a:ea typeface="Arial" panose="020B0604020202020204"/>
-                  <a:cs typeface="Arial" panose="020B0604020202020204"/>
-                  <a:sym typeface="Arial" panose="020B0604020202020204"/>
-                </a:defRPr>
-              </a:lvl6pPr>
-              <a:lvl7pPr marR="0" lvl="6" algn="l" rtl="0">
-                <a:lnSpc>
-                  <a:spcPct val="100000"/>
-                </a:lnSpc>
-                <a:spcBef>
-                  <a:spcPts val="0"/>
-                </a:spcBef>
-                <a:spcAft>
-                  <a:spcPts val="0"/>
-                </a:spcAft>
-                <a:buClr>
-                  <a:srgbClr val="000000"/>
-                </a:buClr>
-                <a:buFont typeface="Arial" panose="020B0604020202020204"/>
-                <a:defRPr sz="1400" b="0" i="0" u="none" strike="noStrike" cap="none">
-                  <a:solidFill>
-                    <a:srgbClr val="000000"/>
-                  </a:solidFill>
-                  <a:latin typeface="Arial" panose="020B0604020202020204"/>
-                  <a:ea typeface="Arial" panose="020B0604020202020204"/>
-                  <a:cs typeface="Arial" panose="020B0604020202020204"/>
-                  <a:sym typeface="Arial" panose="020B0604020202020204"/>
-                </a:defRPr>
-              </a:lvl7pPr>
-              <a:lvl8pPr marR="0" lvl="7" algn="l" rtl="0">
-                <a:lnSpc>
-                  <a:spcPct val="100000"/>
-                </a:lnSpc>
-                <a:spcBef>
-                  <a:spcPts val="0"/>
-                </a:spcBef>
-                <a:spcAft>
-                  <a:spcPts val="0"/>
-                </a:spcAft>
-                <a:buClr>
-                  <a:srgbClr val="000000"/>
-                </a:buClr>
-                <a:buFont typeface="Arial" panose="020B0604020202020204"/>
-                <a:defRPr sz="1400" b="0" i="0" u="none" strike="noStrike" cap="none">
-                  <a:solidFill>
-                    <a:srgbClr val="000000"/>
-                  </a:solidFill>
-                  <a:latin typeface="Arial" panose="020B0604020202020204"/>
-                  <a:ea typeface="Arial" panose="020B0604020202020204"/>
-                  <a:cs typeface="Arial" panose="020B0604020202020204"/>
-                  <a:sym typeface="Arial" panose="020B0604020202020204"/>
-                </a:defRPr>
-              </a:lvl8pPr>
-              <a:lvl9pPr marR="0" lvl="8" algn="l" rtl="0">
-                <a:lnSpc>
-                  <a:spcPct val="100000"/>
-                </a:lnSpc>
-                <a:spcBef>
-                  <a:spcPts val="0"/>
-                </a:spcBef>
-                <a:spcAft>
-                  <a:spcPts val="0"/>
-                </a:spcAft>
-                <a:buClr>
-                  <a:srgbClr val="000000"/>
-                </a:buClr>
-                <a:buFont typeface="Arial" panose="020B0604020202020204"/>
-                <a:defRPr sz="1400" b="0" i="0" u="none" strike="noStrike" cap="none">
-                  <a:solidFill>
-                    <a:srgbClr val="000000"/>
-                  </a:solidFill>
-                  <a:latin typeface="Arial" panose="020B0604020202020204"/>
-                  <a:ea typeface="Arial" panose="020B0604020202020204"/>
-                  <a:cs typeface="Arial" panose="020B0604020202020204"/>
-                  <a:sym typeface="Arial" panose="020B0604020202020204"/>
-                </a:defRPr>
-              </a:lvl9pPr>
-            </a:lstStyle>
-            <a:p>
-              <a:pPr marL="0" lvl="0" indent="0" algn="ctr" rtl="0">
-                <a:spcBef>
-                  <a:spcPts val="0"/>
-                </a:spcBef>
-                <a:spcAft>
-                  <a:spcPts val="0"/>
-                </a:spcAft>
-                <a:buNone/>
-              </a:pPr>
-              <a:endParaRPr sz="1800"/>
-            </a:p>
-          </p:txBody>
-        </p:sp>
-        <p:sp>
-          <p:nvSpPr>
-            <p:cNvPr id="18" name="Google Shape;158;p16">
-              <a:extLst>
-                <a:ext uri="{FF2B5EF4-FFF2-40B4-BE49-F238E27FC236}">
-                  <a16:creationId xmlns:a16="http://schemas.microsoft.com/office/drawing/2014/main" id="{E38C44FB-852A-E8CE-AA35-AD40BB952321}"/>
-                </a:ext>
-              </a:extLst>
-            </p:cNvPr>
-            <p:cNvSpPr txBox="1"/>
-            <p:nvPr/>
-          </p:nvSpPr>
-          <p:spPr>
-            <a:xfrm>
-              <a:off x="4807925" y="4484375"/>
-              <a:ext cx="800100" cy="507575"/>
-            </a:xfrm>
-            <a:prstGeom prst="rect">
-              <a:avLst/>
-            </a:prstGeom>
-            <a:noFill/>
-            <a:ln>
-              <a:noFill/>
-            </a:ln>
-          </p:spPr>
-          <p:txBody>
-            <a:bodyPr spcFirstLastPara="1" wrap="square" lIns="91425" tIns="91425" rIns="91425" bIns="91425" anchor="t" anchorCtr="0">
-              <a:spAutoFit/>
-            </a:bodyPr>
-            <a:lstStyle>
-              <a:defPPr marR="0" lvl="0" algn="l" rtl="0">
-                <a:lnSpc>
-                  <a:spcPct val="100000"/>
-                </a:lnSpc>
-                <a:spcBef>
-                  <a:spcPts val="0"/>
-                </a:spcBef>
-                <a:spcAft>
-                  <a:spcPts val="0"/>
-                </a:spcAft>
-              </a:defPPr>
-              <a:lvl1pPr marR="0" lvl="0" algn="l" rtl="0">
-                <a:lnSpc>
-                  <a:spcPct val="100000"/>
-                </a:lnSpc>
-                <a:spcBef>
-                  <a:spcPts val="0"/>
-                </a:spcBef>
-                <a:spcAft>
-                  <a:spcPts val="0"/>
-                </a:spcAft>
-                <a:buClr>
-                  <a:srgbClr val="000000"/>
-                </a:buClr>
-                <a:buFont typeface="Arial" panose="020B0604020202020204"/>
-                <a:defRPr sz="1400" b="0" i="0" u="none" strike="noStrike" cap="none">
-                  <a:solidFill>
-                    <a:srgbClr val="000000"/>
-                  </a:solidFill>
-                  <a:latin typeface="Arial" panose="020B0604020202020204"/>
-                  <a:ea typeface="Arial" panose="020B0604020202020204"/>
-                  <a:cs typeface="Arial" panose="020B0604020202020204"/>
-                  <a:sym typeface="Arial" panose="020B0604020202020204"/>
-                </a:defRPr>
-              </a:lvl1pPr>
-              <a:lvl2pPr marR="0" lvl="1" algn="l" rtl="0">
-                <a:lnSpc>
-                  <a:spcPct val="100000"/>
-                </a:lnSpc>
-                <a:spcBef>
-                  <a:spcPts val="0"/>
-                </a:spcBef>
-                <a:spcAft>
-                  <a:spcPts val="0"/>
-                </a:spcAft>
-                <a:buClr>
-                  <a:srgbClr val="000000"/>
-                </a:buClr>
-                <a:buFont typeface="Arial" panose="020B0604020202020204"/>
-                <a:defRPr sz="1400" b="0" i="0" u="none" strike="noStrike" cap="none">
-                  <a:solidFill>
-                    <a:srgbClr val="000000"/>
-                  </a:solidFill>
-                  <a:latin typeface="Arial" panose="020B0604020202020204"/>
-                  <a:ea typeface="Arial" panose="020B0604020202020204"/>
-                  <a:cs typeface="Arial" panose="020B0604020202020204"/>
-                  <a:sym typeface="Arial" panose="020B0604020202020204"/>
-                </a:defRPr>
-              </a:lvl2pPr>
-              <a:lvl3pPr marR="0" lvl="2" algn="l" rtl="0">
-                <a:lnSpc>
-                  <a:spcPct val="100000"/>
-                </a:lnSpc>
-                <a:spcBef>
-                  <a:spcPts val="0"/>
-                </a:spcBef>
-                <a:spcAft>
-                  <a:spcPts val="0"/>
-                </a:spcAft>
-                <a:buClr>
-                  <a:srgbClr val="000000"/>
-                </a:buClr>
-                <a:buFont typeface="Arial" panose="020B0604020202020204"/>
-                <a:defRPr sz="1400" b="0" i="0" u="none" strike="noStrike" cap="none">
-                  <a:solidFill>
-                    <a:srgbClr val="000000"/>
-                  </a:solidFill>
-                  <a:latin typeface="Arial" panose="020B0604020202020204"/>
-                  <a:ea typeface="Arial" panose="020B0604020202020204"/>
-                  <a:cs typeface="Arial" panose="020B0604020202020204"/>
-                  <a:sym typeface="Arial" panose="020B0604020202020204"/>
-                </a:defRPr>
-              </a:lvl3pPr>
-              <a:lvl4pPr marR="0" lvl="3" algn="l" rtl="0">
-                <a:lnSpc>
-                  <a:spcPct val="100000"/>
-                </a:lnSpc>
-                <a:spcBef>
-                  <a:spcPts val="0"/>
-                </a:spcBef>
-                <a:spcAft>
-                  <a:spcPts val="0"/>
-                </a:spcAft>
-                <a:buClr>
-                  <a:srgbClr val="000000"/>
-                </a:buClr>
-                <a:buFont typeface="Arial" panose="020B0604020202020204"/>
-                <a:defRPr sz="1400" b="0" i="0" u="none" strike="noStrike" cap="none">
-                  <a:solidFill>
-                    <a:srgbClr val="000000"/>
-                  </a:solidFill>
-                  <a:latin typeface="Arial" panose="020B0604020202020204"/>
-                  <a:ea typeface="Arial" panose="020B0604020202020204"/>
-                  <a:cs typeface="Arial" panose="020B0604020202020204"/>
-                  <a:sym typeface="Arial" panose="020B0604020202020204"/>
-                </a:defRPr>
-              </a:lvl4pPr>
-              <a:lvl5pPr marR="0" lvl="4" algn="l" rtl="0">
-                <a:lnSpc>
-                  <a:spcPct val="100000"/>
-                </a:lnSpc>
-                <a:spcBef>
-                  <a:spcPts val="0"/>
-                </a:spcBef>
-                <a:spcAft>
-                  <a:spcPts val="0"/>
-                </a:spcAft>
-                <a:buClr>
-                  <a:srgbClr val="000000"/>
-                </a:buClr>
-                <a:buFont typeface="Arial" panose="020B0604020202020204"/>
-                <a:defRPr sz="1400" b="0" i="0" u="none" strike="noStrike" cap="none">
-                  <a:solidFill>
-                    <a:srgbClr val="000000"/>
-                  </a:solidFill>
-                  <a:latin typeface="Arial" panose="020B0604020202020204"/>
-                  <a:ea typeface="Arial" panose="020B0604020202020204"/>
-                  <a:cs typeface="Arial" panose="020B0604020202020204"/>
-                  <a:sym typeface="Arial" panose="020B0604020202020204"/>
-                </a:defRPr>
-              </a:lvl5pPr>
-              <a:lvl6pPr marR="0" lvl="5" algn="l" rtl="0">
-                <a:lnSpc>
-                  <a:spcPct val="100000"/>
-                </a:lnSpc>
-                <a:spcBef>
-                  <a:spcPts val="0"/>
-                </a:spcBef>
-                <a:spcAft>
-                  <a:spcPts val="0"/>
-                </a:spcAft>
-                <a:buClr>
-                  <a:srgbClr val="000000"/>
-                </a:buClr>
-                <a:buFont typeface="Arial" panose="020B0604020202020204"/>
-                <a:defRPr sz="1400" b="0" i="0" u="none" strike="noStrike" cap="none">
-                  <a:solidFill>
-                    <a:srgbClr val="000000"/>
-                  </a:solidFill>
-                  <a:latin typeface="Arial" panose="020B0604020202020204"/>
-                  <a:ea typeface="Arial" panose="020B0604020202020204"/>
-                  <a:cs typeface="Arial" panose="020B0604020202020204"/>
-                  <a:sym typeface="Arial" panose="020B0604020202020204"/>
-                </a:defRPr>
-              </a:lvl6pPr>
-              <a:lvl7pPr marR="0" lvl="6" algn="l" rtl="0">
-                <a:lnSpc>
-                  <a:spcPct val="100000"/>
-                </a:lnSpc>
-                <a:spcBef>
-                  <a:spcPts val="0"/>
-                </a:spcBef>
-                <a:spcAft>
-                  <a:spcPts val="0"/>
-                </a:spcAft>
-                <a:buClr>
-                  <a:srgbClr val="000000"/>
-                </a:buClr>
-                <a:buFont typeface="Arial" panose="020B0604020202020204"/>
-                <a:defRPr sz="1400" b="0" i="0" u="none" strike="noStrike" cap="none">
-                  <a:solidFill>
-                    <a:srgbClr val="000000"/>
-                  </a:solidFill>
-                  <a:latin typeface="Arial" panose="020B0604020202020204"/>
-                  <a:ea typeface="Arial" panose="020B0604020202020204"/>
-                  <a:cs typeface="Arial" panose="020B0604020202020204"/>
-                  <a:sym typeface="Arial" panose="020B0604020202020204"/>
-                </a:defRPr>
-              </a:lvl7pPr>
-              <a:lvl8pPr marR="0" lvl="7" algn="l" rtl="0">
-                <a:lnSpc>
-                  <a:spcPct val="100000"/>
-                </a:lnSpc>
-                <a:spcBef>
-                  <a:spcPts val="0"/>
-                </a:spcBef>
-                <a:spcAft>
-                  <a:spcPts val="0"/>
-                </a:spcAft>
-                <a:buClr>
-                  <a:srgbClr val="000000"/>
-                </a:buClr>
-                <a:buFont typeface="Arial" panose="020B0604020202020204"/>
-                <a:defRPr sz="1400" b="0" i="0" u="none" strike="noStrike" cap="none">
-                  <a:solidFill>
-                    <a:srgbClr val="000000"/>
-                  </a:solidFill>
-                  <a:latin typeface="Arial" panose="020B0604020202020204"/>
-                  <a:ea typeface="Arial" panose="020B0604020202020204"/>
-                  <a:cs typeface="Arial" panose="020B0604020202020204"/>
-                  <a:sym typeface="Arial" panose="020B0604020202020204"/>
-                </a:defRPr>
-              </a:lvl8pPr>
-              <a:lvl9pPr marR="0" lvl="8" algn="l" rtl="0">
-                <a:lnSpc>
-                  <a:spcPct val="100000"/>
-                </a:lnSpc>
-                <a:spcBef>
-                  <a:spcPts val="0"/>
-                </a:spcBef>
-                <a:spcAft>
-                  <a:spcPts val="0"/>
-                </a:spcAft>
-                <a:buClr>
-                  <a:srgbClr val="000000"/>
-                </a:buClr>
-                <a:buFont typeface="Arial" panose="020B0604020202020204"/>
-                <a:defRPr sz="1400" b="0" i="0" u="none" strike="noStrike" cap="none">
-                  <a:solidFill>
-                    <a:srgbClr val="000000"/>
-                  </a:solidFill>
-                  <a:latin typeface="Arial" panose="020B0604020202020204"/>
-                  <a:ea typeface="Arial" panose="020B0604020202020204"/>
-                  <a:cs typeface="Arial" panose="020B0604020202020204"/>
-                  <a:sym typeface="Arial" panose="020B0604020202020204"/>
-                </a:defRPr>
-              </a:lvl9pPr>
-            </a:lstStyle>
-            <a:p>
-              <a:pPr marL="0" lvl="0" indent="0" algn="l" rtl="0">
-                <a:spcBef>
-                  <a:spcPts val="0"/>
-                </a:spcBef>
-                <a:spcAft>
-                  <a:spcPts val="0"/>
-                </a:spcAft>
-                <a:buNone/>
-              </a:pPr>
-              <a:r>
-                <a:rPr lang="de-AT" sz="1000" b="1" dirty="0">
-                  <a:solidFill>
-                    <a:schemeClr val="dk1"/>
-                  </a:solidFill>
-                </a:rPr>
-                <a:t>No Building</a:t>
-              </a:r>
-              <a:endParaRPr sz="1000" b="1" dirty="0">
-                <a:solidFill>
-                  <a:schemeClr val="dk1"/>
-                </a:solidFill>
-              </a:endParaRPr>
-            </a:p>
-          </p:txBody>
-        </p:sp>
-        <p:sp>
-          <p:nvSpPr>
-            <p:cNvPr id="19" name="Google Shape;159;p16">
-              <a:extLst>
-                <a:ext uri="{FF2B5EF4-FFF2-40B4-BE49-F238E27FC236}">
-                  <a16:creationId xmlns:a16="http://schemas.microsoft.com/office/drawing/2014/main" id="{4D00177F-CDC7-0F25-08C3-B4767BE48A71}"/>
-                </a:ext>
-              </a:extLst>
-            </p:cNvPr>
-            <p:cNvSpPr/>
-            <p:nvPr/>
-          </p:nvSpPr>
-          <p:spPr>
-            <a:xfrm>
-              <a:off x="5890875" y="4753925"/>
-              <a:ext cx="1009200" cy="234600"/>
-            </a:xfrm>
-            <a:prstGeom prst="rect">
-              <a:avLst/>
-            </a:prstGeom>
-            <a:gradFill>
-              <a:gsLst>
-                <a:gs pos="0">
-                  <a:srgbClr val="1D4877"/>
-                </a:gs>
-                <a:gs pos="24000">
-                  <a:srgbClr val="1B8A5A"/>
-                </a:gs>
-                <a:gs pos="50000">
-                  <a:srgbClr val="FBB021"/>
-                </a:gs>
-                <a:gs pos="75000">
-                  <a:srgbClr val="F68838"/>
-                </a:gs>
-                <a:gs pos="100000">
-                  <a:srgbClr val="EE3E32"/>
-                </a:gs>
-              </a:gsLst>
-              <a:lin ang="0" scaled="0"/>
-            </a:gradFill>
-            <a:ln>
-              <a:noFill/>
-            </a:ln>
-          </p:spPr>
-          <p:txBody>
-            <a:bodyPr spcFirstLastPara="1" wrap="square" lIns="91425" tIns="91425" rIns="91425" bIns="91425" anchor="ctr" anchorCtr="0">
-              <a:noAutofit/>
-            </a:bodyPr>
-            <a:lstStyle>
-              <a:defPPr marR="0" lvl="0" algn="l" rtl="0">
-                <a:lnSpc>
-                  <a:spcPct val="100000"/>
-                </a:lnSpc>
-                <a:spcBef>
-                  <a:spcPts val="0"/>
-                </a:spcBef>
-                <a:spcAft>
-                  <a:spcPts val="0"/>
-                </a:spcAft>
-              </a:defPPr>
-              <a:lvl1pPr marR="0" lvl="0" algn="l" rtl="0">
-                <a:lnSpc>
-                  <a:spcPct val="100000"/>
-                </a:lnSpc>
-                <a:spcBef>
-                  <a:spcPts val="0"/>
-                </a:spcBef>
-                <a:spcAft>
-                  <a:spcPts val="0"/>
-                </a:spcAft>
-                <a:buClr>
-                  <a:srgbClr val="000000"/>
-                </a:buClr>
-                <a:buFont typeface="Arial" panose="020B0604020202020204"/>
-                <a:defRPr sz="1400" b="0" i="0" u="none" strike="noStrike" cap="none">
-                  <a:solidFill>
-                    <a:srgbClr val="000000"/>
-                  </a:solidFill>
-                  <a:latin typeface="Arial" panose="020B0604020202020204"/>
-                  <a:ea typeface="Arial" panose="020B0604020202020204"/>
-                  <a:cs typeface="Arial" panose="020B0604020202020204"/>
-                  <a:sym typeface="Arial" panose="020B0604020202020204"/>
-                </a:defRPr>
-              </a:lvl1pPr>
-              <a:lvl2pPr marR="0" lvl="1" algn="l" rtl="0">
-                <a:lnSpc>
-                  <a:spcPct val="100000"/>
-                </a:lnSpc>
-                <a:spcBef>
-                  <a:spcPts val="0"/>
-                </a:spcBef>
-                <a:spcAft>
-                  <a:spcPts val="0"/>
-                </a:spcAft>
-                <a:buClr>
-                  <a:srgbClr val="000000"/>
-                </a:buClr>
-                <a:buFont typeface="Arial" panose="020B0604020202020204"/>
-                <a:defRPr sz="1400" b="0" i="0" u="none" strike="noStrike" cap="none">
-                  <a:solidFill>
-                    <a:srgbClr val="000000"/>
-                  </a:solidFill>
-                  <a:latin typeface="Arial" panose="020B0604020202020204"/>
-                  <a:ea typeface="Arial" panose="020B0604020202020204"/>
-                  <a:cs typeface="Arial" panose="020B0604020202020204"/>
-                  <a:sym typeface="Arial" panose="020B0604020202020204"/>
-                </a:defRPr>
-              </a:lvl2pPr>
-              <a:lvl3pPr marR="0" lvl="2" algn="l" rtl="0">
-                <a:lnSpc>
-                  <a:spcPct val="100000"/>
-                </a:lnSpc>
-                <a:spcBef>
-                  <a:spcPts val="0"/>
-                </a:spcBef>
-                <a:spcAft>
-                  <a:spcPts val="0"/>
-                </a:spcAft>
-                <a:buClr>
-                  <a:srgbClr val="000000"/>
-                </a:buClr>
-                <a:buFont typeface="Arial" panose="020B0604020202020204"/>
-                <a:defRPr sz="1400" b="0" i="0" u="none" strike="noStrike" cap="none">
-                  <a:solidFill>
-                    <a:srgbClr val="000000"/>
-                  </a:solidFill>
-                  <a:latin typeface="Arial" panose="020B0604020202020204"/>
-                  <a:ea typeface="Arial" panose="020B0604020202020204"/>
-                  <a:cs typeface="Arial" panose="020B0604020202020204"/>
-                  <a:sym typeface="Arial" panose="020B0604020202020204"/>
-                </a:defRPr>
-              </a:lvl3pPr>
-              <a:lvl4pPr marR="0" lvl="3" algn="l" rtl="0">
-                <a:lnSpc>
-                  <a:spcPct val="100000"/>
-                </a:lnSpc>
-                <a:spcBef>
-                  <a:spcPts val="0"/>
-                </a:spcBef>
-                <a:spcAft>
-                  <a:spcPts val="0"/>
-                </a:spcAft>
-                <a:buClr>
-                  <a:srgbClr val="000000"/>
-                </a:buClr>
-                <a:buFont typeface="Arial" panose="020B0604020202020204"/>
-                <a:defRPr sz="1400" b="0" i="0" u="none" strike="noStrike" cap="none">
-                  <a:solidFill>
-                    <a:srgbClr val="000000"/>
-                  </a:solidFill>
-                  <a:latin typeface="Arial" panose="020B0604020202020204"/>
-                  <a:ea typeface="Arial" panose="020B0604020202020204"/>
-                  <a:cs typeface="Arial" panose="020B0604020202020204"/>
-                  <a:sym typeface="Arial" panose="020B0604020202020204"/>
-                </a:defRPr>
-              </a:lvl4pPr>
-              <a:lvl5pPr marR="0" lvl="4" algn="l" rtl="0">
-                <a:lnSpc>
-                  <a:spcPct val="100000"/>
-                </a:lnSpc>
-                <a:spcBef>
-                  <a:spcPts val="0"/>
-                </a:spcBef>
-                <a:spcAft>
-                  <a:spcPts val="0"/>
-                </a:spcAft>
-                <a:buClr>
-                  <a:srgbClr val="000000"/>
-                </a:buClr>
-                <a:buFont typeface="Arial" panose="020B0604020202020204"/>
-                <a:defRPr sz="1400" b="0" i="0" u="none" strike="noStrike" cap="none">
-                  <a:solidFill>
-                    <a:srgbClr val="000000"/>
-                  </a:solidFill>
-                  <a:latin typeface="Arial" panose="020B0604020202020204"/>
-                  <a:ea typeface="Arial" panose="020B0604020202020204"/>
-                  <a:cs typeface="Arial" panose="020B0604020202020204"/>
-                  <a:sym typeface="Arial" panose="020B0604020202020204"/>
-                </a:defRPr>
-              </a:lvl5pPr>
-              <a:lvl6pPr marR="0" lvl="5" algn="l" rtl="0">
-                <a:lnSpc>
-                  <a:spcPct val="100000"/>
-                </a:lnSpc>
-                <a:spcBef>
-                  <a:spcPts val="0"/>
-                </a:spcBef>
-                <a:spcAft>
-                  <a:spcPts val="0"/>
-                </a:spcAft>
-                <a:buClr>
-                  <a:srgbClr val="000000"/>
-                </a:buClr>
-                <a:buFont typeface="Arial" panose="020B0604020202020204"/>
-                <a:defRPr sz="1400" b="0" i="0" u="none" strike="noStrike" cap="none">
-                  <a:solidFill>
-                    <a:srgbClr val="000000"/>
-                  </a:solidFill>
-                  <a:latin typeface="Arial" panose="020B0604020202020204"/>
-                  <a:ea typeface="Arial" panose="020B0604020202020204"/>
-                  <a:cs typeface="Arial" panose="020B0604020202020204"/>
-                  <a:sym typeface="Arial" panose="020B0604020202020204"/>
-                </a:defRPr>
-              </a:lvl6pPr>
-              <a:lvl7pPr marR="0" lvl="6" algn="l" rtl="0">
-                <a:lnSpc>
-                  <a:spcPct val="100000"/>
-                </a:lnSpc>
-                <a:spcBef>
-                  <a:spcPts val="0"/>
-                </a:spcBef>
-                <a:spcAft>
-                  <a:spcPts val="0"/>
-                </a:spcAft>
-                <a:buClr>
-                  <a:srgbClr val="000000"/>
-                </a:buClr>
-                <a:buFont typeface="Arial" panose="020B0604020202020204"/>
-                <a:defRPr sz="1400" b="0" i="0" u="none" strike="noStrike" cap="none">
-                  <a:solidFill>
-                    <a:srgbClr val="000000"/>
-                  </a:solidFill>
-                  <a:latin typeface="Arial" panose="020B0604020202020204"/>
-                  <a:ea typeface="Arial" panose="020B0604020202020204"/>
-                  <a:cs typeface="Arial" panose="020B0604020202020204"/>
-                  <a:sym typeface="Arial" panose="020B0604020202020204"/>
-                </a:defRPr>
-              </a:lvl7pPr>
-              <a:lvl8pPr marR="0" lvl="7" algn="l" rtl="0">
-                <a:lnSpc>
-                  <a:spcPct val="100000"/>
-                </a:lnSpc>
-                <a:spcBef>
-                  <a:spcPts val="0"/>
-                </a:spcBef>
-                <a:spcAft>
-                  <a:spcPts val="0"/>
-                </a:spcAft>
-                <a:buClr>
-                  <a:srgbClr val="000000"/>
-                </a:buClr>
-                <a:buFont typeface="Arial" panose="020B0604020202020204"/>
-                <a:defRPr sz="1400" b="0" i="0" u="none" strike="noStrike" cap="none">
-                  <a:solidFill>
-                    <a:srgbClr val="000000"/>
-                  </a:solidFill>
-                  <a:latin typeface="Arial" panose="020B0604020202020204"/>
-                  <a:ea typeface="Arial" panose="020B0604020202020204"/>
-                  <a:cs typeface="Arial" panose="020B0604020202020204"/>
-                  <a:sym typeface="Arial" panose="020B0604020202020204"/>
-                </a:defRPr>
-              </a:lvl8pPr>
-              <a:lvl9pPr marR="0" lvl="8" algn="l" rtl="0">
-                <a:lnSpc>
-                  <a:spcPct val="100000"/>
-                </a:lnSpc>
-                <a:spcBef>
-                  <a:spcPts val="0"/>
-                </a:spcBef>
-                <a:spcAft>
-                  <a:spcPts val="0"/>
-                </a:spcAft>
-                <a:buClr>
-                  <a:srgbClr val="000000"/>
-                </a:buClr>
-                <a:buFont typeface="Arial" panose="020B0604020202020204"/>
-                <a:defRPr sz="1400" b="0" i="0" u="none" strike="noStrike" cap="none">
-                  <a:solidFill>
-                    <a:srgbClr val="000000"/>
-                  </a:solidFill>
-                  <a:latin typeface="Arial" panose="020B0604020202020204"/>
-                  <a:ea typeface="Arial" panose="020B0604020202020204"/>
-                  <a:cs typeface="Arial" panose="020B0604020202020204"/>
-                  <a:sym typeface="Arial" panose="020B0604020202020204"/>
-                </a:defRPr>
-              </a:lvl9pPr>
-            </a:lstStyle>
-            <a:p>
-              <a:pPr marL="0" lvl="0" indent="0" algn="ctr" rtl="0">
-                <a:spcBef>
-                  <a:spcPts val="0"/>
-                </a:spcBef>
-                <a:spcAft>
-                  <a:spcPts val="0"/>
-                </a:spcAft>
-                <a:buNone/>
-              </a:pPr>
-              <a:endParaRPr sz="1800"/>
-            </a:p>
-          </p:txBody>
-        </p:sp>
-        <p:sp>
-          <p:nvSpPr>
-            <p:cNvPr id="20" name="Google Shape;160;p16">
-              <a:extLst>
-                <a:ext uri="{FF2B5EF4-FFF2-40B4-BE49-F238E27FC236}">
-                  <a16:creationId xmlns:a16="http://schemas.microsoft.com/office/drawing/2014/main" id="{2A44F1C0-705F-63B6-1892-E834A7E81E7A}"/>
-                </a:ext>
-              </a:extLst>
-            </p:cNvPr>
-            <p:cNvSpPr txBox="1"/>
-            <p:nvPr/>
-          </p:nvSpPr>
-          <p:spPr>
-            <a:xfrm>
-              <a:off x="5647974" y="4709676"/>
-              <a:ext cx="233100" cy="356879"/>
-            </a:xfrm>
-            <a:prstGeom prst="rect">
-              <a:avLst/>
-            </a:prstGeom>
-            <a:noFill/>
-            <a:ln>
-              <a:noFill/>
-            </a:ln>
-          </p:spPr>
-          <p:txBody>
-            <a:bodyPr spcFirstLastPara="1" wrap="square" lIns="91425" tIns="91425" rIns="91425" bIns="91425" anchor="t" anchorCtr="0">
-              <a:spAutoFit/>
-            </a:bodyPr>
-            <a:lstStyle>
-              <a:defPPr marR="0" lvl="0" algn="l" rtl="0">
-                <a:lnSpc>
-                  <a:spcPct val="100000"/>
-                </a:lnSpc>
-                <a:spcBef>
-                  <a:spcPts val="0"/>
-                </a:spcBef>
-                <a:spcAft>
-                  <a:spcPts val="0"/>
-                </a:spcAft>
-              </a:defPPr>
-              <a:lvl1pPr marR="0" lvl="0" algn="l" rtl="0">
-                <a:lnSpc>
-                  <a:spcPct val="100000"/>
-                </a:lnSpc>
-                <a:spcBef>
-                  <a:spcPts val="0"/>
-                </a:spcBef>
-                <a:spcAft>
-                  <a:spcPts val="0"/>
-                </a:spcAft>
-                <a:buClr>
-                  <a:srgbClr val="000000"/>
-                </a:buClr>
-                <a:buFont typeface="Arial" panose="020B0604020202020204"/>
-                <a:defRPr sz="1400" b="0" i="0" u="none" strike="noStrike" cap="none">
-                  <a:solidFill>
-                    <a:srgbClr val="000000"/>
-                  </a:solidFill>
-                  <a:latin typeface="Arial" panose="020B0604020202020204"/>
-                  <a:ea typeface="Arial" panose="020B0604020202020204"/>
-                  <a:cs typeface="Arial" panose="020B0604020202020204"/>
-                  <a:sym typeface="Arial" panose="020B0604020202020204"/>
-                </a:defRPr>
-              </a:lvl1pPr>
-              <a:lvl2pPr marR="0" lvl="1" algn="l" rtl="0">
-                <a:lnSpc>
-                  <a:spcPct val="100000"/>
-                </a:lnSpc>
-                <a:spcBef>
-                  <a:spcPts val="0"/>
-                </a:spcBef>
-                <a:spcAft>
-                  <a:spcPts val="0"/>
-                </a:spcAft>
-                <a:buClr>
-                  <a:srgbClr val="000000"/>
-                </a:buClr>
-                <a:buFont typeface="Arial" panose="020B0604020202020204"/>
-                <a:defRPr sz="1400" b="0" i="0" u="none" strike="noStrike" cap="none">
-                  <a:solidFill>
-                    <a:srgbClr val="000000"/>
-                  </a:solidFill>
-                  <a:latin typeface="Arial" panose="020B0604020202020204"/>
-                  <a:ea typeface="Arial" panose="020B0604020202020204"/>
-                  <a:cs typeface="Arial" panose="020B0604020202020204"/>
-                  <a:sym typeface="Arial" panose="020B0604020202020204"/>
-                </a:defRPr>
-              </a:lvl2pPr>
-              <a:lvl3pPr marR="0" lvl="2" algn="l" rtl="0">
-                <a:lnSpc>
-                  <a:spcPct val="100000"/>
-                </a:lnSpc>
-                <a:spcBef>
-                  <a:spcPts val="0"/>
-                </a:spcBef>
-                <a:spcAft>
-                  <a:spcPts val="0"/>
-                </a:spcAft>
-                <a:buClr>
-                  <a:srgbClr val="000000"/>
-                </a:buClr>
-                <a:buFont typeface="Arial" panose="020B0604020202020204"/>
-                <a:defRPr sz="1400" b="0" i="0" u="none" strike="noStrike" cap="none">
-                  <a:solidFill>
-                    <a:srgbClr val="000000"/>
-                  </a:solidFill>
-                  <a:latin typeface="Arial" panose="020B0604020202020204"/>
-                  <a:ea typeface="Arial" panose="020B0604020202020204"/>
-                  <a:cs typeface="Arial" panose="020B0604020202020204"/>
-                  <a:sym typeface="Arial" panose="020B0604020202020204"/>
-                </a:defRPr>
-              </a:lvl3pPr>
-              <a:lvl4pPr marR="0" lvl="3" algn="l" rtl="0">
-                <a:lnSpc>
-                  <a:spcPct val="100000"/>
-                </a:lnSpc>
-                <a:spcBef>
-                  <a:spcPts val="0"/>
-                </a:spcBef>
-                <a:spcAft>
-                  <a:spcPts val="0"/>
-                </a:spcAft>
-                <a:buClr>
-                  <a:srgbClr val="000000"/>
-                </a:buClr>
-                <a:buFont typeface="Arial" panose="020B0604020202020204"/>
-                <a:defRPr sz="1400" b="0" i="0" u="none" strike="noStrike" cap="none">
-                  <a:solidFill>
-                    <a:srgbClr val="000000"/>
-                  </a:solidFill>
-                  <a:latin typeface="Arial" panose="020B0604020202020204"/>
-                  <a:ea typeface="Arial" panose="020B0604020202020204"/>
-                  <a:cs typeface="Arial" panose="020B0604020202020204"/>
-                  <a:sym typeface="Arial" panose="020B0604020202020204"/>
-                </a:defRPr>
-              </a:lvl4pPr>
-              <a:lvl5pPr marR="0" lvl="4" algn="l" rtl="0">
-                <a:lnSpc>
-                  <a:spcPct val="100000"/>
-                </a:lnSpc>
-                <a:spcBef>
-                  <a:spcPts val="0"/>
-                </a:spcBef>
-                <a:spcAft>
-                  <a:spcPts val="0"/>
-                </a:spcAft>
-                <a:buClr>
-                  <a:srgbClr val="000000"/>
-                </a:buClr>
-                <a:buFont typeface="Arial" panose="020B0604020202020204"/>
-                <a:defRPr sz="1400" b="0" i="0" u="none" strike="noStrike" cap="none">
-                  <a:solidFill>
-                    <a:srgbClr val="000000"/>
-                  </a:solidFill>
-                  <a:latin typeface="Arial" panose="020B0604020202020204"/>
-                  <a:ea typeface="Arial" panose="020B0604020202020204"/>
-                  <a:cs typeface="Arial" panose="020B0604020202020204"/>
-                  <a:sym typeface="Arial" panose="020B0604020202020204"/>
-                </a:defRPr>
-              </a:lvl5pPr>
-              <a:lvl6pPr marR="0" lvl="5" algn="l" rtl="0">
-                <a:lnSpc>
-                  <a:spcPct val="100000"/>
-                </a:lnSpc>
-                <a:spcBef>
-                  <a:spcPts val="0"/>
-                </a:spcBef>
-                <a:spcAft>
-                  <a:spcPts val="0"/>
-                </a:spcAft>
-                <a:buClr>
-                  <a:srgbClr val="000000"/>
-                </a:buClr>
-                <a:buFont typeface="Arial" panose="020B0604020202020204"/>
-                <a:defRPr sz="1400" b="0" i="0" u="none" strike="noStrike" cap="none">
-                  <a:solidFill>
-                    <a:srgbClr val="000000"/>
-                  </a:solidFill>
-                  <a:latin typeface="Arial" panose="020B0604020202020204"/>
-                  <a:ea typeface="Arial" panose="020B0604020202020204"/>
-                  <a:cs typeface="Arial" panose="020B0604020202020204"/>
-                  <a:sym typeface="Arial" panose="020B0604020202020204"/>
-                </a:defRPr>
-              </a:lvl6pPr>
-              <a:lvl7pPr marR="0" lvl="6" algn="l" rtl="0">
-                <a:lnSpc>
-                  <a:spcPct val="100000"/>
-                </a:lnSpc>
-                <a:spcBef>
-                  <a:spcPts val="0"/>
-                </a:spcBef>
-                <a:spcAft>
-                  <a:spcPts val="0"/>
-                </a:spcAft>
-                <a:buClr>
-                  <a:srgbClr val="000000"/>
-                </a:buClr>
-                <a:buFont typeface="Arial" panose="020B0604020202020204"/>
-                <a:defRPr sz="1400" b="0" i="0" u="none" strike="noStrike" cap="none">
-                  <a:solidFill>
-                    <a:srgbClr val="000000"/>
-                  </a:solidFill>
-                  <a:latin typeface="Arial" panose="020B0604020202020204"/>
-                  <a:ea typeface="Arial" panose="020B0604020202020204"/>
-                  <a:cs typeface="Arial" panose="020B0604020202020204"/>
-                  <a:sym typeface="Arial" panose="020B0604020202020204"/>
-                </a:defRPr>
-              </a:lvl7pPr>
-              <a:lvl8pPr marR="0" lvl="7" algn="l" rtl="0">
-                <a:lnSpc>
-                  <a:spcPct val="100000"/>
-                </a:lnSpc>
-                <a:spcBef>
-                  <a:spcPts val="0"/>
-                </a:spcBef>
-                <a:spcAft>
-                  <a:spcPts val="0"/>
-                </a:spcAft>
-                <a:buClr>
-                  <a:srgbClr val="000000"/>
-                </a:buClr>
-                <a:buFont typeface="Arial" panose="020B0604020202020204"/>
-                <a:defRPr sz="1400" b="0" i="0" u="none" strike="noStrike" cap="none">
-                  <a:solidFill>
-                    <a:srgbClr val="000000"/>
-                  </a:solidFill>
-                  <a:latin typeface="Arial" panose="020B0604020202020204"/>
-                  <a:ea typeface="Arial" panose="020B0604020202020204"/>
-                  <a:cs typeface="Arial" panose="020B0604020202020204"/>
-                  <a:sym typeface="Arial" panose="020B0604020202020204"/>
-                </a:defRPr>
-              </a:lvl8pPr>
-              <a:lvl9pPr marR="0" lvl="8" algn="l" rtl="0">
-                <a:lnSpc>
-                  <a:spcPct val="100000"/>
-                </a:lnSpc>
-                <a:spcBef>
-                  <a:spcPts val="0"/>
-                </a:spcBef>
-                <a:spcAft>
-                  <a:spcPts val="0"/>
-                </a:spcAft>
-                <a:buClr>
-                  <a:srgbClr val="000000"/>
-                </a:buClr>
-                <a:buFont typeface="Arial" panose="020B0604020202020204"/>
-                <a:defRPr sz="1400" b="0" i="0" u="none" strike="noStrike" cap="none">
-                  <a:solidFill>
-                    <a:srgbClr val="000000"/>
-                  </a:solidFill>
-                  <a:latin typeface="Arial" panose="020B0604020202020204"/>
-                  <a:ea typeface="Arial" panose="020B0604020202020204"/>
-                  <a:cs typeface="Arial" panose="020B0604020202020204"/>
-                  <a:sym typeface="Arial" panose="020B0604020202020204"/>
-                </a:defRPr>
-              </a:lvl9pPr>
-            </a:lstStyle>
-            <a:p>
-              <a:pPr marL="0" lvl="0" indent="0" algn="l" rtl="0">
-                <a:spcBef>
-                  <a:spcPts val="0"/>
-                </a:spcBef>
-                <a:spcAft>
-                  <a:spcPts val="0"/>
-                </a:spcAft>
-                <a:buNone/>
-              </a:pPr>
-              <a:r>
-                <a:rPr lang="de-AT" sz="1050">
-                  <a:solidFill>
-                    <a:schemeClr val="dk1"/>
-                  </a:solidFill>
-                </a:rPr>
-                <a:t>0</a:t>
-              </a:r>
-              <a:endParaRPr sz="1050">
-                <a:solidFill>
-                  <a:schemeClr val="dk1"/>
-                </a:solidFill>
-              </a:endParaRPr>
-            </a:p>
-          </p:txBody>
-        </p:sp>
-        <p:sp>
-          <p:nvSpPr>
-            <p:cNvPr id="21" name="Google Shape;161;p16">
-              <a:extLst>
-                <a:ext uri="{FF2B5EF4-FFF2-40B4-BE49-F238E27FC236}">
-                  <a16:creationId xmlns:a16="http://schemas.microsoft.com/office/drawing/2014/main" id="{1AC6F036-707E-BE20-2985-A19BC9824237}"/>
-                </a:ext>
-              </a:extLst>
-            </p:cNvPr>
-            <p:cNvSpPr txBox="1"/>
-            <p:nvPr/>
-          </p:nvSpPr>
-          <p:spPr>
-            <a:xfrm>
-              <a:off x="6909875" y="4709675"/>
-              <a:ext cx="591300" cy="356879"/>
-            </a:xfrm>
-            <a:prstGeom prst="rect">
-              <a:avLst/>
-            </a:prstGeom>
-            <a:noFill/>
-            <a:ln>
-              <a:noFill/>
-            </a:ln>
-          </p:spPr>
-          <p:txBody>
-            <a:bodyPr spcFirstLastPara="1" wrap="square" lIns="91425" tIns="91425" rIns="91425" bIns="91425" anchor="t" anchorCtr="0">
-              <a:spAutoFit/>
-            </a:bodyPr>
-            <a:lstStyle>
-              <a:defPPr marR="0" lvl="0" algn="l" rtl="0">
-                <a:lnSpc>
-                  <a:spcPct val="100000"/>
-                </a:lnSpc>
-                <a:spcBef>
-                  <a:spcPts val="0"/>
-                </a:spcBef>
-                <a:spcAft>
-                  <a:spcPts val="0"/>
-                </a:spcAft>
-              </a:defPPr>
-              <a:lvl1pPr marR="0" lvl="0" algn="l" rtl="0">
-                <a:lnSpc>
-                  <a:spcPct val="100000"/>
-                </a:lnSpc>
-                <a:spcBef>
-                  <a:spcPts val="0"/>
-                </a:spcBef>
-                <a:spcAft>
-                  <a:spcPts val="0"/>
-                </a:spcAft>
-                <a:buClr>
-                  <a:srgbClr val="000000"/>
-                </a:buClr>
-                <a:buFont typeface="Arial" panose="020B0604020202020204"/>
-                <a:defRPr sz="1400" b="0" i="0" u="none" strike="noStrike" cap="none">
-                  <a:solidFill>
-                    <a:srgbClr val="000000"/>
-                  </a:solidFill>
-                  <a:latin typeface="Arial" panose="020B0604020202020204"/>
-                  <a:ea typeface="Arial" panose="020B0604020202020204"/>
-                  <a:cs typeface="Arial" panose="020B0604020202020204"/>
-                  <a:sym typeface="Arial" panose="020B0604020202020204"/>
-                </a:defRPr>
-              </a:lvl1pPr>
-              <a:lvl2pPr marR="0" lvl="1" algn="l" rtl="0">
-                <a:lnSpc>
-                  <a:spcPct val="100000"/>
-                </a:lnSpc>
-                <a:spcBef>
-                  <a:spcPts val="0"/>
-                </a:spcBef>
-                <a:spcAft>
-                  <a:spcPts val="0"/>
-                </a:spcAft>
-                <a:buClr>
-                  <a:srgbClr val="000000"/>
-                </a:buClr>
-                <a:buFont typeface="Arial" panose="020B0604020202020204"/>
-                <a:defRPr sz="1400" b="0" i="0" u="none" strike="noStrike" cap="none">
-                  <a:solidFill>
-                    <a:srgbClr val="000000"/>
-                  </a:solidFill>
-                  <a:latin typeface="Arial" panose="020B0604020202020204"/>
-                  <a:ea typeface="Arial" panose="020B0604020202020204"/>
-                  <a:cs typeface="Arial" panose="020B0604020202020204"/>
-                  <a:sym typeface="Arial" panose="020B0604020202020204"/>
-                </a:defRPr>
-              </a:lvl2pPr>
-              <a:lvl3pPr marR="0" lvl="2" algn="l" rtl="0">
-                <a:lnSpc>
-                  <a:spcPct val="100000"/>
-                </a:lnSpc>
-                <a:spcBef>
-                  <a:spcPts val="0"/>
-                </a:spcBef>
-                <a:spcAft>
-                  <a:spcPts val="0"/>
-                </a:spcAft>
-                <a:buClr>
-                  <a:srgbClr val="000000"/>
-                </a:buClr>
-                <a:buFont typeface="Arial" panose="020B0604020202020204"/>
-                <a:defRPr sz="1400" b="0" i="0" u="none" strike="noStrike" cap="none">
-                  <a:solidFill>
-                    <a:srgbClr val="000000"/>
-                  </a:solidFill>
-                  <a:latin typeface="Arial" panose="020B0604020202020204"/>
-                  <a:ea typeface="Arial" panose="020B0604020202020204"/>
-                  <a:cs typeface="Arial" panose="020B0604020202020204"/>
-                  <a:sym typeface="Arial" panose="020B0604020202020204"/>
-                </a:defRPr>
-              </a:lvl3pPr>
-              <a:lvl4pPr marR="0" lvl="3" algn="l" rtl="0">
-                <a:lnSpc>
-                  <a:spcPct val="100000"/>
-                </a:lnSpc>
-                <a:spcBef>
-                  <a:spcPts val="0"/>
-                </a:spcBef>
-                <a:spcAft>
-                  <a:spcPts val="0"/>
-                </a:spcAft>
-                <a:buClr>
-                  <a:srgbClr val="000000"/>
-                </a:buClr>
-                <a:buFont typeface="Arial" panose="020B0604020202020204"/>
-                <a:defRPr sz="1400" b="0" i="0" u="none" strike="noStrike" cap="none">
-                  <a:solidFill>
-                    <a:srgbClr val="000000"/>
-                  </a:solidFill>
-                  <a:latin typeface="Arial" panose="020B0604020202020204"/>
-                  <a:ea typeface="Arial" panose="020B0604020202020204"/>
-                  <a:cs typeface="Arial" panose="020B0604020202020204"/>
-                  <a:sym typeface="Arial" panose="020B0604020202020204"/>
-                </a:defRPr>
-              </a:lvl4pPr>
-              <a:lvl5pPr marR="0" lvl="4" algn="l" rtl="0">
-                <a:lnSpc>
-                  <a:spcPct val="100000"/>
-                </a:lnSpc>
-                <a:spcBef>
-                  <a:spcPts val="0"/>
-                </a:spcBef>
-                <a:spcAft>
-                  <a:spcPts val="0"/>
-                </a:spcAft>
-                <a:buClr>
-                  <a:srgbClr val="000000"/>
-                </a:buClr>
-                <a:buFont typeface="Arial" panose="020B0604020202020204"/>
-                <a:defRPr sz="1400" b="0" i="0" u="none" strike="noStrike" cap="none">
-                  <a:solidFill>
-                    <a:srgbClr val="000000"/>
-                  </a:solidFill>
-                  <a:latin typeface="Arial" panose="020B0604020202020204"/>
-                  <a:ea typeface="Arial" panose="020B0604020202020204"/>
-                  <a:cs typeface="Arial" panose="020B0604020202020204"/>
-                  <a:sym typeface="Arial" panose="020B0604020202020204"/>
-                </a:defRPr>
-              </a:lvl5pPr>
-              <a:lvl6pPr marR="0" lvl="5" algn="l" rtl="0">
-                <a:lnSpc>
-                  <a:spcPct val="100000"/>
-                </a:lnSpc>
-                <a:spcBef>
-                  <a:spcPts val="0"/>
-                </a:spcBef>
-                <a:spcAft>
-                  <a:spcPts val="0"/>
-                </a:spcAft>
-                <a:buClr>
-                  <a:srgbClr val="000000"/>
-                </a:buClr>
-                <a:buFont typeface="Arial" panose="020B0604020202020204"/>
-                <a:defRPr sz="1400" b="0" i="0" u="none" strike="noStrike" cap="none">
-                  <a:solidFill>
-                    <a:srgbClr val="000000"/>
-                  </a:solidFill>
-                  <a:latin typeface="Arial" panose="020B0604020202020204"/>
-                  <a:ea typeface="Arial" panose="020B0604020202020204"/>
-                  <a:cs typeface="Arial" panose="020B0604020202020204"/>
-                  <a:sym typeface="Arial" panose="020B0604020202020204"/>
-                </a:defRPr>
-              </a:lvl6pPr>
-              <a:lvl7pPr marR="0" lvl="6" algn="l" rtl="0">
-                <a:lnSpc>
-                  <a:spcPct val="100000"/>
-                </a:lnSpc>
-                <a:spcBef>
-                  <a:spcPts val="0"/>
-                </a:spcBef>
-                <a:spcAft>
-                  <a:spcPts val="0"/>
-                </a:spcAft>
-                <a:buClr>
-                  <a:srgbClr val="000000"/>
-                </a:buClr>
-                <a:buFont typeface="Arial" panose="020B0604020202020204"/>
-                <a:defRPr sz="1400" b="0" i="0" u="none" strike="noStrike" cap="none">
-                  <a:solidFill>
-                    <a:srgbClr val="000000"/>
-                  </a:solidFill>
-                  <a:latin typeface="Arial" panose="020B0604020202020204"/>
-                  <a:ea typeface="Arial" panose="020B0604020202020204"/>
-                  <a:cs typeface="Arial" panose="020B0604020202020204"/>
-                  <a:sym typeface="Arial" panose="020B0604020202020204"/>
-                </a:defRPr>
-              </a:lvl7pPr>
-              <a:lvl8pPr marR="0" lvl="7" algn="l" rtl="0">
-                <a:lnSpc>
-                  <a:spcPct val="100000"/>
-                </a:lnSpc>
-                <a:spcBef>
-                  <a:spcPts val="0"/>
-                </a:spcBef>
-                <a:spcAft>
-                  <a:spcPts val="0"/>
-                </a:spcAft>
-                <a:buClr>
-                  <a:srgbClr val="000000"/>
-                </a:buClr>
-                <a:buFont typeface="Arial" panose="020B0604020202020204"/>
-                <a:defRPr sz="1400" b="0" i="0" u="none" strike="noStrike" cap="none">
-                  <a:solidFill>
-                    <a:srgbClr val="000000"/>
-                  </a:solidFill>
-                  <a:latin typeface="Arial" panose="020B0604020202020204"/>
-                  <a:ea typeface="Arial" panose="020B0604020202020204"/>
-                  <a:cs typeface="Arial" panose="020B0604020202020204"/>
-                  <a:sym typeface="Arial" panose="020B0604020202020204"/>
-                </a:defRPr>
-              </a:lvl8pPr>
-              <a:lvl9pPr marR="0" lvl="8" algn="l" rtl="0">
-                <a:lnSpc>
-                  <a:spcPct val="100000"/>
-                </a:lnSpc>
-                <a:spcBef>
-                  <a:spcPts val="0"/>
-                </a:spcBef>
-                <a:spcAft>
-                  <a:spcPts val="0"/>
-                </a:spcAft>
-                <a:buClr>
-                  <a:srgbClr val="000000"/>
-                </a:buClr>
-                <a:buFont typeface="Arial" panose="020B0604020202020204"/>
-                <a:defRPr sz="1400" b="0" i="0" u="none" strike="noStrike" cap="none">
-                  <a:solidFill>
-                    <a:srgbClr val="000000"/>
-                  </a:solidFill>
-                  <a:latin typeface="Arial" panose="020B0604020202020204"/>
-                  <a:ea typeface="Arial" panose="020B0604020202020204"/>
-                  <a:cs typeface="Arial" panose="020B0604020202020204"/>
-                  <a:sym typeface="Arial" panose="020B0604020202020204"/>
-                </a:defRPr>
-              </a:lvl9pPr>
-            </a:lstStyle>
-            <a:p>
-              <a:pPr marL="0" lvl="0" indent="0" algn="l" rtl="0">
-                <a:spcBef>
-                  <a:spcPts val="0"/>
-                </a:spcBef>
-                <a:spcAft>
-                  <a:spcPts val="0"/>
-                </a:spcAft>
-                <a:buNone/>
-              </a:pPr>
-              <a:r>
-                <a:rPr lang="de-AT" sz="1050">
-                  <a:solidFill>
-                    <a:schemeClr val="dk1"/>
-                  </a:solidFill>
-                </a:rPr>
-                <a:t>100m</a:t>
-              </a:r>
-              <a:endParaRPr sz="1050">
-                <a:solidFill>
-                  <a:schemeClr val="dk1"/>
-                </a:solidFill>
-              </a:endParaRPr>
-            </a:p>
-          </p:txBody>
-        </p:sp>
-        <p:sp>
-          <p:nvSpPr>
-            <p:cNvPr id="22" name="Google Shape;162;p16">
-              <a:extLst>
-                <a:ext uri="{FF2B5EF4-FFF2-40B4-BE49-F238E27FC236}">
-                  <a16:creationId xmlns:a16="http://schemas.microsoft.com/office/drawing/2014/main" id="{FC8456CD-8F64-C977-7C60-F1174824676B}"/>
-                </a:ext>
-              </a:extLst>
-            </p:cNvPr>
-            <p:cNvSpPr txBox="1"/>
-            <p:nvPr/>
-          </p:nvSpPr>
-          <p:spPr>
-            <a:xfrm>
-              <a:off x="5819375" y="4484375"/>
-              <a:ext cx="1681800" cy="348948"/>
-            </a:xfrm>
-            <a:prstGeom prst="rect">
-              <a:avLst/>
-            </a:prstGeom>
-            <a:noFill/>
-            <a:ln>
-              <a:noFill/>
-            </a:ln>
-          </p:spPr>
-          <p:txBody>
-            <a:bodyPr spcFirstLastPara="1" wrap="square" lIns="91425" tIns="91425" rIns="91425" bIns="91425" anchor="t" anchorCtr="0">
-              <a:spAutoFit/>
-            </a:bodyPr>
-            <a:lstStyle>
-              <a:defPPr marR="0" lvl="0" algn="l" rtl="0">
-                <a:lnSpc>
-                  <a:spcPct val="100000"/>
-                </a:lnSpc>
-                <a:spcBef>
-                  <a:spcPts val="0"/>
-                </a:spcBef>
-                <a:spcAft>
-                  <a:spcPts val="0"/>
-                </a:spcAft>
-              </a:defPPr>
-              <a:lvl1pPr marR="0" lvl="0" algn="l" rtl="0">
-                <a:lnSpc>
-                  <a:spcPct val="100000"/>
-                </a:lnSpc>
-                <a:spcBef>
-                  <a:spcPts val="0"/>
-                </a:spcBef>
-                <a:spcAft>
-                  <a:spcPts val="0"/>
-                </a:spcAft>
-                <a:buClr>
-                  <a:srgbClr val="000000"/>
-                </a:buClr>
-                <a:buFont typeface="Arial" panose="020B0604020202020204"/>
-                <a:defRPr sz="1400" b="0" i="0" u="none" strike="noStrike" cap="none">
-                  <a:solidFill>
-                    <a:srgbClr val="000000"/>
-                  </a:solidFill>
-                  <a:latin typeface="Arial" panose="020B0604020202020204"/>
-                  <a:ea typeface="Arial" panose="020B0604020202020204"/>
-                  <a:cs typeface="Arial" panose="020B0604020202020204"/>
-                  <a:sym typeface="Arial" panose="020B0604020202020204"/>
-                </a:defRPr>
-              </a:lvl1pPr>
-              <a:lvl2pPr marR="0" lvl="1" algn="l" rtl="0">
-                <a:lnSpc>
-                  <a:spcPct val="100000"/>
-                </a:lnSpc>
-                <a:spcBef>
-                  <a:spcPts val="0"/>
-                </a:spcBef>
-                <a:spcAft>
-                  <a:spcPts val="0"/>
-                </a:spcAft>
-                <a:buClr>
-                  <a:srgbClr val="000000"/>
-                </a:buClr>
-                <a:buFont typeface="Arial" panose="020B0604020202020204"/>
-                <a:defRPr sz="1400" b="0" i="0" u="none" strike="noStrike" cap="none">
-                  <a:solidFill>
-                    <a:srgbClr val="000000"/>
-                  </a:solidFill>
-                  <a:latin typeface="Arial" panose="020B0604020202020204"/>
-                  <a:ea typeface="Arial" panose="020B0604020202020204"/>
-                  <a:cs typeface="Arial" panose="020B0604020202020204"/>
-                  <a:sym typeface="Arial" panose="020B0604020202020204"/>
-                </a:defRPr>
-              </a:lvl2pPr>
-              <a:lvl3pPr marR="0" lvl="2" algn="l" rtl="0">
-                <a:lnSpc>
-                  <a:spcPct val="100000"/>
-                </a:lnSpc>
-                <a:spcBef>
-                  <a:spcPts val="0"/>
-                </a:spcBef>
-                <a:spcAft>
-                  <a:spcPts val="0"/>
-                </a:spcAft>
-                <a:buClr>
-                  <a:srgbClr val="000000"/>
-                </a:buClr>
-                <a:buFont typeface="Arial" panose="020B0604020202020204"/>
-                <a:defRPr sz="1400" b="0" i="0" u="none" strike="noStrike" cap="none">
-                  <a:solidFill>
-                    <a:srgbClr val="000000"/>
-                  </a:solidFill>
-                  <a:latin typeface="Arial" panose="020B0604020202020204"/>
-                  <a:ea typeface="Arial" panose="020B0604020202020204"/>
-                  <a:cs typeface="Arial" panose="020B0604020202020204"/>
-                  <a:sym typeface="Arial" panose="020B0604020202020204"/>
-                </a:defRPr>
-              </a:lvl3pPr>
-              <a:lvl4pPr marR="0" lvl="3" algn="l" rtl="0">
-                <a:lnSpc>
-                  <a:spcPct val="100000"/>
-                </a:lnSpc>
-                <a:spcBef>
-                  <a:spcPts val="0"/>
-                </a:spcBef>
-                <a:spcAft>
-                  <a:spcPts val="0"/>
-                </a:spcAft>
-                <a:buClr>
-                  <a:srgbClr val="000000"/>
-                </a:buClr>
-                <a:buFont typeface="Arial" panose="020B0604020202020204"/>
-                <a:defRPr sz="1400" b="0" i="0" u="none" strike="noStrike" cap="none">
-                  <a:solidFill>
-                    <a:srgbClr val="000000"/>
-                  </a:solidFill>
-                  <a:latin typeface="Arial" panose="020B0604020202020204"/>
-                  <a:ea typeface="Arial" panose="020B0604020202020204"/>
-                  <a:cs typeface="Arial" panose="020B0604020202020204"/>
-                  <a:sym typeface="Arial" panose="020B0604020202020204"/>
-                </a:defRPr>
-              </a:lvl4pPr>
-              <a:lvl5pPr marR="0" lvl="4" algn="l" rtl="0">
-                <a:lnSpc>
-                  <a:spcPct val="100000"/>
-                </a:lnSpc>
-                <a:spcBef>
-                  <a:spcPts val="0"/>
-                </a:spcBef>
-                <a:spcAft>
-                  <a:spcPts val="0"/>
-                </a:spcAft>
-                <a:buClr>
-                  <a:srgbClr val="000000"/>
-                </a:buClr>
-                <a:buFont typeface="Arial" panose="020B0604020202020204"/>
-                <a:defRPr sz="1400" b="0" i="0" u="none" strike="noStrike" cap="none">
-                  <a:solidFill>
-                    <a:srgbClr val="000000"/>
-                  </a:solidFill>
-                  <a:latin typeface="Arial" panose="020B0604020202020204"/>
-                  <a:ea typeface="Arial" panose="020B0604020202020204"/>
-                  <a:cs typeface="Arial" panose="020B0604020202020204"/>
-                  <a:sym typeface="Arial" panose="020B0604020202020204"/>
-                </a:defRPr>
-              </a:lvl5pPr>
-              <a:lvl6pPr marR="0" lvl="5" algn="l" rtl="0">
-                <a:lnSpc>
-                  <a:spcPct val="100000"/>
-                </a:lnSpc>
-                <a:spcBef>
-                  <a:spcPts val="0"/>
-                </a:spcBef>
-                <a:spcAft>
-                  <a:spcPts val="0"/>
-                </a:spcAft>
-                <a:buClr>
-                  <a:srgbClr val="000000"/>
-                </a:buClr>
-                <a:buFont typeface="Arial" panose="020B0604020202020204"/>
-                <a:defRPr sz="1400" b="0" i="0" u="none" strike="noStrike" cap="none">
-                  <a:solidFill>
-                    <a:srgbClr val="000000"/>
-                  </a:solidFill>
-                  <a:latin typeface="Arial" panose="020B0604020202020204"/>
-                  <a:ea typeface="Arial" panose="020B0604020202020204"/>
-                  <a:cs typeface="Arial" panose="020B0604020202020204"/>
-                  <a:sym typeface="Arial" panose="020B0604020202020204"/>
-                </a:defRPr>
-              </a:lvl6pPr>
-              <a:lvl7pPr marR="0" lvl="6" algn="l" rtl="0">
-                <a:lnSpc>
-                  <a:spcPct val="100000"/>
-                </a:lnSpc>
-                <a:spcBef>
-                  <a:spcPts val="0"/>
-                </a:spcBef>
-                <a:spcAft>
-                  <a:spcPts val="0"/>
-                </a:spcAft>
-                <a:buClr>
-                  <a:srgbClr val="000000"/>
-                </a:buClr>
-                <a:buFont typeface="Arial" panose="020B0604020202020204"/>
-                <a:defRPr sz="1400" b="0" i="0" u="none" strike="noStrike" cap="none">
-                  <a:solidFill>
-                    <a:srgbClr val="000000"/>
-                  </a:solidFill>
-                  <a:latin typeface="Arial" panose="020B0604020202020204"/>
-                  <a:ea typeface="Arial" panose="020B0604020202020204"/>
-                  <a:cs typeface="Arial" panose="020B0604020202020204"/>
-                  <a:sym typeface="Arial" panose="020B0604020202020204"/>
-                </a:defRPr>
-              </a:lvl7pPr>
-              <a:lvl8pPr marR="0" lvl="7" algn="l" rtl="0">
-                <a:lnSpc>
-                  <a:spcPct val="100000"/>
-                </a:lnSpc>
-                <a:spcBef>
-                  <a:spcPts val="0"/>
-                </a:spcBef>
-                <a:spcAft>
-                  <a:spcPts val="0"/>
-                </a:spcAft>
-                <a:buClr>
-                  <a:srgbClr val="000000"/>
-                </a:buClr>
-                <a:buFont typeface="Arial" panose="020B0604020202020204"/>
-                <a:defRPr sz="1400" b="0" i="0" u="none" strike="noStrike" cap="none">
-                  <a:solidFill>
-                    <a:srgbClr val="000000"/>
-                  </a:solidFill>
-                  <a:latin typeface="Arial" panose="020B0604020202020204"/>
-                  <a:ea typeface="Arial" panose="020B0604020202020204"/>
-                  <a:cs typeface="Arial" panose="020B0604020202020204"/>
-                  <a:sym typeface="Arial" panose="020B0604020202020204"/>
-                </a:defRPr>
-              </a:lvl8pPr>
-              <a:lvl9pPr marR="0" lvl="8" algn="l" rtl="0">
-                <a:lnSpc>
-                  <a:spcPct val="100000"/>
-                </a:lnSpc>
-                <a:spcBef>
-                  <a:spcPts val="0"/>
-                </a:spcBef>
-                <a:spcAft>
-                  <a:spcPts val="0"/>
-                </a:spcAft>
-                <a:buClr>
-                  <a:srgbClr val="000000"/>
-                </a:buClr>
-                <a:buFont typeface="Arial" panose="020B0604020202020204"/>
-                <a:defRPr sz="1400" b="0" i="0" u="none" strike="noStrike" cap="none">
-                  <a:solidFill>
-                    <a:srgbClr val="000000"/>
-                  </a:solidFill>
-                  <a:latin typeface="Arial" panose="020B0604020202020204"/>
-                  <a:ea typeface="Arial" panose="020B0604020202020204"/>
-                  <a:cs typeface="Arial" panose="020B0604020202020204"/>
-                  <a:sym typeface="Arial" panose="020B0604020202020204"/>
-                </a:defRPr>
-              </a:lvl9pPr>
-            </a:lstStyle>
-            <a:p>
-              <a:pPr marL="0" lvl="0" indent="0" algn="l" rtl="0">
-                <a:spcBef>
-                  <a:spcPts val="0"/>
-                </a:spcBef>
-                <a:spcAft>
-                  <a:spcPts val="0"/>
-                </a:spcAft>
-                <a:buNone/>
-              </a:pPr>
-              <a:r>
-                <a:rPr lang="de-AT" sz="1000" b="1">
-                  <a:solidFill>
-                    <a:schemeClr val="dk1"/>
-                  </a:solidFill>
-                </a:rPr>
-                <a:t>Building Height (pixel)</a:t>
-              </a:r>
-              <a:endParaRPr sz="1000" b="1">
-                <a:solidFill>
-                  <a:schemeClr val="dk1"/>
-                </a:solidFill>
-              </a:endParaRPr>
-            </a:p>
-          </p:txBody>
-        </p:sp>
-      </p:grpSp>
-      <p:grpSp>
-        <p:nvGrpSpPr>
-          <p:cNvPr id="12" name="Group 11">
-            <a:extLst>
-              <a:ext uri="{FF2B5EF4-FFF2-40B4-BE49-F238E27FC236}">
-                <a16:creationId xmlns:a16="http://schemas.microsoft.com/office/drawing/2014/main" id="{1535C9F1-4CA4-885B-8432-CC933F4B0C0B}"/>
-              </a:ext>
-            </a:extLst>
-          </p:cNvPr>
-          <p:cNvGrpSpPr/>
-          <p:nvPr/>
-        </p:nvGrpSpPr>
-        <p:grpSpPr>
-          <a:xfrm>
-            <a:off x="4439126" y="3863342"/>
-            <a:ext cx="850384" cy="403718"/>
-            <a:chOff x="9532" y="3515"/>
-            <a:chExt cx="1186" cy="563"/>
-          </a:xfrm>
-        </p:grpSpPr>
-        <p:cxnSp>
-          <p:nvCxnSpPr>
-            <p:cNvPr id="13" name="Straight Arrow Connector 12">
-              <a:extLst>
-                <a:ext uri="{FF2B5EF4-FFF2-40B4-BE49-F238E27FC236}">
-                  <a16:creationId xmlns:a16="http://schemas.microsoft.com/office/drawing/2014/main" id="{7002651F-A00B-4E5F-8A89-20BD15899721}"/>
-                </a:ext>
-              </a:extLst>
-            </p:cNvPr>
-            <p:cNvCxnSpPr/>
-            <p:nvPr/>
-          </p:nvCxnSpPr>
-          <p:spPr>
-            <a:xfrm>
-              <a:off x="9532" y="4006"/>
-              <a:ext cx="1186" cy="0"/>
-            </a:xfrm>
-            <a:prstGeom prst="straightConnector1">
-              <a:avLst/>
-            </a:prstGeom>
-            <a:ln>
-              <a:solidFill>
-                <a:schemeClr val="tx1"/>
-              </a:solidFill>
-              <a:headEnd type="none"/>
-              <a:tailEnd type="none"/>
-            </a:ln>
-          </p:spPr>
-          <p:style>
-            <a:lnRef idx="2">
-              <a:schemeClr val="accent1"/>
-            </a:lnRef>
-            <a:fillRef idx="0">
-              <a:srgbClr val="FFFFFF"/>
-            </a:fillRef>
-            <a:effectRef idx="0">
-              <a:srgbClr val="FFFFFF"/>
-            </a:effectRef>
-            <a:fontRef idx="minor">
-              <a:schemeClr val="tx1"/>
-            </a:fontRef>
-          </p:style>
-        </p:cxnSp>
-        <p:cxnSp>
-          <p:nvCxnSpPr>
-            <p:cNvPr id="14" name="Straight Arrow Connector 13">
-              <a:extLst>
-                <a:ext uri="{FF2B5EF4-FFF2-40B4-BE49-F238E27FC236}">
-                  <a16:creationId xmlns:a16="http://schemas.microsoft.com/office/drawing/2014/main" id="{0B77F212-63FB-51BA-811E-5A58EEF8B3FC}"/>
-                </a:ext>
-              </a:extLst>
-            </p:cNvPr>
-            <p:cNvCxnSpPr/>
-            <p:nvPr/>
-          </p:nvCxnSpPr>
-          <p:spPr>
-            <a:xfrm flipV="1">
-              <a:off x="9551" y="3894"/>
-              <a:ext cx="3" cy="130"/>
-            </a:xfrm>
-            <a:prstGeom prst="straightConnector1">
-              <a:avLst/>
-            </a:prstGeom>
-            <a:ln>
-              <a:solidFill>
-                <a:schemeClr val="tx1"/>
-              </a:solidFill>
-              <a:headEnd type="none"/>
-              <a:tailEnd type="none"/>
-            </a:ln>
-          </p:spPr>
-          <p:style>
-            <a:lnRef idx="2">
-              <a:schemeClr val="accent1"/>
-            </a:lnRef>
-            <a:fillRef idx="0">
-              <a:srgbClr val="FFFFFF"/>
-            </a:fillRef>
-            <a:effectRef idx="0">
-              <a:srgbClr val="FFFFFF"/>
-            </a:effectRef>
-            <a:fontRef idx="minor">
-              <a:schemeClr val="tx1"/>
-            </a:fontRef>
-          </p:style>
-        </p:cxnSp>
-        <p:cxnSp>
-          <p:nvCxnSpPr>
-            <p:cNvPr id="15" name="Straight Arrow Connector 14">
-              <a:extLst>
-                <a:ext uri="{FF2B5EF4-FFF2-40B4-BE49-F238E27FC236}">
-                  <a16:creationId xmlns:a16="http://schemas.microsoft.com/office/drawing/2014/main" id="{3CE63090-3263-99FF-383B-8DB1E9DDAA54}"/>
-                </a:ext>
-              </a:extLst>
-            </p:cNvPr>
-            <p:cNvCxnSpPr/>
-            <p:nvPr/>
-          </p:nvCxnSpPr>
-          <p:spPr>
-            <a:xfrm flipV="1">
-              <a:off x="10706" y="3894"/>
-              <a:ext cx="3" cy="130"/>
-            </a:xfrm>
-            <a:prstGeom prst="straightConnector1">
-              <a:avLst/>
-            </a:prstGeom>
-            <a:ln>
-              <a:solidFill>
-                <a:schemeClr val="tx1"/>
-              </a:solidFill>
-              <a:headEnd type="none"/>
-              <a:tailEnd type="none"/>
-            </a:ln>
-          </p:spPr>
-          <p:style>
-            <a:lnRef idx="2">
-              <a:schemeClr val="accent1"/>
-            </a:lnRef>
-            <a:fillRef idx="0">
-              <a:srgbClr val="FFFFFF"/>
-            </a:fillRef>
-            <a:effectRef idx="0">
-              <a:srgbClr val="FFFFFF"/>
-            </a:effectRef>
-            <a:fontRef idx="minor">
-              <a:schemeClr val="tx1"/>
-            </a:fontRef>
-          </p:style>
-        </p:cxnSp>
-        <p:sp>
-          <p:nvSpPr>
-            <p:cNvPr id="16" name="Google Shape;161;p16">
-              <a:extLst>
-                <a:ext uri="{FF2B5EF4-FFF2-40B4-BE49-F238E27FC236}">
-                  <a16:creationId xmlns:a16="http://schemas.microsoft.com/office/drawing/2014/main" id="{E4BAC250-6F45-21BF-A9F9-15F556E8B35E}"/>
-                </a:ext>
-              </a:extLst>
-            </p:cNvPr>
-            <p:cNvSpPr txBox="1"/>
-            <p:nvPr/>
-          </p:nvSpPr>
-          <p:spPr>
-            <a:xfrm>
-              <a:off x="9677" y="3515"/>
-              <a:ext cx="931" cy="563"/>
-            </a:xfrm>
-            <a:prstGeom prst="rect">
-              <a:avLst/>
-            </a:prstGeom>
-            <a:noFill/>
-            <a:ln>
-              <a:noFill/>
-            </a:ln>
-          </p:spPr>
-          <p:txBody>
-            <a:bodyPr spcFirstLastPara="1" wrap="square" lIns="91425" tIns="91425" rIns="91425" bIns="91425" anchor="t" anchorCtr="0">
-              <a:spAutoFit/>
-            </a:bodyPr>
-            <a:lstStyle>
-              <a:defPPr marR="0" lvl="0" algn="l" rtl="0">
-                <a:lnSpc>
-                  <a:spcPct val="100000"/>
-                </a:lnSpc>
-                <a:spcBef>
-                  <a:spcPts val="0"/>
-                </a:spcBef>
-                <a:spcAft>
-                  <a:spcPts val="0"/>
-                </a:spcAft>
-              </a:defPPr>
-              <a:lvl1pPr marR="0" lvl="0" algn="l" rtl="0">
-                <a:lnSpc>
-                  <a:spcPct val="100000"/>
-                </a:lnSpc>
-                <a:spcBef>
-                  <a:spcPts val="0"/>
-                </a:spcBef>
-                <a:spcAft>
-                  <a:spcPts val="0"/>
-                </a:spcAft>
-                <a:buClr>
-                  <a:srgbClr val="000000"/>
-                </a:buClr>
-                <a:buFont typeface="Arial" panose="020B0604020202020204"/>
-                <a:defRPr sz="1400" b="0" i="0" u="none" strike="noStrike" cap="none">
-                  <a:solidFill>
-                    <a:srgbClr val="000000"/>
-                  </a:solidFill>
-                  <a:latin typeface="Arial" panose="020B0604020202020204"/>
-                  <a:ea typeface="Arial" panose="020B0604020202020204"/>
-                  <a:cs typeface="Arial" panose="020B0604020202020204"/>
-                  <a:sym typeface="Arial" panose="020B0604020202020204"/>
-                </a:defRPr>
-              </a:lvl1pPr>
-              <a:lvl2pPr marR="0" lvl="1" algn="l" rtl="0">
-                <a:lnSpc>
-                  <a:spcPct val="100000"/>
-                </a:lnSpc>
-                <a:spcBef>
-                  <a:spcPts val="0"/>
-                </a:spcBef>
-                <a:spcAft>
-                  <a:spcPts val="0"/>
-                </a:spcAft>
-                <a:buClr>
-                  <a:srgbClr val="000000"/>
-                </a:buClr>
-                <a:buFont typeface="Arial" panose="020B0604020202020204"/>
-                <a:defRPr sz="1400" b="0" i="0" u="none" strike="noStrike" cap="none">
-                  <a:solidFill>
-                    <a:srgbClr val="000000"/>
-                  </a:solidFill>
-                  <a:latin typeface="Arial" panose="020B0604020202020204"/>
-                  <a:ea typeface="Arial" panose="020B0604020202020204"/>
-                  <a:cs typeface="Arial" panose="020B0604020202020204"/>
-                  <a:sym typeface="Arial" panose="020B0604020202020204"/>
-                </a:defRPr>
-              </a:lvl2pPr>
-              <a:lvl3pPr marR="0" lvl="2" algn="l" rtl="0">
-                <a:lnSpc>
-                  <a:spcPct val="100000"/>
-                </a:lnSpc>
-                <a:spcBef>
-                  <a:spcPts val="0"/>
-                </a:spcBef>
-                <a:spcAft>
-                  <a:spcPts val="0"/>
-                </a:spcAft>
-                <a:buClr>
-                  <a:srgbClr val="000000"/>
-                </a:buClr>
-                <a:buFont typeface="Arial" panose="020B0604020202020204"/>
-                <a:defRPr sz="1400" b="0" i="0" u="none" strike="noStrike" cap="none">
-                  <a:solidFill>
-                    <a:srgbClr val="000000"/>
-                  </a:solidFill>
-                  <a:latin typeface="Arial" panose="020B0604020202020204"/>
-                  <a:ea typeface="Arial" panose="020B0604020202020204"/>
-                  <a:cs typeface="Arial" panose="020B0604020202020204"/>
-                  <a:sym typeface="Arial" panose="020B0604020202020204"/>
-                </a:defRPr>
-              </a:lvl3pPr>
-              <a:lvl4pPr marR="0" lvl="3" algn="l" rtl="0">
-                <a:lnSpc>
-                  <a:spcPct val="100000"/>
-                </a:lnSpc>
-                <a:spcBef>
-                  <a:spcPts val="0"/>
-                </a:spcBef>
-                <a:spcAft>
-                  <a:spcPts val="0"/>
-                </a:spcAft>
-                <a:buClr>
-                  <a:srgbClr val="000000"/>
-                </a:buClr>
-                <a:buFont typeface="Arial" panose="020B0604020202020204"/>
-                <a:defRPr sz="1400" b="0" i="0" u="none" strike="noStrike" cap="none">
-                  <a:solidFill>
-                    <a:srgbClr val="000000"/>
-                  </a:solidFill>
-                  <a:latin typeface="Arial" panose="020B0604020202020204"/>
-                  <a:ea typeface="Arial" panose="020B0604020202020204"/>
-                  <a:cs typeface="Arial" panose="020B0604020202020204"/>
-                  <a:sym typeface="Arial" panose="020B0604020202020204"/>
-                </a:defRPr>
-              </a:lvl4pPr>
-              <a:lvl5pPr marR="0" lvl="4" algn="l" rtl="0">
-                <a:lnSpc>
-                  <a:spcPct val="100000"/>
-                </a:lnSpc>
-                <a:spcBef>
-                  <a:spcPts val="0"/>
-                </a:spcBef>
-                <a:spcAft>
-                  <a:spcPts val="0"/>
-                </a:spcAft>
-                <a:buClr>
-                  <a:srgbClr val="000000"/>
-                </a:buClr>
-                <a:buFont typeface="Arial" panose="020B0604020202020204"/>
-                <a:defRPr sz="1400" b="0" i="0" u="none" strike="noStrike" cap="none">
-                  <a:solidFill>
-                    <a:srgbClr val="000000"/>
-                  </a:solidFill>
-                  <a:latin typeface="Arial" panose="020B0604020202020204"/>
-                  <a:ea typeface="Arial" panose="020B0604020202020204"/>
-                  <a:cs typeface="Arial" panose="020B0604020202020204"/>
-                  <a:sym typeface="Arial" panose="020B0604020202020204"/>
-                </a:defRPr>
-              </a:lvl5pPr>
-              <a:lvl6pPr marR="0" lvl="5" algn="l" rtl="0">
-                <a:lnSpc>
-                  <a:spcPct val="100000"/>
-                </a:lnSpc>
-                <a:spcBef>
-                  <a:spcPts val="0"/>
-                </a:spcBef>
-                <a:spcAft>
-                  <a:spcPts val="0"/>
-                </a:spcAft>
-                <a:buClr>
-                  <a:srgbClr val="000000"/>
-                </a:buClr>
-                <a:buFont typeface="Arial" panose="020B0604020202020204"/>
-                <a:defRPr sz="1400" b="0" i="0" u="none" strike="noStrike" cap="none">
-                  <a:solidFill>
-                    <a:srgbClr val="000000"/>
-                  </a:solidFill>
-                  <a:latin typeface="Arial" panose="020B0604020202020204"/>
-                  <a:ea typeface="Arial" panose="020B0604020202020204"/>
-                  <a:cs typeface="Arial" panose="020B0604020202020204"/>
-                  <a:sym typeface="Arial" panose="020B0604020202020204"/>
-                </a:defRPr>
-              </a:lvl6pPr>
-              <a:lvl7pPr marR="0" lvl="6" algn="l" rtl="0">
-                <a:lnSpc>
-                  <a:spcPct val="100000"/>
-                </a:lnSpc>
-                <a:spcBef>
-                  <a:spcPts val="0"/>
-                </a:spcBef>
-                <a:spcAft>
-                  <a:spcPts val="0"/>
-                </a:spcAft>
-                <a:buClr>
-                  <a:srgbClr val="000000"/>
-                </a:buClr>
-                <a:buFont typeface="Arial" panose="020B0604020202020204"/>
-                <a:defRPr sz="1400" b="0" i="0" u="none" strike="noStrike" cap="none">
-                  <a:solidFill>
-                    <a:srgbClr val="000000"/>
-                  </a:solidFill>
-                  <a:latin typeface="Arial" panose="020B0604020202020204"/>
-                  <a:ea typeface="Arial" panose="020B0604020202020204"/>
-                  <a:cs typeface="Arial" panose="020B0604020202020204"/>
-                  <a:sym typeface="Arial" panose="020B0604020202020204"/>
-                </a:defRPr>
-              </a:lvl7pPr>
-              <a:lvl8pPr marR="0" lvl="7" algn="l" rtl="0">
-                <a:lnSpc>
-                  <a:spcPct val="100000"/>
-                </a:lnSpc>
-                <a:spcBef>
-                  <a:spcPts val="0"/>
-                </a:spcBef>
-                <a:spcAft>
-                  <a:spcPts val="0"/>
-                </a:spcAft>
-                <a:buClr>
-                  <a:srgbClr val="000000"/>
-                </a:buClr>
-                <a:buFont typeface="Arial" panose="020B0604020202020204"/>
-                <a:defRPr sz="1400" b="0" i="0" u="none" strike="noStrike" cap="none">
-                  <a:solidFill>
-                    <a:srgbClr val="000000"/>
-                  </a:solidFill>
-                  <a:latin typeface="Arial" panose="020B0604020202020204"/>
-                  <a:ea typeface="Arial" panose="020B0604020202020204"/>
-                  <a:cs typeface="Arial" panose="020B0604020202020204"/>
-                  <a:sym typeface="Arial" panose="020B0604020202020204"/>
-                </a:defRPr>
-              </a:lvl8pPr>
-              <a:lvl9pPr marR="0" lvl="8" algn="l" rtl="0">
-                <a:lnSpc>
-                  <a:spcPct val="100000"/>
-                </a:lnSpc>
-                <a:spcBef>
-                  <a:spcPts val="0"/>
-                </a:spcBef>
-                <a:spcAft>
-                  <a:spcPts val="0"/>
-                </a:spcAft>
-                <a:buClr>
-                  <a:srgbClr val="000000"/>
-                </a:buClr>
-                <a:buFont typeface="Arial" panose="020B0604020202020204"/>
-                <a:defRPr sz="1400" b="0" i="0" u="none" strike="noStrike" cap="none">
-                  <a:solidFill>
-                    <a:srgbClr val="000000"/>
-                  </a:solidFill>
-                  <a:latin typeface="Arial" panose="020B0604020202020204"/>
-                  <a:ea typeface="Arial" panose="020B0604020202020204"/>
-                  <a:cs typeface="Arial" panose="020B0604020202020204"/>
-                  <a:sym typeface="Arial" panose="020B0604020202020204"/>
-                </a:defRPr>
-              </a:lvl9pPr>
-            </a:lstStyle>
-            <a:p>
-              <a:pPr marL="0" lvl="0" indent="0" algn="ctr" rtl="0">
-                <a:spcBef>
-                  <a:spcPts val="0"/>
-                </a:spcBef>
-                <a:spcAft>
-                  <a:spcPts val="0"/>
-                </a:spcAft>
-                <a:buNone/>
-              </a:pPr>
-              <a:r>
-                <a:rPr lang="en-US" altLang="de-AT" sz="1050">
-                  <a:solidFill>
-                    <a:schemeClr val="dk1"/>
-                  </a:solidFill>
-                </a:rPr>
-                <a:t>10 km</a:t>
-              </a:r>
-            </a:p>
-          </p:txBody>
-        </p:sp>
-      </p:grpSp>
-      <p:sp>
-        <p:nvSpPr>
-          <p:cNvPr id="6" name="TextBox 5">
-            <a:extLst>
-              <a:ext uri="{FF2B5EF4-FFF2-40B4-BE49-F238E27FC236}">
-                <a16:creationId xmlns:a16="http://schemas.microsoft.com/office/drawing/2014/main" id="{A0718CCF-89C6-9A5B-D8D8-35DFE5557012}"/>
-              </a:ext>
-            </a:extLst>
-          </p:cNvPr>
-          <p:cNvSpPr txBox="1"/>
-          <p:nvPr/>
-        </p:nvSpPr>
-        <p:spPr>
-          <a:xfrm>
-            <a:off x="1280803" y="1000306"/>
-            <a:ext cx="811806" cy="358748"/>
-          </a:xfrm>
-          <a:prstGeom prst="rect">
-            <a:avLst/>
-          </a:prstGeom>
-          <a:noFill/>
-        </p:spPr>
-        <p:txBody>
-          <a:bodyPr wrap="square">
-            <a:spAutoFit/>
-          </a:bodyPr>
-          <a:lstStyle/>
-          <a:p>
-            <a:pPr algn="ctr"/>
-            <a:r>
-              <a:rPr lang="en-US" sz="1400" dirty="0"/>
-              <a:t>2016</a:t>
-            </a:r>
-          </a:p>
-        </p:txBody>
-      </p:sp>
-      <p:sp>
-        <p:nvSpPr>
-          <p:cNvPr id="7" name="TextBox 6">
-            <a:extLst>
-              <a:ext uri="{FF2B5EF4-FFF2-40B4-BE49-F238E27FC236}">
-                <a16:creationId xmlns:a16="http://schemas.microsoft.com/office/drawing/2014/main" id="{0B11A087-864B-B7F0-F2EF-92C7834CE9A7}"/>
-              </a:ext>
-            </a:extLst>
-          </p:cNvPr>
-          <p:cNvSpPr txBox="1"/>
-          <p:nvPr/>
-        </p:nvSpPr>
-        <p:spPr>
-          <a:xfrm>
-            <a:off x="3959134" y="972454"/>
-            <a:ext cx="811806" cy="358748"/>
-          </a:xfrm>
-          <a:prstGeom prst="rect">
-            <a:avLst/>
-          </a:prstGeom>
-          <a:noFill/>
-        </p:spPr>
-        <p:txBody>
-          <a:bodyPr wrap="square">
-            <a:spAutoFit/>
-          </a:bodyPr>
-          <a:lstStyle/>
-          <a:p>
-            <a:pPr algn="ctr"/>
-            <a:r>
-              <a:rPr lang="en-US" sz="1400" dirty="0"/>
-              <a:t>2023</a:t>
-            </a:r>
-          </a:p>
-        </p:txBody>
-      </p:sp>
-      <p:sp>
-        <p:nvSpPr>
-          <p:cNvPr id="32" name="Oval 31">
-            <a:extLst>
-              <a:ext uri="{FF2B5EF4-FFF2-40B4-BE49-F238E27FC236}">
-                <a16:creationId xmlns:a16="http://schemas.microsoft.com/office/drawing/2014/main" id="{717C5B53-6F7E-620F-8824-8CA8FD2621A7}"/>
-              </a:ext>
-            </a:extLst>
-          </p:cNvPr>
-          <p:cNvSpPr/>
-          <p:nvPr/>
-        </p:nvSpPr>
-        <p:spPr>
-          <a:xfrm>
-            <a:off x="1467658" y="2205990"/>
-            <a:ext cx="597362" cy="597362"/>
-          </a:xfrm>
-          <a:prstGeom prst="ellipse">
-            <a:avLst/>
-          </a:prstGeom>
-          <a:noFill/>
-          <a:ln w="12700">
-            <a:solidFill>
-              <a:schemeClr val="bg1"/>
-            </a:solidFill>
-          </a:ln>
-        </p:spPr>
-        <p:style>
-          <a:lnRef idx="2">
-            <a:schemeClr val="accent1">
-              <a:shade val="15000"/>
-            </a:schemeClr>
-          </a:lnRef>
-          <a:fillRef idx="1">
-            <a:schemeClr val="accent1"/>
-          </a:fillRef>
-          <a:effectRef idx="0">
-            <a:schemeClr val="accent1"/>
-          </a:effectRef>
-          <a:fontRef idx="minor">
-            <a:schemeClr val="lt1"/>
-          </a:fontRef>
-        </p:style>
-        <p:txBody>
-          <a:bodyPr rtlCol="0" anchor="ctr"/>
-          <a:lstStyle/>
-          <a:p>
-            <a:pPr algn="ctr"/>
-            <a:endParaRPr lang="en-US"/>
-          </a:p>
-        </p:txBody>
-      </p:sp>
-      <p:sp>
-        <p:nvSpPr>
-          <p:cNvPr id="34" name="Oval 33">
-            <a:extLst>
-              <a:ext uri="{FF2B5EF4-FFF2-40B4-BE49-F238E27FC236}">
-                <a16:creationId xmlns:a16="http://schemas.microsoft.com/office/drawing/2014/main" id="{543BC997-0C00-0EB4-3CE1-2D6064A67220}"/>
-              </a:ext>
-            </a:extLst>
-          </p:cNvPr>
-          <p:cNvSpPr/>
-          <p:nvPr/>
-        </p:nvSpPr>
-        <p:spPr>
-          <a:xfrm>
-            <a:off x="1274393" y="2005005"/>
-            <a:ext cx="991560" cy="991560"/>
-          </a:xfrm>
-          <a:prstGeom prst="ellipse">
-            <a:avLst/>
-          </a:prstGeom>
-          <a:noFill/>
-          <a:ln w="12700">
-            <a:solidFill>
-              <a:schemeClr val="bg1"/>
-            </a:solidFill>
-          </a:ln>
-        </p:spPr>
-        <p:style>
-          <a:lnRef idx="2">
-            <a:schemeClr val="accent1">
-              <a:shade val="15000"/>
-            </a:schemeClr>
-          </a:lnRef>
-          <a:fillRef idx="1">
-            <a:schemeClr val="accent1"/>
-          </a:fillRef>
-          <a:effectRef idx="0">
-            <a:schemeClr val="accent1"/>
-          </a:effectRef>
-          <a:fontRef idx="minor">
-            <a:schemeClr val="lt1"/>
-          </a:fontRef>
-        </p:style>
-        <p:txBody>
-          <a:bodyPr rtlCol="0" anchor="ctr"/>
-          <a:lstStyle/>
-          <a:p>
-            <a:pPr algn="ctr"/>
-            <a:endParaRPr lang="en-US"/>
-          </a:p>
-        </p:txBody>
-      </p:sp>
-      <p:sp>
-        <p:nvSpPr>
-          <p:cNvPr id="35" name="Oval 34">
-            <a:extLst>
-              <a:ext uri="{FF2B5EF4-FFF2-40B4-BE49-F238E27FC236}">
-                <a16:creationId xmlns:a16="http://schemas.microsoft.com/office/drawing/2014/main" id="{419523A6-3302-6551-DCCF-F1AD301981AC}"/>
-              </a:ext>
-            </a:extLst>
-          </p:cNvPr>
-          <p:cNvSpPr/>
-          <p:nvPr/>
-        </p:nvSpPr>
-        <p:spPr>
-          <a:xfrm>
-            <a:off x="860002" y="1595378"/>
-            <a:ext cx="1811570" cy="1811570"/>
-          </a:xfrm>
-          <a:prstGeom prst="ellipse">
-            <a:avLst/>
-          </a:prstGeom>
-          <a:noFill/>
-          <a:ln w="12700">
-            <a:solidFill>
-              <a:schemeClr val="bg1"/>
-            </a:solidFill>
-          </a:ln>
-        </p:spPr>
-        <p:style>
-          <a:lnRef idx="2">
-            <a:schemeClr val="accent1">
-              <a:shade val="15000"/>
-            </a:schemeClr>
-          </a:lnRef>
-          <a:fillRef idx="1">
-            <a:schemeClr val="accent1"/>
-          </a:fillRef>
-          <a:effectRef idx="0">
-            <a:schemeClr val="accent1"/>
-          </a:effectRef>
-          <a:fontRef idx="minor">
-            <a:schemeClr val="lt1"/>
-          </a:fontRef>
-        </p:style>
-        <p:txBody>
-          <a:bodyPr rtlCol="0" anchor="ctr"/>
-          <a:lstStyle/>
-          <a:p>
-            <a:pPr algn="ctr"/>
-            <a:endParaRPr lang="en-US"/>
-          </a:p>
-        </p:txBody>
-      </p:sp>
-      <p:sp>
-        <p:nvSpPr>
-          <p:cNvPr id="36" name="Oval 35">
-            <a:extLst>
-              <a:ext uri="{FF2B5EF4-FFF2-40B4-BE49-F238E27FC236}">
-                <a16:creationId xmlns:a16="http://schemas.microsoft.com/office/drawing/2014/main" id="{848DAC31-A088-F3EE-AB48-A6E0FBD6E98D}"/>
-              </a:ext>
-            </a:extLst>
-          </p:cNvPr>
-          <p:cNvSpPr/>
-          <p:nvPr/>
-        </p:nvSpPr>
-        <p:spPr>
-          <a:xfrm>
-            <a:off x="1746991" y="2477925"/>
-            <a:ext cx="46363" cy="45719"/>
-          </a:xfrm>
-          <a:prstGeom prst="ellipse">
-            <a:avLst/>
-          </a:prstGeom>
-          <a:solidFill>
-            <a:srgbClr val="FF0000"/>
-          </a:solidFill>
-          <a:ln>
-            <a:noFill/>
-          </a:ln>
-        </p:spPr>
-        <p:style>
-          <a:lnRef idx="2">
-            <a:schemeClr val="accent1">
-              <a:shade val="15000"/>
-            </a:schemeClr>
-          </a:lnRef>
-          <a:fillRef idx="1">
-            <a:schemeClr val="accent1"/>
-          </a:fillRef>
-          <a:effectRef idx="0">
-            <a:schemeClr val="accent1"/>
-          </a:effectRef>
-          <a:fontRef idx="minor">
-            <a:schemeClr val="lt1"/>
-          </a:fontRef>
-        </p:style>
-        <p:txBody>
-          <a:bodyPr rtlCol="0" anchor="ctr"/>
-          <a:lstStyle/>
-          <a:p>
-            <a:pPr algn="ctr"/>
-            <a:endParaRPr lang="en-US"/>
-          </a:p>
-        </p:txBody>
-      </p:sp>
-      <p:sp>
-        <p:nvSpPr>
-          <p:cNvPr id="37" name="Oval 36">
-            <a:extLst>
-              <a:ext uri="{FF2B5EF4-FFF2-40B4-BE49-F238E27FC236}">
-                <a16:creationId xmlns:a16="http://schemas.microsoft.com/office/drawing/2014/main" id="{63EC0BBF-FC5A-CF7D-849A-455D29EF46C7}"/>
-              </a:ext>
-            </a:extLst>
-          </p:cNvPr>
-          <p:cNvSpPr/>
-          <p:nvPr/>
-        </p:nvSpPr>
-        <p:spPr>
-          <a:xfrm>
-            <a:off x="4048389" y="2152536"/>
-            <a:ext cx="712204" cy="712204"/>
-          </a:xfrm>
-          <a:prstGeom prst="ellipse">
-            <a:avLst/>
-          </a:prstGeom>
-          <a:noFill/>
-          <a:ln w="12700">
-            <a:solidFill>
-              <a:schemeClr val="bg1"/>
-            </a:solidFill>
-          </a:ln>
-        </p:spPr>
-        <p:style>
-          <a:lnRef idx="2">
-            <a:schemeClr val="accent1">
-              <a:shade val="15000"/>
-            </a:schemeClr>
-          </a:lnRef>
-          <a:fillRef idx="1">
-            <a:schemeClr val="accent1"/>
-          </a:fillRef>
-          <a:effectRef idx="0">
-            <a:schemeClr val="accent1"/>
-          </a:effectRef>
-          <a:fontRef idx="minor">
-            <a:schemeClr val="lt1"/>
-          </a:fontRef>
-        </p:style>
-        <p:txBody>
-          <a:bodyPr rtlCol="0" anchor="ctr"/>
-          <a:lstStyle/>
-          <a:p>
-            <a:pPr algn="ctr"/>
-            <a:endParaRPr lang="en-US"/>
-          </a:p>
-        </p:txBody>
-      </p:sp>
-      <p:sp>
-        <p:nvSpPr>
-          <p:cNvPr id="38" name="Oval 37">
-            <a:extLst>
-              <a:ext uri="{FF2B5EF4-FFF2-40B4-BE49-F238E27FC236}">
-                <a16:creationId xmlns:a16="http://schemas.microsoft.com/office/drawing/2014/main" id="{8D38980D-9E05-337F-FCE2-582ACFBF458F}"/>
-              </a:ext>
-            </a:extLst>
-          </p:cNvPr>
-          <p:cNvSpPr/>
-          <p:nvPr/>
-        </p:nvSpPr>
-        <p:spPr>
-          <a:xfrm>
-            <a:off x="3817232" y="1913659"/>
-            <a:ext cx="1182186" cy="1182186"/>
-          </a:xfrm>
-          <a:prstGeom prst="ellipse">
-            <a:avLst/>
-          </a:prstGeom>
-          <a:noFill/>
-          <a:ln w="12700">
-            <a:solidFill>
-              <a:schemeClr val="bg1"/>
-            </a:solidFill>
-          </a:ln>
-        </p:spPr>
-        <p:style>
-          <a:lnRef idx="2">
-            <a:schemeClr val="accent1">
-              <a:shade val="15000"/>
-            </a:schemeClr>
-          </a:lnRef>
-          <a:fillRef idx="1">
-            <a:schemeClr val="accent1"/>
-          </a:fillRef>
-          <a:effectRef idx="0">
-            <a:schemeClr val="accent1"/>
-          </a:effectRef>
-          <a:fontRef idx="minor">
-            <a:schemeClr val="lt1"/>
-          </a:fontRef>
-        </p:style>
-        <p:txBody>
-          <a:bodyPr rtlCol="0" anchor="ctr"/>
-          <a:lstStyle/>
-          <a:p>
-            <a:pPr algn="ctr"/>
-            <a:endParaRPr lang="en-US"/>
-          </a:p>
-        </p:txBody>
-      </p:sp>
-      <p:sp>
-        <p:nvSpPr>
-          <p:cNvPr id="39" name="Oval 38">
-            <a:extLst>
-              <a:ext uri="{FF2B5EF4-FFF2-40B4-BE49-F238E27FC236}">
-                <a16:creationId xmlns:a16="http://schemas.microsoft.com/office/drawing/2014/main" id="{FC767CF5-3F7E-5898-9174-A1D68D84785E}"/>
-              </a:ext>
-            </a:extLst>
-          </p:cNvPr>
-          <p:cNvSpPr/>
-          <p:nvPr/>
-        </p:nvSpPr>
-        <p:spPr>
-          <a:xfrm>
-            <a:off x="3324018" y="1425209"/>
-            <a:ext cx="2159842" cy="2159842"/>
-          </a:xfrm>
-          <a:prstGeom prst="ellipse">
-            <a:avLst/>
-          </a:prstGeom>
-          <a:noFill/>
-          <a:ln w="12700">
-            <a:solidFill>
-              <a:schemeClr val="bg1"/>
-            </a:solidFill>
-          </a:ln>
-        </p:spPr>
-        <p:style>
-          <a:lnRef idx="2">
-            <a:schemeClr val="accent1">
-              <a:shade val="15000"/>
-            </a:schemeClr>
-          </a:lnRef>
-          <a:fillRef idx="1">
-            <a:schemeClr val="accent1"/>
-          </a:fillRef>
-          <a:effectRef idx="0">
-            <a:schemeClr val="accent1"/>
-          </a:effectRef>
-          <a:fontRef idx="minor">
-            <a:schemeClr val="lt1"/>
-          </a:fontRef>
-        </p:style>
-        <p:txBody>
-          <a:bodyPr rtlCol="0" anchor="ctr"/>
-          <a:lstStyle/>
-          <a:p>
-            <a:pPr algn="ctr"/>
-            <a:endParaRPr lang="en-US"/>
-          </a:p>
-        </p:txBody>
-      </p:sp>
-      <p:sp>
-        <p:nvSpPr>
-          <p:cNvPr id="40" name="Oval 39">
-            <a:extLst>
-              <a:ext uri="{FF2B5EF4-FFF2-40B4-BE49-F238E27FC236}">
-                <a16:creationId xmlns:a16="http://schemas.microsoft.com/office/drawing/2014/main" id="{E220E4FA-D09B-D2C9-F7B2-1640991D20B9}"/>
-              </a:ext>
-            </a:extLst>
-          </p:cNvPr>
-          <p:cNvSpPr/>
-          <p:nvPr/>
-        </p:nvSpPr>
-        <p:spPr>
-          <a:xfrm>
-            <a:off x="4392763" y="2492052"/>
-            <a:ext cx="46363" cy="45719"/>
-          </a:xfrm>
-          <a:prstGeom prst="ellipse">
-            <a:avLst/>
-          </a:prstGeom>
-          <a:solidFill>
-            <a:srgbClr val="FF0000"/>
-          </a:solidFill>
-          <a:ln>
-            <a:noFill/>
-          </a:ln>
-        </p:spPr>
-        <p:style>
-          <a:lnRef idx="2">
-            <a:schemeClr val="accent1">
-              <a:shade val="15000"/>
-            </a:schemeClr>
-          </a:lnRef>
-          <a:fillRef idx="1">
-            <a:schemeClr val="accent1"/>
-          </a:fillRef>
-          <a:effectRef idx="0">
-            <a:schemeClr val="accent1"/>
-          </a:effectRef>
-          <a:fontRef idx="minor">
-            <a:schemeClr val="lt1"/>
-          </a:fontRef>
-        </p:style>
-        <p:txBody>
-          <a:bodyPr rtlCol="0" anchor="ctr"/>
-          <a:lstStyle/>
-          <a:p>
-            <a:pPr algn="ctr"/>
-            <a:endParaRPr lang="en-US"/>
-          </a:p>
-        </p:txBody>
-      </p:sp>
-      <p:sp>
-        <p:nvSpPr>
-          <p:cNvPr id="41" name="TextBox 40">
-            <a:extLst>
-              <a:ext uri="{FF2B5EF4-FFF2-40B4-BE49-F238E27FC236}">
-                <a16:creationId xmlns:a16="http://schemas.microsoft.com/office/drawing/2014/main" id="{922561D7-B1FD-1DA6-1675-5142A70F2A98}"/>
-              </a:ext>
-            </a:extLst>
-          </p:cNvPr>
-          <p:cNvSpPr txBox="1"/>
-          <p:nvPr/>
-        </p:nvSpPr>
-        <p:spPr>
-          <a:xfrm>
-            <a:off x="1512081" y="1378417"/>
-            <a:ext cx="497252" cy="276999"/>
-          </a:xfrm>
-          <a:prstGeom prst="rect">
-            <a:avLst/>
-          </a:prstGeom>
-          <a:noFill/>
-        </p:spPr>
-        <p:txBody>
-          <a:bodyPr wrap="none" rtlCol="0">
-            <a:spAutoFit/>
-          </a:bodyPr>
-          <a:lstStyle/>
-          <a:p>
-            <a:r>
-              <a:rPr lang="en-US" sz="1200" dirty="0">
-                <a:solidFill>
-                  <a:schemeClr val="bg1"/>
-                </a:solidFill>
-                <a:latin typeface="Arial" panose="020B0604020202020204" pitchFamily="34" charset="0"/>
-                <a:cs typeface="Arial" panose="020B0604020202020204" pitchFamily="34" charset="0"/>
-              </a:rPr>
-              <a:t>r = 9</a:t>
-            </a:r>
-          </a:p>
-        </p:txBody>
-      </p:sp>
-      <p:sp>
-        <p:nvSpPr>
-          <p:cNvPr id="42" name="TextBox 41">
-            <a:extLst>
-              <a:ext uri="{FF2B5EF4-FFF2-40B4-BE49-F238E27FC236}">
-                <a16:creationId xmlns:a16="http://schemas.microsoft.com/office/drawing/2014/main" id="{88E02713-4BD8-00C1-DC2B-D3B577D6A312}"/>
-              </a:ext>
-            </a:extLst>
-          </p:cNvPr>
-          <p:cNvSpPr txBox="1"/>
-          <p:nvPr/>
-        </p:nvSpPr>
-        <p:spPr>
-          <a:xfrm>
-            <a:off x="1512081" y="1787782"/>
-            <a:ext cx="497252" cy="276999"/>
-          </a:xfrm>
-          <a:prstGeom prst="rect">
-            <a:avLst/>
-          </a:prstGeom>
-          <a:noFill/>
-        </p:spPr>
-        <p:txBody>
-          <a:bodyPr wrap="none" rtlCol="0">
-            <a:spAutoFit/>
-          </a:bodyPr>
-          <a:lstStyle/>
-          <a:p>
-            <a:r>
-              <a:rPr lang="en-US" sz="1200" dirty="0">
-                <a:solidFill>
-                  <a:schemeClr val="bg1"/>
-                </a:solidFill>
-                <a:latin typeface="Arial" panose="020B0604020202020204" pitchFamily="34" charset="0"/>
-                <a:cs typeface="Arial" panose="020B0604020202020204" pitchFamily="34" charset="0"/>
-              </a:rPr>
-              <a:t>r = 5</a:t>
-            </a:r>
-          </a:p>
-        </p:txBody>
-      </p:sp>
-      <p:sp>
-        <p:nvSpPr>
-          <p:cNvPr id="43" name="TextBox 42">
-            <a:extLst>
-              <a:ext uri="{FF2B5EF4-FFF2-40B4-BE49-F238E27FC236}">
-                <a16:creationId xmlns:a16="http://schemas.microsoft.com/office/drawing/2014/main" id="{BBE0EBB4-0222-7243-FC9C-8C48680D8EAD}"/>
-              </a:ext>
-            </a:extLst>
-          </p:cNvPr>
-          <p:cNvSpPr txBox="1"/>
-          <p:nvPr/>
-        </p:nvSpPr>
-        <p:spPr>
-          <a:xfrm>
-            <a:off x="1520327" y="2006378"/>
-            <a:ext cx="497252" cy="276999"/>
-          </a:xfrm>
-          <a:prstGeom prst="rect">
-            <a:avLst/>
-          </a:prstGeom>
-          <a:noFill/>
-        </p:spPr>
-        <p:txBody>
-          <a:bodyPr wrap="none" rtlCol="0">
-            <a:spAutoFit/>
-          </a:bodyPr>
-          <a:lstStyle/>
-          <a:p>
-            <a:r>
-              <a:rPr lang="en-US" sz="1200" dirty="0">
-                <a:solidFill>
-                  <a:schemeClr val="bg1"/>
-                </a:solidFill>
-                <a:latin typeface="Arial" panose="020B0604020202020204" pitchFamily="34" charset="0"/>
-                <a:cs typeface="Arial" panose="020B0604020202020204" pitchFamily="34" charset="0"/>
-              </a:rPr>
-              <a:t>r = 3</a:t>
-            </a:r>
-          </a:p>
-        </p:txBody>
-      </p:sp>
-      <p:pic>
-        <p:nvPicPr>
-          <p:cNvPr id="47" name="Picture 46">
-            <a:extLst>
-              <a:ext uri="{FF2B5EF4-FFF2-40B4-BE49-F238E27FC236}">
-                <a16:creationId xmlns:a16="http://schemas.microsoft.com/office/drawing/2014/main" id="{F0F4096D-917E-3986-3120-252F590A0BB5}"/>
-              </a:ext>
-            </a:extLst>
-          </p:cNvPr>
-          <p:cNvPicPr>
-            <a:picLocks noChangeAspect="1"/>
-          </p:cNvPicPr>
-          <p:nvPr/>
-        </p:nvPicPr>
-        <p:blipFill>
-          <a:blip r:embed="rId4"/>
-          <a:stretch>
-            <a:fillRect/>
-          </a:stretch>
-        </p:blipFill>
-        <p:spPr>
-          <a:xfrm>
-            <a:off x="5861031" y="701351"/>
-            <a:ext cx="5610225" cy="2752725"/>
-          </a:xfrm>
-          <a:prstGeom prst="rect">
-            <a:avLst/>
-          </a:prstGeom>
-        </p:spPr>
-      </p:pic>
-      <mc:AlternateContent xmlns:mc="http://schemas.openxmlformats.org/markup-compatibility/2006" xmlns:a14="http://schemas.microsoft.com/office/drawing/2010/main">
-        <mc:Choice Requires="a14">
+      <mc:AlternateContent xmlns:mc="http://schemas.openxmlformats.org/markup-compatibility/2006">
+        <mc:Choice xmlns:a14="http://schemas.microsoft.com/office/drawing/2010/main" Requires="a14">
           <p:graphicFrame>
             <p:nvGraphicFramePr>
-              <p:cNvPr id="48" name="Table 47">
+              <p:cNvPr id="3" name="Table 2">
                 <a:extLst>
                   <a:ext uri="{FF2B5EF4-FFF2-40B4-BE49-F238E27FC236}">
-                    <a16:creationId xmlns:a16="http://schemas.microsoft.com/office/drawing/2014/main" id="{BFF03B53-8874-C1A9-EE0C-D12FA8B9DAF4}"/>
+                    <a16:creationId xmlns:a16="http://schemas.microsoft.com/office/drawing/2014/main" id="{6408A2DF-C3A8-0C66-1E68-B1BC0A379BDA}"/>
                   </a:ext>
                 </a:extLst>
               </p:cNvPr>
@@ -6472,13 +3343,13 @@
               <p:nvPr>
                 <p:extLst>
                   <p:ext uri="{D42A27DB-BD31-4B8C-83A1-F6EECF244321}">
-                    <p14:modId xmlns:p14="http://schemas.microsoft.com/office/powerpoint/2010/main" val="2623190717"/>
+                    <p14:modId xmlns:p14="http://schemas.microsoft.com/office/powerpoint/2010/main" val="3063234963"/>
                   </p:ext>
                 </p:extLst>
               </p:nvPr>
             </p:nvGraphicFramePr>
             <p:xfrm>
-              <a:off x="5985794" y="3596755"/>
+              <a:off x="5730240" y="5714660"/>
               <a:ext cx="5551976" cy="914400"/>
             </p:xfrm>
             <a:graphic>
@@ -7101,13 +3972,13 @@
             </a:graphic>
           </p:graphicFrame>
         </mc:Choice>
-        <mc:Fallback xmlns="">
+        <mc:Fallback>
           <p:graphicFrame>
             <p:nvGraphicFramePr>
-              <p:cNvPr id="48" name="Table 47">
+              <p:cNvPr id="3" name="Table 2">
                 <a:extLst>
                   <a:ext uri="{FF2B5EF4-FFF2-40B4-BE49-F238E27FC236}">
-                    <a16:creationId xmlns:a16="http://schemas.microsoft.com/office/drawing/2014/main" id="{BFF03B53-8874-C1A9-EE0C-D12FA8B9DAF4}"/>
+                    <a16:creationId xmlns:a16="http://schemas.microsoft.com/office/drawing/2014/main" id="{6408A2DF-C3A8-0C66-1E68-B1BC0A379BDA}"/>
                   </a:ext>
                 </a:extLst>
               </p:cNvPr>
@@ -7117,13 +3988,13 @@
               <p:nvPr>
                 <p:extLst>
                   <p:ext uri="{D42A27DB-BD31-4B8C-83A1-F6EECF244321}">
-                    <p14:modId xmlns:p14="http://schemas.microsoft.com/office/powerpoint/2010/main" val="2623190717"/>
+                    <p14:modId xmlns:p14="http://schemas.microsoft.com/office/powerpoint/2010/main" val="3063234963"/>
                   </p:ext>
                 </p:extLst>
               </p:nvPr>
             </p:nvGraphicFramePr>
             <p:xfrm>
-              <a:off x="5985794" y="3596755"/>
+              <a:off x="5730240" y="5714660"/>
               <a:ext cx="5551976" cy="914400"/>
             </p:xfrm>
             <a:graphic>
@@ -7211,9 +4082,9 @@
                       </a:txBody>
                       <a:tcPr>
                         <a:blipFill>
-                          <a:blip r:embed="rId5"/>
+                          <a:blip r:embed="rId2"/>
                           <a:stretch>
-                            <a:fillRect l="-100877" t="-6000" r="-603509" b="-222000"/>
+                            <a:fillRect l="-101754" t="-2000" r="-602632" b="-222000"/>
                           </a:stretch>
                         </a:blipFill>
                       </a:tcPr>
@@ -7228,9 +4099,9 @@
                       </a:txBody>
                       <a:tcPr>
                         <a:blipFill>
-                          <a:blip r:embed="rId5"/>
+                          <a:blip r:embed="rId2"/>
                           <a:stretch>
-                            <a:fillRect l="-200877" t="-6000" r="-503509" b="-222000"/>
+                            <a:fillRect l="-201754" t="-2000" r="-502632" b="-222000"/>
                           </a:stretch>
                         </a:blipFill>
                       </a:tcPr>
@@ -7245,9 +4116,9 @@
                       </a:txBody>
                       <a:tcPr>
                         <a:blipFill>
-                          <a:blip r:embed="rId5"/>
+                          <a:blip r:embed="rId2"/>
                           <a:stretch>
-                            <a:fillRect l="-300877" t="-6000" r="-403509" b="-222000"/>
+                            <a:fillRect l="-301754" t="-2000" r="-402632" b="-222000"/>
                           </a:stretch>
                         </a:blipFill>
                       </a:tcPr>
@@ -7262,9 +4133,9 @@
                       </a:txBody>
                       <a:tcPr>
                         <a:blipFill>
-                          <a:blip r:embed="rId5"/>
+                          <a:blip r:embed="rId2"/>
                           <a:stretch>
-                            <a:fillRect l="-400877" t="-6000" r="-303509" b="-222000"/>
+                            <a:fillRect l="-405310" t="-2000" r="-306195" b="-222000"/>
                           </a:stretch>
                         </a:blipFill>
                       </a:tcPr>
@@ -7279,9 +4150,9 @@
                       </a:txBody>
                       <a:tcPr>
                         <a:blipFill>
-                          <a:blip r:embed="rId5"/>
+                          <a:blip r:embed="rId2"/>
                           <a:stretch>
-                            <a:fillRect l="-500877" t="-6000" r="-203509" b="-222000"/>
+                            <a:fillRect l="-500877" t="-2000" r="-203509" b="-222000"/>
                           </a:stretch>
                         </a:blipFill>
                       </a:tcPr>
@@ -7296,9 +4167,9 @@
                       </a:txBody>
                       <a:tcPr>
                         <a:blipFill>
-                          <a:blip r:embed="rId5"/>
+                          <a:blip r:embed="rId2"/>
                           <a:stretch>
-                            <a:fillRect l="-600877" t="-6000" r="-103509" b="-222000"/>
+                            <a:fillRect l="-600877" t="-2000" r="-103509" b="-222000"/>
                           </a:stretch>
                         </a:blipFill>
                       </a:tcPr>
@@ -7313,9 +4184,9 @@
                       </a:txBody>
                       <a:tcPr>
                         <a:blipFill>
-                          <a:blip r:embed="rId5"/>
+                          <a:blip r:embed="rId2"/>
                           <a:stretch>
-                            <a:fillRect l="-700877" t="-6000" r="-3509" b="-222000"/>
+                            <a:fillRect l="-700877" t="-2000" r="-3509" b="-222000"/>
                           </a:stretch>
                         </a:blipFill>
                       </a:tcPr>
@@ -7618,664 +4489,4405 @@
           </p:graphicFrame>
         </mc:Fallback>
       </mc:AlternateContent>
-      <p:sp>
-        <p:nvSpPr>
-          <p:cNvPr id="53" name="TextBox 52">
+      <p:grpSp>
+        <p:nvGrpSpPr>
+          <p:cNvPr id="23" name="Group 22">
             <a:extLst>
               <a:ext uri="{FF2B5EF4-FFF2-40B4-BE49-F238E27FC236}">
-                <a16:creationId xmlns:a16="http://schemas.microsoft.com/office/drawing/2014/main" id="{B3A76907-3FBF-879A-1D52-D28195EF35EE}"/>
+                <a16:creationId xmlns:a16="http://schemas.microsoft.com/office/drawing/2014/main" id="{1092184E-52FE-D590-F3D9-034DB704E764}"/>
               </a:ext>
             </a:extLst>
           </p:cNvPr>
-          <p:cNvSpPr txBox="1"/>
+          <p:cNvGrpSpPr/>
           <p:nvPr/>
-        </p:nvSpPr>
-        <p:spPr>
+        </p:nvGrpSpPr>
+        <p:grpSpPr>
           <a:xfrm>
-            <a:off x="4167318" y="1233590"/>
-            <a:ext cx="497252" cy="276999"/>
+            <a:off x="392188" y="102462"/>
+            <a:ext cx="11150773" cy="4832281"/>
+            <a:chOff x="392188" y="102462"/>
+            <a:chExt cx="11150773" cy="4832281"/>
           </a:xfrm>
-          <a:prstGeom prst="rect">
-            <a:avLst/>
-          </a:prstGeom>
-          <a:noFill/>
-        </p:spPr>
-        <p:txBody>
-          <a:bodyPr wrap="none" rtlCol="0">
-            <a:spAutoFit/>
-          </a:bodyPr>
-          <a:lstStyle/>
-          <a:p>
-            <a:r>
-              <a:rPr lang="en-US" sz="1200" dirty="0">
+        </p:grpSpPr>
+        <p:sp>
+          <p:nvSpPr>
+            <p:cNvPr id="11" name="Text Box 9">
+              <a:extLst>
+                <a:ext uri="{FF2B5EF4-FFF2-40B4-BE49-F238E27FC236}">
+                  <a16:creationId xmlns:a16="http://schemas.microsoft.com/office/drawing/2014/main" id="{71EE8E13-96EA-910A-81F3-E9688BF50613}"/>
+                </a:ext>
+              </a:extLst>
+            </p:cNvPr>
+            <p:cNvSpPr txBox="1"/>
+            <p:nvPr/>
+          </p:nvSpPr>
+          <p:spPr>
+            <a:xfrm>
+              <a:off x="392188" y="562071"/>
+              <a:ext cx="5338052" cy="430497"/>
+            </a:xfrm>
+            <a:prstGeom prst="rect">
+              <a:avLst/>
+            </a:prstGeom>
+            <a:noFill/>
+          </p:spPr>
+          <p:txBody>
+            <a:bodyPr wrap="square" rtlCol="0">
+              <a:spAutoFit/>
+            </a:bodyPr>
+            <a:lstStyle>
+              <a:defPPr marR="0" lvl="0" algn="l" rtl="0">
+                <a:lnSpc>
+                  <a:spcPct val="100000"/>
+                </a:lnSpc>
+                <a:spcBef>
+                  <a:spcPts val="0"/>
+                </a:spcBef>
+                <a:spcAft>
+                  <a:spcPts val="0"/>
+                </a:spcAft>
+              </a:defPPr>
+              <a:lvl1pPr marR="0" lvl="0" algn="l" rtl="0">
+                <a:lnSpc>
+                  <a:spcPct val="100000"/>
+                </a:lnSpc>
+                <a:spcBef>
+                  <a:spcPts val="0"/>
+                </a:spcBef>
+                <a:spcAft>
+                  <a:spcPts val="0"/>
+                </a:spcAft>
+                <a:buClr>
+                  <a:srgbClr val="000000"/>
+                </a:buClr>
+                <a:buFont typeface="Arial" panose="020B0604020202020204"/>
+                <a:defRPr sz="1400" b="0" i="0" u="none" strike="noStrike" cap="none">
+                  <a:solidFill>
+                    <a:srgbClr val="000000"/>
+                  </a:solidFill>
+                  <a:latin typeface="Arial" panose="020B0604020202020204"/>
+                  <a:ea typeface="Arial" panose="020B0604020202020204"/>
+                  <a:cs typeface="Arial" panose="020B0604020202020204"/>
+                  <a:sym typeface="Arial" panose="020B0604020202020204"/>
+                </a:defRPr>
+              </a:lvl1pPr>
+              <a:lvl2pPr marR="0" lvl="1" algn="l" rtl="0">
+                <a:lnSpc>
+                  <a:spcPct val="100000"/>
+                </a:lnSpc>
+                <a:spcBef>
+                  <a:spcPts val="0"/>
+                </a:spcBef>
+                <a:spcAft>
+                  <a:spcPts val="0"/>
+                </a:spcAft>
+                <a:buClr>
+                  <a:srgbClr val="000000"/>
+                </a:buClr>
+                <a:buFont typeface="Arial" panose="020B0604020202020204"/>
+                <a:defRPr sz="1400" b="0" i="0" u="none" strike="noStrike" cap="none">
+                  <a:solidFill>
+                    <a:srgbClr val="000000"/>
+                  </a:solidFill>
+                  <a:latin typeface="Arial" panose="020B0604020202020204"/>
+                  <a:ea typeface="Arial" panose="020B0604020202020204"/>
+                  <a:cs typeface="Arial" panose="020B0604020202020204"/>
+                  <a:sym typeface="Arial" panose="020B0604020202020204"/>
+                </a:defRPr>
+              </a:lvl2pPr>
+              <a:lvl3pPr marR="0" lvl="2" algn="l" rtl="0">
+                <a:lnSpc>
+                  <a:spcPct val="100000"/>
+                </a:lnSpc>
+                <a:spcBef>
+                  <a:spcPts val="0"/>
+                </a:spcBef>
+                <a:spcAft>
+                  <a:spcPts val="0"/>
+                </a:spcAft>
+                <a:buClr>
+                  <a:srgbClr val="000000"/>
+                </a:buClr>
+                <a:buFont typeface="Arial" panose="020B0604020202020204"/>
+                <a:defRPr sz="1400" b="0" i="0" u="none" strike="noStrike" cap="none">
+                  <a:solidFill>
+                    <a:srgbClr val="000000"/>
+                  </a:solidFill>
+                  <a:latin typeface="Arial" panose="020B0604020202020204"/>
+                  <a:ea typeface="Arial" panose="020B0604020202020204"/>
+                  <a:cs typeface="Arial" panose="020B0604020202020204"/>
+                  <a:sym typeface="Arial" panose="020B0604020202020204"/>
+                </a:defRPr>
+              </a:lvl3pPr>
+              <a:lvl4pPr marR="0" lvl="3" algn="l" rtl="0">
+                <a:lnSpc>
+                  <a:spcPct val="100000"/>
+                </a:lnSpc>
+                <a:spcBef>
+                  <a:spcPts val="0"/>
+                </a:spcBef>
+                <a:spcAft>
+                  <a:spcPts val="0"/>
+                </a:spcAft>
+                <a:buClr>
+                  <a:srgbClr val="000000"/>
+                </a:buClr>
+                <a:buFont typeface="Arial" panose="020B0604020202020204"/>
+                <a:defRPr sz="1400" b="0" i="0" u="none" strike="noStrike" cap="none">
+                  <a:solidFill>
+                    <a:srgbClr val="000000"/>
+                  </a:solidFill>
+                  <a:latin typeface="Arial" panose="020B0604020202020204"/>
+                  <a:ea typeface="Arial" panose="020B0604020202020204"/>
+                  <a:cs typeface="Arial" panose="020B0604020202020204"/>
+                  <a:sym typeface="Arial" panose="020B0604020202020204"/>
+                </a:defRPr>
+              </a:lvl4pPr>
+              <a:lvl5pPr marR="0" lvl="4" algn="l" rtl="0">
+                <a:lnSpc>
+                  <a:spcPct val="100000"/>
+                </a:lnSpc>
+                <a:spcBef>
+                  <a:spcPts val="0"/>
+                </a:spcBef>
+                <a:spcAft>
+                  <a:spcPts val="0"/>
+                </a:spcAft>
+                <a:buClr>
+                  <a:srgbClr val="000000"/>
+                </a:buClr>
+                <a:buFont typeface="Arial" panose="020B0604020202020204"/>
+                <a:defRPr sz="1400" b="0" i="0" u="none" strike="noStrike" cap="none">
+                  <a:solidFill>
+                    <a:srgbClr val="000000"/>
+                  </a:solidFill>
+                  <a:latin typeface="Arial" panose="020B0604020202020204"/>
+                  <a:ea typeface="Arial" panose="020B0604020202020204"/>
+                  <a:cs typeface="Arial" panose="020B0604020202020204"/>
+                  <a:sym typeface="Arial" panose="020B0604020202020204"/>
+                </a:defRPr>
+              </a:lvl5pPr>
+              <a:lvl6pPr marR="0" lvl="5" algn="l" rtl="0">
+                <a:lnSpc>
+                  <a:spcPct val="100000"/>
+                </a:lnSpc>
+                <a:spcBef>
+                  <a:spcPts val="0"/>
+                </a:spcBef>
+                <a:spcAft>
+                  <a:spcPts val="0"/>
+                </a:spcAft>
+                <a:buClr>
+                  <a:srgbClr val="000000"/>
+                </a:buClr>
+                <a:buFont typeface="Arial" panose="020B0604020202020204"/>
+                <a:defRPr sz="1400" b="0" i="0" u="none" strike="noStrike" cap="none">
+                  <a:solidFill>
+                    <a:srgbClr val="000000"/>
+                  </a:solidFill>
+                  <a:latin typeface="Arial" panose="020B0604020202020204"/>
+                  <a:ea typeface="Arial" panose="020B0604020202020204"/>
+                  <a:cs typeface="Arial" panose="020B0604020202020204"/>
+                  <a:sym typeface="Arial" panose="020B0604020202020204"/>
+                </a:defRPr>
+              </a:lvl6pPr>
+              <a:lvl7pPr marR="0" lvl="6" algn="l" rtl="0">
+                <a:lnSpc>
+                  <a:spcPct val="100000"/>
+                </a:lnSpc>
+                <a:spcBef>
+                  <a:spcPts val="0"/>
+                </a:spcBef>
+                <a:spcAft>
+                  <a:spcPts val="0"/>
+                </a:spcAft>
+                <a:buClr>
+                  <a:srgbClr val="000000"/>
+                </a:buClr>
+                <a:buFont typeface="Arial" panose="020B0604020202020204"/>
+                <a:defRPr sz="1400" b="0" i="0" u="none" strike="noStrike" cap="none">
+                  <a:solidFill>
+                    <a:srgbClr val="000000"/>
+                  </a:solidFill>
+                  <a:latin typeface="Arial" panose="020B0604020202020204"/>
+                  <a:ea typeface="Arial" panose="020B0604020202020204"/>
+                  <a:cs typeface="Arial" panose="020B0604020202020204"/>
+                  <a:sym typeface="Arial" panose="020B0604020202020204"/>
+                </a:defRPr>
+              </a:lvl7pPr>
+              <a:lvl8pPr marR="0" lvl="7" algn="l" rtl="0">
+                <a:lnSpc>
+                  <a:spcPct val="100000"/>
+                </a:lnSpc>
+                <a:spcBef>
+                  <a:spcPts val="0"/>
+                </a:spcBef>
+                <a:spcAft>
+                  <a:spcPts val="0"/>
+                </a:spcAft>
+                <a:buClr>
+                  <a:srgbClr val="000000"/>
+                </a:buClr>
+                <a:buFont typeface="Arial" panose="020B0604020202020204"/>
+                <a:defRPr sz="1400" b="0" i="0" u="none" strike="noStrike" cap="none">
+                  <a:solidFill>
+                    <a:srgbClr val="000000"/>
+                  </a:solidFill>
+                  <a:latin typeface="Arial" panose="020B0604020202020204"/>
+                  <a:ea typeface="Arial" panose="020B0604020202020204"/>
+                  <a:cs typeface="Arial" panose="020B0604020202020204"/>
+                  <a:sym typeface="Arial" panose="020B0604020202020204"/>
+                </a:defRPr>
+              </a:lvl8pPr>
+              <a:lvl9pPr marR="0" lvl="8" algn="l" rtl="0">
+                <a:lnSpc>
+                  <a:spcPct val="100000"/>
+                </a:lnSpc>
+                <a:spcBef>
+                  <a:spcPts val="0"/>
+                </a:spcBef>
+                <a:spcAft>
+                  <a:spcPts val="0"/>
+                </a:spcAft>
+                <a:buClr>
+                  <a:srgbClr val="000000"/>
+                </a:buClr>
+                <a:buFont typeface="Arial" panose="020B0604020202020204"/>
+                <a:defRPr sz="1400" b="0" i="0" u="none" strike="noStrike" cap="none">
+                  <a:solidFill>
+                    <a:srgbClr val="000000"/>
+                  </a:solidFill>
+                  <a:latin typeface="Arial" panose="020B0604020202020204"/>
+                  <a:ea typeface="Arial" panose="020B0604020202020204"/>
+                  <a:cs typeface="Arial" panose="020B0604020202020204"/>
+                  <a:sym typeface="Arial" panose="020B0604020202020204"/>
+                </a:defRPr>
+              </a:lvl9pPr>
+            </a:lstStyle>
+            <a:p>
+              <a:pPr algn="ctr"/>
+              <a:r>
+                <a:rPr lang="en-US" altLang="zh-CN" sz="1800" dirty="0"/>
+                <a:t>Case City: </a:t>
+              </a:r>
+              <a:r>
+                <a:rPr lang="en-US" sz="1800" dirty="0"/>
+                <a:t>Antananarivo,</a:t>
+              </a:r>
+              <a:r>
+                <a:rPr lang="zh-CN" altLang="en-US" sz="1800" dirty="0"/>
+                <a:t> </a:t>
+              </a:r>
+              <a:r>
+                <a:rPr lang="en-US" altLang="zh-CN" sz="1800" dirty="0"/>
+                <a:t>Madagascar</a:t>
+              </a:r>
+              <a:endParaRPr lang="en-US" sz="1800" dirty="0"/>
+            </a:p>
+          </p:txBody>
+        </p:sp>
+        <p:pic>
+          <p:nvPicPr>
+            <p:cNvPr id="8" name="Picture 7" descr="Screenshot from 2025-05-14 13-41-03">
+              <a:extLst>
+                <a:ext uri="{FF2B5EF4-FFF2-40B4-BE49-F238E27FC236}">
+                  <a16:creationId xmlns:a16="http://schemas.microsoft.com/office/drawing/2014/main" id="{056F824A-2F53-240E-AC0C-0D72D54D8DBA}"/>
+                </a:ext>
+              </a:extLst>
+            </p:cNvPr>
+            <p:cNvPicPr>
+              <a:picLocks noChangeAspect="1"/>
+            </p:cNvPicPr>
+            <p:nvPr/>
+          </p:nvPicPr>
+          <p:blipFill>
+            <a:blip r:embed="rId3"/>
+            <a:stretch>
+              <a:fillRect/>
+            </a:stretch>
+          </p:blipFill>
+          <p:spPr>
+            <a:xfrm>
+              <a:off x="3101650" y="1293770"/>
+              <a:ext cx="2628590" cy="2417285"/>
+            </a:xfrm>
+            <a:prstGeom prst="rect">
+              <a:avLst/>
+            </a:prstGeom>
+          </p:spPr>
+        </p:pic>
+        <p:pic>
+          <p:nvPicPr>
+            <p:cNvPr id="9" name="Picture 8" descr="Screenshot from 2025-05-14 13-40-46">
+              <a:extLst>
+                <a:ext uri="{FF2B5EF4-FFF2-40B4-BE49-F238E27FC236}">
+                  <a16:creationId xmlns:a16="http://schemas.microsoft.com/office/drawing/2014/main" id="{55CEAB13-7257-3152-494A-9D1F6233A402}"/>
+                </a:ext>
+              </a:extLst>
+            </p:cNvPr>
+            <p:cNvPicPr>
+              <a:picLocks noChangeAspect="1"/>
+            </p:cNvPicPr>
+            <p:nvPr/>
+          </p:nvPicPr>
+          <p:blipFill>
+            <a:blip r:embed="rId4"/>
+            <a:stretch>
+              <a:fillRect/>
+            </a:stretch>
+          </p:blipFill>
+          <p:spPr>
+            <a:xfrm>
+              <a:off x="456569" y="1293770"/>
+              <a:ext cx="2628590" cy="2417285"/>
+            </a:xfrm>
+            <a:prstGeom prst="rect">
+              <a:avLst/>
+            </a:prstGeom>
+          </p:spPr>
+        </p:pic>
+        <p:grpSp>
+          <p:nvGrpSpPr>
+            <p:cNvPr id="10" name="Google Shape;156;p16">
+              <a:extLst>
+                <a:ext uri="{FF2B5EF4-FFF2-40B4-BE49-F238E27FC236}">
+                  <a16:creationId xmlns:a16="http://schemas.microsoft.com/office/drawing/2014/main" id="{5E731B56-553C-28A0-B977-8FA0B7143C61}"/>
+                </a:ext>
+              </a:extLst>
+            </p:cNvPr>
+            <p:cNvGrpSpPr/>
+            <p:nvPr/>
+          </p:nvGrpSpPr>
+          <p:grpSpPr>
+            <a:xfrm>
+              <a:off x="1323444" y="3711051"/>
+              <a:ext cx="3041592" cy="658323"/>
+              <a:chOff x="4807925" y="4484375"/>
+              <a:chExt cx="2693250" cy="582180"/>
+            </a:xfrm>
+          </p:grpSpPr>
+          <p:sp>
+            <p:nvSpPr>
+              <p:cNvPr id="17" name="Google Shape;157;p16">
+                <a:extLst>
+                  <a:ext uri="{FF2B5EF4-FFF2-40B4-BE49-F238E27FC236}">
+                    <a16:creationId xmlns:a16="http://schemas.microsoft.com/office/drawing/2014/main" id="{8B13B24B-FBD8-5930-DE5D-C55C619CE57A}"/>
+                  </a:ext>
+                </a:extLst>
+              </p:cNvPr>
+              <p:cNvSpPr/>
+              <p:nvPr/>
+            </p:nvSpPr>
+            <p:spPr>
+              <a:xfrm>
+                <a:off x="4913433" y="4758200"/>
+                <a:ext cx="432300" cy="234600"/>
+              </a:xfrm>
+              <a:prstGeom prst="rect">
+                <a:avLst/>
+              </a:prstGeom>
+              <a:solidFill>
+                <a:schemeClr val="dk1"/>
+              </a:solidFill>
+              <a:ln>
+                <a:noFill/>
+              </a:ln>
+            </p:spPr>
+            <p:txBody>
+              <a:bodyPr spcFirstLastPara="1" wrap="square" lIns="91425" tIns="91425" rIns="91425" bIns="91425" anchor="ctr" anchorCtr="0">
+                <a:noAutofit/>
+              </a:bodyPr>
+              <a:lstStyle>
+                <a:defPPr marR="0" lvl="0" algn="l" rtl="0">
+                  <a:lnSpc>
+                    <a:spcPct val="100000"/>
+                  </a:lnSpc>
+                  <a:spcBef>
+                    <a:spcPts val="0"/>
+                  </a:spcBef>
+                  <a:spcAft>
+                    <a:spcPts val="0"/>
+                  </a:spcAft>
+                </a:defPPr>
+                <a:lvl1pPr marR="0" lvl="0" algn="l" rtl="0">
+                  <a:lnSpc>
+                    <a:spcPct val="100000"/>
+                  </a:lnSpc>
+                  <a:spcBef>
+                    <a:spcPts val="0"/>
+                  </a:spcBef>
+                  <a:spcAft>
+                    <a:spcPts val="0"/>
+                  </a:spcAft>
+                  <a:buClr>
+                    <a:srgbClr val="000000"/>
+                  </a:buClr>
+                  <a:buFont typeface="Arial" panose="020B0604020202020204"/>
+                  <a:defRPr sz="1400" b="0" i="0" u="none" strike="noStrike" cap="none">
+                    <a:solidFill>
+                      <a:srgbClr val="000000"/>
+                    </a:solidFill>
+                    <a:latin typeface="Arial" panose="020B0604020202020204"/>
+                    <a:ea typeface="Arial" panose="020B0604020202020204"/>
+                    <a:cs typeface="Arial" panose="020B0604020202020204"/>
+                    <a:sym typeface="Arial" panose="020B0604020202020204"/>
+                  </a:defRPr>
+                </a:lvl1pPr>
+                <a:lvl2pPr marR="0" lvl="1" algn="l" rtl="0">
+                  <a:lnSpc>
+                    <a:spcPct val="100000"/>
+                  </a:lnSpc>
+                  <a:spcBef>
+                    <a:spcPts val="0"/>
+                  </a:spcBef>
+                  <a:spcAft>
+                    <a:spcPts val="0"/>
+                  </a:spcAft>
+                  <a:buClr>
+                    <a:srgbClr val="000000"/>
+                  </a:buClr>
+                  <a:buFont typeface="Arial" panose="020B0604020202020204"/>
+                  <a:defRPr sz="1400" b="0" i="0" u="none" strike="noStrike" cap="none">
+                    <a:solidFill>
+                      <a:srgbClr val="000000"/>
+                    </a:solidFill>
+                    <a:latin typeface="Arial" panose="020B0604020202020204"/>
+                    <a:ea typeface="Arial" panose="020B0604020202020204"/>
+                    <a:cs typeface="Arial" panose="020B0604020202020204"/>
+                    <a:sym typeface="Arial" panose="020B0604020202020204"/>
+                  </a:defRPr>
+                </a:lvl2pPr>
+                <a:lvl3pPr marR="0" lvl="2" algn="l" rtl="0">
+                  <a:lnSpc>
+                    <a:spcPct val="100000"/>
+                  </a:lnSpc>
+                  <a:spcBef>
+                    <a:spcPts val="0"/>
+                  </a:spcBef>
+                  <a:spcAft>
+                    <a:spcPts val="0"/>
+                  </a:spcAft>
+                  <a:buClr>
+                    <a:srgbClr val="000000"/>
+                  </a:buClr>
+                  <a:buFont typeface="Arial" panose="020B0604020202020204"/>
+                  <a:defRPr sz="1400" b="0" i="0" u="none" strike="noStrike" cap="none">
+                    <a:solidFill>
+                      <a:srgbClr val="000000"/>
+                    </a:solidFill>
+                    <a:latin typeface="Arial" panose="020B0604020202020204"/>
+                    <a:ea typeface="Arial" panose="020B0604020202020204"/>
+                    <a:cs typeface="Arial" panose="020B0604020202020204"/>
+                    <a:sym typeface="Arial" panose="020B0604020202020204"/>
+                  </a:defRPr>
+                </a:lvl3pPr>
+                <a:lvl4pPr marR="0" lvl="3" algn="l" rtl="0">
+                  <a:lnSpc>
+                    <a:spcPct val="100000"/>
+                  </a:lnSpc>
+                  <a:spcBef>
+                    <a:spcPts val="0"/>
+                  </a:spcBef>
+                  <a:spcAft>
+                    <a:spcPts val="0"/>
+                  </a:spcAft>
+                  <a:buClr>
+                    <a:srgbClr val="000000"/>
+                  </a:buClr>
+                  <a:buFont typeface="Arial" panose="020B0604020202020204"/>
+                  <a:defRPr sz="1400" b="0" i="0" u="none" strike="noStrike" cap="none">
+                    <a:solidFill>
+                      <a:srgbClr val="000000"/>
+                    </a:solidFill>
+                    <a:latin typeface="Arial" panose="020B0604020202020204"/>
+                    <a:ea typeface="Arial" panose="020B0604020202020204"/>
+                    <a:cs typeface="Arial" panose="020B0604020202020204"/>
+                    <a:sym typeface="Arial" panose="020B0604020202020204"/>
+                  </a:defRPr>
+                </a:lvl4pPr>
+                <a:lvl5pPr marR="0" lvl="4" algn="l" rtl="0">
+                  <a:lnSpc>
+                    <a:spcPct val="100000"/>
+                  </a:lnSpc>
+                  <a:spcBef>
+                    <a:spcPts val="0"/>
+                  </a:spcBef>
+                  <a:spcAft>
+                    <a:spcPts val="0"/>
+                  </a:spcAft>
+                  <a:buClr>
+                    <a:srgbClr val="000000"/>
+                  </a:buClr>
+                  <a:buFont typeface="Arial" panose="020B0604020202020204"/>
+                  <a:defRPr sz="1400" b="0" i="0" u="none" strike="noStrike" cap="none">
+                    <a:solidFill>
+                      <a:srgbClr val="000000"/>
+                    </a:solidFill>
+                    <a:latin typeface="Arial" panose="020B0604020202020204"/>
+                    <a:ea typeface="Arial" panose="020B0604020202020204"/>
+                    <a:cs typeface="Arial" panose="020B0604020202020204"/>
+                    <a:sym typeface="Arial" panose="020B0604020202020204"/>
+                  </a:defRPr>
+                </a:lvl5pPr>
+                <a:lvl6pPr marR="0" lvl="5" algn="l" rtl="0">
+                  <a:lnSpc>
+                    <a:spcPct val="100000"/>
+                  </a:lnSpc>
+                  <a:spcBef>
+                    <a:spcPts val="0"/>
+                  </a:spcBef>
+                  <a:spcAft>
+                    <a:spcPts val="0"/>
+                  </a:spcAft>
+                  <a:buClr>
+                    <a:srgbClr val="000000"/>
+                  </a:buClr>
+                  <a:buFont typeface="Arial" panose="020B0604020202020204"/>
+                  <a:defRPr sz="1400" b="0" i="0" u="none" strike="noStrike" cap="none">
+                    <a:solidFill>
+                      <a:srgbClr val="000000"/>
+                    </a:solidFill>
+                    <a:latin typeface="Arial" panose="020B0604020202020204"/>
+                    <a:ea typeface="Arial" panose="020B0604020202020204"/>
+                    <a:cs typeface="Arial" panose="020B0604020202020204"/>
+                    <a:sym typeface="Arial" panose="020B0604020202020204"/>
+                  </a:defRPr>
+                </a:lvl6pPr>
+                <a:lvl7pPr marR="0" lvl="6" algn="l" rtl="0">
+                  <a:lnSpc>
+                    <a:spcPct val="100000"/>
+                  </a:lnSpc>
+                  <a:spcBef>
+                    <a:spcPts val="0"/>
+                  </a:spcBef>
+                  <a:spcAft>
+                    <a:spcPts val="0"/>
+                  </a:spcAft>
+                  <a:buClr>
+                    <a:srgbClr val="000000"/>
+                  </a:buClr>
+                  <a:buFont typeface="Arial" panose="020B0604020202020204"/>
+                  <a:defRPr sz="1400" b="0" i="0" u="none" strike="noStrike" cap="none">
+                    <a:solidFill>
+                      <a:srgbClr val="000000"/>
+                    </a:solidFill>
+                    <a:latin typeface="Arial" panose="020B0604020202020204"/>
+                    <a:ea typeface="Arial" panose="020B0604020202020204"/>
+                    <a:cs typeface="Arial" panose="020B0604020202020204"/>
+                    <a:sym typeface="Arial" panose="020B0604020202020204"/>
+                  </a:defRPr>
+                </a:lvl7pPr>
+                <a:lvl8pPr marR="0" lvl="7" algn="l" rtl="0">
+                  <a:lnSpc>
+                    <a:spcPct val="100000"/>
+                  </a:lnSpc>
+                  <a:spcBef>
+                    <a:spcPts val="0"/>
+                  </a:spcBef>
+                  <a:spcAft>
+                    <a:spcPts val="0"/>
+                  </a:spcAft>
+                  <a:buClr>
+                    <a:srgbClr val="000000"/>
+                  </a:buClr>
+                  <a:buFont typeface="Arial" panose="020B0604020202020204"/>
+                  <a:defRPr sz="1400" b="0" i="0" u="none" strike="noStrike" cap="none">
+                    <a:solidFill>
+                      <a:srgbClr val="000000"/>
+                    </a:solidFill>
+                    <a:latin typeface="Arial" panose="020B0604020202020204"/>
+                    <a:ea typeface="Arial" panose="020B0604020202020204"/>
+                    <a:cs typeface="Arial" panose="020B0604020202020204"/>
+                    <a:sym typeface="Arial" panose="020B0604020202020204"/>
+                  </a:defRPr>
+                </a:lvl8pPr>
+                <a:lvl9pPr marR="0" lvl="8" algn="l" rtl="0">
+                  <a:lnSpc>
+                    <a:spcPct val="100000"/>
+                  </a:lnSpc>
+                  <a:spcBef>
+                    <a:spcPts val="0"/>
+                  </a:spcBef>
+                  <a:spcAft>
+                    <a:spcPts val="0"/>
+                  </a:spcAft>
+                  <a:buClr>
+                    <a:srgbClr val="000000"/>
+                  </a:buClr>
+                  <a:buFont typeface="Arial" panose="020B0604020202020204"/>
+                  <a:defRPr sz="1400" b="0" i="0" u="none" strike="noStrike" cap="none">
+                    <a:solidFill>
+                      <a:srgbClr val="000000"/>
+                    </a:solidFill>
+                    <a:latin typeface="Arial" panose="020B0604020202020204"/>
+                    <a:ea typeface="Arial" panose="020B0604020202020204"/>
+                    <a:cs typeface="Arial" panose="020B0604020202020204"/>
+                    <a:sym typeface="Arial" panose="020B0604020202020204"/>
+                  </a:defRPr>
+                </a:lvl9pPr>
+              </a:lstStyle>
+              <a:p>
+                <a:pPr marL="0" lvl="0" indent="0" algn="ctr" rtl="0">
+                  <a:spcBef>
+                    <a:spcPts val="0"/>
+                  </a:spcBef>
+                  <a:spcAft>
+                    <a:spcPts val="0"/>
+                  </a:spcAft>
+                  <a:buNone/>
+                </a:pPr>
+                <a:endParaRPr sz="1800"/>
+              </a:p>
+            </p:txBody>
+          </p:sp>
+          <p:sp>
+            <p:nvSpPr>
+              <p:cNvPr id="18" name="Google Shape;158;p16">
+                <a:extLst>
+                  <a:ext uri="{FF2B5EF4-FFF2-40B4-BE49-F238E27FC236}">
+                    <a16:creationId xmlns:a16="http://schemas.microsoft.com/office/drawing/2014/main" id="{E38C44FB-852A-E8CE-AA35-AD40BB952321}"/>
+                  </a:ext>
+                </a:extLst>
+              </p:cNvPr>
+              <p:cNvSpPr txBox="1"/>
+              <p:nvPr/>
+            </p:nvSpPr>
+            <p:spPr>
+              <a:xfrm>
+                <a:off x="4807925" y="4484375"/>
+                <a:ext cx="800100" cy="507575"/>
+              </a:xfrm>
+              <a:prstGeom prst="rect">
+                <a:avLst/>
+              </a:prstGeom>
+              <a:noFill/>
+              <a:ln>
+                <a:noFill/>
+              </a:ln>
+            </p:spPr>
+            <p:txBody>
+              <a:bodyPr spcFirstLastPara="1" wrap="square" lIns="91425" tIns="91425" rIns="91425" bIns="91425" anchor="t" anchorCtr="0">
+                <a:spAutoFit/>
+              </a:bodyPr>
+              <a:lstStyle>
+                <a:defPPr marR="0" lvl="0" algn="l" rtl="0">
+                  <a:lnSpc>
+                    <a:spcPct val="100000"/>
+                  </a:lnSpc>
+                  <a:spcBef>
+                    <a:spcPts val="0"/>
+                  </a:spcBef>
+                  <a:spcAft>
+                    <a:spcPts val="0"/>
+                  </a:spcAft>
+                </a:defPPr>
+                <a:lvl1pPr marR="0" lvl="0" algn="l" rtl="0">
+                  <a:lnSpc>
+                    <a:spcPct val="100000"/>
+                  </a:lnSpc>
+                  <a:spcBef>
+                    <a:spcPts val="0"/>
+                  </a:spcBef>
+                  <a:spcAft>
+                    <a:spcPts val="0"/>
+                  </a:spcAft>
+                  <a:buClr>
+                    <a:srgbClr val="000000"/>
+                  </a:buClr>
+                  <a:buFont typeface="Arial" panose="020B0604020202020204"/>
+                  <a:defRPr sz="1400" b="0" i="0" u="none" strike="noStrike" cap="none">
+                    <a:solidFill>
+                      <a:srgbClr val="000000"/>
+                    </a:solidFill>
+                    <a:latin typeface="Arial" panose="020B0604020202020204"/>
+                    <a:ea typeface="Arial" panose="020B0604020202020204"/>
+                    <a:cs typeface="Arial" panose="020B0604020202020204"/>
+                    <a:sym typeface="Arial" panose="020B0604020202020204"/>
+                  </a:defRPr>
+                </a:lvl1pPr>
+                <a:lvl2pPr marR="0" lvl="1" algn="l" rtl="0">
+                  <a:lnSpc>
+                    <a:spcPct val="100000"/>
+                  </a:lnSpc>
+                  <a:spcBef>
+                    <a:spcPts val="0"/>
+                  </a:spcBef>
+                  <a:spcAft>
+                    <a:spcPts val="0"/>
+                  </a:spcAft>
+                  <a:buClr>
+                    <a:srgbClr val="000000"/>
+                  </a:buClr>
+                  <a:buFont typeface="Arial" panose="020B0604020202020204"/>
+                  <a:defRPr sz="1400" b="0" i="0" u="none" strike="noStrike" cap="none">
+                    <a:solidFill>
+                      <a:srgbClr val="000000"/>
+                    </a:solidFill>
+                    <a:latin typeface="Arial" panose="020B0604020202020204"/>
+                    <a:ea typeface="Arial" panose="020B0604020202020204"/>
+                    <a:cs typeface="Arial" panose="020B0604020202020204"/>
+                    <a:sym typeface="Arial" panose="020B0604020202020204"/>
+                  </a:defRPr>
+                </a:lvl2pPr>
+                <a:lvl3pPr marR="0" lvl="2" algn="l" rtl="0">
+                  <a:lnSpc>
+                    <a:spcPct val="100000"/>
+                  </a:lnSpc>
+                  <a:spcBef>
+                    <a:spcPts val="0"/>
+                  </a:spcBef>
+                  <a:spcAft>
+                    <a:spcPts val="0"/>
+                  </a:spcAft>
+                  <a:buClr>
+                    <a:srgbClr val="000000"/>
+                  </a:buClr>
+                  <a:buFont typeface="Arial" panose="020B0604020202020204"/>
+                  <a:defRPr sz="1400" b="0" i="0" u="none" strike="noStrike" cap="none">
+                    <a:solidFill>
+                      <a:srgbClr val="000000"/>
+                    </a:solidFill>
+                    <a:latin typeface="Arial" panose="020B0604020202020204"/>
+                    <a:ea typeface="Arial" panose="020B0604020202020204"/>
+                    <a:cs typeface="Arial" panose="020B0604020202020204"/>
+                    <a:sym typeface="Arial" panose="020B0604020202020204"/>
+                  </a:defRPr>
+                </a:lvl3pPr>
+                <a:lvl4pPr marR="0" lvl="3" algn="l" rtl="0">
+                  <a:lnSpc>
+                    <a:spcPct val="100000"/>
+                  </a:lnSpc>
+                  <a:spcBef>
+                    <a:spcPts val="0"/>
+                  </a:spcBef>
+                  <a:spcAft>
+                    <a:spcPts val="0"/>
+                  </a:spcAft>
+                  <a:buClr>
+                    <a:srgbClr val="000000"/>
+                  </a:buClr>
+                  <a:buFont typeface="Arial" panose="020B0604020202020204"/>
+                  <a:defRPr sz="1400" b="0" i="0" u="none" strike="noStrike" cap="none">
+                    <a:solidFill>
+                      <a:srgbClr val="000000"/>
+                    </a:solidFill>
+                    <a:latin typeface="Arial" panose="020B0604020202020204"/>
+                    <a:ea typeface="Arial" panose="020B0604020202020204"/>
+                    <a:cs typeface="Arial" panose="020B0604020202020204"/>
+                    <a:sym typeface="Arial" panose="020B0604020202020204"/>
+                  </a:defRPr>
+                </a:lvl4pPr>
+                <a:lvl5pPr marR="0" lvl="4" algn="l" rtl="0">
+                  <a:lnSpc>
+                    <a:spcPct val="100000"/>
+                  </a:lnSpc>
+                  <a:spcBef>
+                    <a:spcPts val="0"/>
+                  </a:spcBef>
+                  <a:spcAft>
+                    <a:spcPts val="0"/>
+                  </a:spcAft>
+                  <a:buClr>
+                    <a:srgbClr val="000000"/>
+                  </a:buClr>
+                  <a:buFont typeface="Arial" panose="020B0604020202020204"/>
+                  <a:defRPr sz="1400" b="0" i="0" u="none" strike="noStrike" cap="none">
+                    <a:solidFill>
+                      <a:srgbClr val="000000"/>
+                    </a:solidFill>
+                    <a:latin typeface="Arial" panose="020B0604020202020204"/>
+                    <a:ea typeface="Arial" panose="020B0604020202020204"/>
+                    <a:cs typeface="Arial" panose="020B0604020202020204"/>
+                    <a:sym typeface="Arial" panose="020B0604020202020204"/>
+                  </a:defRPr>
+                </a:lvl5pPr>
+                <a:lvl6pPr marR="0" lvl="5" algn="l" rtl="0">
+                  <a:lnSpc>
+                    <a:spcPct val="100000"/>
+                  </a:lnSpc>
+                  <a:spcBef>
+                    <a:spcPts val="0"/>
+                  </a:spcBef>
+                  <a:spcAft>
+                    <a:spcPts val="0"/>
+                  </a:spcAft>
+                  <a:buClr>
+                    <a:srgbClr val="000000"/>
+                  </a:buClr>
+                  <a:buFont typeface="Arial" panose="020B0604020202020204"/>
+                  <a:defRPr sz="1400" b="0" i="0" u="none" strike="noStrike" cap="none">
+                    <a:solidFill>
+                      <a:srgbClr val="000000"/>
+                    </a:solidFill>
+                    <a:latin typeface="Arial" panose="020B0604020202020204"/>
+                    <a:ea typeface="Arial" panose="020B0604020202020204"/>
+                    <a:cs typeface="Arial" panose="020B0604020202020204"/>
+                    <a:sym typeface="Arial" panose="020B0604020202020204"/>
+                  </a:defRPr>
+                </a:lvl6pPr>
+                <a:lvl7pPr marR="0" lvl="6" algn="l" rtl="0">
+                  <a:lnSpc>
+                    <a:spcPct val="100000"/>
+                  </a:lnSpc>
+                  <a:spcBef>
+                    <a:spcPts val="0"/>
+                  </a:spcBef>
+                  <a:spcAft>
+                    <a:spcPts val="0"/>
+                  </a:spcAft>
+                  <a:buClr>
+                    <a:srgbClr val="000000"/>
+                  </a:buClr>
+                  <a:buFont typeface="Arial" panose="020B0604020202020204"/>
+                  <a:defRPr sz="1400" b="0" i="0" u="none" strike="noStrike" cap="none">
+                    <a:solidFill>
+                      <a:srgbClr val="000000"/>
+                    </a:solidFill>
+                    <a:latin typeface="Arial" panose="020B0604020202020204"/>
+                    <a:ea typeface="Arial" panose="020B0604020202020204"/>
+                    <a:cs typeface="Arial" panose="020B0604020202020204"/>
+                    <a:sym typeface="Arial" panose="020B0604020202020204"/>
+                  </a:defRPr>
+                </a:lvl7pPr>
+                <a:lvl8pPr marR="0" lvl="7" algn="l" rtl="0">
+                  <a:lnSpc>
+                    <a:spcPct val="100000"/>
+                  </a:lnSpc>
+                  <a:spcBef>
+                    <a:spcPts val="0"/>
+                  </a:spcBef>
+                  <a:spcAft>
+                    <a:spcPts val="0"/>
+                  </a:spcAft>
+                  <a:buClr>
+                    <a:srgbClr val="000000"/>
+                  </a:buClr>
+                  <a:buFont typeface="Arial" panose="020B0604020202020204"/>
+                  <a:defRPr sz="1400" b="0" i="0" u="none" strike="noStrike" cap="none">
+                    <a:solidFill>
+                      <a:srgbClr val="000000"/>
+                    </a:solidFill>
+                    <a:latin typeface="Arial" panose="020B0604020202020204"/>
+                    <a:ea typeface="Arial" panose="020B0604020202020204"/>
+                    <a:cs typeface="Arial" panose="020B0604020202020204"/>
+                    <a:sym typeface="Arial" panose="020B0604020202020204"/>
+                  </a:defRPr>
+                </a:lvl8pPr>
+                <a:lvl9pPr marR="0" lvl="8" algn="l" rtl="0">
+                  <a:lnSpc>
+                    <a:spcPct val="100000"/>
+                  </a:lnSpc>
+                  <a:spcBef>
+                    <a:spcPts val="0"/>
+                  </a:spcBef>
+                  <a:spcAft>
+                    <a:spcPts val="0"/>
+                  </a:spcAft>
+                  <a:buClr>
+                    <a:srgbClr val="000000"/>
+                  </a:buClr>
+                  <a:buFont typeface="Arial" panose="020B0604020202020204"/>
+                  <a:defRPr sz="1400" b="0" i="0" u="none" strike="noStrike" cap="none">
+                    <a:solidFill>
+                      <a:srgbClr val="000000"/>
+                    </a:solidFill>
+                    <a:latin typeface="Arial" panose="020B0604020202020204"/>
+                    <a:ea typeface="Arial" panose="020B0604020202020204"/>
+                    <a:cs typeface="Arial" panose="020B0604020202020204"/>
+                    <a:sym typeface="Arial" panose="020B0604020202020204"/>
+                  </a:defRPr>
+                </a:lvl9pPr>
+              </a:lstStyle>
+              <a:p>
+                <a:pPr marL="0" lvl="0" indent="0" algn="l" rtl="0">
+                  <a:spcBef>
+                    <a:spcPts val="0"/>
+                  </a:spcBef>
+                  <a:spcAft>
+                    <a:spcPts val="0"/>
+                  </a:spcAft>
+                  <a:buNone/>
+                </a:pPr>
+                <a:r>
+                  <a:rPr lang="de-AT" sz="1000" b="1" dirty="0">
+                    <a:solidFill>
+                      <a:schemeClr val="dk1"/>
+                    </a:solidFill>
+                  </a:rPr>
+                  <a:t>No Building</a:t>
+                </a:r>
+                <a:endParaRPr sz="1000" b="1" dirty="0">
+                  <a:solidFill>
+                    <a:schemeClr val="dk1"/>
+                  </a:solidFill>
+                </a:endParaRPr>
+              </a:p>
+            </p:txBody>
+          </p:sp>
+          <p:sp>
+            <p:nvSpPr>
+              <p:cNvPr id="19" name="Google Shape;159;p16">
+                <a:extLst>
+                  <a:ext uri="{FF2B5EF4-FFF2-40B4-BE49-F238E27FC236}">
+                    <a16:creationId xmlns:a16="http://schemas.microsoft.com/office/drawing/2014/main" id="{4D00177F-CDC7-0F25-08C3-B4767BE48A71}"/>
+                  </a:ext>
+                </a:extLst>
+              </p:cNvPr>
+              <p:cNvSpPr/>
+              <p:nvPr/>
+            </p:nvSpPr>
+            <p:spPr>
+              <a:xfrm>
+                <a:off x="5890875" y="4753925"/>
+                <a:ext cx="1009200" cy="234600"/>
+              </a:xfrm>
+              <a:prstGeom prst="rect">
+                <a:avLst/>
+              </a:prstGeom>
+              <a:gradFill>
+                <a:gsLst>
+                  <a:gs pos="0">
+                    <a:srgbClr val="1D4877"/>
+                  </a:gs>
+                  <a:gs pos="24000">
+                    <a:srgbClr val="1B8A5A"/>
+                  </a:gs>
+                  <a:gs pos="50000">
+                    <a:srgbClr val="FBB021"/>
+                  </a:gs>
+                  <a:gs pos="75000">
+                    <a:srgbClr val="F68838"/>
+                  </a:gs>
+                  <a:gs pos="100000">
+                    <a:srgbClr val="EE3E32"/>
+                  </a:gs>
+                </a:gsLst>
+                <a:lin ang="0" scaled="0"/>
+              </a:gradFill>
+              <a:ln>
+                <a:noFill/>
+              </a:ln>
+            </p:spPr>
+            <p:txBody>
+              <a:bodyPr spcFirstLastPara="1" wrap="square" lIns="91425" tIns="91425" rIns="91425" bIns="91425" anchor="ctr" anchorCtr="0">
+                <a:noAutofit/>
+              </a:bodyPr>
+              <a:lstStyle>
+                <a:defPPr marR="0" lvl="0" algn="l" rtl="0">
+                  <a:lnSpc>
+                    <a:spcPct val="100000"/>
+                  </a:lnSpc>
+                  <a:spcBef>
+                    <a:spcPts val="0"/>
+                  </a:spcBef>
+                  <a:spcAft>
+                    <a:spcPts val="0"/>
+                  </a:spcAft>
+                </a:defPPr>
+                <a:lvl1pPr marR="0" lvl="0" algn="l" rtl="0">
+                  <a:lnSpc>
+                    <a:spcPct val="100000"/>
+                  </a:lnSpc>
+                  <a:spcBef>
+                    <a:spcPts val="0"/>
+                  </a:spcBef>
+                  <a:spcAft>
+                    <a:spcPts val="0"/>
+                  </a:spcAft>
+                  <a:buClr>
+                    <a:srgbClr val="000000"/>
+                  </a:buClr>
+                  <a:buFont typeface="Arial" panose="020B0604020202020204"/>
+                  <a:defRPr sz="1400" b="0" i="0" u="none" strike="noStrike" cap="none">
+                    <a:solidFill>
+                      <a:srgbClr val="000000"/>
+                    </a:solidFill>
+                    <a:latin typeface="Arial" panose="020B0604020202020204"/>
+                    <a:ea typeface="Arial" panose="020B0604020202020204"/>
+                    <a:cs typeface="Arial" panose="020B0604020202020204"/>
+                    <a:sym typeface="Arial" panose="020B0604020202020204"/>
+                  </a:defRPr>
+                </a:lvl1pPr>
+                <a:lvl2pPr marR="0" lvl="1" algn="l" rtl="0">
+                  <a:lnSpc>
+                    <a:spcPct val="100000"/>
+                  </a:lnSpc>
+                  <a:spcBef>
+                    <a:spcPts val="0"/>
+                  </a:spcBef>
+                  <a:spcAft>
+                    <a:spcPts val="0"/>
+                  </a:spcAft>
+                  <a:buClr>
+                    <a:srgbClr val="000000"/>
+                  </a:buClr>
+                  <a:buFont typeface="Arial" panose="020B0604020202020204"/>
+                  <a:defRPr sz="1400" b="0" i="0" u="none" strike="noStrike" cap="none">
+                    <a:solidFill>
+                      <a:srgbClr val="000000"/>
+                    </a:solidFill>
+                    <a:latin typeface="Arial" panose="020B0604020202020204"/>
+                    <a:ea typeface="Arial" panose="020B0604020202020204"/>
+                    <a:cs typeface="Arial" panose="020B0604020202020204"/>
+                    <a:sym typeface="Arial" panose="020B0604020202020204"/>
+                  </a:defRPr>
+                </a:lvl2pPr>
+                <a:lvl3pPr marR="0" lvl="2" algn="l" rtl="0">
+                  <a:lnSpc>
+                    <a:spcPct val="100000"/>
+                  </a:lnSpc>
+                  <a:spcBef>
+                    <a:spcPts val="0"/>
+                  </a:spcBef>
+                  <a:spcAft>
+                    <a:spcPts val="0"/>
+                  </a:spcAft>
+                  <a:buClr>
+                    <a:srgbClr val="000000"/>
+                  </a:buClr>
+                  <a:buFont typeface="Arial" panose="020B0604020202020204"/>
+                  <a:defRPr sz="1400" b="0" i="0" u="none" strike="noStrike" cap="none">
+                    <a:solidFill>
+                      <a:srgbClr val="000000"/>
+                    </a:solidFill>
+                    <a:latin typeface="Arial" panose="020B0604020202020204"/>
+                    <a:ea typeface="Arial" panose="020B0604020202020204"/>
+                    <a:cs typeface="Arial" panose="020B0604020202020204"/>
+                    <a:sym typeface="Arial" panose="020B0604020202020204"/>
+                  </a:defRPr>
+                </a:lvl3pPr>
+                <a:lvl4pPr marR="0" lvl="3" algn="l" rtl="0">
+                  <a:lnSpc>
+                    <a:spcPct val="100000"/>
+                  </a:lnSpc>
+                  <a:spcBef>
+                    <a:spcPts val="0"/>
+                  </a:spcBef>
+                  <a:spcAft>
+                    <a:spcPts val="0"/>
+                  </a:spcAft>
+                  <a:buClr>
+                    <a:srgbClr val="000000"/>
+                  </a:buClr>
+                  <a:buFont typeface="Arial" panose="020B0604020202020204"/>
+                  <a:defRPr sz="1400" b="0" i="0" u="none" strike="noStrike" cap="none">
+                    <a:solidFill>
+                      <a:srgbClr val="000000"/>
+                    </a:solidFill>
+                    <a:latin typeface="Arial" panose="020B0604020202020204"/>
+                    <a:ea typeface="Arial" panose="020B0604020202020204"/>
+                    <a:cs typeface="Arial" panose="020B0604020202020204"/>
+                    <a:sym typeface="Arial" panose="020B0604020202020204"/>
+                  </a:defRPr>
+                </a:lvl4pPr>
+                <a:lvl5pPr marR="0" lvl="4" algn="l" rtl="0">
+                  <a:lnSpc>
+                    <a:spcPct val="100000"/>
+                  </a:lnSpc>
+                  <a:spcBef>
+                    <a:spcPts val="0"/>
+                  </a:spcBef>
+                  <a:spcAft>
+                    <a:spcPts val="0"/>
+                  </a:spcAft>
+                  <a:buClr>
+                    <a:srgbClr val="000000"/>
+                  </a:buClr>
+                  <a:buFont typeface="Arial" panose="020B0604020202020204"/>
+                  <a:defRPr sz="1400" b="0" i="0" u="none" strike="noStrike" cap="none">
+                    <a:solidFill>
+                      <a:srgbClr val="000000"/>
+                    </a:solidFill>
+                    <a:latin typeface="Arial" panose="020B0604020202020204"/>
+                    <a:ea typeface="Arial" panose="020B0604020202020204"/>
+                    <a:cs typeface="Arial" panose="020B0604020202020204"/>
+                    <a:sym typeface="Arial" panose="020B0604020202020204"/>
+                  </a:defRPr>
+                </a:lvl5pPr>
+                <a:lvl6pPr marR="0" lvl="5" algn="l" rtl="0">
+                  <a:lnSpc>
+                    <a:spcPct val="100000"/>
+                  </a:lnSpc>
+                  <a:spcBef>
+                    <a:spcPts val="0"/>
+                  </a:spcBef>
+                  <a:spcAft>
+                    <a:spcPts val="0"/>
+                  </a:spcAft>
+                  <a:buClr>
+                    <a:srgbClr val="000000"/>
+                  </a:buClr>
+                  <a:buFont typeface="Arial" panose="020B0604020202020204"/>
+                  <a:defRPr sz="1400" b="0" i="0" u="none" strike="noStrike" cap="none">
+                    <a:solidFill>
+                      <a:srgbClr val="000000"/>
+                    </a:solidFill>
+                    <a:latin typeface="Arial" panose="020B0604020202020204"/>
+                    <a:ea typeface="Arial" panose="020B0604020202020204"/>
+                    <a:cs typeface="Arial" panose="020B0604020202020204"/>
+                    <a:sym typeface="Arial" panose="020B0604020202020204"/>
+                  </a:defRPr>
+                </a:lvl6pPr>
+                <a:lvl7pPr marR="0" lvl="6" algn="l" rtl="0">
+                  <a:lnSpc>
+                    <a:spcPct val="100000"/>
+                  </a:lnSpc>
+                  <a:spcBef>
+                    <a:spcPts val="0"/>
+                  </a:spcBef>
+                  <a:spcAft>
+                    <a:spcPts val="0"/>
+                  </a:spcAft>
+                  <a:buClr>
+                    <a:srgbClr val="000000"/>
+                  </a:buClr>
+                  <a:buFont typeface="Arial" panose="020B0604020202020204"/>
+                  <a:defRPr sz="1400" b="0" i="0" u="none" strike="noStrike" cap="none">
+                    <a:solidFill>
+                      <a:srgbClr val="000000"/>
+                    </a:solidFill>
+                    <a:latin typeface="Arial" panose="020B0604020202020204"/>
+                    <a:ea typeface="Arial" panose="020B0604020202020204"/>
+                    <a:cs typeface="Arial" panose="020B0604020202020204"/>
+                    <a:sym typeface="Arial" panose="020B0604020202020204"/>
+                  </a:defRPr>
+                </a:lvl7pPr>
+                <a:lvl8pPr marR="0" lvl="7" algn="l" rtl="0">
+                  <a:lnSpc>
+                    <a:spcPct val="100000"/>
+                  </a:lnSpc>
+                  <a:spcBef>
+                    <a:spcPts val="0"/>
+                  </a:spcBef>
+                  <a:spcAft>
+                    <a:spcPts val="0"/>
+                  </a:spcAft>
+                  <a:buClr>
+                    <a:srgbClr val="000000"/>
+                  </a:buClr>
+                  <a:buFont typeface="Arial" panose="020B0604020202020204"/>
+                  <a:defRPr sz="1400" b="0" i="0" u="none" strike="noStrike" cap="none">
+                    <a:solidFill>
+                      <a:srgbClr val="000000"/>
+                    </a:solidFill>
+                    <a:latin typeface="Arial" panose="020B0604020202020204"/>
+                    <a:ea typeface="Arial" panose="020B0604020202020204"/>
+                    <a:cs typeface="Arial" panose="020B0604020202020204"/>
+                    <a:sym typeface="Arial" panose="020B0604020202020204"/>
+                  </a:defRPr>
+                </a:lvl8pPr>
+                <a:lvl9pPr marR="0" lvl="8" algn="l" rtl="0">
+                  <a:lnSpc>
+                    <a:spcPct val="100000"/>
+                  </a:lnSpc>
+                  <a:spcBef>
+                    <a:spcPts val="0"/>
+                  </a:spcBef>
+                  <a:spcAft>
+                    <a:spcPts val="0"/>
+                  </a:spcAft>
+                  <a:buClr>
+                    <a:srgbClr val="000000"/>
+                  </a:buClr>
+                  <a:buFont typeface="Arial" panose="020B0604020202020204"/>
+                  <a:defRPr sz="1400" b="0" i="0" u="none" strike="noStrike" cap="none">
+                    <a:solidFill>
+                      <a:srgbClr val="000000"/>
+                    </a:solidFill>
+                    <a:latin typeface="Arial" panose="020B0604020202020204"/>
+                    <a:ea typeface="Arial" panose="020B0604020202020204"/>
+                    <a:cs typeface="Arial" panose="020B0604020202020204"/>
+                    <a:sym typeface="Arial" panose="020B0604020202020204"/>
+                  </a:defRPr>
+                </a:lvl9pPr>
+              </a:lstStyle>
+              <a:p>
+                <a:pPr marL="0" lvl="0" indent="0" algn="ctr" rtl="0">
+                  <a:spcBef>
+                    <a:spcPts val="0"/>
+                  </a:spcBef>
+                  <a:spcAft>
+                    <a:spcPts val="0"/>
+                  </a:spcAft>
+                  <a:buNone/>
+                </a:pPr>
+                <a:endParaRPr sz="1800"/>
+              </a:p>
+            </p:txBody>
+          </p:sp>
+          <p:sp>
+            <p:nvSpPr>
+              <p:cNvPr id="20" name="Google Shape;160;p16">
+                <a:extLst>
+                  <a:ext uri="{FF2B5EF4-FFF2-40B4-BE49-F238E27FC236}">
+                    <a16:creationId xmlns:a16="http://schemas.microsoft.com/office/drawing/2014/main" id="{2A44F1C0-705F-63B6-1892-E834A7E81E7A}"/>
+                  </a:ext>
+                </a:extLst>
+              </p:cNvPr>
+              <p:cNvSpPr txBox="1"/>
+              <p:nvPr/>
+            </p:nvSpPr>
+            <p:spPr>
+              <a:xfrm>
+                <a:off x="5647974" y="4709676"/>
+                <a:ext cx="233100" cy="356879"/>
+              </a:xfrm>
+              <a:prstGeom prst="rect">
+                <a:avLst/>
+              </a:prstGeom>
+              <a:noFill/>
+              <a:ln>
+                <a:noFill/>
+              </a:ln>
+            </p:spPr>
+            <p:txBody>
+              <a:bodyPr spcFirstLastPara="1" wrap="square" lIns="91425" tIns="91425" rIns="91425" bIns="91425" anchor="t" anchorCtr="0">
+                <a:spAutoFit/>
+              </a:bodyPr>
+              <a:lstStyle>
+                <a:defPPr marR="0" lvl="0" algn="l" rtl="0">
+                  <a:lnSpc>
+                    <a:spcPct val="100000"/>
+                  </a:lnSpc>
+                  <a:spcBef>
+                    <a:spcPts val="0"/>
+                  </a:spcBef>
+                  <a:spcAft>
+                    <a:spcPts val="0"/>
+                  </a:spcAft>
+                </a:defPPr>
+                <a:lvl1pPr marR="0" lvl="0" algn="l" rtl="0">
+                  <a:lnSpc>
+                    <a:spcPct val="100000"/>
+                  </a:lnSpc>
+                  <a:spcBef>
+                    <a:spcPts val="0"/>
+                  </a:spcBef>
+                  <a:spcAft>
+                    <a:spcPts val="0"/>
+                  </a:spcAft>
+                  <a:buClr>
+                    <a:srgbClr val="000000"/>
+                  </a:buClr>
+                  <a:buFont typeface="Arial" panose="020B0604020202020204"/>
+                  <a:defRPr sz="1400" b="0" i="0" u="none" strike="noStrike" cap="none">
+                    <a:solidFill>
+                      <a:srgbClr val="000000"/>
+                    </a:solidFill>
+                    <a:latin typeface="Arial" panose="020B0604020202020204"/>
+                    <a:ea typeface="Arial" panose="020B0604020202020204"/>
+                    <a:cs typeface="Arial" panose="020B0604020202020204"/>
+                    <a:sym typeface="Arial" panose="020B0604020202020204"/>
+                  </a:defRPr>
+                </a:lvl1pPr>
+                <a:lvl2pPr marR="0" lvl="1" algn="l" rtl="0">
+                  <a:lnSpc>
+                    <a:spcPct val="100000"/>
+                  </a:lnSpc>
+                  <a:spcBef>
+                    <a:spcPts val="0"/>
+                  </a:spcBef>
+                  <a:spcAft>
+                    <a:spcPts val="0"/>
+                  </a:spcAft>
+                  <a:buClr>
+                    <a:srgbClr val="000000"/>
+                  </a:buClr>
+                  <a:buFont typeface="Arial" panose="020B0604020202020204"/>
+                  <a:defRPr sz="1400" b="0" i="0" u="none" strike="noStrike" cap="none">
+                    <a:solidFill>
+                      <a:srgbClr val="000000"/>
+                    </a:solidFill>
+                    <a:latin typeface="Arial" panose="020B0604020202020204"/>
+                    <a:ea typeface="Arial" panose="020B0604020202020204"/>
+                    <a:cs typeface="Arial" panose="020B0604020202020204"/>
+                    <a:sym typeface="Arial" panose="020B0604020202020204"/>
+                  </a:defRPr>
+                </a:lvl2pPr>
+                <a:lvl3pPr marR="0" lvl="2" algn="l" rtl="0">
+                  <a:lnSpc>
+                    <a:spcPct val="100000"/>
+                  </a:lnSpc>
+                  <a:spcBef>
+                    <a:spcPts val="0"/>
+                  </a:spcBef>
+                  <a:spcAft>
+                    <a:spcPts val="0"/>
+                  </a:spcAft>
+                  <a:buClr>
+                    <a:srgbClr val="000000"/>
+                  </a:buClr>
+                  <a:buFont typeface="Arial" panose="020B0604020202020204"/>
+                  <a:defRPr sz="1400" b="0" i="0" u="none" strike="noStrike" cap="none">
+                    <a:solidFill>
+                      <a:srgbClr val="000000"/>
+                    </a:solidFill>
+                    <a:latin typeface="Arial" panose="020B0604020202020204"/>
+                    <a:ea typeface="Arial" panose="020B0604020202020204"/>
+                    <a:cs typeface="Arial" panose="020B0604020202020204"/>
+                    <a:sym typeface="Arial" panose="020B0604020202020204"/>
+                  </a:defRPr>
+                </a:lvl3pPr>
+                <a:lvl4pPr marR="0" lvl="3" algn="l" rtl="0">
+                  <a:lnSpc>
+                    <a:spcPct val="100000"/>
+                  </a:lnSpc>
+                  <a:spcBef>
+                    <a:spcPts val="0"/>
+                  </a:spcBef>
+                  <a:spcAft>
+                    <a:spcPts val="0"/>
+                  </a:spcAft>
+                  <a:buClr>
+                    <a:srgbClr val="000000"/>
+                  </a:buClr>
+                  <a:buFont typeface="Arial" panose="020B0604020202020204"/>
+                  <a:defRPr sz="1400" b="0" i="0" u="none" strike="noStrike" cap="none">
+                    <a:solidFill>
+                      <a:srgbClr val="000000"/>
+                    </a:solidFill>
+                    <a:latin typeface="Arial" panose="020B0604020202020204"/>
+                    <a:ea typeface="Arial" panose="020B0604020202020204"/>
+                    <a:cs typeface="Arial" panose="020B0604020202020204"/>
+                    <a:sym typeface="Arial" panose="020B0604020202020204"/>
+                  </a:defRPr>
+                </a:lvl4pPr>
+                <a:lvl5pPr marR="0" lvl="4" algn="l" rtl="0">
+                  <a:lnSpc>
+                    <a:spcPct val="100000"/>
+                  </a:lnSpc>
+                  <a:spcBef>
+                    <a:spcPts val="0"/>
+                  </a:spcBef>
+                  <a:spcAft>
+                    <a:spcPts val="0"/>
+                  </a:spcAft>
+                  <a:buClr>
+                    <a:srgbClr val="000000"/>
+                  </a:buClr>
+                  <a:buFont typeface="Arial" panose="020B0604020202020204"/>
+                  <a:defRPr sz="1400" b="0" i="0" u="none" strike="noStrike" cap="none">
+                    <a:solidFill>
+                      <a:srgbClr val="000000"/>
+                    </a:solidFill>
+                    <a:latin typeface="Arial" panose="020B0604020202020204"/>
+                    <a:ea typeface="Arial" panose="020B0604020202020204"/>
+                    <a:cs typeface="Arial" panose="020B0604020202020204"/>
+                    <a:sym typeface="Arial" panose="020B0604020202020204"/>
+                  </a:defRPr>
+                </a:lvl5pPr>
+                <a:lvl6pPr marR="0" lvl="5" algn="l" rtl="0">
+                  <a:lnSpc>
+                    <a:spcPct val="100000"/>
+                  </a:lnSpc>
+                  <a:spcBef>
+                    <a:spcPts val="0"/>
+                  </a:spcBef>
+                  <a:spcAft>
+                    <a:spcPts val="0"/>
+                  </a:spcAft>
+                  <a:buClr>
+                    <a:srgbClr val="000000"/>
+                  </a:buClr>
+                  <a:buFont typeface="Arial" panose="020B0604020202020204"/>
+                  <a:defRPr sz="1400" b="0" i="0" u="none" strike="noStrike" cap="none">
+                    <a:solidFill>
+                      <a:srgbClr val="000000"/>
+                    </a:solidFill>
+                    <a:latin typeface="Arial" panose="020B0604020202020204"/>
+                    <a:ea typeface="Arial" panose="020B0604020202020204"/>
+                    <a:cs typeface="Arial" panose="020B0604020202020204"/>
+                    <a:sym typeface="Arial" panose="020B0604020202020204"/>
+                  </a:defRPr>
+                </a:lvl6pPr>
+                <a:lvl7pPr marR="0" lvl="6" algn="l" rtl="0">
+                  <a:lnSpc>
+                    <a:spcPct val="100000"/>
+                  </a:lnSpc>
+                  <a:spcBef>
+                    <a:spcPts val="0"/>
+                  </a:spcBef>
+                  <a:spcAft>
+                    <a:spcPts val="0"/>
+                  </a:spcAft>
+                  <a:buClr>
+                    <a:srgbClr val="000000"/>
+                  </a:buClr>
+                  <a:buFont typeface="Arial" panose="020B0604020202020204"/>
+                  <a:defRPr sz="1400" b="0" i="0" u="none" strike="noStrike" cap="none">
+                    <a:solidFill>
+                      <a:srgbClr val="000000"/>
+                    </a:solidFill>
+                    <a:latin typeface="Arial" panose="020B0604020202020204"/>
+                    <a:ea typeface="Arial" panose="020B0604020202020204"/>
+                    <a:cs typeface="Arial" panose="020B0604020202020204"/>
+                    <a:sym typeface="Arial" panose="020B0604020202020204"/>
+                  </a:defRPr>
+                </a:lvl7pPr>
+                <a:lvl8pPr marR="0" lvl="7" algn="l" rtl="0">
+                  <a:lnSpc>
+                    <a:spcPct val="100000"/>
+                  </a:lnSpc>
+                  <a:spcBef>
+                    <a:spcPts val="0"/>
+                  </a:spcBef>
+                  <a:spcAft>
+                    <a:spcPts val="0"/>
+                  </a:spcAft>
+                  <a:buClr>
+                    <a:srgbClr val="000000"/>
+                  </a:buClr>
+                  <a:buFont typeface="Arial" panose="020B0604020202020204"/>
+                  <a:defRPr sz="1400" b="0" i="0" u="none" strike="noStrike" cap="none">
+                    <a:solidFill>
+                      <a:srgbClr val="000000"/>
+                    </a:solidFill>
+                    <a:latin typeface="Arial" panose="020B0604020202020204"/>
+                    <a:ea typeface="Arial" panose="020B0604020202020204"/>
+                    <a:cs typeface="Arial" panose="020B0604020202020204"/>
+                    <a:sym typeface="Arial" panose="020B0604020202020204"/>
+                  </a:defRPr>
+                </a:lvl8pPr>
+                <a:lvl9pPr marR="0" lvl="8" algn="l" rtl="0">
+                  <a:lnSpc>
+                    <a:spcPct val="100000"/>
+                  </a:lnSpc>
+                  <a:spcBef>
+                    <a:spcPts val="0"/>
+                  </a:spcBef>
+                  <a:spcAft>
+                    <a:spcPts val="0"/>
+                  </a:spcAft>
+                  <a:buClr>
+                    <a:srgbClr val="000000"/>
+                  </a:buClr>
+                  <a:buFont typeface="Arial" panose="020B0604020202020204"/>
+                  <a:defRPr sz="1400" b="0" i="0" u="none" strike="noStrike" cap="none">
+                    <a:solidFill>
+                      <a:srgbClr val="000000"/>
+                    </a:solidFill>
+                    <a:latin typeface="Arial" panose="020B0604020202020204"/>
+                    <a:ea typeface="Arial" panose="020B0604020202020204"/>
+                    <a:cs typeface="Arial" panose="020B0604020202020204"/>
+                    <a:sym typeface="Arial" panose="020B0604020202020204"/>
+                  </a:defRPr>
+                </a:lvl9pPr>
+              </a:lstStyle>
+              <a:p>
+                <a:pPr marL="0" lvl="0" indent="0" algn="l" rtl="0">
+                  <a:spcBef>
+                    <a:spcPts val="0"/>
+                  </a:spcBef>
+                  <a:spcAft>
+                    <a:spcPts val="0"/>
+                  </a:spcAft>
+                  <a:buNone/>
+                </a:pPr>
+                <a:r>
+                  <a:rPr lang="de-AT" sz="1050">
+                    <a:solidFill>
+                      <a:schemeClr val="dk1"/>
+                    </a:solidFill>
+                  </a:rPr>
+                  <a:t>0</a:t>
+                </a:r>
+                <a:endParaRPr sz="1050">
+                  <a:solidFill>
+                    <a:schemeClr val="dk1"/>
+                  </a:solidFill>
+                </a:endParaRPr>
+              </a:p>
+            </p:txBody>
+          </p:sp>
+          <p:sp>
+            <p:nvSpPr>
+              <p:cNvPr id="21" name="Google Shape;161;p16">
+                <a:extLst>
+                  <a:ext uri="{FF2B5EF4-FFF2-40B4-BE49-F238E27FC236}">
+                    <a16:creationId xmlns:a16="http://schemas.microsoft.com/office/drawing/2014/main" id="{1AC6F036-707E-BE20-2985-A19BC9824237}"/>
+                  </a:ext>
+                </a:extLst>
+              </p:cNvPr>
+              <p:cNvSpPr txBox="1"/>
+              <p:nvPr/>
+            </p:nvSpPr>
+            <p:spPr>
+              <a:xfrm>
+                <a:off x="6909875" y="4709675"/>
+                <a:ext cx="591300" cy="356879"/>
+              </a:xfrm>
+              <a:prstGeom prst="rect">
+                <a:avLst/>
+              </a:prstGeom>
+              <a:noFill/>
+              <a:ln>
+                <a:noFill/>
+              </a:ln>
+            </p:spPr>
+            <p:txBody>
+              <a:bodyPr spcFirstLastPara="1" wrap="square" lIns="91425" tIns="91425" rIns="91425" bIns="91425" anchor="t" anchorCtr="0">
+                <a:spAutoFit/>
+              </a:bodyPr>
+              <a:lstStyle>
+                <a:defPPr marR="0" lvl="0" algn="l" rtl="0">
+                  <a:lnSpc>
+                    <a:spcPct val="100000"/>
+                  </a:lnSpc>
+                  <a:spcBef>
+                    <a:spcPts val="0"/>
+                  </a:spcBef>
+                  <a:spcAft>
+                    <a:spcPts val="0"/>
+                  </a:spcAft>
+                </a:defPPr>
+                <a:lvl1pPr marR="0" lvl="0" algn="l" rtl="0">
+                  <a:lnSpc>
+                    <a:spcPct val="100000"/>
+                  </a:lnSpc>
+                  <a:spcBef>
+                    <a:spcPts val="0"/>
+                  </a:spcBef>
+                  <a:spcAft>
+                    <a:spcPts val="0"/>
+                  </a:spcAft>
+                  <a:buClr>
+                    <a:srgbClr val="000000"/>
+                  </a:buClr>
+                  <a:buFont typeface="Arial" panose="020B0604020202020204"/>
+                  <a:defRPr sz="1400" b="0" i="0" u="none" strike="noStrike" cap="none">
+                    <a:solidFill>
+                      <a:srgbClr val="000000"/>
+                    </a:solidFill>
+                    <a:latin typeface="Arial" panose="020B0604020202020204"/>
+                    <a:ea typeface="Arial" panose="020B0604020202020204"/>
+                    <a:cs typeface="Arial" panose="020B0604020202020204"/>
+                    <a:sym typeface="Arial" panose="020B0604020202020204"/>
+                  </a:defRPr>
+                </a:lvl1pPr>
+                <a:lvl2pPr marR="0" lvl="1" algn="l" rtl="0">
+                  <a:lnSpc>
+                    <a:spcPct val="100000"/>
+                  </a:lnSpc>
+                  <a:spcBef>
+                    <a:spcPts val="0"/>
+                  </a:spcBef>
+                  <a:spcAft>
+                    <a:spcPts val="0"/>
+                  </a:spcAft>
+                  <a:buClr>
+                    <a:srgbClr val="000000"/>
+                  </a:buClr>
+                  <a:buFont typeface="Arial" panose="020B0604020202020204"/>
+                  <a:defRPr sz="1400" b="0" i="0" u="none" strike="noStrike" cap="none">
+                    <a:solidFill>
+                      <a:srgbClr val="000000"/>
+                    </a:solidFill>
+                    <a:latin typeface="Arial" panose="020B0604020202020204"/>
+                    <a:ea typeface="Arial" panose="020B0604020202020204"/>
+                    <a:cs typeface="Arial" panose="020B0604020202020204"/>
+                    <a:sym typeface="Arial" panose="020B0604020202020204"/>
+                  </a:defRPr>
+                </a:lvl2pPr>
+                <a:lvl3pPr marR="0" lvl="2" algn="l" rtl="0">
+                  <a:lnSpc>
+                    <a:spcPct val="100000"/>
+                  </a:lnSpc>
+                  <a:spcBef>
+                    <a:spcPts val="0"/>
+                  </a:spcBef>
+                  <a:spcAft>
+                    <a:spcPts val="0"/>
+                  </a:spcAft>
+                  <a:buClr>
+                    <a:srgbClr val="000000"/>
+                  </a:buClr>
+                  <a:buFont typeface="Arial" panose="020B0604020202020204"/>
+                  <a:defRPr sz="1400" b="0" i="0" u="none" strike="noStrike" cap="none">
+                    <a:solidFill>
+                      <a:srgbClr val="000000"/>
+                    </a:solidFill>
+                    <a:latin typeface="Arial" panose="020B0604020202020204"/>
+                    <a:ea typeface="Arial" panose="020B0604020202020204"/>
+                    <a:cs typeface="Arial" panose="020B0604020202020204"/>
+                    <a:sym typeface="Arial" panose="020B0604020202020204"/>
+                  </a:defRPr>
+                </a:lvl3pPr>
+                <a:lvl4pPr marR="0" lvl="3" algn="l" rtl="0">
+                  <a:lnSpc>
+                    <a:spcPct val="100000"/>
+                  </a:lnSpc>
+                  <a:spcBef>
+                    <a:spcPts val="0"/>
+                  </a:spcBef>
+                  <a:spcAft>
+                    <a:spcPts val="0"/>
+                  </a:spcAft>
+                  <a:buClr>
+                    <a:srgbClr val="000000"/>
+                  </a:buClr>
+                  <a:buFont typeface="Arial" panose="020B0604020202020204"/>
+                  <a:defRPr sz="1400" b="0" i="0" u="none" strike="noStrike" cap="none">
+                    <a:solidFill>
+                      <a:srgbClr val="000000"/>
+                    </a:solidFill>
+                    <a:latin typeface="Arial" panose="020B0604020202020204"/>
+                    <a:ea typeface="Arial" panose="020B0604020202020204"/>
+                    <a:cs typeface="Arial" panose="020B0604020202020204"/>
+                    <a:sym typeface="Arial" panose="020B0604020202020204"/>
+                  </a:defRPr>
+                </a:lvl4pPr>
+                <a:lvl5pPr marR="0" lvl="4" algn="l" rtl="0">
+                  <a:lnSpc>
+                    <a:spcPct val="100000"/>
+                  </a:lnSpc>
+                  <a:spcBef>
+                    <a:spcPts val="0"/>
+                  </a:spcBef>
+                  <a:spcAft>
+                    <a:spcPts val="0"/>
+                  </a:spcAft>
+                  <a:buClr>
+                    <a:srgbClr val="000000"/>
+                  </a:buClr>
+                  <a:buFont typeface="Arial" panose="020B0604020202020204"/>
+                  <a:defRPr sz="1400" b="0" i="0" u="none" strike="noStrike" cap="none">
+                    <a:solidFill>
+                      <a:srgbClr val="000000"/>
+                    </a:solidFill>
+                    <a:latin typeface="Arial" panose="020B0604020202020204"/>
+                    <a:ea typeface="Arial" panose="020B0604020202020204"/>
+                    <a:cs typeface="Arial" panose="020B0604020202020204"/>
+                    <a:sym typeface="Arial" panose="020B0604020202020204"/>
+                  </a:defRPr>
+                </a:lvl5pPr>
+                <a:lvl6pPr marR="0" lvl="5" algn="l" rtl="0">
+                  <a:lnSpc>
+                    <a:spcPct val="100000"/>
+                  </a:lnSpc>
+                  <a:spcBef>
+                    <a:spcPts val="0"/>
+                  </a:spcBef>
+                  <a:spcAft>
+                    <a:spcPts val="0"/>
+                  </a:spcAft>
+                  <a:buClr>
+                    <a:srgbClr val="000000"/>
+                  </a:buClr>
+                  <a:buFont typeface="Arial" panose="020B0604020202020204"/>
+                  <a:defRPr sz="1400" b="0" i="0" u="none" strike="noStrike" cap="none">
+                    <a:solidFill>
+                      <a:srgbClr val="000000"/>
+                    </a:solidFill>
+                    <a:latin typeface="Arial" panose="020B0604020202020204"/>
+                    <a:ea typeface="Arial" panose="020B0604020202020204"/>
+                    <a:cs typeface="Arial" panose="020B0604020202020204"/>
+                    <a:sym typeface="Arial" panose="020B0604020202020204"/>
+                  </a:defRPr>
+                </a:lvl6pPr>
+                <a:lvl7pPr marR="0" lvl="6" algn="l" rtl="0">
+                  <a:lnSpc>
+                    <a:spcPct val="100000"/>
+                  </a:lnSpc>
+                  <a:spcBef>
+                    <a:spcPts val="0"/>
+                  </a:spcBef>
+                  <a:spcAft>
+                    <a:spcPts val="0"/>
+                  </a:spcAft>
+                  <a:buClr>
+                    <a:srgbClr val="000000"/>
+                  </a:buClr>
+                  <a:buFont typeface="Arial" panose="020B0604020202020204"/>
+                  <a:defRPr sz="1400" b="0" i="0" u="none" strike="noStrike" cap="none">
+                    <a:solidFill>
+                      <a:srgbClr val="000000"/>
+                    </a:solidFill>
+                    <a:latin typeface="Arial" panose="020B0604020202020204"/>
+                    <a:ea typeface="Arial" panose="020B0604020202020204"/>
+                    <a:cs typeface="Arial" panose="020B0604020202020204"/>
+                    <a:sym typeface="Arial" panose="020B0604020202020204"/>
+                  </a:defRPr>
+                </a:lvl7pPr>
+                <a:lvl8pPr marR="0" lvl="7" algn="l" rtl="0">
+                  <a:lnSpc>
+                    <a:spcPct val="100000"/>
+                  </a:lnSpc>
+                  <a:spcBef>
+                    <a:spcPts val="0"/>
+                  </a:spcBef>
+                  <a:spcAft>
+                    <a:spcPts val="0"/>
+                  </a:spcAft>
+                  <a:buClr>
+                    <a:srgbClr val="000000"/>
+                  </a:buClr>
+                  <a:buFont typeface="Arial" panose="020B0604020202020204"/>
+                  <a:defRPr sz="1400" b="0" i="0" u="none" strike="noStrike" cap="none">
+                    <a:solidFill>
+                      <a:srgbClr val="000000"/>
+                    </a:solidFill>
+                    <a:latin typeface="Arial" panose="020B0604020202020204"/>
+                    <a:ea typeface="Arial" panose="020B0604020202020204"/>
+                    <a:cs typeface="Arial" panose="020B0604020202020204"/>
+                    <a:sym typeface="Arial" panose="020B0604020202020204"/>
+                  </a:defRPr>
+                </a:lvl8pPr>
+                <a:lvl9pPr marR="0" lvl="8" algn="l" rtl="0">
+                  <a:lnSpc>
+                    <a:spcPct val="100000"/>
+                  </a:lnSpc>
+                  <a:spcBef>
+                    <a:spcPts val="0"/>
+                  </a:spcBef>
+                  <a:spcAft>
+                    <a:spcPts val="0"/>
+                  </a:spcAft>
+                  <a:buClr>
+                    <a:srgbClr val="000000"/>
+                  </a:buClr>
+                  <a:buFont typeface="Arial" panose="020B0604020202020204"/>
+                  <a:defRPr sz="1400" b="0" i="0" u="none" strike="noStrike" cap="none">
+                    <a:solidFill>
+                      <a:srgbClr val="000000"/>
+                    </a:solidFill>
+                    <a:latin typeface="Arial" panose="020B0604020202020204"/>
+                    <a:ea typeface="Arial" panose="020B0604020202020204"/>
+                    <a:cs typeface="Arial" panose="020B0604020202020204"/>
+                    <a:sym typeface="Arial" panose="020B0604020202020204"/>
+                  </a:defRPr>
+                </a:lvl9pPr>
+              </a:lstStyle>
+              <a:p>
+                <a:pPr marL="0" lvl="0" indent="0" algn="l" rtl="0">
+                  <a:spcBef>
+                    <a:spcPts val="0"/>
+                  </a:spcBef>
+                  <a:spcAft>
+                    <a:spcPts val="0"/>
+                  </a:spcAft>
+                  <a:buNone/>
+                </a:pPr>
+                <a:r>
+                  <a:rPr lang="de-AT" sz="1050">
+                    <a:solidFill>
+                      <a:schemeClr val="dk1"/>
+                    </a:solidFill>
+                  </a:rPr>
+                  <a:t>100m</a:t>
+                </a:r>
+                <a:endParaRPr sz="1050">
+                  <a:solidFill>
+                    <a:schemeClr val="dk1"/>
+                  </a:solidFill>
+                </a:endParaRPr>
+              </a:p>
+            </p:txBody>
+          </p:sp>
+          <p:sp>
+            <p:nvSpPr>
+              <p:cNvPr id="22" name="Google Shape;162;p16">
+                <a:extLst>
+                  <a:ext uri="{FF2B5EF4-FFF2-40B4-BE49-F238E27FC236}">
+                    <a16:creationId xmlns:a16="http://schemas.microsoft.com/office/drawing/2014/main" id="{FC8456CD-8F64-C977-7C60-F1174824676B}"/>
+                  </a:ext>
+                </a:extLst>
+              </p:cNvPr>
+              <p:cNvSpPr txBox="1"/>
+              <p:nvPr/>
+            </p:nvSpPr>
+            <p:spPr>
+              <a:xfrm>
+                <a:off x="5819375" y="4484375"/>
+                <a:ext cx="1681800" cy="348948"/>
+              </a:xfrm>
+              <a:prstGeom prst="rect">
+                <a:avLst/>
+              </a:prstGeom>
+              <a:noFill/>
+              <a:ln>
+                <a:noFill/>
+              </a:ln>
+            </p:spPr>
+            <p:txBody>
+              <a:bodyPr spcFirstLastPara="1" wrap="square" lIns="91425" tIns="91425" rIns="91425" bIns="91425" anchor="t" anchorCtr="0">
+                <a:spAutoFit/>
+              </a:bodyPr>
+              <a:lstStyle>
+                <a:defPPr marR="0" lvl="0" algn="l" rtl="0">
+                  <a:lnSpc>
+                    <a:spcPct val="100000"/>
+                  </a:lnSpc>
+                  <a:spcBef>
+                    <a:spcPts val="0"/>
+                  </a:spcBef>
+                  <a:spcAft>
+                    <a:spcPts val="0"/>
+                  </a:spcAft>
+                </a:defPPr>
+                <a:lvl1pPr marR="0" lvl="0" algn="l" rtl="0">
+                  <a:lnSpc>
+                    <a:spcPct val="100000"/>
+                  </a:lnSpc>
+                  <a:spcBef>
+                    <a:spcPts val="0"/>
+                  </a:spcBef>
+                  <a:spcAft>
+                    <a:spcPts val="0"/>
+                  </a:spcAft>
+                  <a:buClr>
+                    <a:srgbClr val="000000"/>
+                  </a:buClr>
+                  <a:buFont typeface="Arial" panose="020B0604020202020204"/>
+                  <a:defRPr sz="1400" b="0" i="0" u="none" strike="noStrike" cap="none">
+                    <a:solidFill>
+                      <a:srgbClr val="000000"/>
+                    </a:solidFill>
+                    <a:latin typeface="Arial" panose="020B0604020202020204"/>
+                    <a:ea typeface="Arial" panose="020B0604020202020204"/>
+                    <a:cs typeface="Arial" panose="020B0604020202020204"/>
+                    <a:sym typeface="Arial" panose="020B0604020202020204"/>
+                  </a:defRPr>
+                </a:lvl1pPr>
+                <a:lvl2pPr marR="0" lvl="1" algn="l" rtl="0">
+                  <a:lnSpc>
+                    <a:spcPct val="100000"/>
+                  </a:lnSpc>
+                  <a:spcBef>
+                    <a:spcPts val="0"/>
+                  </a:spcBef>
+                  <a:spcAft>
+                    <a:spcPts val="0"/>
+                  </a:spcAft>
+                  <a:buClr>
+                    <a:srgbClr val="000000"/>
+                  </a:buClr>
+                  <a:buFont typeface="Arial" panose="020B0604020202020204"/>
+                  <a:defRPr sz="1400" b="0" i="0" u="none" strike="noStrike" cap="none">
+                    <a:solidFill>
+                      <a:srgbClr val="000000"/>
+                    </a:solidFill>
+                    <a:latin typeface="Arial" panose="020B0604020202020204"/>
+                    <a:ea typeface="Arial" panose="020B0604020202020204"/>
+                    <a:cs typeface="Arial" panose="020B0604020202020204"/>
+                    <a:sym typeface="Arial" panose="020B0604020202020204"/>
+                  </a:defRPr>
+                </a:lvl2pPr>
+                <a:lvl3pPr marR="0" lvl="2" algn="l" rtl="0">
+                  <a:lnSpc>
+                    <a:spcPct val="100000"/>
+                  </a:lnSpc>
+                  <a:spcBef>
+                    <a:spcPts val="0"/>
+                  </a:spcBef>
+                  <a:spcAft>
+                    <a:spcPts val="0"/>
+                  </a:spcAft>
+                  <a:buClr>
+                    <a:srgbClr val="000000"/>
+                  </a:buClr>
+                  <a:buFont typeface="Arial" panose="020B0604020202020204"/>
+                  <a:defRPr sz="1400" b="0" i="0" u="none" strike="noStrike" cap="none">
+                    <a:solidFill>
+                      <a:srgbClr val="000000"/>
+                    </a:solidFill>
+                    <a:latin typeface="Arial" panose="020B0604020202020204"/>
+                    <a:ea typeface="Arial" panose="020B0604020202020204"/>
+                    <a:cs typeface="Arial" panose="020B0604020202020204"/>
+                    <a:sym typeface="Arial" panose="020B0604020202020204"/>
+                  </a:defRPr>
+                </a:lvl3pPr>
+                <a:lvl4pPr marR="0" lvl="3" algn="l" rtl="0">
+                  <a:lnSpc>
+                    <a:spcPct val="100000"/>
+                  </a:lnSpc>
+                  <a:spcBef>
+                    <a:spcPts val="0"/>
+                  </a:spcBef>
+                  <a:spcAft>
+                    <a:spcPts val="0"/>
+                  </a:spcAft>
+                  <a:buClr>
+                    <a:srgbClr val="000000"/>
+                  </a:buClr>
+                  <a:buFont typeface="Arial" panose="020B0604020202020204"/>
+                  <a:defRPr sz="1400" b="0" i="0" u="none" strike="noStrike" cap="none">
+                    <a:solidFill>
+                      <a:srgbClr val="000000"/>
+                    </a:solidFill>
+                    <a:latin typeface="Arial" panose="020B0604020202020204"/>
+                    <a:ea typeface="Arial" panose="020B0604020202020204"/>
+                    <a:cs typeface="Arial" panose="020B0604020202020204"/>
+                    <a:sym typeface="Arial" panose="020B0604020202020204"/>
+                  </a:defRPr>
+                </a:lvl4pPr>
+                <a:lvl5pPr marR="0" lvl="4" algn="l" rtl="0">
+                  <a:lnSpc>
+                    <a:spcPct val="100000"/>
+                  </a:lnSpc>
+                  <a:spcBef>
+                    <a:spcPts val="0"/>
+                  </a:spcBef>
+                  <a:spcAft>
+                    <a:spcPts val="0"/>
+                  </a:spcAft>
+                  <a:buClr>
+                    <a:srgbClr val="000000"/>
+                  </a:buClr>
+                  <a:buFont typeface="Arial" panose="020B0604020202020204"/>
+                  <a:defRPr sz="1400" b="0" i="0" u="none" strike="noStrike" cap="none">
+                    <a:solidFill>
+                      <a:srgbClr val="000000"/>
+                    </a:solidFill>
+                    <a:latin typeface="Arial" panose="020B0604020202020204"/>
+                    <a:ea typeface="Arial" panose="020B0604020202020204"/>
+                    <a:cs typeface="Arial" panose="020B0604020202020204"/>
+                    <a:sym typeface="Arial" panose="020B0604020202020204"/>
+                  </a:defRPr>
+                </a:lvl5pPr>
+                <a:lvl6pPr marR="0" lvl="5" algn="l" rtl="0">
+                  <a:lnSpc>
+                    <a:spcPct val="100000"/>
+                  </a:lnSpc>
+                  <a:spcBef>
+                    <a:spcPts val="0"/>
+                  </a:spcBef>
+                  <a:spcAft>
+                    <a:spcPts val="0"/>
+                  </a:spcAft>
+                  <a:buClr>
+                    <a:srgbClr val="000000"/>
+                  </a:buClr>
+                  <a:buFont typeface="Arial" panose="020B0604020202020204"/>
+                  <a:defRPr sz="1400" b="0" i="0" u="none" strike="noStrike" cap="none">
+                    <a:solidFill>
+                      <a:srgbClr val="000000"/>
+                    </a:solidFill>
+                    <a:latin typeface="Arial" panose="020B0604020202020204"/>
+                    <a:ea typeface="Arial" panose="020B0604020202020204"/>
+                    <a:cs typeface="Arial" panose="020B0604020202020204"/>
+                    <a:sym typeface="Arial" panose="020B0604020202020204"/>
+                  </a:defRPr>
+                </a:lvl6pPr>
+                <a:lvl7pPr marR="0" lvl="6" algn="l" rtl="0">
+                  <a:lnSpc>
+                    <a:spcPct val="100000"/>
+                  </a:lnSpc>
+                  <a:spcBef>
+                    <a:spcPts val="0"/>
+                  </a:spcBef>
+                  <a:spcAft>
+                    <a:spcPts val="0"/>
+                  </a:spcAft>
+                  <a:buClr>
+                    <a:srgbClr val="000000"/>
+                  </a:buClr>
+                  <a:buFont typeface="Arial" panose="020B0604020202020204"/>
+                  <a:defRPr sz="1400" b="0" i="0" u="none" strike="noStrike" cap="none">
+                    <a:solidFill>
+                      <a:srgbClr val="000000"/>
+                    </a:solidFill>
+                    <a:latin typeface="Arial" panose="020B0604020202020204"/>
+                    <a:ea typeface="Arial" panose="020B0604020202020204"/>
+                    <a:cs typeface="Arial" panose="020B0604020202020204"/>
+                    <a:sym typeface="Arial" panose="020B0604020202020204"/>
+                  </a:defRPr>
+                </a:lvl7pPr>
+                <a:lvl8pPr marR="0" lvl="7" algn="l" rtl="0">
+                  <a:lnSpc>
+                    <a:spcPct val="100000"/>
+                  </a:lnSpc>
+                  <a:spcBef>
+                    <a:spcPts val="0"/>
+                  </a:spcBef>
+                  <a:spcAft>
+                    <a:spcPts val="0"/>
+                  </a:spcAft>
+                  <a:buClr>
+                    <a:srgbClr val="000000"/>
+                  </a:buClr>
+                  <a:buFont typeface="Arial" panose="020B0604020202020204"/>
+                  <a:defRPr sz="1400" b="0" i="0" u="none" strike="noStrike" cap="none">
+                    <a:solidFill>
+                      <a:srgbClr val="000000"/>
+                    </a:solidFill>
+                    <a:latin typeface="Arial" panose="020B0604020202020204"/>
+                    <a:ea typeface="Arial" panose="020B0604020202020204"/>
+                    <a:cs typeface="Arial" panose="020B0604020202020204"/>
+                    <a:sym typeface="Arial" panose="020B0604020202020204"/>
+                  </a:defRPr>
+                </a:lvl8pPr>
+                <a:lvl9pPr marR="0" lvl="8" algn="l" rtl="0">
+                  <a:lnSpc>
+                    <a:spcPct val="100000"/>
+                  </a:lnSpc>
+                  <a:spcBef>
+                    <a:spcPts val="0"/>
+                  </a:spcBef>
+                  <a:spcAft>
+                    <a:spcPts val="0"/>
+                  </a:spcAft>
+                  <a:buClr>
+                    <a:srgbClr val="000000"/>
+                  </a:buClr>
+                  <a:buFont typeface="Arial" panose="020B0604020202020204"/>
+                  <a:defRPr sz="1400" b="0" i="0" u="none" strike="noStrike" cap="none">
+                    <a:solidFill>
+                      <a:srgbClr val="000000"/>
+                    </a:solidFill>
+                    <a:latin typeface="Arial" panose="020B0604020202020204"/>
+                    <a:ea typeface="Arial" panose="020B0604020202020204"/>
+                    <a:cs typeface="Arial" panose="020B0604020202020204"/>
+                    <a:sym typeface="Arial" panose="020B0604020202020204"/>
+                  </a:defRPr>
+                </a:lvl9pPr>
+              </a:lstStyle>
+              <a:p>
+                <a:pPr marL="0" lvl="0" indent="0" algn="l" rtl="0">
+                  <a:spcBef>
+                    <a:spcPts val="0"/>
+                  </a:spcBef>
+                  <a:spcAft>
+                    <a:spcPts val="0"/>
+                  </a:spcAft>
+                  <a:buNone/>
+                </a:pPr>
+                <a:r>
+                  <a:rPr lang="de-AT" sz="1000" b="1">
+                    <a:solidFill>
+                      <a:schemeClr val="dk1"/>
+                    </a:solidFill>
+                  </a:rPr>
+                  <a:t>Building Height (pixel)</a:t>
+                </a:r>
+                <a:endParaRPr sz="1000" b="1">
+                  <a:solidFill>
+                    <a:schemeClr val="dk1"/>
+                  </a:solidFill>
+                </a:endParaRPr>
+              </a:p>
+            </p:txBody>
+          </p:sp>
+        </p:grpSp>
+        <p:grpSp>
+          <p:nvGrpSpPr>
+            <p:cNvPr id="12" name="Group 11">
+              <a:extLst>
+                <a:ext uri="{FF2B5EF4-FFF2-40B4-BE49-F238E27FC236}">
+                  <a16:creationId xmlns:a16="http://schemas.microsoft.com/office/drawing/2014/main" id="{1535C9F1-4CA4-885B-8432-CC933F4B0C0B}"/>
+                </a:ext>
+              </a:extLst>
+            </p:cNvPr>
+            <p:cNvGrpSpPr/>
+            <p:nvPr/>
+          </p:nvGrpSpPr>
+          <p:grpSpPr>
+            <a:xfrm>
+              <a:off x="4439126" y="3863342"/>
+              <a:ext cx="850384" cy="403718"/>
+              <a:chOff x="9532" y="3515"/>
+              <a:chExt cx="1186" cy="563"/>
+            </a:xfrm>
+          </p:grpSpPr>
+          <p:cxnSp>
+            <p:nvCxnSpPr>
+              <p:cNvPr id="13" name="Straight Arrow Connector 12">
+                <a:extLst>
+                  <a:ext uri="{FF2B5EF4-FFF2-40B4-BE49-F238E27FC236}">
+                    <a16:creationId xmlns:a16="http://schemas.microsoft.com/office/drawing/2014/main" id="{7002651F-A00B-4E5F-8A89-20BD15899721}"/>
+                  </a:ext>
+                </a:extLst>
+              </p:cNvPr>
+              <p:cNvCxnSpPr/>
+              <p:nvPr/>
+            </p:nvCxnSpPr>
+            <p:spPr>
+              <a:xfrm>
+                <a:off x="9532" y="4006"/>
+                <a:ext cx="1186" cy="0"/>
+              </a:xfrm>
+              <a:prstGeom prst="straightConnector1">
+                <a:avLst/>
+              </a:prstGeom>
+              <a:ln>
                 <a:solidFill>
-                  <a:schemeClr val="bg1"/>
+                  <a:schemeClr val="tx1"/>
                 </a:solidFill>
-                <a:latin typeface="Arial" panose="020B0604020202020204" pitchFamily="34" charset="0"/>
-                <a:cs typeface="Arial" panose="020B0604020202020204" pitchFamily="34" charset="0"/>
-              </a:rPr>
-              <a:t>r = 9</a:t>
-            </a:r>
-          </a:p>
-        </p:txBody>
-      </p:sp>
-      <p:sp>
-        <p:nvSpPr>
-          <p:cNvPr id="54" name="TextBox 53">
-            <a:extLst>
-              <a:ext uri="{FF2B5EF4-FFF2-40B4-BE49-F238E27FC236}">
-                <a16:creationId xmlns:a16="http://schemas.microsoft.com/office/drawing/2014/main" id="{4DE38E54-71C6-BD99-8E9B-834EF1B30091}"/>
-              </a:ext>
-            </a:extLst>
-          </p:cNvPr>
-          <p:cNvSpPr txBox="1"/>
-          <p:nvPr/>
-        </p:nvSpPr>
-        <p:spPr>
-          <a:xfrm>
-            <a:off x="4160914" y="1696881"/>
-            <a:ext cx="497252" cy="276999"/>
-          </a:xfrm>
-          <a:prstGeom prst="rect">
-            <a:avLst/>
-          </a:prstGeom>
-          <a:noFill/>
-        </p:spPr>
-        <p:txBody>
-          <a:bodyPr wrap="none" rtlCol="0">
-            <a:spAutoFit/>
-          </a:bodyPr>
-          <a:lstStyle/>
-          <a:p>
-            <a:r>
-              <a:rPr lang="en-US" sz="1200" dirty="0">
+                <a:headEnd type="none"/>
+                <a:tailEnd type="none"/>
+              </a:ln>
+            </p:spPr>
+            <p:style>
+              <a:lnRef idx="2">
+                <a:schemeClr val="accent1"/>
+              </a:lnRef>
+              <a:fillRef idx="0">
+                <a:srgbClr val="FFFFFF"/>
+              </a:fillRef>
+              <a:effectRef idx="0">
+                <a:srgbClr val="FFFFFF"/>
+              </a:effectRef>
+              <a:fontRef idx="minor">
+                <a:schemeClr val="tx1"/>
+              </a:fontRef>
+            </p:style>
+          </p:cxnSp>
+          <p:cxnSp>
+            <p:nvCxnSpPr>
+              <p:cNvPr id="14" name="Straight Arrow Connector 13">
+                <a:extLst>
+                  <a:ext uri="{FF2B5EF4-FFF2-40B4-BE49-F238E27FC236}">
+                    <a16:creationId xmlns:a16="http://schemas.microsoft.com/office/drawing/2014/main" id="{0B77F212-63FB-51BA-811E-5A58EEF8B3FC}"/>
+                  </a:ext>
+                </a:extLst>
+              </p:cNvPr>
+              <p:cNvCxnSpPr/>
+              <p:nvPr/>
+            </p:nvCxnSpPr>
+            <p:spPr>
+              <a:xfrm flipV="1">
+                <a:off x="9551" y="3894"/>
+                <a:ext cx="3" cy="130"/>
+              </a:xfrm>
+              <a:prstGeom prst="straightConnector1">
+                <a:avLst/>
+              </a:prstGeom>
+              <a:ln>
                 <a:solidFill>
-                  <a:schemeClr val="bg1"/>
+                  <a:schemeClr val="tx1"/>
                 </a:solidFill>
-                <a:latin typeface="Arial" panose="020B0604020202020204" pitchFamily="34" charset="0"/>
-                <a:cs typeface="Arial" panose="020B0604020202020204" pitchFamily="34" charset="0"/>
-              </a:rPr>
-              <a:t>r = 5</a:t>
-            </a:r>
-          </a:p>
-        </p:txBody>
-      </p:sp>
-      <p:sp>
-        <p:nvSpPr>
-          <p:cNvPr id="55" name="TextBox 54">
-            <a:extLst>
-              <a:ext uri="{FF2B5EF4-FFF2-40B4-BE49-F238E27FC236}">
-                <a16:creationId xmlns:a16="http://schemas.microsoft.com/office/drawing/2014/main" id="{E0A72C66-707D-1978-92C0-B54B82BEA728}"/>
-              </a:ext>
-            </a:extLst>
-          </p:cNvPr>
-          <p:cNvSpPr txBox="1"/>
-          <p:nvPr/>
-        </p:nvSpPr>
-        <p:spPr>
-          <a:xfrm>
-            <a:off x="4167319" y="1960290"/>
-            <a:ext cx="497252" cy="276999"/>
-          </a:xfrm>
-          <a:prstGeom prst="rect">
-            <a:avLst/>
-          </a:prstGeom>
-          <a:noFill/>
-        </p:spPr>
-        <p:txBody>
-          <a:bodyPr wrap="none" rtlCol="0">
-            <a:spAutoFit/>
-          </a:bodyPr>
-          <a:lstStyle/>
-          <a:p>
-            <a:r>
-              <a:rPr lang="en-US" sz="1200" dirty="0">
+                <a:headEnd type="none"/>
+                <a:tailEnd type="none"/>
+              </a:ln>
+            </p:spPr>
+            <p:style>
+              <a:lnRef idx="2">
+                <a:schemeClr val="accent1"/>
+              </a:lnRef>
+              <a:fillRef idx="0">
+                <a:srgbClr val="FFFFFF"/>
+              </a:fillRef>
+              <a:effectRef idx="0">
+                <a:srgbClr val="FFFFFF"/>
+              </a:effectRef>
+              <a:fontRef idx="minor">
+                <a:schemeClr val="tx1"/>
+              </a:fontRef>
+            </p:style>
+          </p:cxnSp>
+          <p:cxnSp>
+            <p:nvCxnSpPr>
+              <p:cNvPr id="15" name="Straight Arrow Connector 14">
+                <a:extLst>
+                  <a:ext uri="{FF2B5EF4-FFF2-40B4-BE49-F238E27FC236}">
+                    <a16:creationId xmlns:a16="http://schemas.microsoft.com/office/drawing/2014/main" id="{3CE63090-3263-99FF-383B-8DB1E9DDAA54}"/>
+                  </a:ext>
+                </a:extLst>
+              </p:cNvPr>
+              <p:cNvCxnSpPr/>
+              <p:nvPr/>
+            </p:nvCxnSpPr>
+            <p:spPr>
+              <a:xfrm flipV="1">
+                <a:off x="10706" y="3894"/>
+                <a:ext cx="3" cy="130"/>
+              </a:xfrm>
+              <a:prstGeom prst="straightConnector1">
+                <a:avLst/>
+              </a:prstGeom>
+              <a:ln>
                 <a:solidFill>
-                  <a:schemeClr val="bg1"/>
+                  <a:schemeClr val="tx1"/>
                 </a:solidFill>
-                <a:latin typeface="Arial" panose="020B0604020202020204" pitchFamily="34" charset="0"/>
-                <a:cs typeface="Arial" panose="020B0604020202020204" pitchFamily="34" charset="0"/>
-              </a:rPr>
-              <a:t>r = 3</a:t>
-            </a:r>
-          </a:p>
-        </p:txBody>
-      </p:sp>
-      <p:sp>
-        <p:nvSpPr>
-          <p:cNvPr id="56" name="Text Box 9">
-            <a:extLst>
-              <a:ext uri="{FF2B5EF4-FFF2-40B4-BE49-F238E27FC236}">
-                <a16:creationId xmlns:a16="http://schemas.microsoft.com/office/drawing/2014/main" id="{9D877299-2E12-77FB-747A-C7C7C4A027AF}"/>
-              </a:ext>
-            </a:extLst>
-          </p:cNvPr>
-          <p:cNvSpPr txBox="1"/>
-          <p:nvPr/>
-        </p:nvSpPr>
-        <p:spPr>
-          <a:xfrm>
-            <a:off x="6533353" y="415177"/>
-            <a:ext cx="1642907" cy="646331"/>
-          </a:xfrm>
-          <a:prstGeom prst="rect">
-            <a:avLst/>
-          </a:prstGeom>
-          <a:noFill/>
-        </p:spPr>
-        <p:txBody>
-          <a:bodyPr wrap="square" rtlCol="0">
-            <a:spAutoFit/>
-          </a:bodyPr>
-          <a:lstStyle>
-            <a:defPPr marR="0" lvl="0" algn="l" rtl="0">
-              <a:lnSpc>
-                <a:spcPct val="100000"/>
-              </a:lnSpc>
-              <a:spcBef>
-                <a:spcPts val="0"/>
-              </a:spcBef>
-              <a:spcAft>
-                <a:spcPts val="0"/>
-              </a:spcAft>
-            </a:defPPr>
-            <a:lvl1pPr marR="0" lvl="0" algn="l" rtl="0">
-              <a:lnSpc>
-                <a:spcPct val="100000"/>
-              </a:lnSpc>
-              <a:spcBef>
-                <a:spcPts val="0"/>
-              </a:spcBef>
-              <a:spcAft>
-                <a:spcPts val="0"/>
-              </a:spcAft>
-              <a:buClr>
-                <a:srgbClr val="000000"/>
-              </a:buClr>
-              <a:buFont typeface="Arial" panose="020B0604020202020204"/>
-              <a:defRPr sz="1400" b="0" i="0" u="none" strike="noStrike" cap="none">
-                <a:solidFill>
-                  <a:srgbClr val="000000"/>
-                </a:solidFill>
-                <a:latin typeface="Arial" panose="020B0604020202020204"/>
-                <a:ea typeface="Arial" panose="020B0604020202020204"/>
-                <a:cs typeface="Arial" panose="020B0604020202020204"/>
-                <a:sym typeface="Arial" panose="020B0604020202020204"/>
-              </a:defRPr>
-            </a:lvl1pPr>
-            <a:lvl2pPr marR="0" lvl="1" algn="l" rtl="0">
-              <a:lnSpc>
-                <a:spcPct val="100000"/>
-              </a:lnSpc>
-              <a:spcBef>
-                <a:spcPts val="0"/>
-              </a:spcBef>
-              <a:spcAft>
-                <a:spcPts val="0"/>
-              </a:spcAft>
-              <a:buClr>
-                <a:srgbClr val="000000"/>
-              </a:buClr>
-              <a:buFont typeface="Arial" panose="020B0604020202020204"/>
-              <a:defRPr sz="1400" b="0" i="0" u="none" strike="noStrike" cap="none">
-                <a:solidFill>
-                  <a:srgbClr val="000000"/>
-                </a:solidFill>
-                <a:latin typeface="Arial" panose="020B0604020202020204"/>
-                <a:ea typeface="Arial" panose="020B0604020202020204"/>
-                <a:cs typeface="Arial" panose="020B0604020202020204"/>
-                <a:sym typeface="Arial" panose="020B0604020202020204"/>
-              </a:defRPr>
-            </a:lvl2pPr>
-            <a:lvl3pPr marR="0" lvl="2" algn="l" rtl="0">
-              <a:lnSpc>
-                <a:spcPct val="100000"/>
-              </a:lnSpc>
-              <a:spcBef>
-                <a:spcPts val="0"/>
-              </a:spcBef>
-              <a:spcAft>
-                <a:spcPts val="0"/>
-              </a:spcAft>
-              <a:buClr>
-                <a:srgbClr val="000000"/>
-              </a:buClr>
-              <a:buFont typeface="Arial" panose="020B0604020202020204"/>
-              <a:defRPr sz="1400" b="0" i="0" u="none" strike="noStrike" cap="none">
-                <a:solidFill>
-                  <a:srgbClr val="000000"/>
-                </a:solidFill>
-                <a:latin typeface="Arial" panose="020B0604020202020204"/>
-                <a:ea typeface="Arial" panose="020B0604020202020204"/>
-                <a:cs typeface="Arial" panose="020B0604020202020204"/>
-                <a:sym typeface="Arial" panose="020B0604020202020204"/>
-              </a:defRPr>
-            </a:lvl3pPr>
-            <a:lvl4pPr marR="0" lvl="3" algn="l" rtl="0">
-              <a:lnSpc>
-                <a:spcPct val="100000"/>
-              </a:lnSpc>
-              <a:spcBef>
-                <a:spcPts val="0"/>
-              </a:spcBef>
-              <a:spcAft>
-                <a:spcPts val="0"/>
-              </a:spcAft>
-              <a:buClr>
-                <a:srgbClr val="000000"/>
-              </a:buClr>
-              <a:buFont typeface="Arial" panose="020B0604020202020204"/>
-              <a:defRPr sz="1400" b="0" i="0" u="none" strike="noStrike" cap="none">
-                <a:solidFill>
-                  <a:srgbClr val="000000"/>
-                </a:solidFill>
-                <a:latin typeface="Arial" panose="020B0604020202020204"/>
-                <a:ea typeface="Arial" panose="020B0604020202020204"/>
-                <a:cs typeface="Arial" panose="020B0604020202020204"/>
-                <a:sym typeface="Arial" panose="020B0604020202020204"/>
-              </a:defRPr>
-            </a:lvl4pPr>
-            <a:lvl5pPr marR="0" lvl="4" algn="l" rtl="0">
-              <a:lnSpc>
-                <a:spcPct val="100000"/>
-              </a:lnSpc>
-              <a:spcBef>
-                <a:spcPts val="0"/>
-              </a:spcBef>
-              <a:spcAft>
-                <a:spcPts val="0"/>
-              </a:spcAft>
-              <a:buClr>
-                <a:srgbClr val="000000"/>
-              </a:buClr>
-              <a:buFont typeface="Arial" panose="020B0604020202020204"/>
-              <a:defRPr sz="1400" b="0" i="0" u="none" strike="noStrike" cap="none">
-                <a:solidFill>
-                  <a:srgbClr val="000000"/>
-                </a:solidFill>
-                <a:latin typeface="Arial" panose="020B0604020202020204"/>
-                <a:ea typeface="Arial" panose="020B0604020202020204"/>
-                <a:cs typeface="Arial" panose="020B0604020202020204"/>
-                <a:sym typeface="Arial" panose="020B0604020202020204"/>
-              </a:defRPr>
-            </a:lvl5pPr>
-            <a:lvl6pPr marR="0" lvl="5" algn="l" rtl="0">
-              <a:lnSpc>
-                <a:spcPct val="100000"/>
-              </a:lnSpc>
-              <a:spcBef>
-                <a:spcPts val="0"/>
-              </a:spcBef>
-              <a:spcAft>
-                <a:spcPts val="0"/>
-              </a:spcAft>
-              <a:buClr>
-                <a:srgbClr val="000000"/>
-              </a:buClr>
-              <a:buFont typeface="Arial" panose="020B0604020202020204"/>
-              <a:defRPr sz="1400" b="0" i="0" u="none" strike="noStrike" cap="none">
-                <a:solidFill>
-                  <a:srgbClr val="000000"/>
-                </a:solidFill>
-                <a:latin typeface="Arial" panose="020B0604020202020204"/>
-                <a:ea typeface="Arial" panose="020B0604020202020204"/>
-                <a:cs typeface="Arial" panose="020B0604020202020204"/>
-                <a:sym typeface="Arial" panose="020B0604020202020204"/>
-              </a:defRPr>
-            </a:lvl6pPr>
-            <a:lvl7pPr marR="0" lvl="6" algn="l" rtl="0">
-              <a:lnSpc>
-                <a:spcPct val="100000"/>
-              </a:lnSpc>
-              <a:spcBef>
-                <a:spcPts val="0"/>
-              </a:spcBef>
-              <a:spcAft>
-                <a:spcPts val="0"/>
-              </a:spcAft>
-              <a:buClr>
-                <a:srgbClr val="000000"/>
-              </a:buClr>
-              <a:buFont typeface="Arial" panose="020B0604020202020204"/>
-              <a:defRPr sz="1400" b="0" i="0" u="none" strike="noStrike" cap="none">
-                <a:solidFill>
-                  <a:srgbClr val="000000"/>
-                </a:solidFill>
-                <a:latin typeface="Arial" panose="020B0604020202020204"/>
-                <a:ea typeface="Arial" panose="020B0604020202020204"/>
-                <a:cs typeface="Arial" panose="020B0604020202020204"/>
-                <a:sym typeface="Arial" panose="020B0604020202020204"/>
-              </a:defRPr>
-            </a:lvl7pPr>
-            <a:lvl8pPr marR="0" lvl="7" algn="l" rtl="0">
-              <a:lnSpc>
-                <a:spcPct val="100000"/>
-              </a:lnSpc>
-              <a:spcBef>
-                <a:spcPts val="0"/>
-              </a:spcBef>
-              <a:spcAft>
-                <a:spcPts val="0"/>
-              </a:spcAft>
-              <a:buClr>
-                <a:srgbClr val="000000"/>
-              </a:buClr>
-              <a:buFont typeface="Arial" panose="020B0604020202020204"/>
-              <a:defRPr sz="1400" b="0" i="0" u="none" strike="noStrike" cap="none">
-                <a:solidFill>
-                  <a:srgbClr val="000000"/>
-                </a:solidFill>
-                <a:latin typeface="Arial" panose="020B0604020202020204"/>
-                <a:ea typeface="Arial" panose="020B0604020202020204"/>
-                <a:cs typeface="Arial" panose="020B0604020202020204"/>
-                <a:sym typeface="Arial" panose="020B0604020202020204"/>
-              </a:defRPr>
-            </a:lvl8pPr>
-            <a:lvl9pPr marR="0" lvl="8" algn="l" rtl="0">
-              <a:lnSpc>
-                <a:spcPct val="100000"/>
-              </a:lnSpc>
-              <a:spcBef>
-                <a:spcPts val="0"/>
-              </a:spcBef>
-              <a:spcAft>
-                <a:spcPts val="0"/>
-              </a:spcAft>
-              <a:buClr>
-                <a:srgbClr val="000000"/>
-              </a:buClr>
-              <a:buFont typeface="Arial" panose="020B0604020202020204"/>
-              <a:defRPr sz="1400" b="0" i="0" u="none" strike="noStrike" cap="none">
-                <a:solidFill>
-                  <a:srgbClr val="000000"/>
-                </a:solidFill>
-                <a:latin typeface="Arial" panose="020B0604020202020204"/>
-                <a:ea typeface="Arial" panose="020B0604020202020204"/>
-                <a:cs typeface="Arial" panose="020B0604020202020204"/>
-                <a:sym typeface="Arial" panose="020B0604020202020204"/>
-              </a:defRPr>
-            </a:lvl9pPr>
-          </a:lstStyle>
-          <a:p>
-            <a:pPr algn="ctr"/>
-            <a:r>
-              <a:rPr lang="en-US" sz="1800" dirty="0"/>
-              <a:t>Horizontal</a:t>
-            </a:r>
-          </a:p>
-          <a:p>
-            <a:pPr algn="ctr"/>
-            <a:r>
-              <a:rPr lang="en-US" sz="1800" dirty="0"/>
-              <a:t>\psi(r) = </a:t>
-            </a:r>
-          </a:p>
-        </p:txBody>
-      </p:sp>
-      <p:sp>
-        <p:nvSpPr>
-          <p:cNvPr id="57" name="Text Box 9">
-            <a:extLst>
-              <a:ext uri="{FF2B5EF4-FFF2-40B4-BE49-F238E27FC236}">
-                <a16:creationId xmlns:a16="http://schemas.microsoft.com/office/drawing/2014/main" id="{5E124426-FCA4-B31D-F11B-9CDD824BA24F}"/>
-              </a:ext>
-            </a:extLst>
-          </p:cNvPr>
-          <p:cNvSpPr txBox="1"/>
-          <p:nvPr/>
-        </p:nvSpPr>
-        <p:spPr>
-          <a:xfrm>
-            <a:off x="9398473" y="407987"/>
-            <a:ext cx="1642907" cy="369332"/>
-          </a:xfrm>
-          <a:prstGeom prst="rect">
-            <a:avLst/>
-          </a:prstGeom>
-          <a:noFill/>
-        </p:spPr>
-        <p:txBody>
-          <a:bodyPr wrap="square" rtlCol="0">
-            <a:spAutoFit/>
-          </a:bodyPr>
-          <a:lstStyle>
-            <a:defPPr marR="0" lvl="0" algn="l" rtl="0">
-              <a:lnSpc>
-                <a:spcPct val="100000"/>
-              </a:lnSpc>
-              <a:spcBef>
-                <a:spcPts val="0"/>
-              </a:spcBef>
-              <a:spcAft>
-                <a:spcPts val="0"/>
-              </a:spcAft>
-            </a:defPPr>
-            <a:lvl1pPr marR="0" lvl="0" algn="l" rtl="0">
-              <a:lnSpc>
-                <a:spcPct val="100000"/>
-              </a:lnSpc>
-              <a:spcBef>
-                <a:spcPts val="0"/>
-              </a:spcBef>
-              <a:spcAft>
-                <a:spcPts val="0"/>
-              </a:spcAft>
-              <a:buClr>
-                <a:srgbClr val="000000"/>
-              </a:buClr>
-              <a:buFont typeface="Arial" panose="020B0604020202020204"/>
-              <a:defRPr sz="1400" b="0" i="0" u="none" strike="noStrike" cap="none">
-                <a:solidFill>
-                  <a:srgbClr val="000000"/>
-                </a:solidFill>
-                <a:latin typeface="Arial" panose="020B0604020202020204"/>
-                <a:ea typeface="Arial" panose="020B0604020202020204"/>
-                <a:cs typeface="Arial" panose="020B0604020202020204"/>
-                <a:sym typeface="Arial" panose="020B0604020202020204"/>
-              </a:defRPr>
-            </a:lvl1pPr>
-            <a:lvl2pPr marR="0" lvl="1" algn="l" rtl="0">
-              <a:lnSpc>
-                <a:spcPct val="100000"/>
-              </a:lnSpc>
-              <a:spcBef>
-                <a:spcPts val="0"/>
-              </a:spcBef>
-              <a:spcAft>
-                <a:spcPts val="0"/>
-              </a:spcAft>
-              <a:buClr>
-                <a:srgbClr val="000000"/>
-              </a:buClr>
-              <a:buFont typeface="Arial" panose="020B0604020202020204"/>
-              <a:defRPr sz="1400" b="0" i="0" u="none" strike="noStrike" cap="none">
-                <a:solidFill>
-                  <a:srgbClr val="000000"/>
-                </a:solidFill>
-                <a:latin typeface="Arial" panose="020B0604020202020204"/>
-                <a:ea typeface="Arial" panose="020B0604020202020204"/>
-                <a:cs typeface="Arial" panose="020B0604020202020204"/>
-                <a:sym typeface="Arial" panose="020B0604020202020204"/>
-              </a:defRPr>
-            </a:lvl2pPr>
-            <a:lvl3pPr marR="0" lvl="2" algn="l" rtl="0">
-              <a:lnSpc>
-                <a:spcPct val="100000"/>
-              </a:lnSpc>
-              <a:spcBef>
-                <a:spcPts val="0"/>
-              </a:spcBef>
-              <a:spcAft>
-                <a:spcPts val="0"/>
-              </a:spcAft>
-              <a:buClr>
-                <a:srgbClr val="000000"/>
-              </a:buClr>
-              <a:buFont typeface="Arial" panose="020B0604020202020204"/>
-              <a:defRPr sz="1400" b="0" i="0" u="none" strike="noStrike" cap="none">
-                <a:solidFill>
-                  <a:srgbClr val="000000"/>
-                </a:solidFill>
-                <a:latin typeface="Arial" panose="020B0604020202020204"/>
-                <a:ea typeface="Arial" panose="020B0604020202020204"/>
-                <a:cs typeface="Arial" panose="020B0604020202020204"/>
-                <a:sym typeface="Arial" panose="020B0604020202020204"/>
-              </a:defRPr>
-            </a:lvl3pPr>
-            <a:lvl4pPr marR="0" lvl="3" algn="l" rtl="0">
-              <a:lnSpc>
-                <a:spcPct val="100000"/>
-              </a:lnSpc>
-              <a:spcBef>
-                <a:spcPts val="0"/>
-              </a:spcBef>
-              <a:spcAft>
-                <a:spcPts val="0"/>
-              </a:spcAft>
-              <a:buClr>
-                <a:srgbClr val="000000"/>
-              </a:buClr>
-              <a:buFont typeface="Arial" panose="020B0604020202020204"/>
-              <a:defRPr sz="1400" b="0" i="0" u="none" strike="noStrike" cap="none">
-                <a:solidFill>
-                  <a:srgbClr val="000000"/>
-                </a:solidFill>
-                <a:latin typeface="Arial" panose="020B0604020202020204"/>
-                <a:ea typeface="Arial" panose="020B0604020202020204"/>
-                <a:cs typeface="Arial" panose="020B0604020202020204"/>
-                <a:sym typeface="Arial" panose="020B0604020202020204"/>
-              </a:defRPr>
-            </a:lvl4pPr>
-            <a:lvl5pPr marR="0" lvl="4" algn="l" rtl="0">
-              <a:lnSpc>
-                <a:spcPct val="100000"/>
-              </a:lnSpc>
-              <a:spcBef>
-                <a:spcPts val="0"/>
-              </a:spcBef>
-              <a:spcAft>
-                <a:spcPts val="0"/>
-              </a:spcAft>
-              <a:buClr>
-                <a:srgbClr val="000000"/>
-              </a:buClr>
-              <a:buFont typeface="Arial" panose="020B0604020202020204"/>
-              <a:defRPr sz="1400" b="0" i="0" u="none" strike="noStrike" cap="none">
-                <a:solidFill>
-                  <a:srgbClr val="000000"/>
-                </a:solidFill>
-                <a:latin typeface="Arial" panose="020B0604020202020204"/>
-                <a:ea typeface="Arial" panose="020B0604020202020204"/>
-                <a:cs typeface="Arial" panose="020B0604020202020204"/>
-                <a:sym typeface="Arial" panose="020B0604020202020204"/>
-              </a:defRPr>
-            </a:lvl5pPr>
-            <a:lvl6pPr marR="0" lvl="5" algn="l" rtl="0">
-              <a:lnSpc>
-                <a:spcPct val="100000"/>
-              </a:lnSpc>
-              <a:spcBef>
-                <a:spcPts val="0"/>
-              </a:spcBef>
-              <a:spcAft>
-                <a:spcPts val="0"/>
-              </a:spcAft>
-              <a:buClr>
-                <a:srgbClr val="000000"/>
-              </a:buClr>
-              <a:buFont typeface="Arial" panose="020B0604020202020204"/>
-              <a:defRPr sz="1400" b="0" i="0" u="none" strike="noStrike" cap="none">
-                <a:solidFill>
-                  <a:srgbClr val="000000"/>
-                </a:solidFill>
-                <a:latin typeface="Arial" panose="020B0604020202020204"/>
-                <a:ea typeface="Arial" panose="020B0604020202020204"/>
-                <a:cs typeface="Arial" panose="020B0604020202020204"/>
-                <a:sym typeface="Arial" panose="020B0604020202020204"/>
-              </a:defRPr>
-            </a:lvl6pPr>
-            <a:lvl7pPr marR="0" lvl="6" algn="l" rtl="0">
-              <a:lnSpc>
-                <a:spcPct val="100000"/>
-              </a:lnSpc>
-              <a:spcBef>
-                <a:spcPts val="0"/>
-              </a:spcBef>
-              <a:spcAft>
-                <a:spcPts val="0"/>
-              </a:spcAft>
-              <a:buClr>
-                <a:srgbClr val="000000"/>
-              </a:buClr>
-              <a:buFont typeface="Arial" panose="020B0604020202020204"/>
-              <a:defRPr sz="1400" b="0" i="0" u="none" strike="noStrike" cap="none">
-                <a:solidFill>
-                  <a:srgbClr val="000000"/>
-                </a:solidFill>
-                <a:latin typeface="Arial" panose="020B0604020202020204"/>
-                <a:ea typeface="Arial" panose="020B0604020202020204"/>
-                <a:cs typeface="Arial" panose="020B0604020202020204"/>
-                <a:sym typeface="Arial" panose="020B0604020202020204"/>
-              </a:defRPr>
-            </a:lvl7pPr>
-            <a:lvl8pPr marR="0" lvl="7" algn="l" rtl="0">
-              <a:lnSpc>
-                <a:spcPct val="100000"/>
-              </a:lnSpc>
-              <a:spcBef>
-                <a:spcPts val="0"/>
-              </a:spcBef>
-              <a:spcAft>
-                <a:spcPts val="0"/>
-              </a:spcAft>
-              <a:buClr>
-                <a:srgbClr val="000000"/>
-              </a:buClr>
-              <a:buFont typeface="Arial" panose="020B0604020202020204"/>
-              <a:defRPr sz="1400" b="0" i="0" u="none" strike="noStrike" cap="none">
-                <a:solidFill>
-                  <a:srgbClr val="000000"/>
-                </a:solidFill>
-                <a:latin typeface="Arial" panose="020B0604020202020204"/>
-                <a:ea typeface="Arial" panose="020B0604020202020204"/>
-                <a:cs typeface="Arial" panose="020B0604020202020204"/>
-                <a:sym typeface="Arial" panose="020B0604020202020204"/>
-              </a:defRPr>
-            </a:lvl8pPr>
-            <a:lvl9pPr marR="0" lvl="8" algn="l" rtl="0">
-              <a:lnSpc>
-                <a:spcPct val="100000"/>
-              </a:lnSpc>
-              <a:spcBef>
-                <a:spcPts val="0"/>
-              </a:spcBef>
-              <a:spcAft>
-                <a:spcPts val="0"/>
-              </a:spcAft>
-              <a:buClr>
-                <a:srgbClr val="000000"/>
-              </a:buClr>
-              <a:buFont typeface="Arial" panose="020B0604020202020204"/>
-              <a:defRPr sz="1400" b="0" i="0" u="none" strike="noStrike" cap="none">
-                <a:solidFill>
-                  <a:srgbClr val="000000"/>
-                </a:solidFill>
-                <a:latin typeface="Arial" panose="020B0604020202020204"/>
-                <a:ea typeface="Arial" panose="020B0604020202020204"/>
-                <a:cs typeface="Arial" panose="020B0604020202020204"/>
-                <a:sym typeface="Arial" panose="020B0604020202020204"/>
-              </a:defRPr>
-            </a:lvl9pPr>
-          </a:lstStyle>
-          <a:p>
-            <a:pPr algn="ctr"/>
-            <a:r>
-              <a:rPr lang="en-US" sz="1800" dirty="0"/>
-              <a:t>Vertical</a:t>
-            </a:r>
-          </a:p>
-        </p:txBody>
-      </p:sp>
+                <a:headEnd type="none"/>
+                <a:tailEnd type="none"/>
+              </a:ln>
+            </p:spPr>
+            <p:style>
+              <a:lnRef idx="2">
+                <a:schemeClr val="accent1"/>
+              </a:lnRef>
+              <a:fillRef idx="0">
+                <a:srgbClr val="FFFFFF"/>
+              </a:fillRef>
+              <a:effectRef idx="0">
+                <a:srgbClr val="FFFFFF"/>
+              </a:effectRef>
+              <a:fontRef idx="minor">
+                <a:schemeClr val="tx1"/>
+              </a:fontRef>
+            </p:style>
+          </p:cxnSp>
+          <p:sp>
+            <p:nvSpPr>
+              <p:cNvPr id="16" name="Google Shape;161;p16">
+                <a:extLst>
+                  <a:ext uri="{FF2B5EF4-FFF2-40B4-BE49-F238E27FC236}">
+                    <a16:creationId xmlns:a16="http://schemas.microsoft.com/office/drawing/2014/main" id="{E4BAC250-6F45-21BF-A9F9-15F556E8B35E}"/>
+                  </a:ext>
+                </a:extLst>
+              </p:cNvPr>
+              <p:cNvSpPr txBox="1"/>
+              <p:nvPr/>
+            </p:nvSpPr>
+            <p:spPr>
+              <a:xfrm>
+                <a:off x="9677" y="3515"/>
+                <a:ext cx="931" cy="563"/>
+              </a:xfrm>
+              <a:prstGeom prst="rect">
+                <a:avLst/>
+              </a:prstGeom>
+              <a:noFill/>
+              <a:ln>
+                <a:noFill/>
+              </a:ln>
+            </p:spPr>
+            <p:txBody>
+              <a:bodyPr spcFirstLastPara="1" wrap="square" lIns="91425" tIns="91425" rIns="91425" bIns="91425" anchor="t" anchorCtr="0">
+                <a:spAutoFit/>
+              </a:bodyPr>
+              <a:lstStyle>
+                <a:defPPr marR="0" lvl="0" algn="l" rtl="0">
+                  <a:lnSpc>
+                    <a:spcPct val="100000"/>
+                  </a:lnSpc>
+                  <a:spcBef>
+                    <a:spcPts val="0"/>
+                  </a:spcBef>
+                  <a:spcAft>
+                    <a:spcPts val="0"/>
+                  </a:spcAft>
+                </a:defPPr>
+                <a:lvl1pPr marR="0" lvl="0" algn="l" rtl="0">
+                  <a:lnSpc>
+                    <a:spcPct val="100000"/>
+                  </a:lnSpc>
+                  <a:spcBef>
+                    <a:spcPts val="0"/>
+                  </a:spcBef>
+                  <a:spcAft>
+                    <a:spcPts val="0"/>
+                  </a:spcAft>
+                  <a:buClr>
+                    <a:srgbClr val="000000"/>
+                  </a:buClr>
+                  <a:buFont typeface="Arial" panose="020B0604020202020204"/>
+                  <a:defRPr sz="1400" b="0" i="0" u="none" strike="noStrike" cap="none">
+                    <a:solidFill>
+                      <a:srgbClr val="000000"/>
+                    </a:solidFill>
+                    <a:latin typeface="Arial" panose="020B0604020202020204"/>
+                    <a:ea typeface="Arial" panose="020B0604020202020204"/>
+                    <a:cs typeface="Arial" panose="020B0604020202020204"/>
+                    <a:sym typeface="Arial" panose="020B0604020202020204"/>
+                  </a:defRPr>
+                </a:lvl1pPr>
+                <a:lvl2pPr marR="0" lvl="1" algn="l" rtl="0">
+                  <a:lnSpc>
+                    <a:spcPct val="100000"/>
+                  </a:lnSpc>
+                  <a:spcBef>
+                    <a:spcPts val="0"/>
+                  </a:spcBef>
+                  <a:spcAft>
+                    <a:spcPts val="0"/>
+                  </a:spcAft>
+                  <a:buClr>
+                    <a:srgbClr val="000000"/>
+                  </a:buClr>
+                  <a:buFont typeface="Arial" panose="020B0604020202020204"/>
+                  <a:defRPr sz="1400" b="0" i="0" u="none" strike="noStrike" cap="none">
+                    <a:solidFill>
+                      <a:srgbClr val="000000"/>
+                    </a:solidFill>
+                    <a:latin typeface="Arial" panose="020B0604020202020204"/>
+                    <a:ea typeface="Arial" panose="020B0604020202020204"/>
+                    <a:cs typeface="Arial" panose="020B0604020202020204"/>
+                    <a:sym typeface="Arial" panose="020B0604020202020204"/>
+                  </a:defRPr>
+                </a:lvl2pPr>
+                <a:lvl3pPr marR="0" lvl="2" algn="l" rtl="0">
+                  <a:lnSpc>
+                    <a:spcPct val="100000"/>
+                  </a:lnSpc>
+                  <a:spcBef>
+                    <a:spcPts val="0"/>
+                  </a:spcBef>
+                  <a:spcAft>
+                    <a:spcPts val="0"/>
+                  </a:spcAft>
+                  <a:buClr>
+                    <a:srgbClr val="000000"/>
+                  </a:buClr>
+                  <a:buFont typeface="Arial" panose="020B0604020202020204"/>
+                  <a:defRPr sz="1400" b="0" i="0" u="none" strike="noStrike" cap="none">
+                    <a:solidFill>
+                      <a:srgbClr val="000000"/>
+                    </a:solidFill>
+                    <a:latin typeface="Arial" panose="020B0604020202020204"/>
+                    <a:ea typeface="Arial" panose="020B0604020202020204"/>
+                    <a:cs typeface="Arial" panose="020B0604020202020204"/>
+                    <a:sym typeface="Arial" panose="020B0604020202020204"/>
+                  </a:defRPr>
+                </a:lvl3pPr>
+                <a:lvl4pPr marR="0" lvl="3" algn="l" rtl="0">
+                  <a:lnSpc>
+                    <a:spcPct val="100000"/>
+                  </a:lnSpc>
+                  <a:spcBef>
+                    <a:spcPts val="0"/>
+                  </a:spcBef>
+                  <a:spcAft>
+                    <a:spcPts val="0"/>
+                  </a:spcAft>
+                  <a:buClr>
+                    <a:srgbClr val="000000"/>
+                  </a:buClr>
+                  <a:buFont typeface="Arial" panose="020B0604020202020204"/>
+                  <a:defRPr sz="1400" b="0" i="0" u="none" strike="noStrike" cap="none">
+                    <a:solidFill>
+                      <a:srgbClr val="000000"/>
+                    </a:solidFill>
+                    <a:latin typeface="Arial" panose="020B0604020202020204"/>
+                    <a:ea typeface="Arial" panose="020B0604020202020204"/>
+                    <a:cs typeface="Arial" panose="020B0604020202020204"/>
+                    <a:sym typeface="Arial" panose="020B0604020202020204"/>
+                  </a:defRPr>
+                </a:lvl4pPr>
+                <a:lvl5pPr marR="0" lvl="4" algn="l" rtl="0">
+                  <a:lnSpc>
+                    <a:spcPct val="100000"/>
+                  </a:lnSpc>
+                  <a:spcBef>
+                    <a:spcPts val="0"/>
+                  </a:spcBef>
+                  <a:spcAft>
+                    <a:spcPts val="0"/>
+                  </a:spcAft>
+                  <a:buClr>
+                    <a:srgbClr val="000000"/>
+                  </a:buClr>
+                  <a:buFont typeface="Arial" panose="020B0604020202020204"/>
+                  <a:defRPr sz="1400" b="0" i="0" u="none" strike="noStrike" cap="none">
+                    <a:solidFill>
+                      <a:srgbClr val="000000"/>
+                    </a:solidFill>
+                    <a:latin typeface="Arial" panose="020B0604020202020204"/>
+                    <a:ea typeface="Arial" panose="020B0604020202020204"/>
+                    <a:cs typeface="Arial" panose="020B0604020202020204"/>
+                    <a:sym typeface="Arial" panose="020B0604020202020204"/>
+                  </a:defRPr>
+                </a:lvl5pPr>
+                <a:lvl6pPr marR="0" lvl="5" algn="l" rtl="0">
+                  <a:lnSpc>
+                    <a:spcPct val="100000"/>
+                  </a:lnSpc>
+                  <a:spcBef>
+                    <a:spcPts val="0"/>
+                  </a:spcBef>
+                  <a:spcAft>
+                    <a:spcPts val="0"/>
+                  </a:spcAft>
+                  <a:buClr>
+                    <a:srgbClr val="000000"/>
+                  </a:buClr>
+                  <a:buFont typeface="Arial" panose="020B0604020202020204"/>
+                  <a:defRPr sz="1400" b="0" i="0" u="none" strike="noStrike" cap="none">
+                    <a:solidFill>
+                      <a:srgbClr val="000000"/>
+                    </a:solidFill>
+                    <a:latin typeface="Arial" panose="020B0604020202020204"/>
+                    <a:ea typeface="Arial" panose="020B0604020202020204"/>
+                    <a:cs typeface="Arial" panose="020B0604020202020204"/>
+                    <a:sym typeface="Arial" panose="020B0604020202020204"/>
+                  </a:defRPr>
+                </a:lvl6pPr>
+                <a:lvl7pPr marR="0" lvl="6" algn="l" rtl="0">
+                  <a:lnSpc>
+                    <a:spcPct val="100000"/>
+                  </a:lnSpc>
+                  <a:spcBef>
+                    <a:spcPts val="0"/>
+                  </a:spcBef>
+                  <a:spcAft>
+                    <a:spcPts val="0"/>
+                  </a:spcAft>
+                  <a:buClr>
+                    <a:srgbClr val="000000"/>
+                  </a:buClr>
+                  <a:buFont typeface="Arial" panose="020B0604020202020204"/>
+                  <a:defRPr sz="1400" b="0" i="0" u="none" strike="noStrike" cap="none">
+                    <a:solidFill>
+                      <a:srgbClr val="000000"/>
+                    </a:solidFill>
+                    <a:latin typeface="Arial" panose="020B0604020202020204"/>
+                    <a:ea typeface="Arial" panose="020B0604020202020204"/>
+                    <a:cs typeface="Arial" panose="020B0604020202020204"/>
+                    <a:sym typeface="Arial" panose="020B0604020202020204"/>
+                  </a:defRPr>
+                </a:lvl7pPr>
+                <a:lvl8pPr marR="0" lvl="7" algn="l" rtl="0">
+                  <a:lnSpc>
+                    <a:spcPct val="100000"/>
+                  </a:lnSpc>
+                  <a:spcBef>
+                    <a:spcPts val="0"/>
+                  </a:spcBef>
+                  <a:spcAft>
+                    <a:spcPts val="0"/>
+                  </a:spcAft>
+                  <a:buClr>
+                    <a:srgbClr val="000000"/>
+                  </a:buClr>
+                  <a:buFont typeface="Arial" panose="020B0604020202020204"/>
+                  <a:defRPr sz="1400" b="0" i="0" u="none" strike="noStrike" cap="none">
+                    <a:solidFill>
+                      <a:srgbClr val="000000"/>
+                    </a:solidFill>
+                    <a:latin typeface="Arial" panose="020B0604020202020204"/>
+                    <a:ea typeface="Arial" panose="020B0604020202020204"/>
+                    <a:cs typeface="Arial" panose="020B0604020202020204"/>
+                    <a:sym typeface="Arial" panose="020B0604020202020204"/>
+                  </a:defRPr>
+                </a:lvl8pPr>
+                <a:lvl9pPr marR="0" lvl="8" algn="l" rtl="0">
+                  <a:lnSpc>
+                    <a:spcPct val="100000"/>
+                  </a:lnSpc>
+                  <a:spcBef>
+                    <a:spcPts val="0"/>
+                  </a:spcBef>
+                  <a:spcAft>
+                    <a:spcPts val="0"/>
+                  </a:spcAft>
+                  <a:buClr>
+                    <a:srgbClr val="000000"/>
+                  </a:buClr>
+                  <a:buFont typeface="Arial" panose="020B0604020202020204"/>
+                  <a:defRPr sz="1400" b="0" i="0" u="none" strike="noStrike" cap="none">
+                    <a:solidFill>
+                      <a:srgbClr val="000000"/>
+                    </a:solidFill>
+                    <a:latin typeface="Arial" panose="020B0604020202020204"/>
+                    <a:ea typeface="Arial" panose="020B0604020202020204"/>
+                    <a:cs typeface="Arial" panose="020B0604020202020204"/>
+                    <a:sym typeface="Arial" panose="020B0604020202020204"/>
+                  </a:defRPr>
+                </a:lvl9pPr>
+              </a:lstStyle>
+              <a:p>
+                <a:pPr marL="0" lvl="0" indent="0" algn="ctr" rtl="0">
+                  <a:spcBef>
+                    <a:spcPts val="0"/>
+                  </a:spcBef>
+                  <a:spcAft>
+                    <a:spcPts val="0"/>
+                  </a:spcAft>
+                  <a:buNone/>
+                </a:pPr>
+                <a:r>
+                  <a:rPr lang="en-US" altLang="de-AT" sz="1050">
+                    <a:solidFill>
+                      <a:schemeClr val="dk1"/>
+                    </a:solidFill>
+                  </a:rPr>
+                  <a:t>10 km</a:t>
+                </a:r>
+              </a:p>
+            </p:txBody>
+          </p:sp>
+        </p:grpSp>
+        <p:sp>
+          <p:nvSpPr>
+            <p:cNvPr id="6" name="TextBox 5">
+              <a:extLst>
+                <a:ext uri="{FF2B5EF4-FFF2-40B4-BE49-F238E27FC236}">
+                  <a16:creationId xmlns:a16="http://schemas.microsoft.com/office/drawing/2014/main" id="{A0718CCF-89C6-9A5B-D8D8-35DFE5557012}"/>
+                </a:ext>
+              </a:extLst>
+            </p:cNvPr>
+            <p:cNvSpPr txBox="1"/>
+            <p:nvPr/>
+          </p:nvSpPr>
+          <p:spPr>
+            <a:xfrm>
+              <a:off x="1280803" y="1000306"/>
+              <a:ext cx="811806" cy="358748"/>
+            </a:xfrm>
+            <a:prstGeom prst="rect">
+              <a:avLst/>
+            </a:prstGeom>
+            <a:noFill/>
+          </p:spPr>
+          <p:txBody>
+            <a:bodyPr wrap="square">
+              <a:spAutoFit/>
+            </a:bodyPr>
+            <a:lstStyle/>
+            <a:p>
+              <a:pPr algn="ctr"/>
+              <a:r>
+                <a:rPr lang="en-US" sz="1400" dirty="0"/>
+                <a:t>2016</a:t>
+              </a:r>
+            </a:p>
+          </p:txBody>
+        </p:sp>
+        <p:sp>
+          <p:nvSpPr>
+            <p:cNvPr id="7" name="TextBox 6">
+              <a:extLst>
+                <a:ext uri="{FF2B5EF4-FFF2-40B4-BE49-F238E27FC236}">
+                  <a16:creationId xmlns:a16="http://schemas.microsoft.com/office/drawing/2014/main" id="{0B11A087-864B-B7F0-F2EF-92C7834CE9A7}"/>
+                </a:ext>
+              </a:extLst>
+            </p:cNvPr>
+            <p:cNvSpPr txBox="1"/>
+            <p:nvPr/>
+          </p:nvSpPr>
+          <p:spPr>
+            <a:xfrm>
+              <a:off x="3959134" y="972454"/>
+              <a:ext cx="811806" cy="358748"/>
+            </a:xfrm>
+            <a:prstGeom prst="rect">
+              <a:avLst/>
+            </a:prstGeom>
+            <a:noFill/>
+          </p:spPr>
+          <p:txBody>
+            <a:bodyPr wrap="square">
+              <a:spAutoFit/>
+            </a:bodyPr>
+            <a:lstStyle/>
+            <a:p>
+              <a:pPr algn="ctr"/>
+              <a:r>
+                <a:rPr lang="en-US" sz="1400" dirty="0"/>
+                <a:t>2023</a:t>
+              </a:r>
+            </a:p>
+          </p:txBody>
+        </p:sp>
+        <p:sp>
+          <p:nvSpPr>
+            <p:cNvPr id="32" name="Oval 31">
+              <a:extLst>
+                <a:ext uri="{FF2B5EF4-FFF2-40B4-BE49-F238E27FC236}">
+                  <a16:creationId xmlns:a16="http://schemas.microsoft.com/office/drawing/2014/main" id="{717C5B53-6F7E-620F-8824-8CA8FD2621A7}"/>
+                </a:ext>
+              </a:extLst>
+            </p:cNvPr>
+            <p:cNvSpPr/>
+            <p:nvPr/>
+          </p:nvSpPr>
+          <p:spPr>
+            <a:xfrm>
+              <a:off x="1467658" y="2205990"/>
+              <a:ext cx="597362" cy="597362"/>
+            </a:xfrm>
+            <a:prstGeom prst="ellipse">
+              <a:avLst/>
+            </a:prstGeom>
+            <a:noFill/>
+            <a:ln w="12700">
+              <a:solidFill>
+                <a:schemeClr val="bg1"/>
+              </a:solidFill>
+            </a:ln>
+          </p:spPr>
+          <p:style>
+            <a:lnRef idx="2">
+              <a:schemeClr val="accent1">
+                <a:shade val="15000"/>
+              </a:schemeClr>
+            </a:lnRef>
+            <a:fillRef idx="1">
+              <a:schemeClr val="accent1"/>
+            </a:fillRef>
+            <a:effectRef idx="0">
+              <a:schemeClr val="accent1"/>
+            </a:effectRef>
+            <a:fontRef idx="minor">
+              <a:schemeClr val="lt1"/>
+            </a:fontRef>
+          </p:style>
+          <p:txBody>
+            <a:bodyPr rtlCol="0" anchor="ctr"/>
+            <a:lstStyle/>
+            <a:p>
+              <a:pPr algn="ctr"/>
+              <a:endParaRPr lang="en-US"/>
+            </a:p>
+          </p:txBody>
+        </p:sp>
+        <p:sp>
+          <p:nvSpPr>
+            <p:cNvPr id="34" name="Oval 33">
+              <a:extLst>
+                <a:ext uri="{FF2B5EF4-FFF2-40B4-BE49-F238E27FC236}">
+                  <a16:creationId xmlns:a16="http://schemas.microsoft.com/office/drawing/2014/main" id="{543BC997-0C00-0EB4-3CE1-2D6064A67220}"/>
+                </a:ext>
+              </a:extLst>
+            </p:cNvPr>
+            <p:cNvSpPr/>
+            <p:nvPr/>
+          </p:nvSpPr>
+          <p:spPr>
+            <a:xfrm>
+              <a:off x="1274393" y="2005005"/>
+              <a:ext cx="991560" cy="991560"/>
+            </a:xfrm>
+            <a:prstGeom prst="ellipse">
+              <a:avLst/>
+            </a:prstGeom>
+            <a:noFill/>
+            <a:ln w="12700">
+              <a:solidFill>
+                <a:schemeClr val="bg1"/>
+              </a:solidFill>
+            </a:ln>
+          </p:spPr>
+          <p:style>
+            <a:lnRef idx="2">
+              <a:schemeClr val="accent1">
+                <a:shade val="15000"/>
+              </a:schemeClr>
+            </a:lnRef>
+            <a:fillRef idx="1">
+              <a:schemeClr val="accent1"/>
+            </a:fillRef>
+            <a:effectRef idx="0">
+              <a:schemeClr val="accent1"/>
+            </a:effectRef>
+            <a:fontRef idx="minor">
+              <a:schemeClr val="lt1"/>
+            </a:fontRef>
+          </p:style>
+          <p:txBody>
+            <a:bodyPr rtlCol="0" anchor="ctr"/>
+            <a:lstStyle/>
+            <a:p>
+              <a:pPr algn="ctr"/>
+              <a:endParaRPr lang="en-US"/>
+            </a:p>
+          </p:txBody>
+        </p:sp>
+        <p:sp>
+          <p:nvSpPr>
+            <p:cNvPr id="35" name="Oval 34">
+              <a:extLst>
+                <a:ext uri="{FF2B5EF4-FFF2-40B4-BE49-F238E27FC236}">
+                  <a16:creationId xmlns:a16="http://schemas.microsoft.com/office/drawing/2014/main" id="{419523A6-3302-6551-DCCF-F1AD301981AC}"/>
+                </a:ext>
+              </a:extLst>
+            </p:cNvPr>
+            <p:cNvSpPr/>
+            <p:nvPr/>
+          </p:nvSpPr>
+          <p:spPr>
+            <a:xfrm>
+              <a:off x="860002" y="1595378"/>
+              <a:ext cx="1811570" cy="1811570"/>
+            </a:xfrm>
+            <a:prstGeom prst="ellipse">
+              <a:avLst/>
+            </a:prstGeom>
+            <a:noFill/>
+            <a:ln w="12700">
+              <a:solidFill>
+                <a:schemeClr val="bg1"/>
+              </a:solidFill>
+            </a:ln>
+          </p:spPr>
+          <p:style>
+            <a:lnRef idx="2">
+              <a:schemeClr val="accent1">
+                <a:shade val="15000"/>
+              </a:schemeClr>
+            </a:lnRef>
+            <a:fillRef idx="1">
+              <a:schemeClr val="accent1"/>
+            </a:fillRef>
+            <a:effectRef idx="0">
+              <a:schemeClr val="accent1"/>
+            </a:effectRef>
+            <a:fontRef idx="minor">
+              <a:schemeClr val="lt1"/>
+            </a:fontRef>
+          </p:style>
+          <p:txBody>
+            <a:bodyPr rtlCol="0" anchor="ctr"/>
+            <a:lstStyle/>
+            <a:p>
+              <a:pPr algn="ctr"/>
+              <a:endParaRPr lang="en-US"/>
+            </a:p>
+          </p:txBody>
+        </p:sp>
+        <p:sp>
+          <p:nvSpPr>
+            <p:cNvPr id="36" name="Oval 35">
+              <a:extLst>
+                <a:ext uri="{FF2B5EF4-FFF2-40B4-BE49-F238E27FC236}">
+                  <a16:creationId xmlns:a16="http://schemas.microsoft.com/office/drawing/2014/main" id="{848DAC31-A088-F3EE-AB48-A6E0FBD6E98D}"/>
+                </a:ext>
+              </a:extLst>
+            </p:cNvPr>
+            <p:cNvSpPr/>
+            <p:nvPr/>
+          </p:nvSpPr>
+          <p:spPr>
+            <a:xfrm>
+              <a:off x="1746991" y="2477925"/>
+              <a:ext cx="46363" cy="45719"/>
+            </a:xfrm>
+            <a:prstGeom prst="ellipse">
+              <a:avLst/>
+            </a:prstGeom>
+            <a:solidFill>
+              <a:srgbClr val="FF0000"/>
+            </a:solidFill>
+            <a:ln>
+              <a:noFill/>
+            </a:ln>
+          </p:spPr>
+          <p:style>
+            <a:lnRef idx="2">
+              <a:schemeClr val="accent1">
+                <a:shade val="15000"/>
+              </a:schemeClr>
+            </a:lnRef>
+            <a:fillRef idx="1">
+              <a:schemeClr val="accent1"/>
+            </a:fillRef>
+            <a:effectRef idx="0">
+              <a:schemeClr val="accent1"/>
+            </a:effectRef>
+            <a:fontRef idx="minor">
+              <a:schemeClr val="lt1"/>
+            </a:fontRef>
+          </p:style>
+          <p:txBody>
+            <a:bodyPr rtlCol="0" anchor="ctr"/>
+            <a:lstStyle/>
+            <a:p>
+              <a:pPr algn="ctr"/>
+              <a:endParaRPr lang="en-US"/>
+            </a:p>
+          </p:txBody>
+        </p:sp>
+        <p:sp>
+          <p:nvSpPr>
+            <p:cNvPr id="37" name="Oval 36">
+              <a:extLst>
+                <a:ext uri="{FF2B5EF4-FFF2-40B4-BE49-F238E27FC236}">
+                  <a16:creationId xmlns:a16="http://schemas.microsoft.com/office/drawing/2014/main" id="{63EC0BBF-FC5A-CF7D-849A-455D29EF46C7}"/>
+                </a:ext>
+              </a:extLst>
+            </p:cNvPr>
+            <p:cNvSpPr/>
+            <p:nvPr/>
+          </p:nvSpPr>
+          <p:spPr>
+            <a:xfrm>
+              <a:off x="4048389" y="2152536"/>
+              <a:ext cx="712204" cy="712204"/>
+            </a:xfrm>
+            <a:prstGeom prst="ellipse">
+              <a:avLst/>
+            </a:prstGeom>
+            <a:noFill/>
+            <a:ln w="12700">
+              <a:solidFill>
+                <a:schemeClr val="bg1"/>
+              </a:solidFill>
+            </a:ln>
+          </p:spPr>
+          <p:style>
+            <a:lnRef idx="2">
+              <a:schemeClr val="accent1">
+                <a:shade val="15000"/>
+              </a:schemeClr>
+            </a:lnRef>
+            <a:fillRef idx="1">
+              <a:schemeClr val="accent1"/>
+            </a:fillRef>
+            <a:effectRef idx="0">
+              <a:schemeClr val="accent1"/>
+            </a:effectRef>
+            <a:fontRef idx="minor">
+              <a:schemeClr val="lt1"/>
+            </a:fontRef>
+          </p:style>
+          <p:txBody>
+            <a:bodyPr rtlCol="0" anchor="ctr"/>
+            <a:lstStyle/>
+            <a:p>
+              <a:pPr algn="ctr"/>
+              <a:endParaRPr lang="en-US"/>
+            </a:p>
+          </p:txBody>
+        </p:sp>
+        <p:sp>
+          <p:nvSpPr>
+            <p:cNvPr id="38" name="Oval 37">
+              <a:extLst>
+                <a:ext uri="{FF2B5EF4-FFF2-40B4-BE49-F238E27FC236}">
+                  <a16:creationId xmlns:a16="http://schemas.microsoft.com/office/drawing/2014/main" id="{8D38980D-9E05-337F-FCE2-582ACFBF458F}"/>
+                </a:ext>
+              </a:extLst>
+            </p:cNvPr>
+            <p:cNvSpPr/>
+            <p:nvPr/>
+          </p:nvSpPr>
+          <p:spPr>
+            <a:xfrm>
+              <a:off x="3817232" y="1913659"/>
+              <a:ext cx="1182186" cy="1182186"/>
+            </a:xfrm>
+            <a:prstGeom prst="ellipse">
+              <a:avLst/>
+            </a:prstGeom>
+            <a:noFill/>
+            <a:ln w="12700">
+              <a:solidFill>
+                <a:schemeClr val="bg1"/>
+              </a:solidFill>
+            </a:ln>
+          </p:spPr>
+          <p:style>
+            <a:lnRef idx="2">
+              <a:schemeClr val="accent1">
+                <a:shade val="15000"/>
+              </a:schemeClr>
+            </a:lnRef>
+            <a:fillRef idx="1">
+              <a:schemeClr val="accent1"/>
+            </a:fillRef>
+            <a:effectRef idx="0">
+              <a:schemeClr val="accent1"/>
+            </a:effectRef>
+            <a:fontRef idx="minor">
+              <a:schemeClr val="lt1"/>
+            </a:fontRef>
+          </p:style>
+          <p:txBody>
+            <a:bodyPr rtlCol="0" anchor="ctr"/>
+            <a:lstStyle/>
+            <a:p>
+              <a:pPr algn="ctr"/>
+              <a:endParaRPr lang="en-US"/>
+            </a:p>
+          </p:txBody>
+        </p:sp>
+        <p:sp>
+          <p:nvSpPr>
+            <p:cNvPr id="39" name="Oval 38">
+              <a:extLst>
+                <a:ext uri="{FF2B5EF4-FFF2-40B4-BE49-F238E27FC236}">
+                  <a16:creationId xmlns:a16="http://schemas.microsoft.com/office/drawing/2014/main" id="{FC767CF5-3F7E-5898-9174-A1D68D84785E}"/>
+                </a:ext>
+              </a:extLst>
+            </p:cNvPr>
+            <p:cNvSpPr/>
+            <p:nvPr/>
+          </p:nvSpPr>
+          <p:spPr>
+            <a:xfrm>
+              <a:off x="3324018" y="1425209"/>
+              <a:ext cx="2159842" cy="2159842"/>
+            </a:xfrm>
+            <a:prstGeom prst="ellipse">
+              <a:avLst/>
+            </a:prstGeom>
+            <a:noFill/>
+            <a:ln w="12700">
+              <a:solidFill>
+                <a:schemeClr val="bg1"/>
+              </a:solidFill>
+            </a:ln>
+          </p:spPr>
+          <p:style>
+            <a:lnRef idx="2">
+              <a:schemeClr val="accent1">
+                <a:shade val="15000"/>
+              </a:schemeClr>
+            </a:lnRef>
+            <a:fillRef idx="1">
+              <a:schemeClr val="accent1"/>
+            </a:fillRef>
+            <a:effectRef idx="0">
+              <a:schemeClr val="accent1"/>
+            </a:effectRef>
+            <a:fontRef idx="minor">
+              <a:schemeClr val="lt1"/>
+            </a:fontRef>
+          </p:style>
+          <p:txBody>
+            <a:bodyPr rtlCol="0" anchor="ctr"/>
+            <a:lstStyle/>
+            <a:p>
+              <a:pPr algn="ctr"/>
+              <a:endParaRPr lang="en-US"/>
+            </a:p>
+          </p:txBody>
+        </p:sp>
+        <p:sp>
+          <p:nvSpPr>
+            <p:cNvPr id="40" name="Oval 39">
+              <a:extLst>
+                <a:ext uri="{FF2B5EF4-FFF2-40B4-BE49-F238E27FC236}">
+                  <a16:creationId xmlns:a16="http://schemas.microsoft.com/office/drawing/2014/main" id="{E220E4FA-D09B-D2C9-F7B2-1640991D20B9}"/>
+                </a:ext>
+              </a:extLst>
+            </p:cNvPr>
+            <p:cNvSpPr/>
+            <p:nvPr/>
+          </p:nvSpPr>
+          <p:spPr>
+            <a:xfrm>
+              <a:off x="4392763" y="2492052"/>
+              <a:ext cx="46363" cy="45719"/>
+            </a:xfrm>
+            <a:prstGeom prst="ellipse">
+              <a:avLst/>
+            </a:prstGeom>
+            <a:solidFill>
+              <a:srgbClr val="FF0000"/>
+            </a:solidFill>
+            <a:ln>
+              <a:noFill/>
+            </a:ln>
+          </p:spPr>
+          <p:style>
+            <a:lnRef idx="2">
+              <a:schemeClr val="accent1">
+                <a:shade val="15000"/>
+              </a:schemeClr>
+            </a:lnRef>
+            <a:fillRef idx="1">
+              <a:schemeClr val="accent1"/>
+            </a:fillRef>
+            <a:effectRef idx="0">
+              <a:schemeClr val="accent1"/>
+            </a:effectRef>
+            <a:fontRef idx="minor">
+              <a:schemeClr val="lt1"/>
+            </a:fontRef>
+          </p:style>
+          <p:txBody>
+            <a:bodyPr rtlCol="0" anchor="ctr"/>
+            <a:lstStyle/>
+            <a:p>
+              <a:pPr algn="ctr"/>
+              <a:endParaRPr lang="en-US"/>
+            </a:p>
+          </p:txBody>
+        </p:sp>
+        <p:sp>
+          <p:nvSpPr>
+            <p:cNvPr id="41" name="TextBox 40">
+              <a:extLst>
+                <a:ext uri="{FF2B5EF4-FFF2-40B4-BE49-F238E27FC236}">
+                  <a16:creationId xmlns:a16="http://schemas.microsoft.com/office/drawing/2014/main" id="{922561D7-B1FD-1DA6-1675-5142A70F2A98}"/>
+                </a:ext>
+              </a:extLst>
+            </p:cNvPr>
+            <p:cNvSpPr txBox="1"/>
+            <p:nvPr/>
+          </p:nvSpPr>
+          <p:spPr>
+            <a:xfrm>
+              <a:off x="1512081" y="1378417"/>
+              <a:ext cx="497252" cy="276999"/>
+            </a:xfrm>
+            <a:prstGeom prst="rect">
+              <a:avLst/>
+            </a:prstGeom>
+            <a:noFill/>
+          </p:spPr>
+          <p:txBody>
+            <a:bodyPr wrap="none" rtlCol="0">
+              <a:spAutoFit/>
+            </a:bodyPr>
+            <a:lstStyle/>
+            <a:p>
+              <a:r>
+                <a:rPr lang="en-US" sz="1200" dirty="0">
+                  <a:solidFill>
+                    <a:schemeClr val="bg1"/>
+                  </a:solidFill>
+                  <a:latin typeface="Arial" panose="020B0604020202020204" pitchFamily="34" charset="0"/>
+                  <a:cs typeface="Arial" panose="020B0604020202020204" pitchFamily="34" charset="0"/>
+                </a:rPr>
+                <a:t>r = 9</a:t>
+              </a:r>
+            </a:p>
+          </p:txBody>
+        </p:sp>
+        <p:sp>
+          <p:nvSpPr>
+            <p:cNvPr id="42" name="TextBox 41">
+              <a:extLst>
+                <a:ext uri="{FF2B5EF4-FFF2-40B4-BE49-F238E27FC236}">
+                  <a16:creationId xmlns:a16="http://schemas.microsoft.com/office/drawing/2014/main" id="{88E02713-4BD8-00C1-DC2B-D3B577D6A312}"/>
+                </a:ext>
+              </a:extLst>
+            </p:cNvPr>
+            <p:cNvSpPr txBox="1"/>
+            <p:nvPr/>
+          </p:nvSpPr>
+          <p:spPr>
+            <a:xfrm>
+              <a:off x="1512081" y="1787782"/>
+              <a:ext cx="497252" cy="276999"/>
+            </a:xfrm>
+            <a:prstGeom prst="rect">
+              <a:avLst/>
+            </a:prstGeom>
+            <a:noFill/>
+          </p:spPr>
+          <p:txBody>
+            <a:bodyPr wrap="none" rtlCol="0">
+              <a:spAutoFit/>
+            </a:bodyPr>
+            <a:lstStyle/>
+            <a:p>
+              <a:r>
+                <a:rPr lang="en-US" sz="1200" dirty="0">
+                  <a:solidFill>
+                    <a:schemeClr val="bg1"/>
+                  </a:solidFill>
+                  <a:latin typeface="Arial" panose="020B0604020202020204" pitchFamily="34" charset="0"/>
+                  <a:cs typeface="Arial" panose="020B0604020202020204" pitchFamily="34" charset="0"/>
+                </a:rPr>
+                <a:t>r = 5</a:t>
+              </a:r>
+            </a:p>
+          </p:txBody>
+        </p:sp>
+        <p:sp>
+          <p:nvSpPr>
+            <p:cNvPr id="43" name="TextBox 42">
+              <a:extLst>
+                <a:ext uri="{FF2B5EF4-FFF2-40B4-BE49-F238E27FC236}">
+                  <a16:creationId xmlns:a16="http://schemas.microsoft.com/office/drawing/2014/main" id="{BBE0EBB4-0222-7243-FC9C-8C48680D8EAD}"/>
+                </a:ext>
+              </a:extLst>
+            </p:cNvPr>
+            <p:cNvSpPr txBox="1"/>
+            <p:nvPr/>
+          </p:nvSpPr>
+          <p:spPr>
+            <a:xfrm>
+              <a:off x="1520327" y="2006378"/>
+              <a:ext cx="497252" cy="276999"/>
+            </a:xfrm>
+            <a:prstGeom prst="rect">
+              <a:avLst/>
+            </a:prstGeom>
+            <a:noFill/>
+          </p:spPr>
+          <p:txBody>
+            <a:bodyPr wrap="none" rtlCol="0">
+              <a:spAutoFit/>
+            </a:bodyPr>
+            <a:lstStyle/>
+            <a:p>
+              <a:r>
+                <a:rPr lang="en-US" sz="1200" dirty="0">
+                  <a:solidFill>
+                    <a:schemeClr val="bg1"/>
+                  </a:solidFill>
+                  <a:latin typeface="Arial" panose="020B0604020202020204" pitchFamily="34" charset="0"/>
+                  <a:cs typeface="Arial" panose="020B0604020202020204" pitchFamily="34" charset="0"/>
+                </a:rPr>
+                <a:t>r = 3</a:t>
+              </a:r>
+            </a:p>
+          </p:txBody>
+        </p:sp>
+        <p:pic>
+          <p:nvPicPr>
+            <p:cNvPr id="47" name="Picture 46">
+              <a:extLst>
+                <a:ext uri="{FF2B5EF4-FFF2-40B4-BE49-F238E27FC236}">
+                  <a16:creationId xmlns:a16="http://schemas.microsoft.com/office/drawing/2014/main" id="{F0F4096D-917E-3986-3120-252F590A0BB5}"/>
+                </a:ext>
+              </a:extLst>
+            </p:cNvPr>
+            <p:cNvPicPr>
+              <a:picLocks noChangeAspect="1"/>
+            </p:cNvPicPr>
+            <p:nvPr/>
+          </p:nvPicPr>
+          <p:blipFill>
+            <a:blip r:embed="rId5"/>
+            <a:stretch>
+              <a:fillRect/>
+            </a:stretch>
+          </p:blipFill>
+          <p:spPr>
+            <a:xfrm>
+              <a:off x="5832899" y="1143340"/>
+              <a:ext cx="5610225" cy="2752725"/>
+            </a:xfrm>
+            <a:prstGeom prst="rect">
+              <a:avLst/>
+            </a:prstGeom>
+            <a:solidFill>
+              <a:srgbClr val="91D372"/>
+            </a:solidFill>
+          </p:spPr>
+        </p:pic>
+        <p:sp>
+          <p:nvSpPr>
+            <p:cNvPr id="53" name="TextBox 52">
+              <a:extLst>
+                <a:ext uri="{FF2B5EF4-FFF2-40B4-BE49-F238E27FC236}">
+                  <a16:creationId xmlns:a16="http://schemas.microsoft.com/office/drawing/2014/main" id="{B3A76907-3FBF-879A-1D52-D28195EF35EE}"/>
+                </a:ext>
+              </a:extLst>
+            </p:cNvPr>
+            <p:cNvSpPr txBox="1"/>
+            <p:nvPr/>
+          </p:nvSpPr>
+          <p:spPr>
+            <a:xfrm>
+              <a:off x="4167318" y="1233590"/>
+              <a:ext cx="497252" cy="276999"/>
+            </a:xfrm>
+            <a:prstGeom prst="rect">
+              <a:avLst/>
+            </a:prstGeom>
+            <a:noFill/>
+          </p:spPr>
+          <p:txBody>
+            <a:bodyPr wrap="none" rtlCol="0">
+              <a:spAutoFit/>
+            </a:bodyPr>
+            <a:lstStyle/>
+            <a:p>
+              <a:r>
+                <a:rPr lang="en-US" sz="1200" dirty="0">
+                  <a:solidFill>
+                    <a:schemeClr val="bg1"/>
+                  </a:solidFill>
+                  <a:latin typeface="Arial" panose="020B0604020202020204" pitchFamily="34" charset="0"/>
+                  <a:cs typeface="Arial" panose="020B0604020202020204" pitchFamily="34" charset="0"/>
+                </a:rPr>
+                <a:t>r = 9</a:t>
+              </a:r>
+            </a:p>
+          </p:txBody>
+        </p:sp>
+        <p:sp>
+          <p:nvSpPr>
+            <p:cNvPr id="54" name="TextBox 53">
+              <a:extLst>
+                <a:ext uri="{FF2B5EF4-FFF2-40B4-BE49-F238E27FC236}">
+                  <a16:creationId xmlns:a16="http://schemas.microsoft.com/office/drawing/2014/main" id="{4DE38E54-71C6-BD99-8E9B-834EF1B30091}"/>
+                </a:ext>
+              </a:extLst>
+            </p:cNvPr>
+            <p:cNvSpPr txBox="1"/>
+            <p:nvPr/>
+          </p:nvSpPr>
+          <p:spPr>
+            <a:xfrm>
+              <a:off x="4160914" y="1696881"/>
+              <a:ext cx="497252" cy="276999"/>
+            </a:xfrm>
+            <a:prstGeom prst="rect">
+              <a:avLst/>
+            </a:prstGeom>
+            <a:noFill/>
+          </p:spPr>
+          <p:txBody>
+            <a:bodyPr wrap="none" rtlCol="0">
+              <a:spAutoFit/>
+            </a:bodyPr>
+            <a:lstStyle/>
+            <a:p>
+              <a:r>
+                <a:rPr lang="en-US" sz="1200" dirty="0">
+                  <a:solidFill>
+                    <a:schemeClr val="bg1"/>
+                  </a:solidFill>
+                  <a:latin typeface="Arial" panose="020B0604020202020204" pitchFamily="34" charset="0"/>
+                  <a:cs typeface="Arial" panose="020B0604020202020204" pitchFamily="34" charset="0"/>
+                </a:rPr>
+                <a:t>r = 5</a:t>
+              </a:r>
+            </a:p>
+          </p:txBody>
+        </p:sp>
+        <p:sp>
+          <p:nvSpPr>
+            <p:cNvPr id="55" name="TextBox 54">
+              <a:extLst>
+                <a:ext uri="{FF2B5EF4-FFF2-40B4-BE49-F238E27FC236}">
+                  <a16:creationId xmlns:a16="http://schemas.microsoft.com/office/drawing/2014/main" id="{E0A72C66-707D-1978-92C0-B54B82BEA728}"/>
+                </a:ext>
+              </a:extLst>
+            </p:cNvPr>
+            <p:cNvSpPr txBox="1"/>
+            <p:nvPr/>
+          </p:nvSpPr>
+          <p:spPr>
+            <a:xfrm>
+              <a:off x="4167319" y="1960290"/>
+              <a:ext cx="497252" cy="276999"/>
+            </a:xfrm>
+            <a:prstGeom prst="rect">
+              <a:avLst/>
+            </a:prstGeom>
+            <a:noFill/>
+          </p:spPr>
+          <p:txBody>
+            <a:bodyPr wrap="none" rtlCol="0">
+              <a:spAutoFit/>
+            </a:bodyPr>
+            <a:lstStyle/>
+            <a:p>
+              <a:r>
+                <a:rPr lang="en-US" sz="1200" dirty="0">
+                  <a:solidFill>
+                    <a:schemeClr val="bg1"/>
+                  </a:solidFill>
+                  <a:latin typeface="Arial" panose="020B0604020202020204" pitchFamily="34" charset="0"/>
+                  <a:cs typeface="Arial" panose="020B0604020202020204" pitchFamily="34" charset="0"/>
+                </a:rPr>
+                <a:t>r = 3</a:t>
+              </a:r>
+            </a:p>
+          </p:txBody>
+        </p:sp>
+        <mc:AlternateContent xmlns:mc="http://schemas.openxmlformats.org/markup-compatibility/2006">
+          <mc:Choice xmlns:a14="http://schemas.microsoft.com/office/drawing/2010/main" Requires="a14">
+            <p:sp>
+              <p:nvSpPr>
+                <p:cNvPr id="56" name="Text Box 9">
+                  <a:extLst>
+                    <a:ext uri="{FF2B5EF4-FFF2-40B4-BE49-F238E27FC236}">
+                      <a16:creationId xmlns:a16="http://schemas.microsoft.com/office/drawing/2014/main" id="{9D877299-2E12-77FB-747A-C7C7C4A027AF}"/>
+                    </a:ext>
+                  </a:extLst>
+                </p:cNvPr>
+                <p:cNvSpPr txBox="1"/>
+                <p:nvPr/>
+              </p:nvSpPr>
+              <p:spPr>
+                <a:xfrm>
+                  <a:off x="5874178" y="102462"/>
+                  <a:ext cx="2763833" cy="1077218"/>
+                </a:xfrm>
+                <a:prstGeom prst="rect">
+                  <a:avLst/>
+                </a:prstGeom>
+                <a:noFill/>
+              </p:spPr>
+              <p:txBody>
+                <a:bodyPr wrap="square" rtlCol="0">
+                  <a:spAutoFit/>
+                </a:bodyPr>
+                <a:lstStyle>
+                  <a:defPPr marR="0" lvl="0" algn="l" rtl="0">
+                    <a:lnSpc>
+                      <a:spcPct val="100000"/>
+                    </a:lnSpc>
+                    <a:spcBef>
+                      <a:spcPts val="0"/>
+                    </a:spcBef>
+                    <a:spcAft>
+                      <a:spcPts val="0"/>
+                    </a:spcAft>
+                  </a:defPPr>
+                  <a:lvl1pPr marR="0" lvl="0" algn="l" rtl="0">
+                    <a:lnSpc>
+                      <a:spcPct val="100000"/>
+                    </a:lnSpc>
+                    <a:spcBef>
+                      <a:spcPts val="0"/>
+                    </a:spcBef>
+                    <a:spcAft>
+                      <a:spcPts val="0"/>
+                    </a:spcAft>
+                    <a:buClr>
+                      <a:srgbClr val="000000"/>
+                    </a:buClr>
+                    <a:buFont typeface="Arial" panose="020B0604020202020204"/>
+                    <a:defRPr sz="1400" b="0" i="0" u="none" strike="noStrike" cap="none">
+                      <a:solidFill>
+                        <a:srgbClr val="000000"/>
+                      </a:solidFill>
+                      <a:latin typeface="Arial" panose="020B0604020202020204"/>
+                      <a:ea typeface="Arial" panose="020B0604020202020204"/>
+                      <a:cs typeface="Arial" panose="020B0604020202020204"/>
+                      <a:sym typeface="Arial" panose="020B0604020202020204"/>
+                    </a:defRPr>
+                  </a:lvl1pPr>
+                  <a:lvl2pPr marR="0" lvl="1" algn="l" rtl="0">
+                    <a:lnSpc>
+                      <a:spcPct val="100000"/>
+                    </a:lnSpc>
+                    <a:spcBef>
+                      <a:spcPts val="0"/>
+                    </a:spcBef>
+                    <a:spcAft>
+                      <a:spcPts val="0"/>
+                    </a:spcAft>
+                    <a:buClr>
+                      <a:srgbClr val="000000"/>
+                    </a:buClr>
+                    <a:buFont typeface="Arial" panose="020B0604020202020204"/>
+                    <a:defRPr sz="1400" b="0" i="0" u="none" strike="noStrike" cap="none">
+                      <a:solidFill>
+                        <a:srgbClr val="000000"/>
+                      </a:solidFill>
+                      <a:latin typeface="Arial" panose="020B0604020202020204"/>
+                      <a:ea typeface="Arial" panose="020B0604020202020204"/>
+                      <a:cs typeface="Arial" panose="020B0604020202020204"/>
+                      <a:sym typeface="Arial" panose="020B0604020202020204"/>
+                    </a:defRPr>
+                  </a:lvl2pPr>
+                  <a:lvl3pPr marR="0" lvl="2" algn="l" rtl="0">
+                    <a:lnSpc>
+                      <a:spcPct val="100000"/>
+                    </a:lnSpc>
+                    <a:spcBef>
+                      <a:spcPts val="0"/>
+                    </a:spcBef>
+                    <a:spcAft>
+                      <a:spcPts val="0"/>
+                    </a:spcAft>
+                    <a:buClr>
+                      <a:srgbClr val="000000"/>
+                    </a:buClr>
+                    <a:buFont typeface="Arial" panose="020B0604020202020204"/>
+                    <a:defRPr sz="1400" b="0" i="0" u="none" strike="noStrike" cap="none">
+                      <a:solidFill>
+                        <a:srgbClr val="000000"/>
+                      </a:solidFill>
+                      <a:latin typeface="Arial" panose="020B0604020202020204"/>
+                      <a:ea typeface="Arial" panose="020B0604020202020204"/>
+                      <a:cs typeface="Arial" panose="020B0604020202020204"/>
+                      <a:sym typeface="Arial" panose="020B0604020202020204"/>
+                    </a:defRPr>
+                  </a:lvl3pPr>
+                  <a:lvl4pPr marR="0" lvl="3" algn="l" rtl="0">
+                    <a:lnSpc>
+                      <a:spcPct val="100000"/>
+                    </a:lnSpc>
+                    <a:spcBef>
+                      <a:spcPts val="0"/>
+                    </a:spcBef>
+                    <a:spcAft>
+                      <a:spcPts val="0"/>
+                    </a:spcAft>
+                    <a:buClr>
+                      <a:srgbClr val="000000"/>
+                    </a:buClr>
+                    <a:buFont typeface="Arial" panose="020B0604020202020204"/>
+                    <a:defRPr sz="1400" b="0" i="0" u="none" strike="noStrike" cap="none">
+                      <a:solidFill>
+                        <a:srgbClr val="000000"/>
+                      </a:solidFill>
+                      <a:latin typeface="Arial" panose="020B0604020202020204"/>
+                      <a:ea typeface="Arial" panose="020B0604020202020204"/>
+                      <a:cs typeface="Arial" panose="020B0604020202020204"/>
+                      <a:sym typeface="Arial" panose="020B0604020202020204"/>
+                    </a:defRPr>
+                  </a:lvl4pPr>
+                  <a:lvl5pPr marR="0" lvl="4" algn="l" rtl="0">
+                    <a:lnSpc>
+                      <a:spcPct val="100000"/>
+                    </a:lnSpc>
+                    <a:spcBef>
+                      <a:spcPts val="0"/>
+                    </a:spcBef>
+                    <a:spcAft>
+                      <a:spcPts val="0"/>
+                    </a:spcAft>
+                    <a:buClr>
+                      <a:srgbClr val="000000"/>
+                    </a:buClr>
+                    <a:buFont typeface="Arial" panose="020B0604020202020204"/>
+                    <a:defRPr sz="1400" b="0" i="0" u="none" strike="noStrike" cap="none">
+                      <a:solidFill>
+                        <a:srgbClr val="000000"/>
+                      </a:solidFill>
+                      <a:latin typeface="Arial" panose="020B0604020202020204"/>
+                      <a:ea typeface="Arial" panose="020B0604020202020204"/>
+                      <a:cs typeface="Arial" panose="020B0604020202020204"/>
+                      <a:sym typeface="Arial" panose="020B0604020202020204"/>
+                    </a:defRPr>
+                  </a:lvl5pPr>
+                  <a:lvl6pPr marR="0" lvl="5" algn="l" rtl="0">
+                    <a:lnSpc>
+                      <a:spcPct val="100000"/>
+                    </a:lnSpc>
+                    <a:spcBef>
+                      <a:spcPts val="0"/>
+                    </a:spcBef>
+                    <a:spcAft>
+                      <a:spcPts val="0"/>
+                    </a:spcAft>
+                    <a:buClr>
+                      <a:srgbClr val="000000"/>
+                    </a:buClr>
+                    <a:buFont typeface="Arial" panose="020B0604020202020204"/>
+                    <a:defRPr sz="1400" b="0" i="0" u="none" strike="noStrike" cap="none">
+                      <a:solidFill>
+                        <a:srgbClr val="000000"/>
+                      </a:solidFill>
+                      <a:latin typeface="Arial" panose="020B0604020202020204"/>
+                      <a:ea typeface="Arial" panose="020B0604020202020204"/>
+                      <a:cs typeface="Arial" panose="020B0604020202020204"/>
+                      <a:sym typeface="Arial" panose="020B0604020202020204"/>
+                    </a:defRPr>
+                  </a:lvl6pPr>
+                  <a:lvl7pPr marR="0" lvl="6" algn="l" rtl="0">
+                    <a:lnSpc>
+                      <a:spcPct val="100000"/>
+                    </a:lnSpc>
+                    <a:spcBef>
+                      <a:spcPts val="0"/>
+                    </a:spcBef>
+                    <a:spcAft>
+                      <a:spcPts val="0"/>
+                    </a:spcAft>
+                    <a:buClr>
+                      <a:srgbClr val="000000"/>
+                    </a:buClr>
+                    <a:buFont typeface="Arial" panose="020B0604020202020204"/>
+                    <a:defRPr sz="1400" b="0" i="0" u="none" strike="noStrike" cap="none">
+                      <a:solidFill>
+                        <a:srgbClr val="000000"/>
+                      </a:solidFill>
+                      <a:latin typeface="Arial" panose="020B0604020202020204"/>
+                      <a:ea typeface="Arial" panose="020B0604020202020204"/>
+                      <a:cs typeface="Arial" panose="020B0604020202020204"/>
+                      <a:sym typeface="Arial" panose="020B0604020202020204"/>
+                    </a:defRPr>
+                  </a:lvl7pPr>
+                  <a:lvl8pPr marR="0" lvl="7" algn="l" rtl="0">
+                    <a:lnSpc>
+                      <a:spcPct val="100000"/>
+                    </a:lnSpc>
+                    <a:spcBef>
+                      <a:spcPts val="0"/>
+                    </a:spcBef>
+                    <a:spcAft>
+                      <a:spcPts val="0"/>
+                    </a:spcAft>
+                    <a:buClr>
+                      <a:srgbClr val="000000"/>
+                    </a:buClr>
+                    <a:buFont typeface="Arial" panose="020B0604020202020204"/>
+                    <a:defRPr sz="1400" b="0" i="0" u="none" strike="noStrike" cap="none">
+                      <a:solidFill>
+                        <a:srgbClr val="000000"/>
+                      </a:solidFill>
+                      <a:latin typeface="Arial" panose="020B0604020202020204"/>
+                      <a:ea typeface="Arial" panose="020B0604020202020204"/>
+                      <a:cs typeface="Arial" panose="020B0604020202020204"/>
+                      <a:sym typeface="Arial" panose="020B0604020202020204"/>
+                    </a:defRPr>
+                  </a:lvl8pPr>
+                  <a:lvl9pPr marR="0" lvl="8" algn="l" rtl="0">
+                    <a:lnSpc>
+                      <a:spcPct val="100000"/>
+                    </a:lnSpc>
+                    <a:spcBef>
+                      <a:spcPts val="0"/>
+                    </a:spcBef>
+                    <a:spcAft>
+                      <a:spcPts val="0"/>
+                    </a:spcAft>
+                    <a:buClr>
+                      <a:srgbClr val="000000"/>
+                    </a:buClr>
+                    <a:buFont typeface="Arial" panose="020B0604020202020204"/>
+                    <a:defRPr sz="1400" b="0" i="0" u="none" strike="noStrike" cap="none">
+                      <a:solidFill>
+                        <a:srgbClr val="000000"/>
+                      </a:solidFill>
+                      <a:latin typeface="Arial" panose="020B0604020202020204"/>
+                      <a:ea typeface="Arial" panose="020B0604020202020204"/>
+                      <a:cs typeface="Arial" panose="020B0604020202020204"/>
+                      <a:sym typeface="Arial" panose="020B0604020202020204"/>
+                    </a:defRPr>
+                  </a:lvl9pPr>
+                </a:lstStyle>
+                <a:p>
+                  <a:pPr algn="ctr"/>
+                  <a:r>
+                    <a:rPr lang="en-US" sz="1600" dirty="0">
+                      <a:solidFill>
+                        <a:srgbClr val="8472D3"/>
+                      </a:solidFill>
+                    </a:rPr>
+                    <a:t>Horizontal </a:t>
+                  </a:r>
+                  <a:r>
+                    <a:rPr lang="en-US" altLang="zh-CN" sz="1600" dirty="0">
+                      <a:solidFill>
+                        <a:srgbClr val="8472D3"/>
+                      </a:solidFill>
+                    </a:rPr>
+                    <a:t>Constraints</a:t>
+                  </a:r>
+                  <a:endParaRPr lang="en-US" sz="1600" b="0" i="1" dirty="0">
+                    <a:solidFill>
+                      <a:srgbClr val="8472D3"/>
+                    </a:solidFill>
+                    <a:latin typeface="Cambria Math" panose="02040503050406030204" pitchFamily="18" charset="0"/>
+                  </a:endParaRPr>
+                </a:p>
+                <a:p>
+                  <a:pPr algn="ctr"/>
+                  <a14:m>
+                    <m:oMathPara xmlns:m="http://schemas.openxmlformats.org/officeDocument/2006/math">
+                      <m:oMathParaPr>
+                        <m:jc m:val="centerGroup"/>
+                      </m:oMathParaPr>
+                      <m:oMath xmlns:m="http://schemas.openxmlformats.org/officeDocument/2006/math">
+                        <m:r>
+                          <a:rPr lang="en-US" sz="1600" b="0" i="1" smtClean="0">
+                            <a:solidFill>
+                              <a:srgbClr val="8472D3"/>
+                            </a:solidFill>
+                            <a:latin typeface="Cambria Math" panose="02040503050406030204" pitchFamily="18" charset="0"/>
+                          </a:rPr>
+                          <m:t>𝜓</m:t>
+                        </m:r>
+                        <m:d>
+                          <m:dPr>
+                            <m:ctrlPr>
+                              <a:rPr lang="en-US" sz="1600" b="0" i="1" smtClean="0">
+                                <a:solidFill>
+                                  <a:srgbClr val="8472D3"/>
+                                </a:solidFill>
+                                <a:latin typeface="Cambria Math" panose="02040503050406030204" pitchFamily="18" charset="0"/>
+                              </a:rPr>
+                            </m:ctrlPr>
+                          </m:dPr>
+                          <m:e>
+                            <m:r>
+                              <a:rPr lang="en-US" sz="1600" b="0" i="1" smtClean="0">
+                                <a:solidFill>
+                                  <a:srgbClr val="8472D3"/>
+                                </a:solidFill>
+                                <a:latin typeface="Cambria Math" panose="02040503050406030204" pitchFamily="18" charset="0"/>
+                              </a:rPr>
+                              <m:t>𝑟</m:t>
+                            </m:r>
+                          </m:e>
+                        </m:d>
+                        <m:r>
+                          <a:rPr lang="en-US" sz="1600" b="0" i="1" smtClean="0">
+                            <a:solidFill>
+                              <a:srgbClr val="8472D3"/>
+                            </a:solidFill>
+                            <a:latin typeface="Cambria Math" panose="02040503050406030204" pitchFamily="18" charset="0"/>
+                          </a:rPr>
+                          <m:t>=</m:t>
+                        </m:r>
+                        <m:r>
+                          <m:rPr>
+                            <m:sty m:val="p"/>
+                          </m:rPr>
+                          <a:rPr lang="en-US" altLang="zh-CN" sz="1600" i="1">
+                            <a:solidFill>
+                              <a:srgbClr val="8472D3"/>
+                            </a:solidFill>
+                            <a:latin typeface="Cambria Math" panose="02040503050406030204" pitchFamily="18" charset="0"/>
+                          </a:rPr>
+                          <m:t>logistic</m:t>
+                        </m:r>
+                        <m:d>
+                          <m:dPr>
+                            <m:ctrlPr>
+                              <a:rPr lang="en-US" sz="1600" b="0" i="1" smtClean="0">
+                                <a:solidFill>
+                                  <a:srgbClr val="8472D3"/>
+                                </a:solidFill>
+                                <a:latin typeface="Cambria Math" panose="02040503050406030204" pitchFamily="18" charset="0"/>
+                              </a:rPr>
+                            </m:ctrlPr>
+                          </m:dPr>
+                          <m:e>
+                            <m:r>
+                              <a:rPr lang="en-US" sz="1600" b="0" i="1" smtClean="0">
+                                <a:solidFill>
+                                  <a:srgbClr val="8472D3"/>
+                                </a:solidFill>
+                                <a:latin typeface="Cambria Math" panose="02040503050406030204" pitchFamily="18" charset="0"/>
+                              </a:rPr>
+                              <m:t>𝛼</m:t>
+                            </m:r>
+                            <m:r>
+                              <a:rPr lang="en-US" sz="1600" b="0" i="1" smtClean="0">
+                                <a:solidFill>
+                                  <a:srgbClr val="8472D3"/>
+                                </a:solidFill>
+                                <a:latin typeface="Cambria Math" panose="02040503050406030204" pitchFamily="18" charset="0"/>
+                              </a:rPr>
+                              <m:t>+ </m:t>
+                            </m:r>
+                            <m:r>
+                              <a:rPr lang="en-US" sz="1600" b="0" i="1" smtClean="0">
+                                <a:solidFill>
+                                  <a:srgbClr val="8472D3"/>
+                                </a:solidFill>
+                                <a:latin typeface="Cambria Math" panose="02040503050406030204" pitchFamily="18" charset="0"/>
+                              </a:rPr>
+                              <m:t>𝛽</m:t>
+                            </m:r>
+                            <m:r>
+                              <m:rPr>
+                                <m:sty m:val="p"/>
+                              </m:rPr>
+                              <a:rPr lang="en-US" sz="1600" b="0" i="1" smtClean="0">
+                                <a:solidFill>
+                                  <a:srgbClr val="8472D3"/>
+                                </a:solidFill>
+                                <a:latin typeface="Cambria Math" panose="02040503050406030204" pitchFamily="18" charset="0"/>
+                              </a:rPr>
+                              <m:t>r</m:t>
+                            </m:r>
+                          </m:e>
+                        </m:d>
+                      </m:oMath>
+                    </m:oMathPara>
+                  </a14:m>
+                  <a:endParaRPr lang="en-US" sz="1600" dirty="0">
+                    <a:solidFill>
+                      <a:srgbClr val="8472D3"/>
+                    </a:solidFill>
+                  </a:endParaRPr>
+                </a:p>
+                <a:p>
+                  <a:pPr algn="ctr"/>
+                  <a:r>
+                    <a:rPr lang="en-US" altLang="zh-CN" sz="1600" dirty="0">
+                      <a:solidFill>
+                        <a:srgbClr val="91D372"/>
+                      </a:solidFill>
+                    </a:rPr>
+                    <a:t>Horizontal Construction</a:t>
+                  </a:r>
+                  <a:endParaRPr lang="en-US" sz="1600" dirty="0">
+                    <a:solidFill>
+                      <a:srgbClr val="91D372"/>
+                    </a:solidFill>
+                  </a:endParaRPr>
+                </a:p>
+                <a:p>
+                  <a:pPr algn="ctr"/>
+                  <a14:m>
+                    <m:oMathPara xmlns:m="http://schemas.openxmlformats.org/officeDocument/2006/math">
+                      <m:oMathParaPr>
+                        <m:jc m:val="centerGroup"/>
+                      </m:oMathParaPr>
+                      <m:oMath xmlns:m="http://schemas.openxmlformats.org/officeDocument/2006/math">
+                        <m:r>
+                          <a:rPr lang="en-US" sz="1600" i="1" dirty="0" smtClean="0">
+                            <a:solidFill>
+                              <a:srgbClr val="91D372"/>
+                            </a:solidFill>
+                            <a:latin typeface="Cambria Math" panose="02040503050406030204" pitchFamily="18" charset="0"/>
+                          </a:rPr>
+                          <m:t>𝜋</m:t>
+                        </m:r>
+                        <m:d>
+                          <m:dPr>
+                            <m:ctrlPr>
+                              <a:rPr lang="en-US" sz="1600" i="1" dirty="0" smtClean="0">
+                                <a:solidFill>
+                                  <a:srgbClr val="91D372"/>
+                                </a:solidFill>
+                                <a:latin typeface="Cambria Math" panose="02040503050406030204" pitchFamily="18" charset="0"/>
+                              </a:rPr>
+                            </m:ctrlPr>
+                          </m:dPr>
+                          <m:e>
+                            <m:r>
+                              <a:rPr lang="en-US" sz="1600" i="1" dirty="0" smtClean="0">
+                                <a:solidFill>
+                                  <a:srgbClr val="91D372"/>
+                                </a:solidFill>
+                                <a:latin typeface="Cambria Math" panose="02040503050406030204" pitchFamily="18" charset="0"/>
+                              </a:rPr>
+                              <m:t>𝑟</m:t>
+                            </m:r>
+                          </m:e>
+                        </m:d>
+                        <m:r>
+                          <a:rPr lang="en-US" sz="1600" i="1" dirty="0" smtClean="0">
+                            <a:solidFill>
+                              <a:srgbClr val="91D372"/>
+                            </a:solidFill>
+                            <a:latin typeface="Cambria Math" panose="02040503050406030204" pitchFamily="18" charset="0"/>
+                          </a:rPr>
+                          <m:t>=</m:t>
+                        </m:r>
+                        <m:r>
+                          <m:rPr>
+                            <m:sty m:val="p"/>
+                          </m:rPr>
+                          <a:rPr lang="en-US" sz="1600" i="0" dirty="0" smtClean="0">
+                            <a:solidFill>
+                              <a:srgbClr val="91D372"/>
+                            </a:solidFill>
+                            <a:latin typeface="Cambria Math" panose="02040503050406030204" pitchFamily="18" charset="0"/>
+                          </a:rPr>
+                          <m:t>logistic</m:t>
+                        </m:r>
+                        <m:d>
+                          <m:dPr>
+                            <m:ctrlPr>
+                              <a:rPr lang="en-US" sz="1600" i="1" dirty="0" smtClean="0">
+                                <a:solidFill>
+                                  <a:srgbClr val="91D372"/>
+                                </a:solidFill>
+                                <a:latin typeface="Cambria Math" panose="02040503050406030204" pitchFamily="18" charset="0"/>
+                              </a:rPr>
+                            </m:ctrlPr>
+                          </m:dPr>
+                          <m:e>
+                            <m:r>
+                              <a:rPr lang="en-US" sz="1600" i="1" dirty="0" smtClean="0">
+                                <a:solidFill>
+                                  <a:srgbClr val="91D372"/>
+                                </a:solidFill>
+                                <a:latin typeface="Cambria Math" panose="02040503050406030204" pitchFamily="18" charset="0"/>
+                              </a:rPr>
+                              <m:t>𝜅</m:t>
+                            </m:r>
+                            <m:r>
+                              <a:rPr lang="en-US" sz="1600" b="0" i="1" dirty="0" smtClean="0">
+                                <a:solidFill>
+                                  <a:srgbClr val="91D372"/>
+                                </a:solidFill>
+                                <a:latin typeface="Cambria Math" panose="02040503050406030204" pitchFamily="18" charset="0"/>
+                              </a:rPr>
+                              <m:t> </m:t>
+                            </m:r>
+                            <m:r>
+                              <a:rPr lang="en-US" sz="1600" i="1" dirty="0" smtClean="0">
+                                <a:solidFill>
+                                  <a:srgbClr val="91D372"/>
+                                </a:solidFill>
+                                <a:latin typeface="Cambria Math" panose="02040503050406030204" pitchFamily="18" charset="0"/>
+                              </a:rPr>
+                              <m:t>–</m:t>
+                            </m:r>
+                            <m:r>
+                              <a:rPr lang="en-US" sz="1600" i="1" dirty="0" smtClean="0">
+                                <a:solidFill>
+                                  <a:srgbClr val="91D372"/>
+                                </a:solidFill>
+                                <a:latin typeface="Cambria Math" panose="02040503050406030204" pitchFamily="18" charset="0"/>
+                              </a:rPr>
+                              <m:t>𝛿</m:t>
+                            </m:r>
+                            <m:r>
+                              <a:rPr lang="en-US" sz="1600" i="1" dirty="0" smtClean="0">
+                                <a:solidFill>
+                                  <a:srgbClr val="91D372"/>
+                                </a:solidFill>
+                                <a:latin typeface="Cambria Math" panose="02040503050406030204" pitchFamily="18" charset="0"/>
+                              </a:rPr>
+                              <m:t>𝑟</m:t>
+                            </m:r>
+                          </m:e>
+                        </m:d>
+                      </m:oMath>
+                    </m:oMathPara>
+                  </a14:m>
+                  <a:endParaRPr lang="en-US" sz="1600" dirty="0">
+                    <a:solidFill>
+                      <a:srgbClr val="91D372"/>
+                    </a:solidFill>
+                  </a:endParaRPr>
+                </a:p>
+              </p:txBody>
+            </p:sp>
+          </mc:Choice>
+          <mc:Fallback>
+            <p:sp>
+              <p:nvSpPr>
+                <p:cNvPr id="56" name="Text Box 9">
+                  <a:extLst>
+                    <a:ext uri="{FF2B5EF4-FFF2-40B4-BE49-F238E27FC236}">
+                      <a16:creationId xmlns:a16="http://schemas.microsoft.com/office/drawing/2014/main" id="{9D877299-2E12-77FB-747A-C7C7C4A027AF}"/>
+                    </a:ext>
+                  </a:extLst>
+                </p:cNvPr>
+                <p:cNvSpPr txBox="1">
+                  <a:spLocks noRot="1" noChangeAspect="1" noMove="1" noResize="1" noEditPoints="1" noAdjustHandles="1" noChangeArrowheads="1" noChangeShapeType="1" noTextEdit="1"/>
+                </p:cNvSpPr>
+                <p:nvPr/>
+              </p:nvSpPr>
+              <p:spPr>
+                <a:xfrm>
+                  <a:off x="5874178" y="102462"/>
+                  <a:ext cx="2763833" cy="1077218"/>
+                </a:xfrm>
+                <a:prstGeom prst="rect">
+                  <a:avLst/>
+                </a:prstGeom>
+                <a:blipFill>
+                  <a:blip r:embed="rId6"/>
+                  <a:stretch>
+                    <a:fillRect t="-1695" b="-2825"/>
+                  </a:stretch>
+                </a:blipFill>
+              </p:spPr>
+              <p:txBody>
+                <a:bodyPr/>
+                <a:lstStyle/>
+                <a:p>
+                  <a:r>
+                    <a:rPr lang="en-US">
+                      <a:noFill/>
+                    </a:rPr>
+                    <a:t> </a:t>
+                  </a:r>
+                </a:p>
+              </p:txBody>
+            </p:sp>
+          </mc:Fallback>
+        </mc:AlternateContent>
+        <mc:AlternateContent xmlns:mc="http://schemas.openxmlformats.org/markup-compatibility/2006">
+          <mc:Choice xmlns:a14="http://schemas.microsoft.com/office/drawing/2010/main" Requires="a14">
+            <p:sp>
+              <p:nvSpPr>
+                <p:cNvPr id="57" name="Text Box 9">
+                  <a:extLst>
+                    <a:ext uri="{FF2B5EF4-FFF2-40B4-BE49-F238E27FC236}">
+                      <a16:creationId xmlns:a16="http://schemas.microsoft.com/office/drawing/2014/main" id="{5E124426-FCA4-B31D-F11B-9CDD824BA24F}"/>
+                    </a:ext>
+                  </a:extLst>
+                </p:cNvPr>
+                <p:cNvSpPr txBox="1"/>
+                <p:nvPr/>
+              </p:nvSpPr>
+              <p:spPr>
+                <a:xfrm>
+                  <a:off x="8781949" y="497009"/>
+                  <a:ext cx="2761012" cy="584775"/>
+                </a:xfrm>
+                <a:prstGeom prst="rect">
+                  <a:avLst/>
+                </a:prstGeom>
+                <a:noFill/>
+              </p:spPr>
+              <p:txBody>
+                <a:bodyPr wrap="square" rtlCol="0">
+                  <a:spAutoFit/>
+                </a:bodyPr>
+                <a:lstStyle>
+                  <a:defPPr marR="0" lvl="0" algn="l" rtl="0">
+                    <a:lnSpc>
+                      <a:spcPct val="100000"/>
+                    </a:lnSpc>
+                    <a:spcBef>
+                      <a:spcPts val="0"/>
+                    </a:spcBef>
+                    <a:spcAft>
+                      <a:spcPts val="0"/>
+                    </a:spcAft>
+                  </a:defPPr>
+                  <a:lvl1pPr marR="0" lvl="0" algn="l" rtl="0">
+                    <a:lnSpc>
+                      <a:spcPct val="100000"/>
+                    </a:lnSpc>
+                    <a:spcBef>
+                      <a:spcPts val="0"/>
+                    </a:spcBef>
+                    <a:spcAft>
+                      <a:spcPts val="0"/>
+                    </a:spcAft>
+                    <a:buClr>
+                      <a:srgbClr val="000000"/>
+                    </a:buClr>
+                    <a:buFont typeface="Arial" panose="020B0604020202020204"/>
+                    <a:defRPr sz="1400" b="0" i="0" u="none" strike="noStrike" cap="none">
+                      <a:solidFill>
+                        <a:srgbClr val="000000"/>
+                      </a:solidFill>
+                      <a:latin typeface="Arial" panose="020B0604020202020204"/>
+                      <a:ea typeface="Arial" panose="020B0604020202020204"/>
+                      <a:cs typeface="Arial" panose="020B0604020202020204"/>
+                      <a:sym typeface="Arial" panose="020B0604020202020204"/>
+                    </a:defRPr>
+                  </a:lvl1pPr>
+                  <a:lvl2pPr marR="0" lvl="1" algn="l" rtl="0">
+                    <a:lnSpc>
+                      <a:spcPct val="100000"/>
+                    </a:lnSpc>
+                    <a:spcBef>
+                      <a:spcPts val="0"/>
+                    </a:spcBef>
+                    <a:spcAft>
+                      <a:spcPts val="0"/>
+                    </a:spcAft>
+                    <a:buClr>
+                      <a:srgbClr val="000000"/>
+                    </a:buClr>
+                    <a:buFont typeface="Arial" panose="020B0604020202020204"/>
+                    <a:defRPr sz="1400" b="0" i="0" u="none" strike="noStrike" cap="none">
+                      <a:solidFill>
+                        <a:srgbClr val="000000"/>
+                      </a:solidFill>
+                      <a:latin typeface="Arial" panose="020B0604020202020204"/>
+                      <a:ea typeface="Arial" panose="020B0604020202020204"/>
+                      <a:cs typeface="Arial" panose="020B0604020202020204"/>
+                      <a:sym typeface="Arial" panose="020B0604020202020204"/>
+                    </a:defRPr>
+                  </a:lvl2pPr>
+                  <a:lvl3pPr marR="0" lvl="2" algn="l" rtl="0">
+                    <a:lnSpc>
+                      <a:spcPct val="100000"/>
+                    </a:lnSpc>
+                    <a:spcBef>
+                      <a:spcPts val="0"/>
+                    </a:spcBef>
+                    <a:spcAft>
+                      <a:spcPts val="0"/>
+                    </a:spcAft>
+                    <a:buClr>
+                      <a:srgbClr val="000000"/>
+                    </a:buClr>
+                    <a:buFont typeface="Arial" panose="020B0604020202020204"/>
+                    <a:defRPr sz="1400" b="0" i="0" u="none" strike="noStrike" cap="none">
+                      <a:solidFill>
+                        <a:srgbClr val="000000"/>
+                      </a:solidFill>
+                      <a:latin typeface="Arial" panose="020B0604020202020204"/>
+                      <a:ea typeface="Arial" panose="020B0604020202020204"/>
+                      <a:cs typeface="Arial" panose="020B0604020202020204"/>
+                      <a:sym typeface="Arial" panose="020B0604020202020204"/>
+                    </a:defRPr>
+                  </a:lvl3pPr>
+                  <a:lvl4pPr marR="0" lvl="3" algn="l" rtl="0">
+                    <a:lnSpc>
+                      <a:spcPct val="100000"/>
+                    </a:lnSpc>
+                    <a:spcBef>
+                      <a:spcPts val="0"/>
+                    </a:spcBef>
+                    <a:spcAft>
+                      <a:spcPts val="0"/>
+                    </a:spcAft>
+                    <a:buClr>
+                      <a:srgbClr val="000000"/>
+                    </a:buClr>
+                    <a:buFont typeface="Arial" panose="020B0604020202020204"/>
+                    <a:defRPr sz="1400" b="0" i="0" u="none" strike="noStrike" cap="none">
+                      <a:solidFill>
+                        <a:srgbClr val="000000"/>
+                      </a:solidFill>
+                      <a:latin typeface="Arial" panose="020B0604020202020204"/>
+                      <a:ea typeface="Arial" panose="020B0604020202020204"/>
+                      <a:cs typeface="Arial" panose="020B0604020202020204"/>
+                      <a:sym typeface="Arial" panose="020B0604020202020204"/>
+                    </a:defRPr>
+                  </a:lvl4pPr>
+                  <a:lvl5pPr marR="0" lvl="4" algn="l" rtl="0">
+                    <a:lnSpc>
+                      <a:spcPct val="100000"/>
+                    </a:lnSpc>
+                    <a:spcBef>
+                      <a:spcPts val="0"/>
+                    </a:spcBef>
+                    <a:spcAft>
+                      <a:spcPts val="0"/>
+                    </a:spcAft>
+                    <a:buClr>
+                      <a:srgbClr val="000000"/>
+                    </a:buClr>
+                    <a:buFont typeface="Arial" panose="020B0604020202020204"/>
+                    <a:defRPr sz="1400" b="0" i="0" u="none" strike="noStrike" cap="none">
+                      <a:solidFill>
+                        <a:srgbClr val="000000"/>
+                      </a:solidFill>
+                      <a:latin typeface="Arial" panose="020B0604020202020204"/>
+                      <a:ea typeface="Arial" panose="020B0604020202020204"/>
+                      <a:cs typeface="Arial" panose="020B0604020202020204"/>
+                      <a:sym typeface="Arial" panose="020B0604020202020204"/>
+                    </a:defRPr>
+                  </a:lvl5pPr>
+                  <a:lvl6pPr marR="0" lvl="5" algn="l" rtl="0">
+                    <a:lnSpc>
+                      <a:spcPct val="100000"/>
+                    </a:lnSpc>
+                    <a:spcBef>
+                      <a:spcPts val="0"/>
+                    </a:spcBef>
+                    <a:spcAft>
+                      <a:spcPts val="0"/>
+                    </a:spcAft>
+                    <a:buClr>
+                      <a:srgbClr val="000000"/>
+                    </a:buClr>
+                    <a:buFont typeface="Arial" panose="020B0604020202020204"/>
+                    <a:defRPr sz="1400" b="0" i="0" u="none" strike="noStrike" cap="none">
+                      <a:solidFill>
+                        <a:srgbClr val="000000"/>
+                      </a:solidFill>
+                      <a:latin typeface="Arial" panose="020B0604020202020204"/>
+                      <a:ea typeface="Arial" panose="020B0604020202020204"/>
+                      <a:cs typeface="Arial" panose="020B0604020202020204"/>
+                      <a:sym typeface="Arial" panose="020B0604020202020204"/>
+                    </a:defRPr>
+                  </a:lvl6pPr>
+                  <a:lvl7pPr marR="0" lvl="6" algn="l" rtl="0">
+                    <a:lnSpc>
+                      <a:spcPct val="100000"/>
+                    </a:lnSpc>
+                    <a:spcBef>
+                      <a:spcPts val="0"/>
+                    </a:spcBef>
+                    <a:spcAft>
+                      <a:spcPts val="0"/>
+                    </a:spcAft>
+                    <a:buClr>
+                      <a:srgbClr val="000000"/>
+                    </a:buClr>
+                    <a:buFont typeface="Arial" panose="020B0604020202020204"/>
+                    <a:defRPr sz="1400" b="0" i="0" u="none" strike="noStrike" cap="none">
+                      <a:solidFill>
+                        <a:srgbClr val="000000"/>
+                      </a:solidFill>
+                      <a:latin typeface="Arial" panose="020B0604020202020204"/>
+                      <a:ea typeface="Arial" panose="020B0604020202020204"/>
+                      <a:cs typeface="Arial" panose="020B0604020202020204"/>
+                      <a:sym typeface="Arial" panose="020B0604020202020204"/>
+                    </a:defRPr>
+                  </a:lvl7pPr>
+                  <a:lvl8pPr marR="0" lvl="7" algn="l" rtl="0">
+                    <a:lnSpc>
+                      <a:spcPct val="100000"/>
+                    </a:lnSpc>
+                    <a:spcBef>
+                      <a:spcPts val="0"/>
+                    </a:spcBef>
+                    <a:spcAft>
+                      <a:spcPts val="0"/>
+                    </a:spcAft>
+                    <a:buClr>
+                      <a:srgbClr val="000000"/>
+                    </a:buClr>
+                    <a:buFont typeface="Arial" panose="020B0604020202020204"/>
+                    <a:defRPr sz="1400" b="0" i="0" u="none" strike="noStrike" cap="none">
+                      <a:solidFill>
+                        <a:srgbClr val="000000"/>
+                      </a:solidFill>
+                      <a:latin typeface="Arial" panose="020B0604020202020204"/>
+                      <a:ea typeface="Arial" panose="020B0604020202020204"/>
+                      <a:cs typeface="Arial" panose="020B0604020202020204"/>
+                      <a:sym typeface="Arial" panose="020B0604020202020204"/>
+                    </a:defRPr>
+                  </a:lvl8pPr>
+                  <a:lvl9pPr marR="0" lvl="8" algn="l" rtl="0">
+                    <a:lnSpc>
+                      <a:spcPct val="100000"/>
+                    </a:lnSpc>
+                    <a:spcBef>
+                      <a:spcPts val="0"/>
+                    </a:spcBef>
+                    <a:spcAft>
+                      <a:spcPts val="0"/>
+                    </a:spcAft>
+                    <a:buClr>
+                      <a:srgbClr val="000000"/>
+                    </a:buClr>
+                    <a:buFont typeface="Arial" panose="020B0604020202020204"/>
+                    <a:defRPr sz="1400" b="0" i="0" u="none" strike="noStrike" cap="none">
+                      <a:solidFill>
+                        <a:srgbClr val="000000"/>
+                      </a:solidFill>
+                      <a:latin typeface="Arial" panose="020B0604020202020204"/>
+                      <a:ea typeface="Arial" panose="020B0604020202020204"/>
+                      <a:cs typeface="Arial" panose="020B0604020202020204"/>
+                      <a:sym typeface="Arial" panose="020B0604020202020204"/>
+                    </a:defRPr>
+                  </a:lvl9pPr>
+                </a:lstStyle>
+                <a:p>
+                  <a:pPr algn="ctr"/>
+                  <a:r>
+                    <a:rPr lang="en-US" sz="1600" dirty="0">
+                      <a:solidFill>
+                        <a:srgbClr val="D2B26F"/>
+                      </a:solidFill>
+                    </a:rPr>
+                    <a:t>Vertical Profile</a:t>
+                  </a:r>
+                </a:p>
+                <a:p>
+                  <a:pPr algn="ctr"/>
+                  <a14:m>
+                    <m:oMathPara xmlns:m="http://schemas.openxmlformats.org/officeDocument/2006/math">
+                      <m:oMathParaPr>
+                        <m:jc m:val="centerGroup"/>
+                      </m:oMathParaPr>
+                      <m:oMath xmlns:m="http://schemas.openxmlformats.org/officeDocument/2006/math">
+                        <m:r>
+                          <a:rPr lang="en-US" sz="1600" i="1" dirty="0" smtClean="0">
+                            <a:solidFill>
+                              <a:srgbClr val="D2B26F"/>
+                            </a:solidFill>
+                            <a:latin typeface="Cambria Math" panose="02040503050406030204" pitchFamily="18" charset="0"/>
+                          </a:rPr>
+                          <m:t>𝐻</m:t>
+                        </m:r>
+                        <m:d>
+                          <m:dPr>
+                            <m:ctrlPr>
+                              <a:rPr lang="en-US" sz="1600" i="1" dirty="0" smtClean="0">
+                                <a:solidFill>
+                                  <a:srgbClr val="D2B26F"/>
+                                </a:solidFill>
+                                <a:latin typeface="Cambria Math" panose="02040503050406030204" pitchFamily="18" charset="0"/>
+                              </a:rPr>
+                            </m:ctrlPr>
+                          </m:dPr>
+                          <m:e>
+                            <m:r>
+                              <a:rPr lang="en-US" sz="1600" i="1" dirty="0" smtClean="0">
+                                <a:solidFill>
+                                  <a:srgbClr val="D2B26F"/>
+                                </a:solidFill>
+                                <a:latin typeface="Cambria Math" panose="02040503050406030204" pitchFamily="18" charset="0"/>
+                              </a:rPr>
+                              <m:t>𝑟</m:t>
+                            </m:r>
+                          </m:e>
+                        </m:d>
+                        <m:r>
+                          <a:rPr lang="en-US" sz="1600" i="1" dirty="0" smtClean="0">
+                            <a:solidFill>
+                              <a:srgbClr val="D2B26F"/>
+                            </a:solidFill>
+                            <a:latin typeface="Cambria Math" panose="02040503050406030204" pitchFamily="18" charset="0"/>
+                          </a:rPr>
+                          <m:t>=</m:t>
+                        </m:r>
+                        <m:r>
+                          <a:rPr lang="en-US" sz="1600" i="1" dirty="0" smtClean="0">
+                            <a:solidFill>
+                              <a:srgbClr val="D2B26F"/>
+                            </a:solidFill>
+                            <a:latin typeface="Cambria Math" panose="02040503050406030204" pitchFamily="18" charset="0"/>
+                          </a:rPr>
+                          <m:t>𝐴</m:t>
+                        </m:r>
+                        <m:r>
+                          <a:rPr lang="en-US" sz="1600" b="0" i="1" dirty="0" smtClean="0">
+                            <a:solidFill>
+                              <a:srgbClr val="D2B26F"/>
+                            </a:solidFill>
+                            <a:latin typeface="Cambria Math" panose="02040503050406030204" pitchFamily="18" charset="0"/>
+                          </a:rPr>
+                          <m:t> </m:t>
+                        </m:r>
+                        <m:func>
+                          <m:funcPr>
+                            <m:ctrlPr>
+                              <a:rPr lang="en-US" sz="1600" i="1" dirty="0" smtClean="0">
+                                <a:solidFill>
+                                  <a:srgbClr val="D2B26F"/>
+                                </a:solidFill>
+                                <a:latin typeface="Cambria Math" panose="02040503050406030204" pitchFamily="18" charset="0"/>
+                              </a:rPr>
+                            </m:ctrlPr>
+                          </m:funcPr>
+                          <m:fName>
+                            <m:r>
+                              <m:rPr>
+                                <m:sty m:val="p"/>
+                              </m:rPr>
+                              <a:rPr lang="en-US" sz="1600" b="0" i="1" dirty="0" smtClean="0">
+                                <a:solidFill>
+                                  <a:srgbClr val="D2B26F"/>
+                                </a:solidFill>
+                                <a:latin typeface="Cambria Math" panose="02040503050406030204" pitchFamily="18" charset="0"/>
+                              </a:rPr>
+                              <m:t>exp</m:t>
+                            </m:r>
+                          </m:fName>
+                          <m:e>
+                            <m:d>
+                              <m:dPr>
+                                <m:ctrlPr>
+                                  <a:rPr lang="en-US" sz="1600" i="1" dirty="0" smtClean="0">
+                                    <a:solidFill>
+                                      <a:srgbClr val="D2B26F"/>
+                                    </a:solidFill>
+                                    <a:latin typeface="Cambria Math" panose="02040503050406030204" pitchFamily="18" charset="0"/>
+                                  </a:rPr>
+                                </m:ctrlPr>
+                              </m:dPr>
+                              <m:e>
+                                <m:r>
+                                  <a:rPr lang="en-US" sz="1600" i="1" dirty="0" smtClean="0">
+                                    <a:solidFill>
+                                      <a:srgbClr val="D2B26F"/>
+                                    </a:solidFill>
+                                    <a:latin typeface="Cambria Math" panose="02040503050406030204" pitchFamily="18" charset="0"/>
+                                  </a:rPr>
+                                  <m:t>𝐵𝑟</m:t>
+                                </m:r>
+                                <m:r>
+                                  <a:rPr lang="en-US" sz="1600" i="1" dirty="0" smtClean="0">
+                                    <a:solidFill>
+                                      <a:srgbClr val="D2B26F"/>
+                                    </a:solidFill>
+                                    <a:latin typeface="Cambria Math" panose="02040503050406030204" pitchFamily="18" charset="0"/>
+                                  </a:rPr>
+                                  <m:t>+</m:t>
+                                </m:r>
+                                <m:r>
+                                  <a:rPr lang="en-US" sz="1600" i="1" dirty="0" smtClean="0">
+                                    <a:solidFill>
+                                      <a:srgbClr val="D2B26F"/>
+                                    </a:solidFill>
+                                    <a:latin typeface="Cambria Math" panose="02040503050406030204" pitchFamily="18" charset="0"/>
+                                  </a:rPr>
+                                  <m:t>𝐶</m:t>
+                                </m:r>
+                                <m:sSup>
+                                  <m:sSupPr>
+                                    <m:ctrlPr>
+                                      <a:rPr lang="en-US" sz="1600" i="1" dirty="0" smtClean="0">
+                                        <a:solidFill>
+                                          <a:srgbClr val="D2B26F"/>
+                                        </a:solidFill>
+                                        <a:latin typeface="Cambria Math" panose="02040503050406030204" pitchFamily="18" charset="0"/>
+                                      </a:rPr>
+                                    </m:ctrlPr>
+                                  </m:sSupPr>
+                                  <m:e>
+                                    <m:r>
+                                      <a:rPr lang="en-US" sz="1600" i="1" dirty="0" smtClean="0">
+                                        <a:solidFill>
+                                          <a:srgbClr val="D2B26F"/>
+                                        </a:solidFill>
+                                        <a:latin typeface="Cambria Math" panose="02040503050406030204" pitchFamily="18" charset="0"/>
+                                      </a:rPr>
+                                      <m:t>𝑟</m:t>
+                                    </m:r>
+                                  </m:e>
+                                  <m:sup>
+                                    <m:r>
+                                      <a:rPr lang="en-US" sz="1600" i="1" dirty="0" smtClean="0">
+                                        <a:solidFill>
+                                          <a:srgbClr val="D2B26F"/>
+                                        </a:solidFill>
+                                        <a:latin typeface="Cambria Math" panose="02040503050406030204" pitchFamily="18" charset="0"/>
+                                      </a:rPr>
+                                      <m:t>2</m:t>
+                                    </m:r>
+                                  </m:sup>
+                                </m:sSup>
+                              </m:e>
+                            </m:d>
+                          </m:e>
+                        </m:func>
+                      </m:oMath>
+                    </m:oMathPara>
+                  </a14:m>
+                  <a:endParaRPr lang="en-US" sz="1600" dirty="0">
+                    <a:solidFill>
+                      <a:srgbClr val="D2B26F"/>
+                    </a:solidFill>
+                  </a:endParaRPr>
+                </a:p>
+              </p:txBody>
+            </p:sp>
+          </mc:Choice>
+          <mc:Fallback>
+            <p:sp>
+              <p:nvSpPr>
+                <p:cNvPr id="57" name="Text Box 9">
+                  <a:extLst>
+                    <a:ext uri="{FF2B5EF4-FFF2-40B4-BE49-F238E27FC236}">
+                      <a16:creationId xmlns:a16="http://schemas.microsoft.com/office/drawing/2014/main" id="{5E124426-FCA4-B31D-F11B-9CDD824BA24F}"/>
+                    </a:ext>
+                  </a:extLst>
+                </p:cNvPr>
+                <p:cNvSpPr txBox="1">
+                  <a:spLocks noRot="1" noChangeAspect="1" noMove="1" noResize="1" noEditPoints="1" noAdjustHandles="1" noChangeArrowheads="1" noChangeShapeType="1" noTextEdit="1"/>
+                </p:cNvSpPr>
+                <p:nvPr/>
+              </p:nvSpPr>
+              <p:spPr>
+                <a:xfrm>
+                  <a:off x="8781949" y="497009"/>
+                  <a:ext cx="2761012" cy="584775"/>
+                </a:xfrm>
+                <a:prstGeom prst="rect">
+                  <a:avLst/>
+                </a:prstGeom>
+                <a:blipFill>
+                  <a:blip r:embed="rId7"/>
+                  <a:stretch>
+                    <a:fillRect t="-3158" b="-3158"/>
+                  </a:stretch>
+                </a:blipFill>
+              </p:spPr>
+              <p:txBody>
+                <a:bodyPr/>
+                <a:lstStyle/>
+                <a:p>
+                  <a:r>
+                    <a:rPr lang="en-US">
+                      <a:noFill/>
+                    </a:rPr>
+                    <a:t> </a:t>
+                  </a:r>
+                </a:p>
+              </p:txBody>
+            </p:sp>
+          </mc:Fallback>
+        </mc:AlternateContent>
+        <p:pic>
+          <p:nvPicPr>
+            <p:cNvPr id="5" name="Picture 4">
+              <a:extLst>
+                <a:ext uri="{FF2B5EF4-FFF2-40B4-BE49-F238E27FC236}">
+                  <a16:creationId xmlns:a16="http://schemas.microsoft.com/office/drawing/2014/main" id="{9A1C4FB0-01DE-6A38-E7D8-ACF7144FC535}"/>
+                </a:ext>
+              </a:extLst>
+            </p:cNvPr>
+            <p:cNvPicPr>
+              <a:picLocks noChangeAspect="1"/>
+            </p:cNvPicPr>
+            <p:nvPr/>
+          </p:nvPicPr>
+          <p:blipFill>
+            <a:blip r:embed="rId8"/>
+            <a:stretch>
+              <a:fillRect/>
+            </a:stretch>
+          </p:blipFill>
+          <p:spPr>
+            <a:xfrm>
+              <a:off x="5843474" y="3947105"/>
+              <a:ext cx="5590517" cy="987638"/>
+            </a:xfrm>
+            <a:prstGeom prst="rect">
+              <a:avLst/>
+            </a:prstGeom>
+          </p:spPr>
+        </p:pic>
+      </p:grpSp>
     </p:spTree>
     <p:extLst>
       <p:ext uri="{BB962C8B-B14F-4D97-AF65-F5344CB8AC3E}">
